--- a/docs/pptx/auc3/jx-auc3-linsubhr-ratio-anemia2.pptx
+++ b/docs/pptx/auc3/jx-auc3-linsubhr-ratio-anemia2.pptx
@@ -2271,7 +2271,7 @@
           </p:nvSpPr>
           <p:spPr>
             <a:xfrm>
-              <a:off x="817517" y="5114368"/>
+              <a:off x="817517" y="5142518"/>
               <a:ext cx="7799693" cy="0"/>
             </a:xfrm>
             <a:custGeom>
@@ -2314,7 +2314,7 @@
           </p:nvSpPr>
           <p:spPr>
             <a:xfrm>
-              <a:off x="817517" y="4244691"/>
+              <a:off x="817517" y="4313054"/>
               <a:ext cx="7799693" cy="0"/>
             </a:xfrm>
             <a:custGeom>
@@ -2357,7 +2357,7 @@
           </p:nvSpPr>
           <p:spPr>
             <a:xfrm>
-              <a:off x="817517" y="3375014"/>
+              <a:off x="817517" y="3483591"/>
               <a:ext cx="7799693" cy="0"/>
             </a:xfrm>
             <a:custGeom>
@@ -2400,7 +2400,7 @@
           </p:nvSpPr>
           <p:spPr>
             <a:xfrm>
-              <a:off x="817517" y="2505337"/>
+              <a:off x="817517" y="2654127"/>
               <a:ext cx="7799693" cy="0"/>
             </a:xfrm>
             <a:custGeom>
@@ -2443,15 +2443,15 @@
           </p:nvSpPr>
           <p:spPr>
             <a:xfrm>
-              <a:off x="1615213" y="1896563"/>
-              <a:ext cx="0" cy="3826579"/>
+              <a:off x="1615213" y="2073503"/>
+              <a:ext cx="0" cy="3649639"/>
             </a:xfrm>
             <a:custGeom>
               <a:avLst/>
               <a:pathLst>
-                <a:path w="0" h="3826579">
+                <a:path w="0" h="3649639">
                   <a:moveTo>
-                    <a:pt x="0" y="3826579"/>
+                    <a:pt x="0" y="3649639"/>
                   </a:moveTo>
                   <a:lnTo>
                     <a:pt x="0" y="0"/>
@@ -2486,15 +2486,15 @@
           </p:nvSpPr>
           <p:spPr>
             <a:xfrm>
-              <a:off x="3387871" y="1896563"/>
-              <a:ext cx="0" cy="3826579"/>
+              <a:off x="3387871" y="2073503"/>
+              <a:ext cx="0" cy="3649639"/>
             </a:xfrm>
             <a:custGeom>
               <a:avLst/>
               <a:pathLst>
-                <a:path w="0" h="3826579">
+                <a:path w="0" h="3649639">
                   <a:moveTo>
-                    <a:pt x="0" y="3826579"/>
+                    <a:pt x="0" y="3649639"/>
                   </a:moveTo>
                   <a:lnTo>
                     <a:pt x="0" y="0"/>
@@ -2529,15 +2529,15 @@
           </p:nvSpPr>
           <p:spPr>
             <a:xfrm>
-              <a:off x="5160528" y="1896563"/>
-              <a:ext cx="0" cy="3826579"/>
+              <a:off x="5160528" y="2073503"/>
+              <a:ext cx="0" cy="3649639"/>
             </a:xfrm>
             <a:custGeom>
               <a:avLst/>
               <a:pathLst>
-                <a:path w="0" h="3826579">
+                <a:path w="0" h="3649639">
                   <a:moveTo>
-                    <a:pt x="0" y="3826579"/>
+                    <a:pt x="0" y="3649639"/>
                   </a:moveTo>
                   <a:lnTo>
                     <a:pt x="0" y="0"/>
@@ -2572,15 +2572,15 @@
           </p:nvSpPr>
           <p:spPr>
             <a:xfrm>
-              <a:off x="6933186" y="1896563"/>
-              <a:ext cx="0" cy="3826579"/>
+              <a:off x="6933186" y="2073503"/>
+              <a:ext cx="0" cy="3649639"/>
             </a:xfrm>
             <a:custGeom>
               <a:avLst/>
               <a:pathLst>
-                <a:path w="0" h="3826579">
+                <a:path w="0" h="3649639">
                   <a:moveTo>
-                    <a:pt x="0" y="3826579"/>
+                    <a:pt x="0" y="3649639"/>
                   </a:moveTo>
                   <a:lnTo>
                     <a:pt x="0" y="0"/>
@@ -2615,7 +2615,7 @@
           </p:nvSpPr>
           <p:spPr>
             <a:xfrm>
-              <a:off x="817517" y="5549207"/>
+              <a:off x="817517" y="5557249"/>
               <a:ext cx="7799693" cy="0"/>
             </a:xfrm>
             <a:custGeom>
@@ -2658,7 +2658,7 @@
           </p:nvSpPr>
           <p:spPr>
             <a:xfrm>
-              <a:off x="817517" y="4679530"/>
+              <a:off x="817517" y="4727786"/>
               <a:ext cx="7799693" cy="0"/>
             </a:xfrm>
             <a:custGeom>
@@ -2701,7 +2701,7 @@
           </p:nvSpPr>
           <p:spPr>
             <a:xfrm>
-              <a:off x="817517" y="3809853"/>
+              <a:off x="817517" y="3898322"/>
               <a:ext cx="7799693" cy="0"/>
             </a:xfrm>
             <a:custGeom>
@@ -2744,7 +2744,7 @@
           </p:nvSpPr>
           <p:spPr>
             <a:xfrm>
-              <a:off x="817517" y="2940175"/>
+              <a:off x="817517" y="3068859"/>
               <a:ext cx="7799693" cy="0"/>
             </a:xfrm>
             <a:custGeom>
@@ -2787,7 +2787,7 @@
           </p:nvSpPr>
           <p:spPr>
             <a:xfrm>
-              <a:off x="817517" y="2070498"/>
+              <a:off x="817517" y="2239395"/>
               <a:ext cx="7799693" cy="0"/>
             </a:xfrm>
             <a:custGeom>
@@ -2830,15 +2830,15 @@
           </p:nvSpPr>
           <p:spPr>
             <a:xfrm>
-              <a:off x="2501542" y="1896563"/>
-              <a:ext cx="0" cy="3826579"/>
+              <a:off x="2501542" y="2073503"/>
+              <a:ext cx="0" cy="3649639"/>
             </a:xfrm>
             <a:custGeom>
               <a:avLst/>
               <a:pathLst>
-                <a:path w="0" h="3826579">
+                <a:path w="0" h="3649639">
                   <a:moveTo>
-                    <a:pt x="0" y="3826579"/>
+                    <a:pt x="0" y="3649639"/>
                   </a:moveTo>
                   <a:lnTo>
                     <a:pt x="0" y="0"/>
@@ -2873,15 +2873,15 @@
           </p:nvSpPr>
           <p:spPr>
             <a:xfrm>
-              <a:off x="4274200" y="1896563"/>
-              <a:ext cx="0" cy="3826579"/>
+              <a:off x="4274200" y="2073503"/>
+              <a:ext cx="0" cy="3649639"/>
             </a:xfrm>
             <a:custGeom>
               <a:avLst/>
               <a:pathLst>
-                <a:path w="0" h="3826579">
+                <a:path w="0" h="3649639">
                   <a:moveTo>
-                    <a:pt x="0" y="3826579"/>
+                    <a:pt x="0" y="3649639"/>
                   </a:moveTo>
                   <a:lnTo>
                     <a:pt x="0" y="0"/>
@@ -2916,15 +2916,15 @@
           </p:nvSpPr>
           <p:spPr>
             <a:xfrm>
-              <a:off x="6046857" y="1896563"/>
-              <a:ext cx="0" cy="3826579"/>
+              <a:off x="6046857" y="2073503"/>
+              <a:ext cx="0" cy="3649639"/>
             </a:xfrm>
             <a:custGeom>
               <a:avLst/>
               <a:pathLst>
-                <a:path w="0" h="3826579">
+                <a:path w="0" h="3649639">
                   <a:moveTo>
-                    <a:pt x="0" y="3826579"/>
+                    <a:pt x="0" y="3649639"/>
                   </a:moveTo>
                   <a:lnTo>
                     <a:pt x="0" y="0"/>
@@ -2959,15 +2959,15 @@
           </p:nvSpPr>
           <p:spPr>
             <a:xfrm>
-              <a:off x="7819515" y="1896563"/>
-              <a:ext cx="0" cy="3826579"/>
+              <a:off x="7819515" y="2073503"/>
+              <a:ext cx="0" cy="3649639"/>
             </a:xfrm>
             <a:custGeom>
               <a:avLst/>
               <a:pathLst>
-                <a:path w="0" h="3826579">
+                <a:path w="0" h="3649639">
                   <a:moveTo>
-                    <a:pt x="0" y="3826579"/>
+                    <a:pt x="0" y="3649639"/>
                   </a:moveTo>
                   <a:lnTo>
                     <a:pt x="0" y="0"/>
@@ -3002,594 +3002,594 @@
           </p:nvSpPr>
           <p:spPr>
             <a:xfrm>
-              <a:off x="817517" y="2973664"/>
-              <a:ext cx="7392041" cy="2349231"/>
+              <a:off x="817517" y="3100799"/>
+              <a:ext cx="7392041" cy="2240604"/>
             </a:xfrm>
             <a:custGeom>
               <a:avLst/>
               <a:pathLst>
-                <a:path w="7392041" h="2349231">
+                <a:path w="7392041" h="2240604">
                   <a:moveTo>
                     <a:pt x="0" y="0"/>
                   </a:moveTo>
                   <a:lnTo>
-                    <a:pt x="53901" y="45440"/>
-                  </a:lnTo>
-                  <a:lnTo>
-                    <a:pt x="131145" y="108924"/>
-                  </a:lnTo>
-                  <a:lnTo>
-                    <a:pt x="208389" y="170815"/>
-                  </a:lnTo>
-                  <a:lnTo>
-                    <a:pt x="285632" y="231153"/>
-                  </a:lnTo>
-                  <a:lnTo>
-                    <a:pt x="362876" y="289977"/>
-                  </a:lnTo>
-                  <a:lnTo>
-                    <a:pt x="440119" y="347326"/>
-                  </a:lnTo>
-                  <a:lnTo>
-                    <a:pt x="517363" y="403235"/>
-                  </a:lnTo>
-                  <a:lnTo>
-                    <a:pt x="594606" y="457741"/>
-                  </a:lnTo>
-                  <a:lnTo>
-                    <a:pt x="671850" y="510880"/>
-                  </a:lnTo>
-                  <a:lnTo>
-                    <a:pt x="749094" y="562686"/>
-                  </a:lnTo>
-                  <a:lnTo>
-                    <a:pt x="826337" y="613191"/>
-                  </a:lnTo>
-                  <a:lnTo>
-                    <a:pt x="903581" y="662429"/>
-                  </a:lnTo>
-                  <a:lnTo>
-                    <a:pt x="980824" y="710432"/>
-                  </a:lnTo>
-                  <a:lnTo>
-                    <a:pt x="1058068" y="757231"/>
-                  </a:lnTo>
-                  <a:lnTo>
-                    <a:pt x="1135311" y="802855"/>
-                  </a:lnTo>
-                  <a:lnTo>
-                    <a:pt x="1212555" y="847334"/>
-                  </a:lnTo>
-                  <a:lnTo>
-                    <a:pt x="1289799" y="890697"/>
-                  </a:lnTo>
-                  <a:lnTo>
-                    <a:pt x="1367042" y="932973"/>
-                  </a:lnTo>
-                  <a:lnTo>
-                    <a:pt x="1444286" y="974187"/>
-                  </a:lnTo>
-                  <a:lnTo>
-                    <a:pt x="1521529" y="1014368"/>
-                  </a:lnTo>
-                  <a:lnTo>
-                    <a:pt x="1598773" y="1053540"/>
-                  </a:lnTo>
-                  <a:lnTo>
-                    <a:pt x="1676016" y="1091729"/>
-                  </a:lnTo>
-                  <a:lnTo>
-                    <a:pt x="1753260" y="1128960"/>
-                  </a:lnTo>
-                  <a:lnTo>
-                    <a:pt x="1830504" y="1165257"/>
-                  </a:lnTo>
-                  <a:lnTo>
-                    <a:pt x="1907747" y="1200643"/>
-                  </a:lnTo>
-                  <a:lnTo>
-                    <a:pt x="1984991" y="1235141"/>
-                  </a:lnTo>
-                  <a:lnTo>
-                    <a:pt x="2062234" y="1268774"/>
-                  </a:lnTo>
-                  <a:lnTo>
-                    <a:pt x="2139478" y="1301563"/>
-                  </a:lnTo>
-                  <a:lnTo>
-                    <a:pt x="2216721" y="1333529"/>
-                  </a:lnTo>
-                  <a:lnTo>
-                    <a:pt x="2293965" y="1364693"/>
-                  </a:lnTo>
-                  <a:lnTo>
-                    <a:pt x="2371209" y="1395075"/>
-                  </a:lnTo>
-                  <a:lnTo>
-                    <a:pt x="2448452" y="1424695"/>
-                  </a:lnTo>
-                  <a:lnTo>
-                    <a:pt x="2525696" y="1453571"/>
-                  </a:lnTo>
-                  <a:lnTo>
-                    <a:pt x="2602939" y="1481723"/>
-                  </a:lnTo>
-                  <a:lnTo>
-                    <a:pt x="2680183" y="1509168"/>
-                  </a:lnTo>
-                  <a:lnTo>
-                    <a:pt x="2757426" y="1535925"/>
-                  </a:lnTo>
-                  <a:lnTo>
-                    <a:pt x="2834670" y="1562011"/>
-                  </a:lnTo>
-                  <a:lnTo>
-                    <a:pt x="2911914" y="1587442"/>
-                  </a:lnTo>
-                  <a:lnTo>
-                    <a:pt x="2989157" y="1612235"/>
-                  </a:lnTo>
-                  <a:lnTo>
-                    <a:pt x="3066401" y="1636406"/>
-                  </a:lnTo>
-                  <a:lnTo>
-                    <a:pt x="3143644" y="1659970"/>
-                  </a:lnTo>
-                  <a:lnTo>
-                    <a:pt x="3220888" y="1682943"/>
-                  </a:lnTo>
-                  <a:lnTo>
-                    <a:pt x="3298131" y="1705340"/>
-                  </a:lnTo>
-                  <a:lnTo>
-                    <a:pt x="3375375" y="1711283"/>
-                  </a:lnTo>
-                  <a:lnTo>
-                    <a:pt x="3452619" y="1716798"/>
-                  </a:lnTo>
-                  <a:lnTo>
-                    <a:pt x="3529862" y="1722278"/>
-                  </a:lnTo>
-                  <a:lnTo>
-                    <a:pt x="3607106" y="1727723"/>
-                  </a:lnTo>
-                  <a:lnTo>
-                    <a:pt x="3684349" y="1733133"/>
-                  </a:lnTo>
-                  <a:lnTo>
-                    <a:pt x="3761593" y="1738509"/>
-                  </a:lnTo>
-                  <a:lnTo>
-                    <a:pt x="3838836" y="1743850"/>
-                  </a:lnTo>
-                  <a:lnTo>
-                    <a:pt x="3916080" y="1749157"/>
-                  </a:lnTo>
-                  <a:lnTo>
-                    <a:pt x="3993324" y="1754431"/>
-                  </a:lnTo>
-                  <a:lnTo>
-                    <a:pt x="4070567" y="1759670"/>
-                  </a:lnTo>
-                  <a:lnTo>
-                    <a:pt x="4147811" y="1764877"/>
-                  </a:lnTo>
-                  <a:lnTo>
-                    <a:pt x="4225054" y="1770050"/>
-                  </a:lnTo>
-                  <a:lnTo>
-                    <a:pt x="4302298" y="1775190"/>
-                  </a:lnTo>
-                  <a:lnTo>
-                    <a:pt x="4379541" y="1780297"/>
-                  </a:lnTo>
-                  <a:lnTo>
-                    <a:pt x="4456785" y="1785372"/>
-                  </a:lnTo>
-                  <a:lnTo>
-                    <a:pt x="4534029" y="1790414"/>
-                  </a:lnTo>
-                  <a:lnTo>
-                    <a:pt x="4611272" y="1795424"/>
-                  </a:lnTo>
-                  <a:lnTo>
-                    <a:pt x="4688516" y="1800402"/>
-                  </a:lnTo>
-                  <a:lnTo>
-                    <a:pt x="4765759" y="1805349"/>
-                  </a:lnTo>
-                  <a:lnTo>
-                    <a:pt x="4843003" y="1810264"/>
-                  </a:lnTo>
-                  <a:lnTo>
-                    <a:pt x="4920246" y="1815147"/>
-                  </a:lnTo>
-                  <a:lnTo>
-                    <a:pt x="4997490" y="1819999"/>
-                  </a:lnTo>
-                  <a:lnTo>
-                    <a:pt x="5074734" y="1824821"/>
-                  </a:lnTo>
-                  <a:lnTo>
-                    <a:pt x="5151977" y="1829611"/>
-                  </a:lnTo>
-                  <a:lnTo>
-                    <a:pt x="5229221" y="1834371"/>
-                  </a:lnTo>
-                  <a:lnTo>
-                    <a:pt x="5306464" y="1839101"/>
-                  </a:lnTo>
-                  <a:lnTo>
-                    <a:pt x="5383708" y="1843800"/>
-                  </a:lnTo>
-                  <a:lnTo>
-                    <a:pt x="5460951" y="1848470"/>
-                  </a:lnTo>
-                  <a:lnTo>
-                    <a:pt x="5538195" y="1853109"/>
-                  </a:lnTo>
-                  <a:lnTo>
-                    <a:pt x="5615439" y="1857719"/>
-                  </a:lnTo>
-                  <a:lnTo>
-                    <a:pt x="5692682" y="1862300"/>
-                  </a:lnTo>
-                  <a:lnTo>
-                    <a:pt x="5769926" y="1866851"/>
-                  </a:lnTo>
-                  <a:lnTo>
-                    <a:pt x="5847169" y="1871374"/>
-                  </a:lnTo>
-                  <a:lnTo>
-                    <a:pt x="5924413" y="1875867"/>
-                  </a:lnTo>
-                  <a:lnTo>
-                    <a:pt x="6001656" y="1880332"/>
-                  </a:lnTo>
-                  <a:lnTo>
-                    <a:pt x="6078900" y="1884768"/>
-                  </a:lnTo>
-                  <a:lnTo>
-                    <a:pt x="6156144" y="1889176"/>
-                  </a:lnTo>
-                  <a:lnTo>
-                    <a:pt x="6233387" y="1893556"/>
-                  </a:lnTo>
-                  <a:lnTo>
-                    <a:pt x="6310631" y="1897908"/>
-                  </a:lnTo>
-                  <a:lnTo>
-                    <a:pt x="6387874" y="1902232"/>
-                  </a:lnTo>
-                  <a:lnTo>
-                    <a:pt x="6465118" y="1906529"/>
-                  </a:lnTo>
-                  <a:lnTo>
-                    <a:pt x="6542361" y="1910798"/>
-                  </a:lnTo>
-                  <a:lnTo>
-                    <a:pt x="6619605" y="1915040"/>
-                  </a:lnTo>
-                  <a:lnTo>
-                    <a:pt x="6696849" y="1919255"/>
-                  </a:lnTo>
-                  <a:lnTo>
-                    <a:pt x="6774092" y="1923443"/>
-                  </a:lnTo>
-                  <a:lnTo>
-                    <a:pt x="6851336" y="1927604"/>
-                  </a:lnTo>
-                  <a:lnTo>
-                    <a:pt x="6928579" y="1931739"/>
-                  </a:lnTo>
-                  <a:lnTo>
-                    <a:pt x="7005823" y="1935847"/>
-                  </a:lnTo>
-                  <a:lnTo>
-                    <a:pt x="7083066" y="1939929"/>
-                  </a:lnTo>
-                  <a:lnTo>
-                    <a:pt x="7160310" y="1943985"/>
-                  </a:lnTo>
-                  <a:lnTo>
-                    <a:pt x="7237554" y="1948015"/>
-                  </a:lnTo>
-                  <a:lnTo>
-                    <a:pt x="7314797" y="1952020"/>
-                  </a:lnTo>
-                  <a:lnTo>
-                    <a:pt x="7392041" y="1955999"/>
-                  </a:lnTo>
-                  <a:lnTo>
-                    <a:pt x="7392041" y="2349231"/>
-                  </a:lnTo>
-                  <a:lnTo>
-                    <a:pt x="7314797" y="2343407"/>
-                  </a:lnTo>
-                  <a:lnTo>
-                    <a:pt x="7237554" y="2337432"/>
-                  </a:lnTo>
-                  <a:lnTo>
-                    <a:pt x="7160310" y="2331304"/>
-                  </a:lnTo>
-                  <a:lnTo>
-                    <a:pt x="7083066" y="2325018"/>
-                  </a:lnTo>
-                  <a:lnTo>
-                    <a:pt x="7005823" y="2318570"/>
-                  </a:lnTo>
-                  <a:lnTo>
-                    <a:pt x="6928579" y="2311956"/>
-                  </a:lnTo>
-                  <a:lnTo>
-                    <a:pt x="6851336" y="2305172"/>
-                  </a:lnTo>
-                  <a:lnTo>
-                    <a:pt x="6774092" y="2298214"/>
-                  </a:lnTo>
-                  <a:lnTo>
-                    <a:pt x="6696849" y="2291076"/>
-                  </a:lnTo>
-                  <a:lnTo>
-                    <a:pt x="6619605" y="2283755"/>
-                  </a:lnTo>
-                  <a:lnTo>
-                    <a:pt x="6542361" y="2276245"/>
-                  </a:lnTo>
-                  <a:lnTo>
-                    <a:pt x="6465118" y="2268542"/>
-                  </a:lnTo>
-                  <a:lnTo>
-                    <a:pt x="6387874" y="2260640"/>
-                  </a:lnTo>
-                  <a:lnTo>
-                    <a:pt x="6310631" y="2252536"/>
-                  </a:lnTo>
-                  <a:lnTo>
-                    <a:pt x="6233387" y="2244222"/>
-                  </a:lnTo>
-                  <a:lnTo>
-                    <a:pt x="6156144" y="2235695"/>
-                  </a:lnTo>
-                  <a:lnTo>
-                    <a:pt x="6078900" y="2226948"/>
-                  </a:lnTo>
-                  <a:lnTo>
-                    <a:pt x="6001656" y="2217977"/>
-                  </a:lnTo>
-                  <a:lnTo>
-                    <a:pt x="5924413" y="2208774"/>
-                  </a:lnTo>
-                  <a:lnTo>
-                    <a:pt x="5847169" y="2199334"/>
-                  </a:lnTo>
-                  <a:lnTo>
-                    <a:pt x="5769926" y="2189652"/>
-                  </a:lnTo>
-                  <a:lnTo>
-                    <a:pt x="5692682" y="2179720"/>
-                  </a:lnTo>
-                  <a:lnTo>
-                    <a:pt x="5615439" y="2169532"/>
-                  </a:lnTo>
-                  <a:lnTo>
-                    <a:pt x="5538195" y="2159083"/>
-                  </a:lnTo>
-                  <a:lnTo>
-                    <a:pt x="5460951" y="2148364"/>
-                  </a:lnTo>
-                  <a:lnTo>
-                    <a:pt x="5383708" y="2137370"/>
-                  </a:lnTo>
-                  <a:lnTo>
-                    <a:pt x="5306464" y="2126093"/>
-                  </a:lnTo>
-                  <a:lnTo>
-                    <a:pt x="5229221" y="2114525"/>
-                  </a:lnTo>
-                  <a:lnTo>
-                    <a:pt x="5151977" y="2102660"/>
-                  </a:lnTo>
-                  <a:lnTo>
-                    <a:pt x="5074734" y="2090489"/>
-                  </a:lnTo>
-                  <a:lnTo>
-                    <a:pt x="4997490" y="2078005"/>
-                  </a:lnTo>
-                  <a:lnTo>
-                    <a:pt x="4920246" y="2065200"/>
-                  </a:lnTo>
-                  <a:lnTo>
-                    <a:pt x="4843003" y="2052065"/>
-                  </a:lnTo>
-                  <a:lnTo>
-                    <a:pt x="4765759" y="2038592"/>
-                  </a:lnTo>
-                  <a:lnTo>
-                    <a:pt x="4688516" y="2024773"/>
-                  </a:lnTo>
-                  <a:lnTo>
-                    <a:pt x="4611272" y="2010597"/>
-                  </a:lnTo>
-                  <a:lnTo>
-                    <a:pt x="4534029" y="1996057"/>
-                  </a:lnTo>
-                  <a:lnTo>
-                    <a:pt x="4456785" y="1981143"/>
-                  </a:lnTo>
-                  <a:lnTo>
-                    <a:pt x="4379541" y="1965845"/>
-                  </a:lnTo>
-                  <a:lnTo>
-                    <a:pt x="4302298" y="1950153"/>
-                  </a:lnTo>
-                  <a:lnTo>
-                    <a:pt x="4225054" y="1934057"/>
-                  </a:lnTo>
-                  <a:lnTo>
-                    <a:pt x="4147811" y="1917547"/>
-                  </a:lnTo>
-                  <a:lnTo>
-                    <a:pt x="4070567" y="1900612"/>
-                  </a:lnTo>
-                  <a:lnTo>
-                    <a:pt x="3993324" y="1883241"/>
-                  </a:lnTo>
-                  <a:lnTo>
-                    <a:pt x="3916080" y="1865423"/>
-                  </a:lnTo>
-                  <a:lnTo>
-                    <a:pt x="3838836" y="1847146"/>
-                  </a:lnTo>
-                  <a:lnTo>
-                    <a:pt x="3761593" y="1828399"/>
-                  </a:lnTo>
-                  <a:lnTo>
-                    <a:pt x="3684349" y="1809170"/>
-                  </a:lnTo>
-                  <a:lnTo>
-                    <a:pt x="3607106" y="1789446"/>
-                  </a:lnTo>
-                  <a:lnTo>
-                    <a:pt x="3529862" y="1769214"/>
-                  </a:lnTo>
-                  <a:lnTo>
-                    <a:pt x="3452619" y="1748461"/>
-                  </a:lnTo>
-                  <a:lnTo>
-                    <a:pt x="3375375" y="1727174"/>
-                  </a:lnTo>
-                  <a:lnTo>
-                    <a:pt x="3298131" y="1705732"/>
-                  </a:lnTo>
-                  <a:lnTo>
-                    <a:pt x="3220888" y="1700146"/>
-                  </a:lnTo>
-                  <a:lnTo>
-                    <a:pt x="3143644" y="1694524"/>
-                  </a:lnTo>
-                  <a:lnTo>
-                    <a:pt x="3066401" y="1688866"/>
-                  </a:lnTo>
-                  <a:lnTo>
-                    <a:pt x="2989157" y="1683172"/>
-                  </a:lnTo>
-                  <a:lnTo>
-                    <a:pt x="2911914" y="1677441"/>
-                  </a:lnTo>
-                  <a:lnTo>
-                    <a:pt x="2834670" y="1671673"/>
-                  </a:lnTo>
-                  <a:lnTo>
-                    <a:pt x="2757426" y="1665868"/>
-                  </a:lnTo>
-                  <a:lnTo>
-                    <a:pt x="2680183" y="1660026"/>
-                  </a:lnTo>
-                  <a:lnTo>
-                    <a:pt x="2602939" y="1654146"/>
-                  </a:lnTo>
-                  <a:lnTo>
-                    <a:pt x="2525696" y="1648229"/>
-                  </a:lnTo>
-                  <a:lnTo>
-                    <a:pt x="2448452" y="1642273"/>
-                  </a:lnTo>
-                  <a:lnTo>
-                    <a:pt x="2371209" y="1636280"/>
-                  </a:lnTo>
-                  <a:lnTo>
-                    <a:pt x="2293965" y="1630247"/>
-                  </a:lnTo>
-                  <a:lnTo>
-                    <a:pt x="2216721" y="1624176"/>
-                  </a:lnTo>
-                  <a:lnTo>
-                    <a:pt x="2139478" y="1618066"/>
-                  </a:lnTo>
-                  <a:lnTo>
-                    <a:pt x="2062234" y="1611917"/>
-                  </a:lnTo>
-                  <a:lnTo>
-                    <a:pt x="1984991" y="1605729"/>
-                  </a:lnTo>
-                  <a:lnTo>
-                    <a:pt x="1907747" y="1599500"/>
-                  </a:lnTo>
-                  <a:lnTo>
-                    <a:pt x="1830504" y="1593232"/>
-                  </a:lnTo>
-                  <a:lnTo>
-                    <a:pt x="1753260" y="1586923"/>
-                  </a:lnTo>
-                  <a:lnTo>
-                    <a:pt x="1676016" y="1580574"/>
-                  </a:lnTo>
-                  <a:lnTo>
-                    <a:pt x="1598773" y="1574184"/>
-                  </a:lnTo>
-                  <a:lnTo>
-                    <a:pt x="1521529" y="1567753"/>
-                  </a:lnTo>
-                  <a:lnTo>
-                    <a:pt x="1444286" y="1561281"/>
-                  </a:lnTo>
-                  <a:lnTo>
-                    <a:pt x="1367042" y="1554767"/>
-                  </a:lnTo>
-                  <a:lnTo>
-                    <a:pt x="1289799" y="1548211"/>
-                  </a:lnTo>
-                  <a:lnTo>
-                    <a:pt x="1212555" y="1541614"/>
-                  </a:lnTo>
-                  <a:lnTo>
-                    <a:pt x="1135311" y="1534973"/>
-                  </a:lnTo>
-                  <a:lnTo>
-                    <a:pt x="1058068" y="1528291"/>
-                  </a:lnTo>
-                  <a:lnTo>
-                    <a:pt x="980824" y="1521565"/>
-                  </a:lnTo>
-                  <a:lnTo>
-                    <a:pt x="903581" y="1514796"/>
-                  </a:lnTo>
-                  <a:lnTo>
-                    <a:pt x="826337" y="1507984"/>
-                  </a:lnTo>
-                  <a:lnTo>
-                    <a:pt x="749094" y="1501127"/>
-                  </a:lnTo>
-                  <a:lnTo>
-                    <a:pt x="671850" y="1494227"/>
-                  </a:lnTo>
-                  <a:lnTo>
-                    <a:pt x="594606" y="1487283"/>
-                  </a:lnTo>
-                  <a:lnTo>
-                    <a:pt x="517363" y="1480294"/>
-                  </a:lnTo>
-                  <a:lnTo>
-                    <a:pt x="440119" y="1473260"/>
-                  </a:lnTo>
-                  <a:lnTo>
-                    <a:pt x="362876" y="1466181"/>
-                  </a:lnTo>
-                  <a:lnTo>
-                    <a:pt x="285632" y="1459056"/>
-                  </a:lnTo>
-                  <a:lnTo>
-                    <a:pt x="208389" y="1451886"/>
-                  </a:lnTo>
-                  <a:lnTo>
-                    <a:pt x="131145" y="1444669"/>
-                  </a:lnTo>
-                  <a:lnTo>
-                    <a:pt x="53901" y="1437406"/>
-                  </a:lnTo>
-                  <a:lnTo>
-                    <a:pt x="0" y="1432306"/>
+                    <a:pt x="53901" y="43339"/>
+                  </a:lnTo>
+                  <a:lnTo>
+                    <a:pt x="131145" y="103887"/>
+                  </a:lnTo>
+                  <a:lnTo>
+                    <a:pt x="208389" y="162917"/>
+                  </a:lnTo>
+                  <a:lnTo>
+                    <a:pt x="285632" y="220465"/>
+                  </a:lnTo>
+                  <a:lnTo>
+                    <a:pt x="362876" y="276569"/>
+                  </a:lnTo>
+                  <a:lnTo>
+                    <a:pt x="440119" y="331265"/>
+                  </a:lnTo>
+                  <a:lnTo>
+                    <a:pt x="517363" y="384590"/>
+                  </a:lnTo>
+                  <a:lnTo>
+                    <a:pt x="594606" y="436576"/>
+                  </a:lnTo>
+                  <a:lnTo>
+                    <a:pt x="671850" y="487257"/>
+                  </a:lnTo>
+                  <a:lnTo>
+                    <a:pt x="749094" y="536667"/>
+                  </a:lnTo>
+                  <a:lnTo>
+                    <a:pt x="826337" y="584837"/>
+                  </a:lnTo>
+                  <a:lnTo>
+                    <a:pt x="903581" y="631799"/>
+                  </a:lnTo>
+                  <a:lnTo>
+                    <a:pt x="980824" y="677582"/>
+                  </a:lnTo>
+                  <a:lnTo>
+                    <a:pt x="1058068" y="722217"/>
+                  </a:lnTo>
+                  <a:lnTo>
+                    <a:pt x="1135311" y="765731"/>
+                  </a:lnTo>
+                  <a:lnTo>
+                    <a:pt x="1212555" y="808154"/>
+                  </a:lnTo>
+                  <a:lnTo>
+                    <a:pt x="1289799" y="849512"/>
+                  </a:lnTo>
+                  <a:lnTo>
+                    <a:pt x="1367042" y="889832"/>
+                  </a:lnTo>
+                  <a:lnTo>
+                    <a:pt x="1444286" y="929141"/>
+                  </a:lnTo>
+                  <a:lnTo>
+                    <a:pt x="1521529" y="967464"/>
+                  </a:lnTo>
+                  <a:lnTo>
+                    <a:pt x="1598773" y="1004824"/>
+                  </a:lnTo>
+                  <a:lnTo>
+                    <a:pt x="1676016" y="1041248"/>
+                  </a:lnTo>
+                  <a:lnTo>
+                    <a:pt x="1753260" y="1076757"/>
+                  </a:lnTo>
+                  <a:lnTo>
+                    <a:pt x="1830504" y="1111376"/>
+                  </a:lnTo>
+                  <a:lnTo>
+                    <a:pt x="1907747" y="1145126"/>
+                  </a:lnTo>
+                  <a:lnTo>
+                    <a:pt x="1984991" y="1178029"/>
+                  </a:lnTo>
+                  <a:lnTo>
+                    <a:pt x="2062234" y="1210106"/>
+                  </a:lnTo>
+                  <a:lnTo>
+                    <a:pt x="2139478" y="1241379"/>
+                  </a:lnTo>
+                  <a:lnTo>
+                    <a:pt x="2216721" y="1271867"/>
+                  </a:lnTo>
+                  <a:lnTo>
+                    <a:pt x="2293965" y="1301590"/>
+                  </a:lnTo>
+                  <a:lnTo>
+                    <a:pt x="2371209" y="1330567"/>
+                  </a:lnTo>
+                  <a:lnTo>
+                    <a:pt x="2448452" y="1358817"/>
+                  </a:lnTo>
+                  <a:lnTo>
+                    <a:pt x="2525696" y="1386358"/>
+                  </a:lnTo>
+                  <a:lnTo>
+                    <a:pt x="2602939" y="1413209"/>
+                  </a:lnTo>
+                  <a:lnTo>
+                    <a:pt x="2680183" y="1439385"/>
+                  </a:lnTo>
+                  <a:lnTo>
+                    <a:pt x="2757426" y="1464905"/>
+                  </a:lnTo>
+                  <a:lnTo>
+                    <a:pt x="2834670" y="1489784"/>
+                  </a:lnTo>
+                  <a:lnTo>
+                    <a:pt x="2911914" y="1514039"/>
+                  </a:lnTo>
+                  <a:lnTo>
+                    <a:pt x="2989157" y="1537686"/>
+                  </a:lnTo>
+                  <a:lnTo>
+                    <a:pt x="3066401" y="1560739"/>
+                  </a:lnTo>
+                  <a:lnTo>
+                    <a:pt x="3143644" y="1583214"/>
+                  </a:lnTo>
+                  <a:lnTo>
+                    <a:pt x="3220888" y="1605124"/>
+                  </a:lnTo>
+                  <a:lnTo>
+                    <a:pt x="3298131" y="1626485"/>
+                  </a:lnTo>
+                  <a:lnTo>
+                    <a:pt x="3375375" y="1632154"/>
+                  </a:lnTo>
+                  <a:lnTo>
+                    <a:pt x="3452619" y="1637414"/>
+                  </a:lnTo>
+                  <a:lnTo>
+                    <a:pt x="3529862" y="1642640"/>
+                  </a:lnTo>
+                  <a:lnTo>
+                    <a:pt x="3607106" y="1647834"/>
+                  </a:lnTo>
+                  <a:lnTo>
+                    <a:pt x="3684349" y="1652994"/>
+                  </a:lnTo>
+                  <a:lnTo>
+                    <a:pt x="3761593" y="1658121"/>
+                  </a:lnTo>
+                  <a:lnTo>
+                    <a:pt x="3838836" y="1663215"/>
+                  </a:lnTo>
+                  <a:lnTo>
+                    <a:pt x="3916080" y="1668277"/>
+                  </a:lnTo>
+                  <a:lnTo>
+                    <a:pt x="3993324" y="1673306"/>
+                  </a:lnTo>
+                  <a:lnTo>
+                    <a:pt x="4070567" y="1678304"/>
+                  </a:lnTo>
+                  <a:lnTo>
+                    <a:pt x="4147811" y="1683269"/>
+                  </a:lnTo>
+                  <a:lnTo>
+                    <a:pt x="4225054" y="1688203"/>
+                  </a:lnTo>
+                  <a:lnTo>
+                    <a:pt x="4302298" y="1693106"/>
+                  </a:lnTo>
+                  <a:lnTo>
+                    <a:pt x="4379541" y="1697977"/>
+                  </a:lnTo>
+                  <a:lnTo>
+                    <a:pt x="4456785" y="1702817"/>
+                  </a:lnTo>
+                  <a:lnTo>
+                    <a:pt x="4534029" y="1707626"/>
+                  </a:lnTo>
+                  <a:lnTo>
+                    <a:pt x="4611272" y="1712404"/>
+                  </a:lnTo>
+                  <a:lnTo>
+                    <a:pt x="4688516" y="1717152"/>
+                  </a:lnTo>
+                  <a:lnTo>
+                    <a:pt x="4765759" y="1721870"/>
+                  </a:lnTo>
+                  <a:lnTo>
+                    <a:pt x="4843003" y="1726558"/>
+                  </a:lnTo>
+                  <a:lnTo>
+                    <a:pt x="4920246" y="1731215"/>
+                  </a:lnTo>
+                  <a:lnTo>
+                    <a:pt x="4997490" y="1735843"/>
+                  </a:lnTo>
+                  <a:lnTo>
+                    <a:pt x="5074734" y="1740442"/>
+                  </a:lnTo>
+                  <a:lnTo>
+                    <a:pt x="5151977" y="1745011"/>
+                  </a:lnTo>
+                  <a:lnTo>
+                    <a:pt x="5229221" y="1749550"/>
+                  </a:lnTo>
+                  <a:lnTo>
+                    <a:pt x="5306464" y="1754061"/>
+                  </a:lnTo>
+                  <a:lnTo>
+                    <a:pt x="5383708" y="1758544"/>
+                  </a:lnTo>
+                  <a:lnTo>
+                    <a:pt x="5460951" y="1762997"/>
+                  </a:lnTo>
+                  <a:lnTo>
+                    <a:pt x="5538195" y="1767422"/>
+                  </a:lnTo>
+                  <a:lnTo>
+                    <a:pt x="5615439" y="1771819"/>
+                  </a:lnTo>
+                  <a:lnTo>
+                    <a:pt x="5692682" y="1776188"/>
+                  </a:lnTo>
+                  <a:lnTo>
+                    <a:pt x="5769926" y="1780529"/>
+                  </a:lnTo>
+                  <a:lnTo>
+                    <a:pt x="5847169" y="1784842"/>
+                  </a:lnTo>
+                  <a:lnTo>
+                    <a:pt x="5924413" y="1789128"/>
+                  </a:lnTo>
+                  <a:lnTo>
+                    <a:pt x="6001656" y="1793386"/>
+                  </a:lnTo>
+                  <a:lnTo>
+                    <a:pt x="6078900" y="1797617"/>
+                  </a:lnTo>
+                  <a:lnTo>
+                    <a:pt x="6156144" y="1801822"/>
+                  </a:lnTo>
+                  <a:lnTo>
+                    <a:pt x="6233387" y="1805999"/>
+                  </a:lnTo>
+                  <a:lnTo>
+                    <a:pt x="6310631" y="1810150"/>
+                  </a:lnTo>
+                  <a:lnTo>
+                    <a:pt x="6387874" y="1814274"/>
+                  </a:lnTo>
+                  <a:lnTo>
+                    <a:pt x="6465118" y="1818372"/>
+                  </a:lnTo>
+                  <a:lnTo>
+                    <a:pt x="6542361" y="1822443"/>
+                  </a:lnTo>
+                  <a:lnTo>
+                    <a:pt x="6619605" y="1826489"/>
+                  </a:lnTo>
+                  <a:lnTo>
+                    <a:pt x="6696849" y="1830509"/>
+                  </a:lnTo>
+                  <a:lnTo>
+                    <a:pt x="6774092" y="1834504"/>
+                  </a:lnTo>
+                  <a:lnTo>
+                    <a:pt x="6851336" y="1838472"/>
+                  </a:lnTo>
+                  <a:lnTo>
+                    <a:pt x="6928579" y="1842416"/>
+                  </a:lnTo>
+                  <a:lnTo>
+                    <a:pt x="7005823" y="1846334"/>
+                  </a:lnTo>
+                  <a:lnTo>
+                    <a:pt x="7083066" y="1850227"/>
+                  </a:lnTo>
+                  <a:lnTo>
+                    <a:pt x="7160310" y="1854096"/>
+                  </a:lnTo>
+                  <a:lnTo>
+                    <a:pt x="7237554" y="1857940"/>
+                  </a:lnTo>
+                  <a:lnTo>
+                    <a:pt x="7314797" y="1861759"/>
+                  </a:lnTo>
+                  <a:lnTo>
+                    <a:pt x="7392041" y="1865554"/>
+                  </a:lnTo>
+                  <a:lnTo>
+                    <a:pt x="7392041" y="2240604"/>
+                  </a:lnTo>
+                  <a:lnTo>
+                    <a:pt x="7314797" y="2235048"/>
+                  </a:lnTo>
+                  <a:lnTo>
+                    <a:pt x="7237554" y="2229350"/>
+                  </a:lnTo>
+                  <a:lnTo>
+                    <a:pt x="7160310" y="2223505"/>
+                  </a:lnTo>
+                  <a:lnTo>
+                    <a:pt x="7083066" y="2217510"/>
+                  </a:lnTo>
+                  <a:lnTo>
+                    <a:pt x="7005823" y="2211360"/>
+                  </a:lnTo>
+                  <a:lnTo>
+                    <a:pt x="6928579" y="2205052"/>
+                  </a:lnTo>
+                  <a:lnTo>
+                    <a:pt x="6851336" y="2198582"/>
+                  </a:lnTo>
+                  <a:lnTo>
+                    <a:pt x="6774092" y="2191945"/>
+                  </a:lnTo>
+                  <a:lnTo>
+                    <a:pt x="6696849" y="2185137"/>
+                  </a:lnTo>
+                  <a:lnTo>
+                    <a:pt x="6619605" y="2178155"/>
+                  </a:lnTo>
+                  <a:lnTo>
+                    <a:pt x="6542361" y="2170992"/>
+                  </a:lnTo>
+                  <a:lnTo>
+                    <a:pt x="6465118" y="2163645"/>
+                  </a:lnTo>
+                  <a:lnTo>
+                    <a:pt x="6387874" y="2156109"/>
+                  </a:lnTo>
+                  <a:lnTo>
+                    <a:pt x="6310631" y="2148379"/>
+                  </a:lnTo>
+                  <a:lnTo>
+                    <a:pt x="6233387" y="2140450"/>
+                  </a:lnTo>
+                  <a:lnTo>
+                    <a:pt x="6156144" y="2132317"/>
+                  </a:lnTo>
+                  <a:lnTo>
+                    <a:pt x="6078900" y="2123975"/>
+                  </a:lnTo>
+                  <a:lnTo>
+                    <a:pt x="6001656" y="2115418"/>
+                  </a:lnTo>
+                  <a:lnTo>
+                    <a:pt x="5924413" y="2106641"/>
+                  </a:lnTo>
+                  <a:lnTo>
+                    <a:pt x="5847169" y="2097638"/>
+                  </a:lnTo>
+                  <a:lnTo>
+                    <a:pt x="5769926" y="2088403"/>
+                  </a:lnTo>
+                  <a:lnTo>
+                    <a:pt x="5692682" y="2078930"/>
+                  </a:lnTo>
+                  <a:lnTo>
+                    <a:pt x="5615439" y="2069214"/>
+                  </a:lnTo>
+                  <a:lnTo>
+                    <a:pt x="5538195" y="2059248"/>
+                  </a:lnTo>
+                  <a:lnTo>
+                    <a:pt x="5460951" y="2049025"/>
+                  </a:lnTo>
+                  <a:lnTo>
+                    <a:pt x="5383708" y="2038539"/>
+                  </a:lnTo>
+                  <a:lnTo>
+                    <a:pt x="5306464" y="2027783"/>
+                  </a:lnTo>
+                  <a:lnTo>
+                    <a:pt x="5229221" y="2016750"/>
+                  </a:lnTo>
+                  <a:lnTo>
+                    <a:pt x="5151977" y="2005434"/>
+                  </a:lnTo>
+                  <a:lnTo>
+                    <a:pt x="5074734" y="1993826"/>
+                  </a:lnTo>
+                  <a:lnTo>
+                    <a:pt x="4997490" y="1981919"/>
+                  </a:lnTo>
+                  <a:lnTo>
+                    <a:pt x="4920246" y="1969706"/>
+                  </a:lnTo>
+                  <a:lnTo>
+                    <a:pt x="4843003" y="1957178"/>
+                  </a:lnTo>
+                  <a:lnTo>
+                    <a:pt x="4765759" y="1944328"/>
+                  </a:lnTo>
+                  <a:lnTo>
+                    <a:pt x="4688516" y="1931148"/>
+                  </a:lnTo>
+                  <a:lnTo>
+                    <a:pt x="4611272" y="1917628"/>
+                  </a:lnTo>
+                  <a:lnTo>
+                    <a:pt x="4534029" y="1903760"/>
+                  </a:lnTo>
+                  <a:lnTo>
+                    <a:pt x="4456785" y="1889535"/>
+                  </a:lnTo>
+                  <a:lnTo>
+                    <a:pt x="4379541" y="1874945"/>
+                  </a:lnTo>
+                  <a:lnTo>
+                    <a:pt x="4302298" y="1859978"/>
+                  </a:lnTo>
+                  <a:lnTo>
+                    <a:pt x="4225054" y="1844627"/>
+                  </a:lnTo>
+                  <a:lnTo>
+                    <a:pt x="4147811" y="1828880"/>
+                  </a:lnTo>
+                  <a:lnTo>
+                    <a:pt x="4070567" y="1812728"/>
+                  </a:lnTo>
+                  <a:lnTo>
+                    <a:pt x="3993324" y="1796160"/>
+                  </a:lnTo>
+                  <a:lnTo>
+                    <a:pt x="3916080" y="1779166"/>
+                  </a:lnTo>
+                  <a:lnTo>
+                    <a:pt x="3838836" y="1761735"/>
+                  </a:lnTo>
+                  <a:lnTo>
+                    <a:pt x="3761593" y="1743855"/>
+                  </a:lnTo>
+                  <a:lnTo>
+                    <a:pt x="3684349" y="1725515"/>
+                  </a:lnTo>
+                  <a:lnTo>
+                    <a:pt x="3607106" y="1706702"/>
+                  </a:lnTo>
+                  <a:lnTo>
+                    <a:pt x="3529862" y="1687406"/>
+                  </a:lnTo>
+                  <a:lnTo>
+                    <a:pt x="3452619" y="1667613"/>
+                  </a:lnTo>
+                  <a:lnTo>
+                    <a:pt x="3375375" y="1647310"/>
+                  </a:lnTo>
+                  <a:lnTo>
+                    <a:pt x="3298131" y="1626860"/>
+                  </a:lnTo>
+                  <a:lnTo>
+                    <a:pt x="3220888" y="1621532"/>
+                  </a:lnTo>
+                  <a:lnTo>
+                    <a:pt x="3143644" y="1616170"/>
+                  </a:lnTo>
+                  <a:lnTo>
+                    <a:pt x="3066401" y="1610774"/>
+                  </a:lnTo>
+                  <a:lnTo>
+                    <a:pt x="2989157" y="1605342"/>
+                  </a:lnTo>
+                  <a:lnTo>
+                    <a:pt x="2911914" y="1599876"/>
+                  </a:lnTo>
+                  <a:lnTo>
+                    <a:pt x="2834670" y="1594375"/>
+                  </a:lnTo>
+                  <a:lnTo>
+                    <a:pt x="2757426" y="1588839"/>
+                  </a:lnTo>
+                  <a:lnTo>
+                    <a:pt x="2680183" y="1583267"/>
+                  </a:lnTo>
+                  <a:lnTo>
+                    <a:pt x="2602939" y="1577659"/>
+                  </a:lnTo>
+                  <a:lnTo>
+                    <a:pt x="2525696" y="1572015"/>
+                  </a:lnTo>
+                  <a:lnTo>
+                    <a:pt x="2448452" y="1566335"/>
+                  </a:lnTo>
+                  <a:lnTo>
+                    <a:pt x="2371209" y="1560619"/>
+                  </a:lnTo>
+                  <a:lnTo>
+                    <a:pt x="2293965" y="1554865"/>
+                  </a:lnTo>
+                  <a:lnTo>
+                    <a:pt x="2216721" y="1549075"/>
+                  </a:lnTo>
+                  <a:lnTo>
+                    <a:pt x="2139478" y="1543248"/>
+                  </a:lnTo>
+                  <a:lnTo>
+                    <a:pt x="2062234" y="1537383"/>
+                  </a:lnTo>
+                  <a:lnTo>
+                    <a:pt x="1984991" y="1531480"/>
+                  </a:lnTo>
+                  <a:lnTo>
+                    <a:pt x="1907747" y="1525540"/>
+                  </a:lnTo>
+                  <a:lnTo>
+                    <a:pt x="1830504" y="1519561"/>
+                  </a:lnTo>
+                  <a:lnTo>
+                    <a:pt x="1753260" y="1513544"/>
+                  </a:lnTo>
+                  <a:lnTo>
+                    <a:pt x="1676016" y="1507489"/>
+                  </a:lnTo>
+                  <a:lnTo>
+                    <a:pt x="1598773" y="1501394"/>
+                  </a:lnTo>
+                  <a:lnTo>
+                    <a:pt x="1521529" y="1495261"/>
+                  </a:lnTo>
+                  <a:lnTo>
+                    <a:pt x="1444286" y="1489088"/>
+                  </a:lnTo>
+                  <a:lnTo>
+                    <a:pt x="1367042" y="1482875"/>
+                  </a:lnTo>
+                  <a:lnTo>
+                    <a:pt x="1289799" y="1476623"/>
+                  </a:lnTo>
+                  <a:lnTo>
+                    <a:pt x="1212555" y="1470330"/>
+                  </a:lnTo>
+                  <a:lnTo>
+                    <a:pt x="1135311" y="1463997"/>
+                  </a:lnTo>
+                  <a:lnTo>
+                    <a:pt x="1058068" y="1457623"/>
+                  </a:lnTo>
+                  <a:lnTo>
+                    <a:pt x="980824" y="1451208"/>
+                  </a:lnTo>
+                  <a:lnTo>
+                    <a:pt x="903581" y="1444752"/>
+                  </a:lnTo>
+                  <a:lnTo>
+                    <a:pt x="826337" y="1438255"/>
+                  </a:lnTo>
+                  <a:lnTo>
+                    <a:pt x="749094" y="1431716"/>
+                  </a:lnTo>
+                  <a:lnTo>
+                    <a:pt x="671850" y="1425135"/>
+                  </a:lnTo>
+                  <a:lnTo>
+                    <a:pt x="594606" y="1418511"/>
+                  </a:lnTo>
+                  <a:lnTo>
+                    <a:pt x="517363" y="1411845"/>
+                  </a:lnTo>
+                  <a:lnTo>
+                    <a:pt x="440119" y="1405137"/>
+                  </a:lnTo>
+                  <a:lnTo>
+                    <a:pt x="362876" y="1398385"/>
+                  </a:lnTo>
+                  <a:lnTo>
+                    <a:pt x="285632" y="1391590"/>
+                  </a:lnTo>
+                  <a:lnTo>
+                    <a:pt x="208389" y="1384751"/>
+                  </a:lnTo>
+                  <a:lnTo>
+                    <a:pt x="131145" y="1377868"/>
+                  </a:lnTo>
+                  <a:lnTo>
+                    <a:pt x="53901" y="1370941"/>
+                  </a:lnTo>
+                  <a:lnTo>
+                    <a:pt x="0" y="1366077"/>
                   </a:lnTo>
                   <a:close/>
                 </a:path>
@@ -3615,303 +3615,303 @@
           </p:nvSpPr>
           <p:spPr>
             <a:xfrm>
-              <a:off x="817517" y="2973664"/>
-              <a:ext cx="7392041" cy="1955999"/>
+              <a:off x="817517" y="3100799"/>
+              <a:ext cx="7392041" cy="1865554"/>
             </a:xfrm>
             <a:custGeom>
               <a:avLst/>
               <a:pathLst>
-                <a:path w="7392041" h="1955999">
+                <a:path w="7392041" h="1865554">
                   <a:moveTo>
                     <a:pt x="0" y="0"/>
                   </a:moveTo>
                   <a:lnTo>
-                    <a:pt x="53901" y="45440"/>
-                  </a:lnTo>
-                  <a:lnTo>
-                    <a:pt x="131145" y="108924"/>
-                  </a:lnTo>
-                  <a:lnTo>
-                    <a:pt x="208389" y="170815"/>
-                  </a:lnTo>
-                  <a:lnTo>
-                    <a:pt x="285632" y="231153"/>
-                  </a:lnTo>
-                  <a:lnTo>
-                    <a:pt x="362876" y="289977"/>
-                  </a:lnTo>
-                  <a:lnTo>
-                    <a:pt x="440119" y="347326"/>
-                  </a:lnTo>
-                  <a:lnTo>
-                    <a:pt x="517363" y="403235"/>
-                  </a:lnTo>
-                  <a:lnTo>
-                    <a:pt x="594606" y="457741"/>
-                  </a:lnTo>
-                  <a:lnTo>
-                    <a:pt x="671850" y="510880"/>
-                  </a:lnTo>
-                  <a:lnTo>
-                    <a:pt x="749094" y="562686"/>
-                  </a:lnTo>
-                  <a:lnTo>
-                    <a:pt x="826337" y="613191"/>
-                  </a:lnTo>
-                  <a:lnTo>
-                    <a:pt x="903581" y="662429"/>
-                  </a:lnTo>
-                  <a:lnTo>
-                    <a:pt x="980824" y="710432"/>
-                  </a:lnTo>
-                  <a:lnTo>
-                    <a:pt x="1058068" y="757231"/>
-                  </a:lnTo>
-                  <a:lnTo>
-                    <a:pt x="1135311" y="802855"/>
-                  </a:lnTo>
-                  <a:lnTo>
-                    <a:pt x="1212555" y="847334"/>
-                  </a:lnTo>
-                  <a:lnTo>
-                    <a:pt x="1289799" y="890697"/>
-                  </a:lnTo>
-                  <a:lnTo>
-                    <a:pt x="1367042" y="932973"/>
-                  </a:lnTo>
-                  <a:lnTo>
-                    <a:pt x="1444286" y="974187"/>
-                  </a:lnTo>
-                  <a:lnTo>
-                    <a:pt x="1521529" y="1014368"/>
-                  </a:lnTo>
-                  <a:lnTo>
-                    <a:pt x="1598773" y="1053540"/>
-                  </a:lnTo>
-                  <a:lnTo>
-                    <a:pt x="1676016" y="1091729"/>
-                  </a:lnTo>
-                  <a:lnTo>
-                    <a:pt x="1753260" y="1128960"/>
-                  </a:lnTo>
-                  <a:lnTo>
-                    <a:pt x="1830504" y="1165257"/>
-                  </a:lnTo>
-                  <a:lnTo>
-                    <a:pt x="1907747" y="1200643"/>
-                  </a:lnTo>
-                  <a:lnTo>
-                    <a:pt x="1984991" y="1235141"/>
-                  </a:lnTo>
-                  <a:lnTo>
-                    <a:pt x="2062234" y="1268774"/>
-                  </a:lnTo>
-                  <a:lnTo>
-                    <a:pt x="2139478" y="1301563"/>
-                  </a:lnTo>
-                  <a:lnTo>
-                    <a:pt x="2216721" y="1333529"/>
-                  </a:lnTo>
-                  <a:lnTo>
-                    <a:pt x="2293965" y="1364693"/>
-                  </a:lnTo>
-                  <a:lnTo>
-                    <a:pt x="2371209" y="1395075"/>
-                  </a:lnTo>
-                  <a:lnTo>
-                    <a:pt x="2448452" y="1424695"/>
-                  </a:lnTo>
-                  <a:lnTo>
-                    <a:pt x="2525696" y="1453571"/>
-                  </a:lnTo>
-                  <a:lnTo>
-                    <a:pt x="2602939" y="1481723"/>
-                  </a:lnTo>
-                  <a:lnTo>
-                    <a:pt x="2680183" y="1509168"/>
-                  </a:lnTo>
-                  <a:lnTo>
-                    <a:pt x="2757426" y="1535925"/>
-                  </a:lnTo>
-                  <a:lnTo>
-                    <a:pt x="2834670" y="1562011"/>
-                  </a:lnTo>
-                  <a:lnTo>
-                    <a:pt x="2911914" y="1587442"/>
-                  </a:lnTo>
-                  <a:lnTo>
-                    <a:pt x="2989157" y="1612235"/>
-                  </a:lnTo>
-                  <a:lnTo>
-                    <a:pt x="3066401" y="1636406"/>
-                  </a:lnTo>
-                  <a:lnTo>
-                    <a:pt x="3143644" y="1659970"/>
-                  </a:lnTo>
-                  <a:lnTo>
-                    <a:pt x="3220888" y="1682943"/>
-                  </a:lnTo>
-                  <a:lnTo>
-                    <a:pt x="3298131" y="1705340"/>
-                  </a:lnTo>
-                  <a:lnTo>
-                    <a:pt x="3375375" y="1711283"/>
-                  </a:lnTo>
-                  <a:lnTo>
-                    <a:pt x="3452619" y="1716798"/>
-                  </a:lnTo>
-                  <a:lnTo>
-                    <a:pt x="3529862" y="1722278"/>
-                  </a:lnTo>
-                  <a:lnTo>
-                    <a:pt x="3607106" y="1727723"/>
-                  </a:lnTo>
-                  <a:lnTo>
-                    <a:pt x="3684349" y="1733133"/>
-                  </a:lnTo>
-                  <a:lnTo>
-                    <a:pt x="3761593" y="1738509"/>
-                  </a:lnTo>
-                  <a:lnTo>
-                    <a:pt x="3838836" y="1743850"/>
-                  </a:lnTo>
-                  <a:lnTo>
-                    <a:pt x="3916080" y="1749157"/>
-                  </a:lnTo>
-                  <a:lnTo>
-                    <a:pt x="3993324" y="1754431"/>
-                  </a:lnTo>
-                  <a:lnTo>
-                    <a:pt x="4070567" y="1759670"/>
-                  </a:lnTo>
-                  <a:lnTo>
-                    <a:pt x="4147811" y="1764877"/>
-                  </a:lnTo>
-                  <a:lnTo>
-                    <a:pt x="4225054" y="1770050"/>
-                  </a:lnTo>
-                  <a:lnTo>
-                    <a:pt x="4302298" y="1775190"/>
-                  </a:lnTo>
-                  <a:lnTo>
-                    <a:pt x="4379541" y="1780297"/>
-                  </a:lnTo>
-                  <a:lnTo>
-                    <a:pt x="4456785" y="1785372"/>
-                  </a:lnTo>
-                  <a:lnTo>
-                    <a:pt x="4534029" y="1790414"/>
-                  </a:lnTo>
-                  <a:lnTo>
-                    <a:pt x="4611272" y="1795424"/>
-                  </a:lnTo>
-                  <a:lnTo>
-                    <a:pt x="4688516" y="1800402"/>
-                  </a:lnTo>
-                  <a:lnTo>
-                    <a:pt x="4765759" y="1805349"/>
-                  </a:lnTo>
-                  <a:lnTo>
-                    <a:pt x="4843003" y="1810264"/>
-                  </a:lnTo>
-                  <a:lnTo>
-                    <a:pt x="4920246" y="1815147"/>
-                  </a:lnTo>
-                  <a:lnTo>
-                    <a:pt x="4997490" y="1819999"/>
-                  </a:lnTo>
-                  <a:lnTo>
-                    <a:pt x="5074734" y="1824821"/>
-                  </a:lnTo>
-                  <a:lnTo>
-                    <a:pt x="5151977" y="1829611"/>
-                  </a:lnTo>
-                  <a:lnTo>
-                    <a:pt x="5229221" y="1834371"/>
-                  </a:lnTo>
-                  <a:lnTo>
-                    <a:pt x="5306464" y="1839101"/>
-                  </a:lnTo>
-                  <a:lnTo>
-                    <a:pt x="5383708" y="1843800"/>
-                  </a:lnTo>
-                  <a:lnTo>
-                    <a:pt x="5460951" y="1848470"/>
-                  </a:lnTo>
-                  <a:lnTo>
-                    <a:pt x="5538195" y="1853109"/>
-                  </a:lnTo>
-                  <a:lnTo>
-                    <a:pt x="5615439" y="1857719"/>
-                  </a:lnTo>
-                  <a:lnTo>
-                    <a:pt x="5692682" y="1862300"/>
-                  </a:lnTo>
-                  <a:lnTo>
-                    <a:pt x="5769926" y="1866851"/>
-                  </a:lnTo>
-                  <a:lnTo>
-                    <a:pt x="5847169" y="1871374"/>
-                  </a:lnTo>
-                  <a:lnTo>
-                    <a:pt x="5924413" y="1875867"/>
-                  </a:lnTo>
-                  <a:lnTo>
-                    <a:pt x="6001656" y="1880332"/>
-                  </a:lnTo>
-                  <a:lnTo>
-                    <a:pt x="6078900" y="1884768"/>
-                  </a:lnTo>
-                  <a:lnTo>
-                    <a:pt x="6156144" y="1889176"/>
-                  </a:lnTo>
-                  <a:lnTo>
-                    <a:pt x="6233387" y="1893556"/>
-                  </a:lnTo>
-                  <a:lnTo>
-                    <a:pt x="6310631" y="1897908"/>
-                  </a:lnTo>
-                  <a:lnTo>
-                    <a:pt x="6387874" y="1902232"/>
-                  </a:lnTo>
-                  <a:lnTo>
-                    <a:pt x="6465118" y="1906529"/>
-                  </a:lnTo>
-                  <a:lnTo>
-                    <a:pt x="6542361" y="1910798"/>
-                  </a:lnTo>
-                  <a:lnTo>
-                    <a:pt x="6619605" y="1915040"/>
-                  </a:lnTo>
-                  <a:lnTo>
-                    <a:pt x="6696849" y="1919255"/>
-                  </a:lnTo>
-                  <a:lnTo>
-                    <a:pt x="6774092" y="1923443"/>
-                  </a:lnTo>
-                  <a:lnTo>
-                    <a:pt x="6851336" y="1927604"/>
-                  </a:lnTo>
-                  <a:lnTo>
-                    <a:pt x="6928579" y="1931739"/>
-                  </a:lnTo>
-                  <a:lnTo>
-                    <a:pt x="7005823" y="1935847"/>
-                  </a:lnTo>
-                  <a:lnTo>
-                    <a:pt x="7083066" y="1939929"/>
-                  </a:lnTo>
-                  <a:lnTo>
-                    <a:pt x="7160310" y="1943985"/>
-                  </a:lnTo>
-                  <a:lnTo>
-                    <a:pt x="7237554" y="1948015"/>
-                  </a:lnTo>
-                  <a:lnTo>
-                    <a:pt x="7314797" y="1952020"/>
-                  </a:lnTo>
-                  <a:lnTo>
-                    <a:pt x="7392041" y="1955999"/>
+                    <a:pt x="53901" y="43339"/>
+                  </a:lnTo>
+                  <a:lnTo>
+                    <a:pt x="131145" y="103887"/>
+                  </a:lnTo>
+                  <a:lnTo>
+                    <a:pt x="208389" y="162917"/>
+                  </a:lnTo>
+                  <a:lnTo>
+                    <a:pt x="285632" y="220465"/>
+                  </a:lnTo>
+                  <a:lnTo>
+                    <a:pt x="362876" y="276569"/>
+                  </a:lnTo>
+                  <a:lnTo>
+                    <a:pt x="440119" y="331265"/>
+                  </a:lnTo>
+                  <a:lnTo>
+                    <a:pt x="517363" y="384590"/>
+                  </a:lnTo>
+                  <a:lnTo>
+                    <a:pt x="594606" y="436576"/>
+                  </a:lnTo>
+                  <a:lnTo>
+                    <a:pt x="671850" y="487257"/>
+                  </a:lnTo>
+                  <a:lnTo>
+                    <a:pt x="749094" y="536667"/>
+                  </a:lnTo>
+                  <a:lnTo>
+                    <a:pt x="826337" y="584837"/>
+                  </a:lnTo>
+                  <a:lnTo>
+                    <a:pt x="903581" y="631799"/>
+                  </a:lnTo>
+                  <a:lnTo>
+                    <a:pt x="980824" y="677582"/>
+                  </a:lnTo>
+                  <a:lnTo>
+                    <a:pt x="1058068" y="722217"/>
+                  </a:lnTo>
+                  <a:lnTo>
+                    <a:pt x="1135311" y="765731"/>
+                  </a:lnTo>
+                  <a:lnTo>
+                    <a:pt x="1212555" y="808154"/>
+                  </a:lnTo>
+                  <a:lnTo>
+                    <a:pt x="1289799" y="849512"/>
+                  </a:lnTo>
+                  <a:lnTo>
+                    <a:pt x="1367042" y="889832"/>
+                  </a:lnTo>
+                  <a:lnTo>
+                    <a:pt x="1444286" y="929141"/>
+                  </a:lnTo>
+                  <a:lnTo>
+                    <a:pt x="1521529" y="967464"/>
+                  </a:lnTo>
+                  <a:lnTo>
+                    <a:pt x="1598773" y="1004824"/>
+                  </a:lnTo>
+                  <a:lnTo>
+                    <a:pt x="1676016" y="1041248"/>
+                  </a:lnTo>
+                  <a:lnTo>
+                    <a:pt x="1753260" y="1076757"/>
+                  </a:lnTo>
+                  <a:lnTo>
+                    <a:pt x="1830504" y="1111376"/>
+                  </a:lnTo>
+                  <a:lnTo>
+                    <a:pt x="1907747" y="1145126"/>
+                  </a:lnTo>
+                  <a:lnTo>
+                    <a:pt x="1984991" y="1178029"/>
+                  </a:lnTo>
+                  <a:lnTo>
+                    <a:pt x="2062234" y="1210106"/>
+                  </a:lnTo>
+                  <a:lnTo>
+                    <a:pt x="2139478" y="1241379"/>
+                  </a:lnTo>
+                  <a:lnTo>
+                    <a:pt x="2216721" y="1271867"/>
+                  </a:lnTo>
+                  <a:lnTo>
+                    <a:pt x="2293965" y="1301590"/>
+                  </a:lnTo>
+                  <a:lnTo>
+                    <a:pt x="2371209" y="1330567"/>
+                  </a:lnTo>
+                  <a:lnTo>
+                    <a:pt x="2448452" y="1358817"/>
+                  </a:lnTo>
+                  <a:lnTo>
+                    <a:pt x="2525696" y="1386358"/>
+                  </a:lnTo>
+                  <a:lnTo>
+                    <a:pt x="2602939" y="1413209"/>
+                  </a:lnTo>
+                  <a:lnTo>
+                    <a:pt x="2680183" y="1439385"/>
+                  </a:lnTo>
+                  <a:lnTo>
+                    <a:pt x="2757426" y="1464905"/>
+                  </a:lnTo>
+                  <a:lnTo>
+                    <a:pt x="2834670" y="1489784"/>
+                  </a:lnTo>
+                  <a:lnTo>
+                    <a:pt x="2911914" y="1514039"/>
+                  </a:lnTo>
+                  <a:lnTo>
+                    <a:pt x="2989157" y="1537686"/>
+                  </a:lnTo>
+                  <a:lnTo>
+                    <a:pt x="3066401" y="1560739"/>
+                  </a:lnTo>
+                  <a:lnTo>
+                    <a:pt x="3143644" y="1583214"/>
+                  </a:lnTo>
+                  <a:lnTo>
+                    <a:pt x="3220888" y="1605124"/>
+                  </a:lnTo>
+                  <a:lnTo>
+                    <a:pt x="3298131" y="1626485"/>
+                  </a:lnTo>
+                  <a:lnTo>
+                    <a:pt x="3375375" y="1632154"/>
+                  </a:lnTo>
+                  <a:lnTo>
+                    <a:pt x="3452619" y="1637414"/>
+                  </a:lnTo>
+                  <a:lnTo>
+                    <a:pt x="3529862" y="1642640"/>
+                  </a:lnTo>
+                  <a:lnTo>
+                    <a:pt x="3607106" y="1647834"/>
+                  </a:lnTo>
+                  <a:lnTo>
+                    <a:pt x="3684349" y="1652994"/>
+                  </a:lnTo>
+                  <a:lnTo>
+                    <a:pt x="3761593" y="1658121"/>
+                  </a:lnTo>
+                  <a:lnTo>
+                    <a:pt x="3838836" y="1663215"/>
+                  </a:lnTo>
+                  <a:lnTo>
+                    <a:pt x="3916080" y="1668277"/>
+                  </a:lnTo>
+                  <a:lnTo>
+                    <a:pt x="3993324" y="1673306"/>
+                  </a:lnTo>
+                  <a:lnTo>
+                    <a:pt x="4070567" y="1678304"/>
+                  </a:lnTo>
+                  <a:lnTo>
+                    <a:pt x="4147811" y="1683269"/>
+                  </a:lnTo>
+                  <a:lnTo>
+                    <a:pt x="4225054" y="1688203"/>
+                  </a:lnTo>
+                  <a:lnTo>
+                    <a:pt x="4302298" y="1693106"/>
+                  </a:lnTo>
+                  <a:lnTo>
+                    <a:pt x="4379541" y="1697977"/>
+                  </a:lnTo>
+                  <a:lnTo>
+                    <a:pt x="4456785" y="1702817"/>
+                  </a:lnTo>
+                  <a:lnTo>
+                    <a:pt x="4534029" y="1707626"/>
+                  </a:lnTo>
+                  <a:lnTo>
+                    <a:pt x="4611272" y="1712404"/>
+                  </a:lnTo>
+                  <a:lnTo>
+                    <a:pt x="4688516" y="1717152"/>
+                  </a:lnTo>
+                  <a:lnTo>
+                    <a:pt x="4765759" y="1721870"/>
+                  </a:lnTo>
+                  <a:lnTo>
+                    <a:pt x="4843003" y="1726558"/>
+                  </a:lnTo>
+                  <a:lnTo>
+                    <a:pt x="4920246" y="1731215"/>
+                  </a:lnTo>
+                  <a:lnTo>
+                    <a:pt x="4997490" y="1735843"/>
+                  </a:lnTo>
+                  <a:lnTo>
+                    <a:pt x="5074734" y="1740442"/>
+                  </a:lnTo>
+                  <a:lnTo>
+                    <a:pt x="5151977" y="1745011"/>
+                  </a:lnTo>
+                  <a:lnTo>
+                    <a:pt x="5229221" y="1749550"/>
+                  </a:lnTo>
+                  <a:lnTo>
+                    <a:pt x="5306464" y="1754061"/>
+                  </a:lnTo>
+                  <a:lnTo>
+                    <a:pt x="5383708" y="1758544"/>
+                  </a:lnTo>
+                  <a:lnTo>
+                    <a:pt x="5460951" y="1762997"/>
+                  </a:lnTo>
+                  <a:lnTo>
+                    <a:pt x="5538195" y="1767422"/>
+                  </a:lnTo>
+                  <a:lnTo>
+                    <a:pt x="5615439" y="1771819"/>
+                  </a:lnTo>
+                  <a:lnTo>
+                    <a:pt x="5692682" y="1776188"/>
+                  </a:lnTo>
+                  <a:lnTo>
+                    <a:pt x="5769926" y="1780529"/>
+                  </a:lnTo>
+                  <a:lnTo>
+                    <a:pt x="5847169" y="1784842"/>
+                  </a:lnTo>
+                  <a:lnTo>
+                    <a:pt x="5924413" y="1789128"/>
+                  </a:lnTo>
+                  <a:lnTo>
+                    <a:pt x="6001656" y="1793386"/>
+                  </a:lnTo>
+                  <a:lnTo>
+                    <a:pt x="6078900" y="1797617"/>
+                  </a:lnTo>
+                  <a:lnTo>
+                    <a:pt x="6156144" y="1801822"/>
+                  </a:lnTo>
+                  <a:lnTo>
+                    <a:pt x="6233387" y="1805999"/>
+                  </a:lnTo>
+                  <a:lnTo>
+                    <a:pt x="6310631" y="1810150"/>
+                  </a:lnTo>
+                  <a:lnTo>
+                    <a:pt x="6387874" y="1814274"/>
+                  </a:lnTo>
+                  <a:lnTo>
+                    <a:pt x="6465118" y="1818372"/>
+                  </a:lnTo>
+                  <a:lnTo>
+                    <a:pt x="6542361" y="1822443"/>
+                  </a:lnTo>
+                  <a:lnTo>
+                    <a:pt x="6619605" y="1826489"/>
+                  </a:lnTo>
+                  <a:lnTo>
+                    <a:pt x="6696849" y="1830509"/>
+                  </a:lnTo>
+                  <a:lnTo>
+                    <a:pt x="6774092" y="1834504"/>
+                  </a:lnTo>
+                  <a:lnTo>
+                    <a:pt x="6851336" y="1838472"/>
+                  </a:lnTo>
+                  <a:lnTo>
+                    <a:pt x="6928579" y="1842416"/>
+                  </a:lnTo>
+                  <a:lnTo>
+                    <a:pt x="7005823" y="1846334"/>
+                  </a:lnTo>
+                  <a:lnTo>
+                    <a:pt x="7083066" y="1850227"/>
+                  </a:lnTo>
+                  <a:lnTo>
+                    <a:pt x="7160310" y="1854096"/>
+                  </a:lnTo>
+                  <a:lnTo>
+                    <a:pt x="7237554" y="1857940"/>
+                  </a:lnTo>
+                  <a:lnTo>
+                    <a:pt x="7314797" y="1861759"/>
+                  </a:lnTo>
+                  <a:lnTo>
+                    <a:pt x="7392041" y="1865554"/>
                   </a:lnTo>
                 </a:path>
               </a:pathLst>
@@ -3931,300 +3931,300 @@
           </p:nvSpPr>
           <p:spPr>
             <a:xfrm>
-              <a:off x="817517" y="4405971"/>
-              <a:ext cx="7392041" cy="916925"/>
+              <a:off x="817517" y="4466876"/>
+              <a:ext cx="7392041" cy="874527"/>
             </a:xfrm>
             <a:custGeom>
               <a:avLst/>
               <a:pathLst>
-                <a:path w="7392041" h="916925">
+                <a:path w="7392041" h="874527">
                   <a:moveTo>
-                    <a:pt x="7392041" y="916925"/>
+                    <a:pt x="7392041" y="874527"/>
                   </a:moveTo>
                   <a:lnTo>
-                    <a:pt x="7314797" y="911100"/>
-                  </a:lnTo>
-                  <a:lnTo>
-                    <a:pt x="7237554" y="905126"/>
-                  </a:lnTo>
-                  <a:lnTo>
-                    <a:pt x="7160310" y="898997"/>
-                  </a:lnTo>
-                  <a:lnTo>
-                    <a:pt x="7083066" y="892711"/>
-                  </a:lnTo>
-                  <a:lnTo>
-                    <a:pt x="7005823" y="886264"/>
-                  </a:lnTo>
-                  <a:lnTo>
-                    <a:pt x="6928579" y="879650"/>
-                  </a:lnTo>
-                  <a:lnTo>
-                    <a:pt x="6851336" y="872866"/>
-                  </a:lnTo>
-                  <a:lnTo>
-                    <a:pt x="6774092" y="865907"/>
-                  </a:lnTo>
-                  <a:lnTo>
-                    <a:pt x="6696849" y="858770"/>
-                  </a:lnTo>
-                  <a:lnTo>
-                    <a:pt x="6619605" y="851448"/>
-                  </a:lnTo>
-                  <a:lnTo>
-                    <a:pt x="6542361" y="843939"/>
-                  </a:lnTo>
-                  <a:lnTo>
-                    <a:pt x="6465118" y="836235"/>
-                  </a:lnTo>
-                  <a:lnTo>
-                    <a:pt x="6387874" y="828334"/>
-                  </a:lnTo>
-                  <a:lnTo>
-                    <a:pt x="6310631" y="820229"/>
-                  </a:lnTo>
-                  <a:lnTo>
-                    <a:pt x="6233387" y="811916"/>
-                  </a:lnTo>
-                  <a:lnTo>
-                    <a:pt x="6156144" y="803389"/>
-                  </a:lnTo>
-                  <a:lnTo>
-                    <a:pt x="6078900" y="794642"/>
-                  </a:lnTo>
-                  <a:lnTo>
-                    <a:pt x="6001656" y="785670"/>
-                  </a:lnTo>
-                  <a:lnTo>
-                    <a:pt x="5924413" y="776467"/>
-                  </a:lnTo>
-                  <a:lnTo>
-                    <a:pt x="5847169" y="767028"/>
-                  </a:lnTo>
-                  <a:lnTo>
-                    <a:pt x="5769926" y="757345"/>
-                  </a:lnTo>
-                  <a:lnTo>
-                    <a:pt x="5692682" y="747414"/>
-                  </a:lnTo>
-                  <a:lnTo>
-                    <a:pt x="5615439" y="737226"/>
-                  </a:lnTo>
-                  <a:lnTo>
-                    <a:pt x="5538195" y="726777"/>
-                  </a:lnTo>
-                  <a:lnTo>
-                    <a:pt x="5460951" y="716058"/>
-                  </a:lnTo>
-                  <a:lnTo>
-                    <a:pt x="5383708" y="705064"/>
-                  </a:lnTo>
-                  <a:lnTo>
-                    <a:pt x="5306464" y="693786"/>
-                  </a:lnTo>
-                  <a:lnTo>
-                    <a:pt x="5229221" y="682219"/>
-                  </a:lnTo>
-                  <a:lnTo>
-                    <a:pt x="5151977" y="670353"/>
-                  </a:lnTo>
-                  <a:lnTo>
-                    <a:pt x="5074734" y="658183"/>
-                  </a:lnTo>
-                  <a:lnTo>
-                    <a:pt x="4997490" y="645699"/>
-                  </a:lnTo>
-                  <a:lnTo>
-                    <a:pt x="4920246" y="632894"/>
-                  </a:lnTo>
-                  <a:lnTo>
-                    <a:pt x="4843003" y="619759"/>
-                  </a:lnTo>
-                  <a:lnTo>
-                    <a:pt x="4765759" y="606286"/>
-                  </a:lnTo>
-                  <a:lnTo>
-                    <a:pt x="4688516" y="592466"/>
-                  </a:lnTo>
-                  <a:lnTo>
-                    <a:pt x="4611272" y="578291"/>
-                  </a:lnTo>
-                  <a:lnTo>
-                    <a:pt x="4534029" y="563751"/>
-                  </a:lnTo>
-                  <a:lnTo>
-                    <a:pt x="4456785" y="548836"/>
-                  </a:lnTo>
-                  <a:lnTo>
-                    <a:pt x="4379541" y="533538"/>
-                  </a:lnTo>
-                  <a:lnTo>
-                    <a:pt x="4302298" y="517846"/>
-                  </a:lnTo>
-                  <a:lnTo>
-                    <a:pt x="4225054" y="501750"/>
-                  </a:lnTo>
-                  <a:lnTo>
-                    <a:pt x="4147811" y="485240"/>
-                  </a:lnTo>
-                  <a:lnTo>
-                    <a:pt x="4070567" y="468305"/>
-                  </a:lnTo>
-                  <a:lnTo>
-                    <a:pt x="3993324" y="450935"/>
-                  </a:lnTo>
-                  <a:lnTo>
-                    <a:pt x="3916080" y="433117"/>
-                  </a:lnTo>
-                  <a:lnTo>
-                    <a:pt x="3838836" y="414840"/>
-                  </a:lnTo>
-                  <a:lnTo>
-                    <a:pt x="3761593" y="396093"/>
-                  </a:lnTo>
-                  <a:lnTo>
-                    <a:pt x="3684349" y="376864"/>
-                  </a:lnTo>
-                  <a:lnTo>
-                    <a:pt x="3607106" y="357139"/>
-                  </a:lnTo>
-                  <a:lnTo>
-                    <a:pt x="3529862" y="336907"/>
-                  </a:lnTo>
-                  <a:lnTo>
-                    <a:pt x="3452619" y="316155"/>
-                  </a:lnTo>
-                  <a:lnTo>
-                    <a:pt x="3375375" y="294868"/>
-                  </a:lnTo>
-                  <a:lnTo>
-                    <a:pt x="3298131" y="273426"/>
-                  </a:lnTo>
-                  <a:lnTo>
-                    <a:pt x="3220888" y="267840"/>
-                  </a:lnTo>
-                  <a:lnTo>
-                    <a:pt x="3143644" y="262218"/>
-                  </a:lnTo>
-                  <a:lnTo>
-                    <a:pt x="3066401" y="256560"/>
-                  </a:lnTo>
-                  <a:lnTo>
-                    <a:pt x="2989157" y="250865"/>
-                  </a:lnTo>
-                  <a:lnTo>
-                    <a:pt x="2911914" y="245134"/>
-                  </a:lnTo>
-                  <a:lnTo>
-                    <a:pt x="2834670" y="239367"/>
-                  </a:lnTo>
-                  <a:lnTo>
-                    <a:pt x="2757426" y="233562"/>
-                  </a:lnTo>
-                  <a:lnTo>
-                    <a:pt x="2680183" y="227719"/>
-                  </a:lnTo>
-                  <a:lnTo>
-                    <a:pt x="2602939" y="221840"/>
-                  </a:lnTo>
-                  <a:lnTo>
-                    <a:pt x="2525696" y="215922"/>
-                  </a:lnTo>
-                  <a:lnTo>
-                    <a:pt x="2448452" y="209967"/>
-                  </a:lnTo>
-                  <a:lnTo>
-                    <a:pt x="2371209" y="203973"/>
-                  </a:lnTo>
-                  <a:lnTo>
-                    <a:pt x="2293965" y="197941"/>
-                  </a:lnTo>
-                  <a:lnTo>
-                    <a:pt x="2216721" y="191870"/>
-                  </a:lnTo>
-                  <a:lnTo>
-                    <a:pt x="2139478" y="185760"/>
-                  </a:lnTo>
-                  <a:lnTo>
-                    <a:pt x="2062234" y="179611"/>
-                  </a:lnTo>
-                  <a:lnTo>
-                    <a:pt x="1984991" y="173422"/>
-                  </a:lnTo>
-                  <a:lnTo>
-                    <a:pt x="1907747" y="167194"/>
-                  </a:lnTo>
-                  <a:lnTo>
-                    <a:pt x="1830504" y="160926"/>
-                  </a:lnTo>
-                  <a:lnTo>
-                    <a:pt x="1753260" y="154617"/>
-                  </a:lnTo>
-                  <a:lnTo>
-                    <a:pt x="1676016" y="148268"/>
-                  </a:lnTo>
-                  <a:lnTo>
-                    <a:pt x="1598773" y="141878"/>
-                  </a:lnTo>
-                  <a:lnTo>
-                    <a:pt x="1521529" y="135447"/>
-                  </a:lnTo>
-                  <a:lnTo>
-                    <a:pt x="1444286" y="128975"/>
-                  </a:lnTo>
-                  <a:lnTo>
-                    <a:pt x="1367042" y="122461"/>
-                  </a:lnTo>
-                  <a:lnTo>
-                    <a:pt x="1289799" y="115905"/>
-                  </a:lnTo>
-                  <a:lnTo>
-                    <a:pt x="1212555" y="109307"/>
-                  </a:lnTo>
-                  <a:lnTo>
-                    <a:pt x="1135311" y="102667"/>
-                  </a:lnTo>
-                  <a:lnTo>
-                    <a:pt x="1058068" y="95984"/>
-                  </a:lnTo>
-                  <a:lnTo>
-                    <a:pt x="980824" y="89259"/>
-                  </a:lnTo>
-                  <a:lnTo>
-                    <a:pt x="903581" y="82490"/>
-                  </a:lnTo>
-                  <a:lnTo>
-                    <a:pt x="826337" y="75677"/>
-                  </a:lnTo>
-                  <a:lnTo>
-                    <a:pt x="749094" y="68821"/>
-                  </a:lnTo>
-                  <a:lnTo>
-                    <a:pt x="671850" y="61921"/>
-                  </a:lnTo>
-                  <a:lnTo>
-                    <a:pt x="594606" y="54976"/>
-                  </a:lnTo>
-                  <a:lnTo>
-                    <a:pt x="517363" y="47987"/>
-                  </a:lnTo>
-                  <a:lnTo>
-                    <a:pt x="440119" y="40953"/>
-                  </a:lnTo>
-                  <a:lnTo>
-                    <a:pt x="362876" y="33874"/>
-                  </a:lnTo>
-                  <a:lnTo>
-                    <a:pt x="285632" y="26750"/>
-                  </a:lnTo>
-                  <a:lnTo>
-                    <a:pt x="208389" y="19579"/>
-                  </a:lnTo>
-                  <a:lnTo>
-                    <a:pt x="131145" y="12363"/>
-                  </a:lnTo>
-                  <a:lnTo>
-                    <a:pt x="53901" y="5100"/>
+                    <a:pt x="7314797" y="868971"/>
+                  </a:lnTo>
+                  <a:lnTo>
+                    <a:pt x="7237554" y="863273"/>
+                  </a:lnTo>
+                  <a:lnTo>
+                    <a:pt x="7160310" y="857428"/>
+                  </a:lnTo>
+                  <a:lnTo>
+                    <a:pt x="7083066" y="851433"/>
+                  </a:lnTo>
+                  <a:lnTo>
+                    <a:pt x="7005823" y="845283"/>
+                  </a:lnTo>
+                  <a:lnTo>
+                    <a:pt x="6928579" y="838975"/>
+                  </a:lnTo>
+                  <a:lnTo>
+                    <a:pt x="6851336" y="832505"/>
+                  </a:lnTo>
+                  <a:lnTo>
+                    <a:pt x="6774092" y="825868"/>
+                  </a:lnTo>
+                  <a:lnTo>
+                    <a:pt x="6696849" y="819060"/>
+                  </a:lnTo>
+                  <a:lnTo>
+                    <a:pt x="6619605" y="812078"/>
+                  </a:lnTo>
+                  <a:lnTo>
+                    <a:pt x="6542361" y="804915"/>
+                  </a:lnTo>
+                  <a:lnTo>
+                    <a:pt x="6465118" y="797568"/>
+                  </a:lnTo>
+                  <a:lnTo>
+                    <a:pt x="6387874" y="790032"/>
+                  </a:lnTo>
+                  <a:lnTo>
+                    <a:pt x="6310631" y="782302"/>
+                  </a:lnTo>
+                  <a:lnTo>
+                    <a:pt x="6233387" y="774373"/>
+                  </a:lnTo>
+                  <a:lnTo>
+                    <a:pt x="6156144" y="766240"/>
+                  </a:lnTo>
+                  <a:lnTo>
+                    <a:pt x="6078900" y="757898"/>
+                  </a:lnTo>
+                  <a:lnTo>
+                    <a:pt x="6001656" y="749341"/>
+                  </a:lnTo>
+                  <a:lnTo>
+                    <a:pt x="5924413" y="740564"/>
+                  </a:lnTo>
+                  <a:lnTo>
+                    <a:pt x="5847169" y="731561"/>
+                  </a:lnTo>
+                  <a:lnTo>
+                    <a:pt x="5769926" y="722326"/>
+                  </a:lnTo>
+                  <a:lnTo>
+                    <a:pt x="5692682" y="712853"/>
+                  </a:lnTo>
+                  <a:lnTo>
+                    <a:pt x="5615439" y="703137"/>
+                  </a:lnTo>
+                  <a:lnTo>
+                    <a:pt x="5538195" y="693171"/>
+                  </a:lnTo>
+                  <a:lnTo>
+                    <a:pt x="5460951" y="682948"/>
+                  </a:lnTo>
+                  <a:lnTo>
+                    <a:pt x="5383708" y="672462"/>
+                  </a:lnTo>
+                  <a:lnTo>
+                    <a:pt x="5306464" y="661706"/>
+                  </a:lnTo>
+                  <a:lnTo>
+                    <a:pt x="5229221" y="650673"/>
+                  </a:lnTo>
+                  <a:lnTo>
+                    <a:pt x="5151977" y="639357"/>
+                  </a:lnTo>
+                  <a:lnTo>
+                    <a:pt x="5074734" y="627749"/>
+                  </a:lnTo>
+                  <a:lnTo>
+                    <a:pt x="4997490" y="615842"/>
+                  </a:lnTo>
+                  <a:lnTo>
+                    <a:pt x="4920246" y="603629"/>
+                  </a:lnTo>
+                  <a:lnTo>
+                    <a:pt x="4843003" y="591101"/>
+                  </a:lnTo>
+                  <a:lnTo>
+                    <a:pt x="4765759" y="578251"/>
+                  </a:lnTo>
+                  <a:lnTo>
+                    <a:pt x="4688516" y="565071"/>
+                  </a:lnTo>
+                  <a:lnTo>
+                    <a:pt x="4611272" y="551551"/>
+                  </a:lnTo>
+                  <a:lnTo>
+                    <a:pt x="4534029" y="537683"/>
+                  </a:lnTo>
+                  <a:lnTo>
+                    <a:pt x="4456785" y="523458"/>
+                  </a:lnTo>
+                  <a:lnTo>
+                    <a:pt x="4379541" y="508868"/>
+                  </a:lnTo>
+                  <a:lnTo>
+                    <a:pt x="4302298" y="493901"/>
+                  </a:lnTo>
+                  <a:lnTo>
+                    <a:pt x="4225054" y="478550"/>
+                  </a:lnTo>
+                  <a:lnTo>
+                    <a:pt x="4147811" y="462803"/>
+                  </a:lnTo>
+                  <a:lnTo>
+                    <a:pt x="4070567" y="446651"/>
+                  </a:lnTo>
+                  <a:lnTo>
+                    <a:pt x="3993324" y="430083"/>
+                  </a:lnTo>
+                  <a:lnTo>
+                    <a:pt x="3916080" y="413089"/>
+                  </a:lnTo>
+                  <a:lnTo>
+                    <a:pt x="3838836" y="395658"/>
+                  </a:lnTo>
+                  <a:lnTo>
+                    <a:pt x="3761593" y="377778"/>
+                  </a:lnTo>
+                  <a:lnTo>
+                    <a:pt x="3684349" y="359438"/>
+                  </a:lnTo>
+                  <a:lnTo>
+                    <a:pt x="3607106" y="340625"/>
+                  </a:lnTo>
+                  <a:lnTo>
+                    <a:pt x="3529862" y="321329"/>
+                  </a:lnTo>
+                  <a:lnTo>
+                    <a:pt x="3452619" y="301536"/>
+                  </a:lnTo>
+                  <a:lnTo>
+                    <a:pt x="3375375" y="281233"/>
+                  </a:lnTo>
+                  <a:lnTo>
+                    <a:pt x="3298131" y="260783"/>
+                  </a:lnTo>
+                  <a:lnTo>
+                    <a:pt x="3220888" y="255455"/>
+                  </a:lnTo>
+                  <a:lnTo>
+                    <a:pt x="3143644" y="250093"/>
+                  </a:lnTo>
+                  <a:lnTo>
+                    <a:pt x="3066401" y="244697"/>
+                  </a:lnTo>
+                  <a:lnTo>
+                    <a:pt x="2989157" y="239265"/>
+                  </a:lnTo>
+                  <a:lnTo>
+                    <a:pt x="2911914" y="233799"/>
+                  </a:lnTo>
+                  <a:lnTo>
+                    <a:pt x="2834670" y="228298"/>
+                  </a:lnTo>
+                  <a:lnTo>
+                    <a:pt x="2757426" y="222762"/>
+                  </a:lnTo>
+                  <a:lnTo>
+                    <a:pt x="2680183" y="217190"/>
+                  </a:lnTo>
+                  <a:lnTo>
+                    <a:pt x="2602939" y="211582"/>
+                  </a:lnTo>
+                  <a:lnTo>
+                    <a:pt x="2525696" y="205938"/>
+                  </a:lnTo>
+                  <a:lnTo>
+                    <a:pt x="2448452" y="200258"/>
+                  </a:lnTo>
+                  <a:lnTo>
+                    <a:pt x="2371209" y="194542"/>
+                  </a:lnTo>
+                  <a:lnTo>
+                    <a:pt x="2293965" y="188788"/>
+                  </a:lnTo>
+                  <a:lnTo>
+                    <a:pt x="2216721" y="182998"/>
+                  </a:lnTo>
+                  <a:lnTo>
+                    <a:pt x="2139478" y="177171"/>
+                  </a:lnTo>
+                  <a:lnTo>
+                    <a:pt x="2062234" y="171306"/>
+                  </a:lnTo>
+                  <a:lnTo>
+                    <a:pt x="1984991" y="165403"/>
+                  </a:lnTo>
+                  <a:lnTo>
+                    <a:pt x="1907747" y="159463"/>
+                  </a:lnTo>
+                  <a:lnTo>
+                    <a:pt x="1830504" y="153484"/>
+                  </a:lnTo>
+                  <a:lnTo>
+                    <a:pt x="1753260" y="147467"/>
+                  </a:lnTo>
+                  <a:lnTo>
+                    <a:pt x="1676016" y="141412"/>
+                  </a:lnTo>
+                  <a:lnTo>
+                    <a:pt x="1598773" y="135317"/>
+                  </a:lnTo>
+                  <a:lnTo>
+                    <a:pt x="1521529" y="129184"/>
+                  </a:lnTo>
+                  <a:lnTo>
+                    <a:pt x="1444286" y="123011"/>
+                  </a:lnTo>
+                  <a:lnTo>
+                    <a:pt x="1367042" y="116798"/>
+                  </a:lnTo>
+                  <a:lnTo>
+                    <a:pt x="1289799" y="110546"/>
+                  </a:lnTo>
+                  <a:lnTo>
+                    <a:pt x="1212555" y="104253"/>
+                  </a:lnTo>
+                  <a:lnTo>
+                    <a:pt x="1135311" y="97920"/>
+                  </a:lnTo>
+                  <a:lnTo>
+                    <a:pt x="1058068" y="91546"/>
+                  </a:lnTo>
+                  <a:lnTo>
+                    <a:pt x="980824" y="85131"/>
+                  </a:lnTo>
+                  <a:lnTo>
+                    <a:pt x="903581" y="78675"/>
+                  </a:lnTo>
+                  <a:lnTo>
+                    <a:pt x="826337" y="72178"/>
+                  </a:lnTo>
+                  <a:lnTo>
+                    <a:pt x="749094" y="65639"/>
+                  </a:lnTo>
+                  <a:lnTo>
+                    <a:pt x="671850" y="59058"/>
+                  </a:lnTo>
+                  <a:lnTo>
+                    <a:pt x="594606" y="52434"/>
+                  </a:lnTo>
+                  <a:lnTo>
+                    <a:pt x="517363" y="45768"/>
+                  </a:lnTo>
+                  <a:lnTo>
+                    <a:pt x="440119" y="39060"/>
+                  </a:lnTo>
+                  <a:lnTo>
+                    <a:pt x="362876" y="32308"/>
+                  </a:lnTo>
+                  <a:lnTo>
+                    <a:pt x="285632" y="25513"/>
+                  </a:lnTo>
+                  <a:lnTo>
+                    <a:pt x="208389" y="18674"/>
+                  </a:lnTo>
+                  <a:lnTo>
+                    <a:pt x="131145" y="11791"/>
+                  </a:lnTo>
+                  <a:lnTo>
+                    <a:pt x="53901" y="4864"/>
                   </a:lnTo>
                   <a:lnTo>
                     <a:pt x="0" y="0"/>
@@ -4247,303 +4247,303 @@
           </p:nvSpPr>
           <p:spPr>
             <a:xfrm>
-              <a:off x="817517" y="3833282"/>
-              <a:ext cx="7392041" cy="1341479"/>
+              <a:off x="817517" y="3920669"/>
+              <a:ext cx="7392041" cy="1279449"/>
             </a:xfrm>
             <a:custGeom>
               <a:avLst/>
               <a:pathLst>
-                <a:path w="7392041" h="1341479">
+                <a:path w="7392041" h="1279449">
                   <a:moveTo>
                     <a:pt x="0" y="0"/>
                   </a:moveTo>
                   <a:lnTo>
-                    <a:pt x="53901" y="18986"/>
-                  </a:lnTo>
-                  <a:lnTo>
-                    <a:pt x="131145" y="45765"/>
-                  </a:lnTo>
-                  <a:lnTo>
-                    <a:pt x="208389" y="72122"/>
-                  </a:lnTo>
-                  <a:lnTo>
-                    <a:pt x="285632" y="98062"/>
-                  </a:lnTo>
-                  <a:lnTo>
-                    <a:pt x="362876" y="123594"/>
-                  </a:lnTo>
-                  <a:lnTo>
-                    <a:pt x="440119" y="148722"/>
-                  </a:lnTo>
-                  <a:lnTo>
-                    <a:pt x="517363" y="173454"/>
-                  </a:lnTo>
-                  <a:lnTo>
-                    <a:pt x="594606" y="197795"/>
-                  </a:lnTo>
-                  <a:lnTo>
-                    <a:pt x="671850" y="221752"/>
-                  </a:lnTo>
-                  <a:lnTo>
-                    <a:pt x="749094" y="245332"/>
-                  </a:lnTo>
-                  <a:lnTo>
-                    <a:pt x="826337" y="268539"/>
-                  </a:lnTo>
-                  <a:lnTo>
-                    <a:pt x="903581" y="291380"/>
-                  </a:lnTo>
-                  <a:lnTo>
-                    <a:pt x="980824" y="313860"/>
-                  </a:lnTo>
-                  <a:lnTo>
-                    <a:pt x="1058068" y="335986"/>
-                  </a:lnTo>
-                  <a:lnTo>
-                    <a:pt x="1135311" y="357763"/>
-                  </a:lnTo>
-                  <a:lnTo>
-                    <a:pt x="1212555" y="379196"/>
-                  </a:lnTo>
-                  <a:lnTo>
-                    <a:pt x="1289799" y="400290"/>
-                  </a:lnTo>
-                  <a:lnTo>
-                    <a:pt x="1367042" y="421052"/>
-                  </a:lnTo>
-                  <a:lnTo>
-                    <a:pt x="1444286" y="441486"/>
-                  </a:lnTo>
-                  <a:lnTo>
-                    <a:pt x="1521529" y="461598"/>
-                  </a:lnTo>
-                  <a:lnTo>
-                    <a:pt x="1598773" y="481392"/>
-                  </a:lnTo>
-                  <a:lnTo>
-                    <a:pt x="1676016" y="500874"/>
-                  </a:lnTo>
-                  <a:lnTo>
-                    <a:pt x="1753260" y="520049"/>
-                  </a:lnTo>
-                  <a:lnTo>
-                    <a:pt x="1830504" y="538921"/>
-                  </a:lnTo>
-                  <a:lnTo>
-                    <a:pt x="1907747" y="557495"/>
-                  </a:lnTo>
-                  <a:lnTo>
-                    <a:pt x="1984991" y="575776"/>
-                  </a:lnTo>
-                  <a:lnTo>
-                    <a:pt x="2062234" y="593768"/>
-                  </a:lnTo>
-                  <a:lnTo>
-                    <a:pt x="2139478" y="611477"/>
-                  </a:lnTo>
-                  <a:lnTo>
-                    <a:pt x="2216721" y="628906"/>
-                  </a:lnTo>
-                  <a:lnTo>
-                    <a:pt x="2293965" y="646060"/>
-                  </a:lnTo>
-                  <a:lnTo>
-                    <a:pt x="2371209" y="662943"/>
-                  </a:lnTo>
-                  <a:lnTo>
-                    <a:pt x="2448452" y="679560"/>
-                  </a:lnTo>
-                  <a:lnTo>
-                    <a:pt x="2525696" y="695915"/>
-                  </a:lnTo>
-                  <a:lnTo>
-                    <a:pt x="2602939" y="712012"/>
-                  </a:lnTo>
-                  <a:lnTo>
-                    <a:pt x="2680183" y="727854"/>
-                  </a:lnTo>
-                  <a:lnTo>
-                    <a:pt x="2757426" y="743447"/>
-                  </a:lnTo>
-                  <a:lnTo>
-                    <a:pt x="2834670" y="758793"/>
-                  </a:lnTo>
-                  <a:lnTo>
-                    <a:pt x="2911914" y="773898"/>
-                  </a:lnTo>
-                  <a:lnTo>
-                    <a:pt x="2989157" y="788764"/>
-                  </a:lnTo>
-                  <a:lnTo>
-                    <a:pt x="3066401" y="803395"/>
-                  </a:lnTo>
-                  <a:lnTo>
-                    <a:pt x="3143644" y="817795"/>
-                  </a:lnTo>
-                  <a:lnTo>
-                    <a:pt x="3220888" y="831969"/>
-                  </a:lnTo>
-                  <a:lnTo>
-                    <a:pt x="3298131" y="845918"/>
-                  </a:lnTo>
-                  <a:lnTo>
-                    <a:pt x="3375375" y="859648"/>
-                  </a:lnTo>
-                  <a:lnTo>
-                    <a:pt x="3452619" y="873160"/>
-                  </a:lnTo>
-                  <a:lnTo>
-                    <a:pt x="3529862" y="886460"/>
-                  </a:lnTo>
-                  <a:lnTo>
-                    <a:pt x="3607106" y="899550"/>
-                  </a:lnTo>
-                  <a:lnTo>
-                    <a:pt x="3684349" y="912433"/>
-                  </a:lnTo>
-                  <a:lnTo>
-                    <a:pt x="3761593" y="925112"/>
-                  </a:lnTo>
-                  <a:lnTo>
-                    <a:pt x="3838836" y="937592"/>
-                  </a:lnTo>
-                  <a:lnTo>
-                    <a:pt x="3916080" y="949875"/>
-                  </a:lnTo>
-                  <a:lnTo>
-                    <a:pt x="3993324" y="961964"/>
-                  </a:lnTo>
-                  <a:lnTo>
-                    <a:pt x="4070567" y="973862"/>
-                  </a:lnTo>
-                  <a:lnTo>
-                    <a:pt x="4147811" y="985572"/>
-                  </a:lnTo>
-                  <a:lnTo>
-                    <a:pt x="4225054" y="997098"/>
-                  </a:lnTo>
-                  <a:lnTo>
-                    <a:pt x="4302298" y="1008442"/>
-                  </a:lnTo>
-                  <a:lnTo>
-                    <a:pt x="4379541" y="1019606"/>
-                  </a:lnTo>
-                  <a:lnTo>
-                    <a:pt x="4456785" y="1030595"/>
-                  </a:lnTo>
-                  <a:lnTo>
-                    <a:pt x="4534029" y="1041410"/>
-                  </a:lnTo>
-                  <a:lnTo>
-                    <a:pt x="4611272" y="1052054"/>
-                  </a:lnTo>
-                  <a:lnTo>
-                    <a:pt x="4688516" y="1062531"/>
-                  </a:lnTo>
-                  <a:lnTo>
-                    <a:pt x="4765759" y="1072842"/>
-                  </a:lnTo>
-                  <a:lnTo>
-                    <a:pt x="4843003" y="1082990"/>
-                  </a:lnTo>
-                  <a:lnTo>
-                    <a:pt x="4920246" y="1092978"/>
-                  </a:lnTo>
-                  <a:lnTo>
-                    <a:pt x="4997490" y="1102809"/>
-                  </a:lnTo>
-                  <a:lnTo>
-                    <a:pt x="5074734" y="1112484"/>
-                  </a:lnTo>
-                  <a:lnTo>
-                    <a:pt x="5151977" y="1122007"/>
-                  </a:lnTo>
-                  <a:lnTo>
-                    <a:pt x="5229221" y="1131380"/>
-                  </a:lnTo>
-                  <a:lnTo>
-                    <a:pt x="5306464" y="1140604"/>
-                  </a:lnTo>
-                  <a:lnTo>
-                    <a:pt x="5383708" y="1149683"/>
-                  </a:lnTo>
-                  <a:lnTo>
-                    <a:pt x="5460951" y="1158619"/>
-                  </a:lnTo>
-                  <a:lnTo>
-                    <a:pt x="5538195" y="1167414"/>
-                  </a:lnTo>
-                  <a:lnTo>
-                    <a:pt x="5615439" y="1176070"/>
-                  </a:lnTo>
-                  <a:lnTo>
-                    <a:pt x="5692682" y="1184589"/>
-                  </a:lnTo>
-                  <a:lnTo>
-                    <a:pt x="5769926" y="1192974"/>
-                  </a:lnTo>
-                  <a:lnTo>
-                    <a:pt x="5847169" y="1201227"/>
-                  </a:lnTo>
-                  <a:lnTo>
-                    <a:pt x="5924413" y="1209349"/>
-                  </a:lnTo>
-                  <a:lnTo>
-                    <a:pt x="6001656" y="1217343"/>
-                  </a:lnTo>
-                  <a:lnTo>
-                    <a:pt x="6078900" y="1225211"/>
-                  </a:lnTo>
-                  <a:lnTo>
-                    <a:pt x="6156144" y="1232955"/>
-                  </a:lnTo>
-                  <a:lnTo>
-                    <a:pt x="6233387" y="1240577"/>
-                  </a:lnTo>
-                  <a:lnTo>
-                    <a:pt x="6310631" y="1248078"/>
-                  </a:lnTo>
-                  <a:lnTo>
-                    <a:pt x="6387874" y="1255461"/>
-                  </a:lnTo>
-                  <a:lnTo>
-                    <a:pt x="6465118" y="1262728"/>
-                  </a:lnTo>
-                  <a:lnTo>
-                    <a:pt x="6542361" y="1269879"/>
-                  </a:lnTo>
-                  <a:lnTo>
-                    <a:pt x="6619605" y="1276918"/>
-                  </a:lnTo>
-                  <a:lnTo>
-                    <a:pt x="6696849" y="1283846"/>
-                  </a:lnTo>
-                  <a:lnTo>
-                    <a:pt x="6774092" y="1290665"/>
-                  </a:lnTo>
-                  <a:lnTo>
-                    <a:pt x="6851336" y="1297376"/>
-                  </a:lnTo>
-                  <a:lnTo>
-                    <a:pt x="6928579" y="1303981"/>
-                  </a:lnTo>
-                  <a:lnTo>
-                    <a:pt x="7005823" y="1310482"/>
-                  </a:lnTo>
-                  <a:lnTo>
-                    <a:pt x="7083066" y="1316880"/>
-                  </a:lnTo>
-                  <a:lnTo>
-                    <a:pt x="7160310" y="1323177"/>
-                  </a:lnTo>
-                  <a:lnTo>
-                    <a:pt x="7237554" y="1329375"/>
-                  </a:lnTo>
-                  <a:lnTo>
-                    <a:pt x="7314797" y="1335475"/>
-                  </a:lnTo>
-                  <a:lnTo>
-                    <a:pt x="7392041" y="1341479"/>
+                    <a:pt x="53901" y="18108"/>
+                  </a:lnTo>
+                  <a:lnTo>
+                    <a:pt x="131145" y="43649"/>
+                  </a:lnTo>
+                  <a:lnTo>
+                    <a:pt x="208389" y="68787"/>
+                  </a:lnTo>
+                  <a:lnTo>
+                    <a:pt x="285632" y="93528"/>
+                  </a:lnTo>
+                  <a:lnTo>
+                    <a:pt x="362876" y="117879"/>
+                  </a:lnTo>
+                  <a:lnTo>
+                    <a:pt x="440119" y="141845"/>
+                  </a:lnTo>
+                  <a:lnTo>
+                    <a:pt x="517363" y="165433"/>
+                  </a:lnTo>
+                  <a:lnTo>
+                    <a:pt x="594606" y="188649"/>
+                  </a:lnTo>
+                  <a:lnTo>
+                    <a:pt x="671850" y="211499"/>
+                  </a:lnTo>
+                  <a:lnTo>
+                    <a:pt x="749094" y="233988"/>
+                  </a:lnTo>
+                  <a:lnTo>
+                    <a:pt x="826337" y="256122"/>
+                  </a:lnTo>
+                  <a:lnTo>
+                    <a:pt x="903581" y="277907"/>
+                  </a:lnTo>
+                  <a:lnTo>
+                    <a:pt x="980824" y="299348"/>
+                  </a:lnTo>
+                  <a:lnTo>
+                    <a:pt x="1058068" y="320450"/>
+                  </a:lnTo>
+                  <a:lnTo>
+                    <a:pt x="1135311" y="341220"/>
+                  </a:lnTo>
+                  <a:lnTo>
+                    <a:pt x="1212555" y="361662"/>
+                  </a:lnTo>
+                  <a:lnTo>
+                    <a:pt x="1289799" y="381781"/>
+                  </a:lnTo>
+                  <a:lnTo>
+                    <a:pt x="1367042" y="401583"/>
+                  </a:lnTo>
+                  <a:lnTo>
+                    <a:pt x="1444286" y="421072"/>
+                  </a:lnTo>
+                  <a:lnTo>
+                    <a:pt x="1521529" y="440254"/>
+                  </a:lnTo>
+                  <a:lnTo>
+                    <a:pt x="1598773" y="459133"/>
+                  </a:lnTo>
+                  <a:lnTo>
+                    <a:pt x="1676016" y="477714"/>
+                  </a:lnTo>
+                  <a:lnTo>
+                    <a:pt x="1753260" y="496002"/>
+                  </a:lnTo>
+                  <a:lnTo>
+                    <a:pt x="1830504" y="514001"/>
+                  </a:lnTo>
+                  <a:lnTo>
+                    <a:pt x="1907747" y="531716"/>
+                  </a:lnTo>
+                  <a:lnTo>
+                    <a:pt x="1984991" y="549152"/>
+                  </a:lnTo>
+                  <a:lnTo>
+                    <a:pt x="2062234" y="566313"/>
+                  </a:lnTo>
+                  <a:lnTo>
+                    <a:pt x="2139478" y="583202"/>
+                  </a:lnTo>
+                  <a:lnTo>
+                    <a:pt x="2216721" y="599826"/>
+                  </a:lnTo>
+                  <a:lnTo>
+                    <a:pt x="2293965" y="616186"/>
+                  </a:lnTo>
+                  <a:lnTo>
+                    <a:pt x="2371209" y="632289"/>
+                  </a:lnTo>
+                  <a:lnTo>
+                    <a:pt x="2448452" y="648138"/>
+                  </a:lnTo>
+                  <a:lnTo>
+                    <a:pt x="2525696" y="663736"/>
+                  </a:lnTo>
+                  <a:lnTo>
+                    <a:pt x="2602939" y="679088"/>
+                  </a:lnTo>
+                  <a:lnTo>
+                    <a:pt x="2680183" y="694198"/>
+                  </a:lnTo>
+                  <a:lnTo>
+                    <a:pt x="2757426" y="709070"/>
+                  </a:lnTo>
+                  <a:lnTo>
+                    <a:pt x="2834670" y="723707"/>
+                  </a:lnTo>
+                  <a:lnTo>
+                    <a:pt x="2911914" y="738113"/>
+                  </a:lnTo>
+                  <a:lnTo>
+                    <a:pt x="2989157" y="752291"/>
+                  </a:lnTo>
+                  <a:lnTo>
+                    <a:pt x="3066401" y="766246"/>
+                  </a:lnTo>
+                  <a:lnTo>
+                    <a:pt x="3143644" y="779981"/>
+                  </a:lnTo>
+                  <a:lnTo>
+                    <a:pt x="3220888" y="793499"/>
+                  </a:lnTo>
+                  <a:lnTo>
+                    <a:pt x="3298131" y="806803"/>
+                  </a:lnTo>
+                  <a:lnTo>
+                    <a:pt x="3375375" y="819898"/>
+                  </a:lnTo>
+                  <a:lnTo>
+                    <a:pt x="3452619" y="832786"/>
+                  </a:lnTo>
+                  <a:lnTo>
+                    <a:pt x="3529862" y="845470"/>
+                  </a:lnTo>
+                  <a:lnTo>
+                    <a:pt x="3607106" y="857955"/>
+                  </a:lnTo>
+                  <a:lnTo>
+                    <a:pt x="3684349" y="870242"/>
+                  </a:lnTo>
+                  <a:lnTo>
+                    <a:pt x="3761593" y="882336"/>
+                  </a:lnTo>
+                  <a:lnTo>
+                    <a:pt x="3838836" y="894238"/>
+                  </a:lnTo>
+                  <a:lnTo>
+                    <a:pt x="3916080" y="905953"/>
+                  </a:lnTo>
+                  <a:lnTo>
+                    <a:pt x="3993324" y="917483"/>
+                  </a:lnTo>
+                  <a:lnTo>
+                    <a:pt x="4070567" y="928831"/>
+                  </a:lnTo>
+                  <a:lnTo>
+                    <a:pt x="4147811" y="940000"/>
+                  </a:lnTo>
+                  <a:lnTo>
+                    <a:pt x="4225054" y="950992"/>
+                  </a:lnTo>
+                  <a:lnTo>
+                    <a:pt x="4302298" y="961812"/>
+                  </a:lnTo>
+                  <a:lnTo>
+                    <a:pt x="4379541" y="972460"/>
+                  </a:lnTo>
+                  <a:lnTo>
+                    <a:pt x="4456785" y="982940"/>
+                  </a:lnTo>
+                  <a:lnTo>
+                    <a:pt x="4534029" y="993255"/>
+                  </a:lnTo>
+                  <a:lnTo>
+                    <a:pt x="4611272" y="1003408"/>
+                  </a:lnTo>
+                  <a:lnTo>
+                    <a:pt x="4688516" y="1013400"/>
+                  </a:lnTo>
+                  <a:lnTo>
+                    <a:pt x="4765759" y="1023234"/>
+                  </a:lnTo>
+                  <a:lnTo>
+                    <a:pt x="4843003" y="1032913"/>
+                  </a:lnTo>
+                  <a:lnTo>
+                    <a:pt x="4920246" y="1042439"/>
+                  </a:lnTo>
+                  <a:lnTo>
+                    <a:pt x="4997490" y="1051815"/>
+                  </a:lnTo>
+                  <a:lnTo>
+                    <a:pt x="5074734" y="1061043"/>
+                  </a:lnTo>
+                  <a:lnTo>
+                    <a:pt x="5151977" y="1070126"/>
+                  </a:lnTo>
+                  <a:lnTo>
+                    <a:pt x="5229221" y="1079065"/>
+                  </a:lnTo>
+                  <a:lnTo>
+                    <a:pt x="5306464" y="1087863"/>
+                  </a:lnTo>
+                  <a:lnTo>
+                    <a:pt x="5383708" y="1096522"/>
+                  </a:lnTo>
+                  <a:lnTo>
+                    <a:pt x="5460951" y="1105045"/>
+                  </a:lnTo>
+                  <a:lnTo>
+                    <a:pt x="5538195" y="1113433"/>
+                  </a:lnTo>
+                  <a:lnTo>
+                    <a:pt x="5615439" y="1121689"/>
+                  </a:lnTo>
+                  <a:lnTo>
+                    <a:pt x="5692682" y="1129814"/>
+                  </a:lnTo>
+                  <a:lnTo>
+                    <a:pt x="5769926" y="1137811"/>
+                  </a:lnTo>
+                  <a:lnTo>
+                    <a:pt x="5847169" y="1145682"/>
+                  </a:lnTo>
+                  <a:lnTo>
+                    <a:pt x="5924413" y="1153429"/>
+                  </a:lnTo>
+                  <a:lnTo>
+                    <a:pt x="6001656" y="1161054"/>
+                  </a:lnTo>
+                  <a:lnTo>
+                    <a:pt x="6078900" y="1168558"/>
+                  </a:lnTo>
+                  <a:lnTo>
+                    <a:pt x="6156144" y="1175944"/>
+                  </a:lnTo>
+                  <a:lnTo>
+                    <a:pt x="6233387" y="1183213"/>
+                  </a:lnTo>
+                  <a:lnTo>
+                    <a:pt x="6310631" y="1190367"/>
+                  </a:lnTo>
+                  <a:lnTo>
+                    <a:pt x="6387874" y="1197409"/>
+                  </a:lnTo>
+                  <a:lnTo>
+                    <a:pt x="6465118" y="1204340"/>
+                  </a:lnTo>
+                  <a:lnTo>
+                    <a:pt x="6542361" y="1211161"/>
+                  </a:lnTo>
+                  <a:lnTo>
+                    <a:pt x="6619605" y="1217874"/>
+                  </a:lnTo>
+                  <a:lnTo>
+                    <a:pt x="6696849" y="1224482"/>
+                  </a:lnTo>
+                  <a:lnTo>
+                    <a:pt x="6774092" y="1230985"/>
+                  </a:lnTo>
+                  <a:lnTo>
+                    <a:pt x="6851336" y="1237386"/>
+                  </a:lnTo>
+                  <a:lnTo>
+                    <a:pt x="6928579" y="1243685"/>
+                  </a:lnTo>
+                  <a:lnTo>
+                    <a:pt x="7005823" y="1249885"/>
+                  </a:lnTo>
+                  <a:lnTo>
+                    <a:pt x="7083066" y="1255988"/>
+                  </a:lnTo>
+                  <a:lnTo>
+                    <a:pt x="7160310" y="1261994"/>
+                  </a:lnTo>
+                  <a:lnTo>
+                    <a:pt x="7237554" y="1267905"/>
+                  </a:lnTo>
+                  <a:lnTo>
+                    <a:pt x="7314797" y="1273723"/>
+                  </a:lnTo>
+                  <a:lnTo>
+                    <a:pt x="7392041" y="1279449"/>
                   </a:lnTo>
                 </a:path>
               </a:pathLst>
@@ -4572,7 +4572,7 @@
           </p:nvSpPr>
           <p:spPr>
             <a:xfrm>
-              <a:off x="817517" y="4679530"/>
+              <a:off x="817517" y="4727786"/>
               <a:ext cx="7799693" cy="0"/>
             </a:xfrm>
             <a:custGeom>
@@ -4615,15 +4615,15 @@
           </p:nvSpPr>
           <p:spPr>
             <a:xfrm>
-              <a:off x="4117484" y="1896563"/>
-              <a:ext cx="0" cy="3826579"/>
+              <a:off x="4117484" y="2073503"/>
+              <a:ext cx="0" cy="3649639"/>
             </a:xfrm>
             <a:custGeom>
               <a:avLst/>
               <a:pathLst>
-                <a:path w="0" h="3826579">
+                <a:path w="0" h="3649639">
                   <a:moveTo>
-                    <a:pt x="0" y="3826579"/>
+                    <a:pt x="0" y="3649639"/>
                   </a:moveTo>
                   <a:lnTo>
                     <a:pt x="0" y="0"/>
@@ -4658,7 +4658,7 @@
           </p:nvSpPr>
           <p:spPr>
             <a:xfrm>
-              <a:off x="692708" y="5509156"/>
+              <a:off x="692708" y="5517199"/>
               <a:ext cx="62179" cy="80101"/>
             </a:xfrm>
             <a:prstGeom prst="rect">
@@ -4704,7 +4704,7 @@
           </p:nvSpPr>
           <p:spPr>
             <a:xfrm>
-              <a:off x="692708" y="4639479"/>
+              <a:off x="692708" y="4687735"/>
               <a:ext cx="62179" cy="80101"/>
             </a:xfrm>
             <a:prstGeom prst="rect">
@@ -4750,7 +4750,7 @@
           </p:nvSpPr>
           <p:spPr>
             <a:xfrm>
-              <a:off x="692708" y="3769802"/>
+              <a:off x="692708" y="3858272"/>
               <a:ext cx="62179" cy="80101"/>
             </a:xfrm>
             <a:prstGeom prst="rect">
@@ -4796,7 +4796,7 @@
           </p:nvSpPr>
           <p:spPr>
             <a:xfrm>
-              <a:off x="692708" y="2900125"/>
+              <a:off x="692708" y="3028808"/>
               <a:ext cx="62179" cy="80101"/>
             </a:xfrm>
             <a:prstGeom prst="rect">
@@ -4842,7 +4842,7 @@
           </p:nvSpPr>
           <p:spPr>
             <a:xfrm>
-              <a:off x="692708" y="2030448"/>
+              <a:off x="692708" y="2199345"/>
               <a:ext cx="62179" cy="80101"/>
             </a:xfrm>
             <a:prstGeom prst="rect">
@@ -5118,7 +5118,7 @@
           </p:nvSpPr>
           <p:spPr>
             <a:xfrm rot="-5400000">
-              <a:off x="68446" y="3759743"/>
+              <a:off x="68446" y="3848213"/>
               <a:ext cx="1016904" cy="100218"/>
             </a:xfrm>
             <a:prstGeom prst="rect">
@@ -5159,6 +5159,52 @@
         <p:sp>
           <p:nvSpPr>
             <p:cNvPr id="38" name="tx38"/>
+            <p:cNvSpPr/>
+            <p:nvPr/>
+          </p:nvSpPr>
+          <p:spPr>
+            <a:xfrm>
+              <a:off x="817517" y="1896563"/>
+              <a:ext cx="5626211" cy="82021"/>
+            </a:xfrm>
+            <a:prstGeom prst="rect">
+              <a:avLst/>
+            </a:prstGeom>
+            <a:noFill/>
+          </p:spPr>
+          <p:txBody>
+            <a:bodyPr lIns="0" rIns="0" tIns="0" bIns="0" anchorCtr="1" anchor="ctr" wrap="none"/>
+            <a:lstStyle/>
+            <a:p>
+              <a:pPr algn="l" marL="0" marR="0" indent="0">
+                <a:lnSpc>
+                  <a:spcPts val="900"/>
+                </a:lnSpc>
+                <a:spcBef>
+                  <a:spcPts val="0"/>
+                </a:spcBef>
+                <a:spcAft>
+                  <a:spcPts val="0"/>
+                </a:spcAft>
+              </a:pPr>
+              <a:r>
+                <a:rPr sz="900">
+                  <a:solidFill>
+                    <a:srgbClr val="404040">
+                      <a:alpha val="100000"/>
+                    </a:srgbClr>
+                  </a:solidFill>
+                  <a:latin typeface="Helvetica"/>
+                  <a:cs typeface="Helvetica"/>
+                </a:rPr>
+                <a:t>subHR per 0.1 ratio decline: 1.20 (1.08-1.34)  |  per IQR decline (Δ = 0.30): 1.71 (1.24-2.37)  |  IQR: [0.84, 1.14]</a:t>
+              </a:r>
+            </a:p>
+          </p:txBody>
+        </p:sp>
+        <p:sp>
+          <p:nvSpPr>
+            <p:cNvPr id="39" name="tx39"/>
             <p:cNvSpPr/>
             <p:nvPr/>
           </p:nvSpPr>

--- a/docs/pptx/auc3/jx-auc3-linsubhr-ratio-anemia2.pptx
+++ b/docs/pptx/auc3/jx-auc3-linsubhr-ratio-anemia2.pptx
@@ -5165,7 +5165,7 @@
           <p:spPr>
             <a:xfrm>
               <a:off x="817517" y="1896563"/>
-              <a:ext cx="5626211" cy="82021"/>
+              <a:ext cx="6169365" cy="82021"/>
             </a:xfrm>
             <a:prstGeom prst="rect">
               <a:avLst/>
@@ -5197,7 +5197,7 @@
                   <a:latin typeface="Helvetica"/>
                   <a:cs typeface="Helvetica"/>
                 </a:rPr>
-                <a:t>subHR per 0.1 ratio decline: 1.20 (1.08-1.34)  |  per IQR decline (Δ = 0.30): 1.71 (1.24-2.37)  |  IQR: [0.84, 1.14]</a:t>
+                <a:t>subHR per 0.1 ratio decline: 1.20 (1.08-1.34), p = 0.001  |  per IQR decline (Δ = 0.30): 1.71 (1.24-2.37)  |  IQR: [0.84, 1.14]</a:t>
               </a:r>
             </a:p>
           </p:txBody>

--- a/docs/pptx/auc3/jx-auc3-linsubhr-ratio-anemia2.pptx
+++ b/docs/pptx/auc3/jx-auc3-linsubhr-ratio-anemia2.pptx
@@ -5165,7 +5165,7 @@
           <p:spPr>
             <a:xfrm>
               <a:off x="817517" y="1896563"/>
-              <a:ext cx="6169365" cy="82021"/>
+              <a:ext cx="6833128" cy="82021"/>
             </a:xfrm>
             <a:prstGeom prst="rect">
               <a:avLst/>
@@ -5197,7 +5197,7 @@
                   <a:latin typeface="Helvetica"/>
                   <a:cs typeface="Helvetica"/>
                 </a:rPr>
-                <a:t>subHR per 0.1 ratio decline: 1.20 (1.08-1.34), p = 0.001  |  per IQR decline (Δ = 0.30): 1.71 (1.24-2.37)  |  IQR: [0.84, 1.14]</a:t>
+                <a:t>subHR per 0.1 ratio decline: 1.20 (1.08-1.34), p_Bonf = 0.006 (n = 6)  |  per IQR decline (Δ = 0.30): 1.71 (1.24-2.37)  |  IQR: [0.84, 1.14]</a:t>
               </a:r>
             </a:p>
           </p:txBody>

--- a/docs/pptx/auc3/jx-auc3-linsubhr-ratio-anemia2.pptx
+++ b/docs/pptx/auc3/jx-auc3-linsubhr-ratio-anemia2.pptx
@@ -2443,7 +2443,7 @@
           </p:nvSpPr>
           <p:spPr>
             <a:xfrm>
-              <a:off x="1615213" y="2073503"/>
+              <a:off x="1531834" y="2073503"/>
               <a:ext cx="0" cy="3649639"/>
             </a:xfrm>
             <a:custGeom>
@@ -2486,7 +2486,7 @@
           </p:nvSpPr>
           <p:spPr>
             <a:xfrm>
-              <a:off x="3387871" y="2073503"/>
+              <a:off x="3586410" y="2073503"/>
               <a:ext cx="0" cy="3649639"/>
             </a:xfrm>
             <a:custGeom>
@@ -2529,7 +2529,7 @@
           </p:nvSpPr>
           <p:spPr>
             <a:xfrm>
-              <a:off x="5160528" y="2073503"/>
+              <a:off x="5640985" y="2073503"/>
               <a:ext cx="0" cy="3649639"/>
             </a:xfrm>
             <a:custGeom>
@@ -2572,7 +2572,7 @@
           </p:nvSpPr>
           <p:spPr>
             <a:xfrm>
-              <a:off x="6933186" y="2073503"/>
+              <a:off x="7695561" y="2073503"/>
               <a:ext cx="0" cy="3649639"/>
             </a:xfrm>
             <a:custGeom>
@@ -2830,7 +2830,7 @@
           </p:nvSpPr>
           <p:spPr>
             <a:xfrm>
-              <a:off x="2501542" y="2073503"/>
+              <a:off x="2559122" y="2073503"/>
               <a:ext cx="0" cy="3649639"/>
             </a:xfrm>
             <a:custGeom>
@@ -2873,7 +2873,7 @@
           </p:nvSpPr>
           <p:spPr>
             <a:xfrm>
-              <a:off x="4274200" y="2073503"/>
+              <a:off x="4613698" y="2073503"/>
               <a:ext cx="0" cy="3649639"/>
             </a:xfrm>
             <a:custGeom>
@@ -2916,7 +2916,7 @@
           </p:nvSpPr>
           <p:spPr>
             <a:xfrm>
-              <a:off x="6046857" y="2073503"/>
+              <a:off x="6668273" y="2073503"/>
               <a:ext cx="0" cy="3649639"/>
             </a:xfrm>
             <a:custGeom>
@@ -2953,643 +2953,618 @@
         </p:sp>
         <p:sp>
           <p:nvSpPr>
-            <p:cNvPr id="20" name="pl20"/>
+            <p:cNvPr id="20" name="pg20"/>
             <p:cNvSpPr/>
             <p:nvPr/>
           </p:nvSpPr>
           <p:spPr>
             <a:xfrm>
-              <a:off x="7819515" y="2073503"/>
-              <a:ext cx="0" cy="3649639"/>
+              <a:off x="1172049" y="2885955"/>
+              <a:ext cx="7090630" cy="2455448"/>
             </a:xfrm>
             <a:custGeom>
               <a:avLst/>
               <a:pathLst>
-                <a:path w="0" h="3649639">
-                  <a:moveTo>
-                    <a:pt x="0" y="3649639"/>
-                  </a:moveTo>
-                  <a:lnTo>
-                    <a:pt x="0" y="0"/>
-                  </a:lnTo>
-                  <a:lnTo>
-                    <a:pt x="0" y="0"/>
-                  </a:lnTo>
-                </a:path>
-              </a:pathLst>
-            </a:custGeom>
-            <a:ln w="13550" cap="flat">
-              <a:solidFill>
-                <a:srgbClr val="EBEBEB">
-                  <a:alpha val="100000"/>
-                </a:srgbClr>
-              </a:solidFill>
-              <a:prstDash val="solid"/>
-              <a:round/>
-            </a:ln>
-          </p:spPr>
-          <p:txBody>
-            <a:bodyPr/>
-            <a:lstStyle/>
-            <a:p/>
-          </p:txBody>
-        </p:sp>
-        <p:sp>
-          <p:nvSpPr>
-            <p:cNvPr id="21" name="pg21"/>
-            <p:cNvSpPr/>
-            <p:nvPr/>
-          </p:nvSpPr>
-          <p:spPr>
-            <a:xfrm>
-              <a:off x="817517" y="3100799"/>
-              <a:ext cx="7392041" cy="2240604"/>
-            </a:xfrm>
-            <a:custGeom>
-              <a:avLst/>
-              <a:pathLst>
-                <a:path w="7392041" h="2240604">
+                <a:path w="7090630" h="2455448">
                   <a:moveTo>
                     <a:pt x="0" y="0"/>
                   </a:moveTo>
                   <a:lnTo>
-                    <a:pt x="53901" y="43339"/>
-                  </a:lnTo>
-                  <a:lnTo>
-                    <a:pt x="131145" y="103887"/>
-                  </a:lnTo>
-                  <a:lnTo>
-                    <a:pt x="208389" y="162917"/>
-                  </a:lnTo>
-                  <a:lnTo>
-                    <a:pt x="285632" y="220465"/>
-                  </a:lnTo>
-                  <a:lnTo>
-                    <a:pt x="362876" y="276569"/>
-                  </a:lnTo>
-                  <a:lnTo>
-                    <a:pt x="440119" y="331265"/>
-                  </a:lnTo>
-                  <a:lnTo>
-                    <a:pt x="517363" y="384590"/>
-                  </a:lnTo>
-                  <a:lnTo>
-                    <a:pt x="594606" y="436576"/>
-                  </a:lnTo>
-                  <a:lnTo>
-                    <a:pt x="671850" y="487257"/>
-                  </a:lnTo>
-                  <a:lnTo>
-                    <a:pt x="749094" y="536667"/>
-                  </a:lnTo>
-                  <a:lnTo>
-                    <a:pt x="826337" y="584837"/>
-                  </a:lnTo>
-                  <a:lnTo>
-                    <a:pt x="903581" y="631799"/>
-                  </a:lnTo>
-                  <a:lnTo>
-                    <a:pt x="980824" y="677582"/>
-                  </a:lnTo>
-                  <a:lnTo>
-                    <a:pt x="1058068" y="722217"/>
-                  </a:lnTo>
-                  <a:lnTo>
-                    <a:pt x="1135311" y="765731"/>
-                  </a:lnTo>
-                  <a:lnTo>
-                    <a:pt x="1212555" y="808154"/>
-                  </a:lnTo>
-                  <a:lnTo>
-                    <a:pt x="1289799" y="849512"/>
-                  </a:lnTo>
-                  <a:lnTo>
-                    <a:pt x="1367042" y="889832"/>
-                  </a:lnTo>
-                  <a:lnTo>
-                    <a:pt x="1444286" y="929141"/>
-                  </a:lnTo>
-                  <a:lnTo>
-                    <a:pt x="1521529" y="967464"/>
-                  </a:lnTo>
-                  <a:lnTo>
-                    <a:pt x="1598773" y="1004824"/>
-                  </a:lnTo>
-                  <a:lnTo>
-                    <a:pt x="1676016" y="1041248"/>
-                  </a:lnTo>
-                  <a:lnTo>
-                    <a:pt x="1753260" y="1076757"/>
-                  </a:lnTo>
-                  <a:lnTo>
-                    <a:pt x="1830504" y="1111376"/>
-                  </a:lnTo>
-                  <a:lnTo>
-                    <a:pt x="1907747" y="1145126"/>
-                  </a:lnTo>
-                  <a:lnTo>
-                    <a:pt x="1984991" y="1178029"/>
-                  </a:lnTo>
-                  <a:lnTo>
-                    <a:pt x="2062234" y="1210106"/>
-                  </a:lnTo>
-                  <a:lnTo>
-                    <a:pt x="2139478" y="1241379"/>
-                  </a:lnTo>
-                  <a:lnTo>
-                    <a:pt x="2216721" y="1271867"/>
-                  </a:lnTo>
-                  <a:lnTo>
-                    <a:pt x="2293965" y="1301590"/>
-                  </a:lnTo>
-                  <a:lnTo>
-                    <a:pt x="2371209" y="1330567"/>
-                  </a:lnTo>
-                  <a:lnTo>
-                    <a:pt x="2448452" y="1358817"/>
-                  </a:lnTo>
-                  <a:lnTo>
-                    <a:pt x="2525696" y="1386358"/>
-                  </a:lnTo>
-                  <a:lnTo>
-                    <a:pt x="2602939" y="1413209"/>
-                  </a:lnTo>
-                  <a:lnTo>
-                    <a:pt x="2680183" y="1439385"/>
-                  </a:lnTo>
-                  <a:lnTo>
-                    <a:pt x="2757426" y="1464905"/>
-                  </a:lnTo>
-                  <a:lnTo>
-                    <a:pt x="2834670" y="1489784"/>
-                  </a:lnTo>
-                  <a:lnTo>
-                    <a:pt x="2911914" y="1514039"/>
-                  </a:lnTo>
-                  <a:lnTo>
-                    <a:pt x="2989157" y="1537686"/>
-                  </a:lnTo>
-                  <a:lnTo>
-                    <a:pt x="3066401" y="1560739"/>
-                  </a:lnTo>
-                  <a:lnTo>
-                    <a:pt x="3143644" y="1583214"/>
-                  </a:lnTo>
-                  <a:lnTo>
-                    <a:pt x="3220888" y="1605124"/>
-                  </a:lnTo>
-                  <a:lnTo>
-                    <a:pt x="3298131" y="1626485"/>
-                  </a:lnTo>
-                  <a:lnTo>
-                    <a:pt x="3375375" y="1632154"/>
-                  </a:lnTo>
-                  <a:lnTo>
-                    <a:pt x="3452619" y="1637414"/>
-                  </a:lnTo>
-                  <a:lnTo>
-                    <a:pt x="3529862" y="1642640"/>
-                  </a:lnTo>
-                  <a:lnTo>
-                    <a:pt x="3607106" y="1647834"/>
-                  </a:lnTo>
-                  <a:lnTo>
-                    <a:pt x="3684349" y="1652994"/>
-                  </a:lnTo>
-                  <a:lnTo>
-                    <a:pt x="3761593" y="1658121"/>
-                  </a:lnTo>
-                  <a:lnTo>
-                    <a:pt x="3838836" y="1663215"/>
-                  </a:lnTo>
-                  <a:lnTo>
-                    <a:pt x="3916080" y="1668277"/>
-                  </a:lnTo>
-                  <a:lnTo>
-                    <a:pt x="3993324" y="1673306"/>
-                  </a:lnTo>
-                  <a:lnTo>
-                    <a:pt x="4070567" y="1678304"/>
-                  </a:lnTo>
-                  <a:lnTo>
-                    <a:pt x="4147811" y="1683269"/>
-                  </a:lnTo>
-                  <a:lnTo>
-                    <a:pt x="4225054" y="1688203"/>
-                  </a:lnTo>
-                  <a:lnTo>
-                    <a:pt x="4302298" y="1693106"/>
-                  </a:lnTo>
-                  <a:lnTo>
-                    <a:pt x="4379541" y="1697977"/>
-                  </a:lnTo>
-                  <a:lnTo>
-                    <a:pt x="4456785" y="1702817"/>
-                  </a:lnTo>
-                  <a:lnTo>
-                    <a:pt x="4534029" y="1707626"/>
-                  </a:lnTo>
-                  <a:lnTo>
-                    <a:pt x="4611272" y="1712404"/>
-                  </a:lnTo>
-                  <a:lnTo>
-                    <a:pt x="4688516" y="1717152"/>
-                  </a:lnTo>
-                  <a:lnTo>
-                    <a:pt x="4765759" y="1721870"/>
-                  </a:lnTo>
-                  <a:lnTo>
-                    <a:pt x="4843003" y="1726558"/>
-                  </a:lnTo>
-                  <a:lnTo>
-                    <a:pt x="4920246" y="1731215"/>
-                  </a:lnTo>
-                  <a:lnTo>
-                    <a:pt x="4997490" y="1735843"/>
-                  </a:lnTo>
-                  <a:lnTo>
-                    <a:pt x="5074734" y="1740442"/>
-                  </a:lnTo>
-                  <a:lnTo>
-                    <a:pt x="5151977" y="1745011"/>
-                  </a:lnTo>
-                  <a:lnTo>
-                    <a:pt x="5229221" y="1749550"/>
-                  </a:lnTo>
-                  <a:lnTo>
-                    <a:pt x="5306464" y="1754061"/>
-                  </a:lnTo>
-                  <a:lnTo>
-                    <a:pt x="5383708" y="1758544"/>
-                  </a:lnTo>
-                  <a:lnTo>
-                    <a:pt x="5460951" y="1762997"/>
-                  </a:lnTo>
-                  <a:lnTo>
-                    <a:pt x="5538195" y="1767422"/>
-                  </a:lnTo>
-                  <a:lnTo>
-                    <a:pt x="5615439" y="1771819"/>
-                  </a:lnTo>
-                  <a:lnTo>
-                    <a:pt x="5692682" y="1776188"/>
-                  </a:lnTo>
-                  <a:lnTo>
-                    <a:pt x="5769926" y="1780529"/>
-                  </a:lnTo>
-                  <a:lnTo>
-                    <a:pt x="5847169" y="1784842"/>
-                  </a:lnTo>
-                  <a:lnTo>
-                    <a:pt x="5924413" y="1789128"/>
-                  </a:lnTo>
-                  <a:lnTo>
-                    <a:pt x="6001656" y="1793386"/>
-                  </a:lnTo>
-                  <a:lnTo>
-                    <a:pt x="6078900" y="1797617"/>
-                  </a:lnTo>
-                  <a:lnTo>
-                    <a:pt x="6156144" y="1801822"/>
-                  </a:lnTo>
-                  <a:lnTo>
-                    <a:pt x="6233387" y="1805999"/>
-                  </a:lnTo>
-                  <a:lnTo>
-                    <a:pt x="6310631" y="1810150"/>
-                  </a:lnTo>
-                  <a:lnTo>
-                    <a:pt x="6387874" y="1814274"/>
-                  </a:lnTo>
-                  <a:lnTo>
-                    <a:pt x="6465118" y="1818372"/>
-                  </a:lnTo>
-                  <a:lnTo>
-                    <a:pt x="6542361" y="1822443"/>
-                  </a:lnTo>
-                  <a:lnTo>
-                    <a:pt x="6619605" y="1826489"/>
-                  </a:lnTo>
-                  <a:lnTo>
-                    <a:pt x="6696849" y="1830509"/>
-                  </a:lnTo>
-                  <a:lnTo>
-                    <a:pt x="6774092" y="1834504"/>
-                  </a:lnTo>
-                  <a:lnTo>
-                    <a:pt x="6851336" y="1838472"/>
-                  </a:lnTo>
-                  <a:lnTo>
-                    <a:pt x="6928579" y="1842416"/>
-                  </a:lnTo>
-                  <a:lnTo>
-                    <a:pt x="7005823" y="1846334"/>
-                  </a:lnTo>
-                  <a:lnTo>
-                    <a:pt x="7083066" y="1850227"/>
-                  </a:lnTo>
-                  <a:lnTo>
-                    <a:pt x="7160310" y="1854096"/>
-                  </a:lnTo>
-                  <a:lnTo>
-                    <a:pt x="7237554" y="1857940"/>
-                  </a:lnTo>
-                  <a:lnTo>
-                    <a:pt x="7314797" y="1861759"/>
-                  </a:lnTo>
-                  <a:lnTo>
-                    <a:pt x="7392041" y="1865554"/>
-                  </a:lnTo>
-                  <a:lnTo>
-                    <a:pt x="7392041" y="2240604"/>
-                  </a:lnTo>
-                  <a:lnTo>
-                    <a:pt x="7314797" y="2235048"/>
-                  </a:lnTo>
-                  <a:lnTo>
-                    <a:pt x="7237554" y="2229350"/>
-                  </a:lnTo>
-                  <a:lnTo>
-                    <a:pt x="7160310" y="2223505"/>
-                  </a:lnTo>
-                  <a:lnTo>
-                    <a:pt x="7083066" y="2217510"/>
-                  </a:lnTo>
-                  <a:lnTo>
-                    <a:pt x="7005823" y="2211360"/>
-                  </a:lnTo>
-                  <a:lnTo>
-                    <a:pt x="6928579" y="2205052"/>
-                  </a:lnTo>
-                  <a:lnTo>
-                    <a:pt x="6851336" y="2198582"/>
-                  </a:lnTo>
-                  <a:lnTo>
-                    <a:pt x="6774092" y="2191945"/>
-                  </a:lnTo>
-                  <a:lnTo>
-                    <a:pt x="6696849" y="2185137"/>
-                  </a:lnTo>
-                  <a:lnTo>
-                    <a:pt x="6619605" y="2178155"/>
-                  </a:lnTo>
-                  <a:lnTo>
-                    <a:pt x="6542361" y="2170992"/>
-                  </a:lnTo>
-                  <a:lnTo>
-                    <a:pt x="6465118" y="2163645"/>
-                  </a:lnTo>
-                  <a:lnTo>
-                    <a:pt x="6387874" y="2156109"/>
-                  </a:lnTo>
-                  <a:lnTo>
-                    <a:pt x="6310631" y="2148379"/>
-                  </a:lnTo>
-                  <a:lnTo>
-                    <a:pt x="6233387" y="2140450"/>
-                  </a:lnTo>
-                  <a:lnTo>
-                    <a:pt x="6156144" y="2132317"/>
-                  </a:lnTo>
-                  <a:lnTo>
-                    <a:pt x="6078900" y="2123975"/>
-                  </a:lnTo>
-                  <a:lnTo>
-                    <a:pt x="6001656" y="2115418"/>
-                  </a:lnTo>
-                  <a:lnTo>
-                    <a:pt x="5924413" y="2106641"/>
-                  </a:lnTo>
-                  <a:lnTo>
-                    <a:pt x="5847169" y="2097638"/>
-                  </a:lnTo>
-                  <a:lnTo>
-                    <a:pt x="5769926" y="2088403"/>
-                  </a:lnTo>
-                  <a:lnTo>
-                    <a:pt x="5692682" y="2078930"/>
-                  </a:lnTo>
-                  <a:lnTo>
-                    <a:pt x="5615439" y="2069214"/>
-                  </a:lnTo>
-                  <a:lnTo>
-                    <a:pt x="5538195" y="2059248"/>
-                  </a:lnTo>
-                  <a:lnTo>
-                    <a:pt x="5460951" y="2049025"/>
-                  </a:lnTo>
-                  <a:lnTo>
-                    <a:pt x="5383708" y="2038539"/>
-                  </a:lnTo>
-                  <a:lnTo>
-                    <a:pt x="5306464" y="2027783"/>
-                  </a:lnTo>
-                  <a:lnTo>
-                    <a:pt x="5229221" y="2016750"/>
-                  </a:lnTo>
-                  <a:lnTo>
-                    <a:pt x="5151977" y="2005434"/>
-                  </a:lnTo>
-                  <a:lnTo>
-                    <a:pt x="5074734" y="1993826"/>
-                  </a:lnTo>
-                  <a:lnTo>
-                    <a:pt x="4997490" y="1981919"/>
-                  </a:lnTo>
-                  <a:lnTo>
-                    <a:pt x="4920246" y="1969706"/>
-                  </a:lnTo>
-                  <a:lnTo>
-                    <a:pt x="4843003" y="1957178"/>
-                  </a:lnTo>
-                  <a:lnTo>
-                    <a:pt x="4765759" y="1944328"/>
-                  </a:lnTo>
-                  <a:lnTo>
-                    <a:pt x="4688516" y="1931148"/>
-                  </a:lnTo>
-                  <a:lnTo>
-                    <a:pt x="4611272" y="1917628"/>
-                  </a:lnTo>
-                  <a:lnTo>
-                    <a:pt x="4534029" y="1903760"/>
-                  </a:lnTo>
-                  <a:lnTo>
-                    <a:pt x="4456785" y="1889535"/>
-                  </a:lnTo>
-                  <a:lnTo>
-                    <a:pt x="4379541" y="1874945"/>
-                  </a:lnTo>
-                  <a:lnTo>
-                    <a:pt x="4302298" y="1859978"/>
-                  </a:lnTo>
-                  <a:lnTo>
-                    <a:pt x="4225054" y="1844627"/>
-                  </a:lnTo>
-                  <a:lnTo>
-                    <a:pt x="4147811" y="1828880"/>
-                  </a:lnTo>
-                  <a:lnTo>
-                    <a:pt x="4070567" y="1812728"/>
-                  </a:lnTo>
-                  <a:lnTo>
-                    <a:pt x="3993324" y="1796160"/>
-                  </a:lnTo>
-                  <a:lnTo>
-                    <a:pt x="3916080" y="1779166"/>
-                  </a:lnTo>
-                  <a:lnTo>
-                    <a:pt x="3838836" y="1761735"/>
-                  </a:lnTo>
-                  <a:lnTo>
-                    <a:pt x="3761593" y="1743855"/>
-                  </a:lnTo>
-                  <a:lnTo>
-                    <a:pt x="3684349" y="1725515"/>
-                  </a:lnTo>
-                  <a:lnTo>
-                    <a:pt x="3607106" y="1706702"/>
-                  </a:lnTo>
-                  <a:lnTo>
-                    <a:pt x="3529862" y="1687406"/>
-                  </a:lnTo>
-                  <a:lnTo>
-                    <a:pt x="3452619" y="1667613"/>
-                  </a:lnTo>
-                  <a:lnTo>
-                    <a:pt x="3375375" y="1647310"/>
-                  </a:lnTo>
-                  <a:lnTo>
-                    <a:pt x="3298131" y="1626860"/>
-                  </a:lnTo>
-                  <a:lnTo>
-                    <a:pt x="3220888" y="1621532"/>
-                  </a:lnTo>
-                  <a:lnTo>
-                    <a:pt x="3143644" y="1616170"/>
-                  </a:lnTo>
-                  <a:lnTo>
-                    <a:pt x="3066401" y="1610774"/>
-                  </a:lnTo>
-                  <a:lnTo>
-                    <a:pt x="2989157" y="1605342"/>
-                  </a:lnTo>
-                  <a:lnTo>
-                    <a:pt x="2911914" y="1599876"/>
-                  </a:lnTo>
-                  <a:lnTo>
-                    <a:pt x="2834670" y="1594375"/>
-                  </a:lnTo>
-                  <a:lnTo>
-                    <a:pt x="2757426" y="1588839"/>
-                  </a:lnTo>
-                  <a:lnTo>
-                    <a:pt x="2680183" y="1583267"/>
-                  </a:lnTo>
-                  <a:lnTo>
-                    <a:pt x="2602939" y="1577659"/>
-                  </a:lnTo>
-                  <a:lnTo>
-                    <a:pt x="2525696" y="1572015"/>
-                  </a:lnTo>
-                  <a:lnTo>
-                    <a:pt x="2448452" y="1566335"/>
-                  </a:lnTo>
-                  <a:lnTo>
-                    <a:pt x="2371209" y="1560619"/>
-                  </a:lnTo>
-                  <a:lnTo>
-                    <a:pt x="2293965" y="1554865"/>
-                  </a:lnTo>
-                  <a:lnTo>
-                    <a:pt x="2216721" y="1549075"/>
-                  </a:lnTo>
-                  <a:lnTo>
-                    <a:pt x="2139478" y="1543248"/>
-                  </a:lnTo>
-                  <a:lnTo>
-                    <a:pt x="2062234" y="1537383"/>
-                  </a:lnTo>
-                  <a:lnTo>
-                    <a:pt x="1984991" y="1531480"/>
-                  </a:lnTo>
-                  <a:lnTo>
-                    <a:pt x="1907747" y="1525540"/>
-                  </a:lnTo>
-                  <a:lnTo>
-                    <a:pt x="1830504" y="1519561"/>
-                  </a:lnTo>
-                  <a:lnTo>
-                    <a:pt x="1753260" y="1513544"/>
-                  </a:lnTo>
-                  <a:lnTo>
-                    <a:pt x="1676016" y="1507489"/>
-                  </a:lnTo>
-                  <a:lnTo>
-                    <a:pt x="1598773" y="1501394"/>
-                  </a:lnTo>
-                  <a:lnTo>
-                    <a:pt x="1521529" y="1495261"/>
-                  </a:lnTo>
-                  <a:lnTo>
-                    <a:pt x="1444286" y="1489088"/>
-                  </a:lnTo>
-                  <a:lnTo>
-                    <a:pt x="1367042" y="1482875"/>
-                  </a:lnTo>
-                  <a:lnTo>
-                    <a:pt x="1289799" y="1476623"/>
-                  </a:lnTo>
-                  <a:lnTo>
-                    <a:pt x="1212555" y="1470330"/>
-                  </a:lnTo>
-                  <a:lnTo>
-                    <a:pt x="1135311" y="1463997"/>
-                  </a:lnTo>
-                  <a:lnTo>
-                    <a:pt x="1058068" y="1457623"/>
-                  </a:lnTo>
-                  <a:lnTo>
-                    <a:pt x="980824" y="1451208"/>
-                  </a:lnTo>
-                  <a:lnTo>
-                    <a:pt x="903581" y="1444752"/>
-                  </a:lnTo>
-                  <a:lnTo>
-                    <a:pt x="826337" y="1438255"/>
-                  </a:lnTo>
-                  <a:lnTo>
-                    <a:pt x="749094" y="1431716"/>
-                  </a:lnTo>
-                  <a:lnTo>
-                    <a:pt x="671850" y="1425135"/>
-                  </a:lnTo>
-                  <a:lnTo>
-                    <a:pt x="594606" y="1418511"/>
-                  </a:lnTo>
-                  <a:lnTo>
-                    <a:pt x="517363" y="1411845"/>
-                  </a:lnTo>
-                  <a:lnTo>
-                    <a:pt x="440119" y="1405137"/>
-                  </a:lnTo>
-                  <a:lnTo>
-                    <a:pt x="362876" y="1398385"/>
-                  </a:lnTo>
-                  <a:lnTo>
-                    <a:pt x="285632" y="1391590"/>
-                  </a:lnTo>
-                  <a:lnTo>
-                    <a:pt x="208389" y="1384751"/>
-                  </a:lnTo>
-                  <a:lnTo>
-                    <a:pt x="131145" y="1377868"/>
-                  </a:lnTo>
-                  <a:lnTo>
-                    <a:pt x="53901" y="1370941"/>
-                  </a:lnTo>
-                  <a:lnTo>
-                    <a:pt x="0" y="1366077"/>
+                    <a:pt x="71622" y="67026"/>
+                  </a:lnTo>
+                  <a:lnTo>
+                    <a:pt x="143245" y="132371"/>
+                  </a:lnTo>
+                  <a:lnTo>
+                    <a:pt x="214867" y="196077"/>
+                  </a:lnTo>
+                  <a:lnTo>
+                    <a:pt x="286490" y="258184"/>
+                  </a:lnTo>
+                  <a:lnTo>
+                    <a:pt x="358112" y="318732"/>
+                  </a:lnTo>
+                  <a:lnTo>
+                    <a:pt x="429735" y="377761"/>
+                  </a:lnTo>
+                  <a:lnTo>
+                    <a:pt x="501357" y="435310"/>
+                  </a:lnTo>
+                  <a:lnTo>
+                    <a:pt x="572980" y="491414"/>
+                  </a:lnTo>
+                  <a:lnTo>
+                    <a:pt x="644602" y="546110"/>
+                  </a:lnTo>
+                  <a:lnTo>
+                    <a:pt x="716225" y="599434"/>
+                  </a:lnTo>
+                  <a:lnTo>
+                    <a:pt x="787847" y="651420"/>
+                  </a:lnTo>
+                  <a:lnTo>
+                    <a:pt x="859470" y="702102"/>
+                  </a:lnTo>
+                  <a:lnTo>
+                    <a:pt x="931092" y="751512"/>
+                  </a:lnTo>
+                  <a:lnTo>
+                    <a:pt x="1002715" y="799682"/>
+                  </a:lnTo>
+                  <a:lnTo>
+                    <a:pt x="1074337" y="846644"/>
+                  </a:lnTo>
+                  <a:lnTo>
+                    <a:pt x="1145960" y="892427"/>
+                  </a:lnTo>
+                  <a:lnTo>
+                    <a:pt x="1217582" y="937061"/>
+                  </a:lnTo>
+                  <a:lnTo>
+                    <a:pt x="1289205" y="980576"/>
+                  </a:lnTo>
+                  <a:lnTo>
+                    <a:pt x="1360827" y="1022998"/>
+                  </a:lnTo>
+                  <a:lnTo>
+                    <a:pt x="1432450" y="1064357"/>
+                  </a:lnTo>
+                  <a:lnTo>
+                    <a:pt x="1504073" y="1104677"/>
+                  </a:lnTo>
+                  <a:lnTo>
+                    <a:pt x="1575695" y="1143986"/>
+                  </a:lnTo>
+                  <a:lnTo>
+                    <a:pt x="1647318" y="1182308"/>
+                  </a:lnTo>
+                  <a:lnTo>
+                    <a:pt x="1718940" y="1219669"/>
+                  </a:lnTo>
+                  <a:lnTo>
+                    <a:pt x="1790563" y="1256093"/>
+                  </a:lnTo>
+                  <a:lnTo>
+                    <a:pt x="1862185" y="1291602"/>
+                  </a:lnTo>
+                  <a:lnTo>
+                    <a:pt x="1933808" y="1326221"/>
+                  </a:lnTo>
+                  <a:lnTo>
+                    <a:pt x="2005430" y="1359971"/>
+                  </a:lnTo>
+                  <a:lnTo>
+                    <a:pt x="2077053" y="1392874"/>
+                  </a:lnTo>
+                  <a:lnTo>
+                    <a:pt x="2148675" y="1424951"/>
+                  </a:lnTo>
+                  <a:lnTo>
+                    <a:pt x="2220298" y="1456224"/>
+                  </a:lnTo>
+                  <a:lnTo>
+                    <a:pt x="2291920" y="1486712"/>
+                  </a:lnTo>
+                  <a:lnTo>
+                    <a:pt x="2363543" y="1516435"/>
+                  </a:lnTo>
+                  <a:lnTo>
+                    <a:pt x="2435165" y="1545412"/>
+                  </a:lnTo>
+                  <a:lnTo>
+                    <a:pt x="2506788" y="1573662"/>
+                  </a:lnTo>
+                  <a:lnTo>
+                    <a:pt x="2578410" y="1601203"/>
+                  </a:lnTo>
+                  <a:lnTo>
+                    <a:pt x="2650033" y="1628053"/>
+                  </a:lnTo>
+                  <a:lnTo>
+                    <a:pt x="2721655" y="1654230"/>
+                  </a:lnTo>
+                  <a:lnTo>
+                    <a:pt x="2793278" y="1679749"/>
+                  </a:lnTo>
+                  <a:lnTo>
+                    <a:pt x="2864901" y="1704629"/>
+                  </a:lnTo>
+                  <a:lnTo>
+                    <a:pt x="2936523" y="1728884"/>
+                  </a:lnTo>
+                  <a:lnTo>
+                    <a:pt x="3008146" y="1752530"/>
+                  </a:lnTo>
+                  <a:lnTo>
+                    <a:pt x="3079768" y="1775584"/>
+                  </a:lnTo>
+                  <a:lnTo>
+                    <a:pt x="3151391" y="1798058"/>
+                  </a:lnTo>
+                  <a:lnTo>
+                    <a:pt x="3223013" y="1819969"/>
+                  </a:lnTo>
+                  <a:lnTo>
+                    <a:pt x="3294636" y="1841330"/>
+                  </a:lnTo>
+                  <a:lnTo>
+                    <a:pt x="3366258" y="1846999"/>
+                  </a:lnTo>
+                  <a:lnTo>
+                    <a:pt x="3437881" y="1852259"/>
+                  </a:lnTo>
+                  <a:lnTo>
+                    <a:pt x="3509503" y="1857485"/>
+                  </a:lnTo>
+                  <a:lnTo>
+                    <a:pt x="3581126" y="1862678"/>
+                  </a:lnTo>
+                  <a:lnTo>
+                    <a:pt x="3652748" y="1867838"/>
+                  </a:lnTo>
+                  <a:lnTo>
+                    <a:pt x="3724371" y="1872965"/>
+                  </a:lnTo>
+                  <a:lnTo>
+                    <a:pt x="3795993" y="1878060"/>
+                  </a:lnTo>
+                  <a:lnTo>
+                    <a:pt x="3867616" y="1883122"/>
+                  </a:lnTo>
+                  <a:lnTo>
+                    <a:pt x="3939238" y="1888151"/>
+                  </a:lnTo>
+                  <a:lnTo>
+                    <a:pt x="4010861" y="1893149"/>
+                  </a:lnTo>
+                  <a:lnTo>
+                    <a:pt x="4082483" y="1898114"/>
+                  </a:lnTo>
+                  <a:lnTo>
+                    <a:pt x="4154106" y="1903048"/>
+                  </a:lnTo>
+                  <a:lnTo>
+                    <a:pt x="4225729" y="1907950"/>
+                  </a:lnTo>
+                  <a:lnTo>
+                    <a:pt x="4297351" y="1912822"/>
+                  </a:lnTo>
+                  <a:lnTo>
+                    <a:pt x="4368974" y="1917662"/>
+                  </a:lnTo>
+                  <a:lnTo>
+                    <a:pt x="4440596" y="1922471"/>
+                  </a:lnTo>
+                  <a:lnTo>
+                    <a:pt x="4512219" y="1927249"/>
+                  </a:lnTo>
+                  <a:lnTo>
+                    <a:pt x="4583841" y="1931997"/>
+                  </a:lnTo>
+                  <a:lnTo>
+                    <a:pt x="4655464" y="1936715"/>
+                  </a:lnTo>
+                  <a:lnTo>
+                    <a:pt x="4727086" y="1941402"/>
+                  </a:lnTo>
+                  <a:lnTo>
+                    <a:pt x="4798709" y="1946060"/>
+                  </a:lnTo>
+                  <a:lnTo>
+                    <a:pt x="4870331" y="1950688"/>
+                  </a:lnTo>
+                  <a:lnTo>
+                    <a:pt x="4941954" y="1955286"/>
+                  </a:lnTo>
+                  <a:lnTo>
+                    <a:pt x="5013576" y="1959855"/>
+                  </a:lnTo>
+                  <a:lnTo>
+                    <a:pt x="5085199" y="1964395"/>
+                  </a:lnTo>
+                  <a:lnTo>
+                    <a:pt x="5156821" y="1968906"/>
+                  </a:lnTo>
+                  <a:lnTo>
+                    <a:pt x="5228444" y="1973388"/>
+                  </a:lnTo>
+                  <a:lnTo>
+                    <a:pt x="5300066" y="1977842"/>
+                  </a:lnTo>
+                  <a:lnTo>
+                    <a:pt x="5371689" y="1982267"/>
+                  </a:lnTo>
+                  <a:lnTo>
+                    <a:pt x="5443311" y="1986664"/>
+                  </a:lnTo>
+                  <a:lnTo>
+                    <a:pt x="5514934" y="1991033"/>
+                  </a:lnTo>
+                  <a:lnTo>
+                    <a:pt x="5586557" y="1995374"/>
+                  </a:lnTo>
+                  <a:lnTo>
+                    <a:pt x="5658179" y="1999687"/>
+                  </a:lnTo>
+                  <a:lnTo>
+                    <a:pt x="5729802" y="2003972"/>
+                  </a:lnTo>
+                  <a:lnTo>
+                    <a:pt x="5801424" y="2008231"/>
+                  </a:lnTo>
+                  <a:lnTo>
+                    <a:pt x="5873047" y="2012462"/>
+                  </a:lnTo>
+                  <a:lnTo>
+                    <a:pt x="5944669" y="2016666"/>
+                  </a:lnTo>
+                  <a:lnTo>
+                    <a:pt x="6016292" y="2020844"/>
+                  </a:lnTo>
+                  <a:lnTo>
+                    <a:pt x="6087914" y="2024994"/>
+                  </a:lnTo>
+                  <a:lnTo>
+                    <a:pt x="6159537" y="2029119"/>
+                  </a:lnTo>
+                  <a:lnTo>
+                    <a:pt x="6231159" y="2033216"/>
+                  </a:lnTo>
+                  <a:lnTo>
+                    <a:pt x="6302782" y="2037288"/>
+                  </a:lnTo>
+                  <a:lnTo>
+                    <a:pt x="6374404" y="2041334"/>
+                  </a:lnTo>
+                  <a:lnTo>
+                    <a:pt x="6446027" y="2045354"/>
+                  </a:lnTo>
+                  <a:lnTo>
+                    <a:pt x="6517649" y="2049348"/>
+                  </a:lnTo>
+                  <a:lnTo>
+                    <a:pt x="6589272" y="2053317"/>
+                  </a:lnTo>
+                  <a:lnTo>
+                    <a:pt x="6660894" y="2057261"/>
+                  </a:lnTo>
+                  <a:lnTo>
+                    <a:pt x="6732517" y="2061179"/>
+                  </a:lnTo>
+                  <a:lnTo>
+                    <a:pt x="6804139" y="2065072"/>
+                  </a:lnTo>
+                  <a:lnTo>
+                    <a:pt x="6875762" y="2068941"/>
+                  </a:lnTo>
+                  <a:lnTo>
+                    <a:pt x="6947385" y="2072784"/>
+                  </a:lnTo>
+                  <a:lnTo>
+                    <a:pt x="7019007" y="2076604"/>
+                  </a:lnTo>
+                  <a:lnTo>
+                    <a:pt x="7090630" y="2080399"/>
+                  </a:lnTo>
+                  <a:lnTo>
+                    <a:pt x="7090630" y="2455448"/>
+                  </a:lnTo>
+                  <a:lnTo>
+                    <a:pt x="7019007" y="2449893"/>
+                  </a:lnTo>
+                  <a:lnTo>
+                    <a:pt x="6947385" y="2444195"/>
+                  </a:lnTo>
+                  <a:lnTo>
+                    <a:pt x="6875762" y="2438350"/>
+                  </a:lnTo>
+                  <a:lnTo>
+                    <a:pt x="6804139" y="2432355"/>
+                  </a:lnTo>
+                  <a:lnTo>
+                    <a:pt x="6732517" y="2426205"/>
+                  </a:lnTo>
+                  <a:lnTo>
+                    <a:pt x="6660894" y="2419897"/>
+                  </a:lnTo>
+                  <a:lnTo>
+                    <a:pt x="6589272" y="2413427"/>
+                  </a:lnTo>
+                  <a:lnTo>
+                    <a:pt x="6517649" y="2406790"/>
+                  </a:lnTo>
+                  <a:lnTo>
+                    <a:pt x="6446027" y="2399982"/>
+                  </a:lnTo>
+                  <a:lnTo>
+                    <a:pt x="6374404" y="2392999"/>
+                  </a:lnTo>
+                  <a:lnTo>
+                    <a:pt x="6302782" y="2385837"/>
+                  </a:lnTo>
+                  <a:lnTo>
+                    <a:pt x="6231159" y="2378490"/>
+                  </a:lnTo>
+                  <a:lnTo>
+                    <a:pt x="6159537" y="2370954"/>
+                  </a:lnTo>
+                  <a:lnTo>
+                    <a:pt x="6087914" y="2363224"/>
+                  </a:lnTo>
+                  <a:lnTo>
+                    <a:pt x="6016292" y="2355295"/>
+                  </a:lnTo>
+                  <a:lnTo>
+                    <a:pt x="5944669" y="2347162"/>
+                  </a:lnTo>
+                  <a:lnTo>
+                    <a:pt x="5873047" y="2338820"/>
+                  </a:lnTo>
+                  <a:lnTo>
+                    <a:pt x="5801424" y="2330263"/>
+                  </a:lnTo>
+                  <a:lnTo>
+                    <a:pt x="5729802" y="2321486"/>
+                  </a:lnTo>
+                  <a:lnTo>
+                    <a:pt x="5658179" y="2312482"/>
+                  </a:lnTo>
+                  <a:lnTo>
+                    <a:pt x="5586557" y="2303248"/>
+                  </a:lnTo>
+                  <a:lnTo>
+                    <a:pt x="5514934" y="2293775"/>
+                  </a:lnTo>
+                  <a:lnTo>
+                    <a:pt x="5443311" y="2284059"/>
+                  </a:lnTo>
+                  <a:lnTo>
+                    <a:pt x="5371689" y="2274092"/>
+                  </a:lnTo>
+                  <a:lnTo>
+                    <a:pt x="5300066" y="2263870"/>
+                  </a:lnTo>
+                  <a:lnTo>
+                    <a:pt x="5228444" y="2253384"/>
+                  </a:lnTo>
+                  <a:lnTo>
+                    <a:pt x="5156821" y="2242628"/>
+                  </a:lnTo>
+                  <a:lnTo>
+                    <a:pt x="5085199" y="2231595"/>
+                  </a:lnTo>
+                  <a:lnTo>
+                    <a:pt x="5013576" y="2220278"/>
+                  </a:lnTo>
+                  <a:lnTo>
+                    <a:pt x="4941954" y="2208670"/>
+                  </a:lnTo>
+                  <a:lnTo>
+                    <a:pt x="4870331" y="2196764"/>
+                  </a:lnTo>
+                  <a:lnTo>
+                    <a:pt x="4798709" y="2184550"/>
+                  </a:lnTo>
+                  <a:lnTo>
+                    <a:pt x="4727086" y="2172023"/>
+                  </a:lnTo>
+                  <a:lnTo>
+                    <a:pt x="4655464" y="2159173"/>
+                  </a:lnTo>
+                  <a:lnTo>
+                    <a:pt x="4583841" y="2145993"/>
+                  </a:lnTo>
+                  <a:lnTo>
+                    <a:pt x="4512219" y="2132473"/>
+                  </a:lnTo>
+                  <a:lnTo>
+                    <a:pt x="4440596" y="2118605"/>
+                  </a:lnTo>
+                  <a:lnTo>
+                    <a:pt x="4368974" y="2104380"/>
+                  </a:lnTo>
+                  <a:lnTo>
+                    <a:pt x="4297351" y="2089789"/>
+                  </a:lnTo>
+                  <a:lnTo>
+                    <a:pt x="4225729" y="2074823"/>
+                  </a:lnTo>
+                  <a:lnTo>
+                    <a:pt x="4154106" y="2059471"/>
+                  </a:lnTo>
+                  <a:lnTo>
+                    <a:pt x="4082483" y="2043725"/>
+                  </a:lnTo>
+                  <a:lnTo>
+                    <a:pt x="4010861" y="2027573"/>
+                  </a:lnTo>
+                  <a:lnTo>
+                    <a:pt x="3939238" y="2011005"/>
+                  </a:lnTo>
+                  <a:lnTo>
+                    <a:pt x="3867616" y="1994011"/>
+                  </a:lnTo>
+                  <a:lnTo>
+                    <a:pt x="3795993" y="1976580"/>
+                  </a:lnTo>
+                  <a:lnTo>
+                    <a:pt x="3724371" y="1958700"/>
+                  </a:lnTo>
+                  <a:lnTo>
+                    <a:pt x="3652748" y="1940359"/>
+                  </a:lnTo>
+                  <a:lnTo>
+                    <a:pt x="3581126" y="1921547"/>
+                  </a:lnTo>
+                  <a:lnTo>
+                    <a:pt x="3509503" y="1902251"/>
+                  </a:lnTo>
+                  <a:lnTo>
+                    <a:pt x="3437881" y="1882458"/>
+                  </a:lnTo>
+                  <a:lnTo>
+                    <a:pt x="3366258" y="1862155"/>
+                  </a:lnTo>
+                  <a:lnTo>
+                    <a:pt x="3294636" y="1841705"/>
+                  </a:lnTo>
+                  <a:lnTo>
+                    <a:pt x="3223013" y="1836377"/>
+                  </a:lnTo>
+                  <a:lnTo>
+                    <a:pt x="3151391" y="1831015"/>
+                  </a:lnTo>
+                  <a:lnTo>
+                    <a:pt x="3079768" y="1825618"/>
+                  </a:lnTo>
+                  <a:lnTo>
+                    <a:pt x="3008146" y="1820187"/>
+                  </a:lnTo>
+                  <a:lnTo>
+                    <a:pt x="2936523" y="1814721"/>
+                  </a:lnTo>
+                  <a:lnTo>
+                    <a:pt x="2864901" y="1809220"/>
+                  </a:lnTo>
+                  <a:lnTo>
+                    <a:pt x="2793278" y="1803684"/>
+                  </a:lnTo>
+                  <a:lnTo>
+                    <a:pt x="2721655" y="1798112"/>
+                  </a:lnTo>
+                  <a:lnTo>
+                    <a:pt x="2650033" y="1792504"/>
+                  </a:lnTo>
+                  <a:lnTo>
+                    <a:pt x="2578410" y="1786860"/>
+                  </a:lnTo>
+                  <a:lnTo>
+                    <a:pt x="2506788" y="1781180"/>
+                  </a:lnTo>
+                  <a:lnTo>
+                    <a:pt x="2435165" y="1775463"/>
+                  </a:lnTo>
+                  <a:lnTo>
+                    <a:pt x="2363543" y="1769710"/>
+                  </a:lnTo>
+                  <a:lnTo>
+                    <a:pt x="2291920" y="1763920"/>
+                  </a:lnTo>
+                  <a:lnTo>
+                    <a:pt x="2220298" y="1758092"/>
+                  </a:lnTo>
+                  <a:lnTo>
+                    <a:pt x="2148675" y="1752228"/>
+                  </a:lnTo>
+                  <a:lnTo>
+                    <a:pt x="2077053" y="1746325"/>
+                  </a:lnTo>
+                  <a:lnTo>
+                    <a:pt x="2005430" y="1740385"/>
+                  </a:lnTo>
+                  <a:lnTo>
+                    <a:pt x="1933808" y="1734406"/>
+                  </a:lnTo>
+                  <a:lnTo>
+                    <a:pt x="1862185" y="1728389"/>
+                  </a:lnTo>
+                  <a:lnTo>
+                    <a:pt x="1790563" y="1722334"/>
+                  </a:lnTo>
+                  <a:lnTo>
+                    <a:pt x="1718940" y="1716239"/>
+                  </a:lnTo>
+                  <a:lnTo>
+                    <a:pt x="1647318" y="1710106"/>
+                  </a:lnTo>
+                  <a:lnTo>
+                    <a:pt x="1575695" y="1703933"/>
+                  </a:lnTo>
+                  <a:lnTo>
+                    <a:pt x="1504073" y="1697720"/>
+                  </a:lnTo>
+                  <a:lnTo>
+                    <a:pt x="1432450" y="1691467"/>
+                  </a:lnTo>
+                  <a:lnTo>
+                    <a:pt x="1360827" y="1685175"/>
+                  </a:lnTo>
+                  <a:lnTo>
+                    <a:pt x="1289205" y="1678841"/>
+                  </a:lnTo>
+                  <a:lnTo>
+                    <a:pt x="1217582" y="1672468"/>
+                  </a:lnTo>
+                  <a:lnTo>
+                    <a:pt x="1145960" y="1666053"/>
+                  </a:lnTo>
+                  <a:lnTo>
+                    <a:pt x="1074337" y="1659597"/>
+                  </a:lnTo>
+                  <a:lnTo>
+                    <a:pt x="1002715" y="1653100"/>
+                  </a:lnTo>
+                  <a:lnTo>
+                    <a:pt x="931092" y="1646561"/>
+                  </a:lnTo>
+                  <a:lnTo>
+                    <a:pt x="859470" y="1639979"/>
+                  </a:lnTo>
+                  <a:lnTo>
+                    <a:pt x="787847" y="1633356"/>
+                  </a:lnTo>
+                  <a:lnTo>
+                    <a:pt x="716225" y="1626690"/>
+                  </a:lnTo>
+                  <a:lnTo>
+                    <a:pt x="644602" y="1619981"/>
+                  </a:lnTo>
+                  <a:lnTo>
+                    <a:pt x="572980" y="1613230"/>
+                  </a:lnTo>
+                  <a:lnTo>
+                    <a:pt x="501357" y="1606434"/>
+                  </a:lnTo>
+                  <a:lnTo>
+                    <a:pt x="429735" y="1599596"/>
+                  </a:lnTo>
+                  <a:lnTo>
+                    <a:pt x="358112" y="1592713"/>
+                  </a:lnTo>
+                  <a:lnTo>
+                    <a:pt x="286490" y="1585786"/>
+                  </a:lnTo>
+                  <a:lnTo>
+                    <a:pt x="214867" y="1578815"/>
+                  </a:lnTo>
+                  <a:lnTo>
+                    <a:pt x="143245" y="1571798"/>
+                  </a:lnTo>
+                  <a:lnTo>
+                    <a:pt x="71622" y="1564737"/>
+                  </a:lnTo>
+                  <a:lnTo>
+                    <a:pt x="0" y="1557631"/>
                   </a:lnTo>
                   <a:close/>
                 </a:path>
@@ -3609,309 +3584,643 @@
         </p:sp>
         <p:sp>
           <p:nvSpPr>
+            <p:cNvPr id="21" name="pl21"/>
+            <p:cNvSpPr/>
+            <p:nvPr/>
+          </p:nvSpPr>
+          <p:spPr>
+            <a:xfrm>
+              <a:off x="1172049" y="2885955"/>
+              <a:ext cx="7090630" cy="2080399"/>
+            </a:xfrm>
+            <a:custGeom>
+              <a:avLst/>
+              <a:pathLst>
+                <a:path w="7090630" h="2080399">
+                  <a:moveTo>
+                    <a:pt x="0" y="0"/>
+                  </a:moveTo>
+                  <a:lnTo>
+                    <a:pt x="71622" y="67026"/>
+                  </a:lnTo>
+                  <a:lnTo>
+                    <a:pt x="143245" y="132371"/>
+                  </a:lnTo>
+                  <a:lnTo>
+                    <a:pt x="214867" y="196077"/>
+                  </a:lnTo>
+                  <a:lnTo>
+                    <a:pt x="286490" y="258184"/>
+                  </a:lnTo>
+                  <a:lnTo>
+                    <a:pt x="358112" y="318732"/>
+                  </a:lnTo>
+                  <a:lnTo>
+                    <a:pt x="429735" y="377761"/>
+                  </a:lnTo>
+                  <a:lnTo>
+                    <a:pt x="501357" y="435310"/>
+                  </a:lnTo>
+                  <a:lnTo>
+                    <a:pt x="572980" y="491414"/>
+                  </a:lnTo>
+                  <a:lnTo>
+                    <a:pt x="644602" y="546110"/>
+                  </a:lnTo>
+                  <a:lnTo>
+                    <a:pt x="716225" y="599434"/>
+                  </a:lnTo>
+                  <a:lnTo>
+                    <a:pt x="787847" y="651420"/>
+                  </a:lnTo>
+                  <a:lnTo>
+                    <a:pt x="859470" y="702102"/>
+                  </a:lnTo>
+                  <a:lnTo>
+                    <a:pt x="931092" y="751512"/>
+                  </a:lnTo>
+                  <a:lnTo>
+                    <a:pt x="1002715" y="799682"/>
+                  </a:lnTo>
+                  <a:lnTo>
+                    <a:pt x="1074337" y="846644"/>
+                  </a:lnTo>
+                  <a:lnTo>
+                    <a:pt x="1145960" y="892427"/>
+                  </a:lnTo>
+                  <a:lnTo>
+                    <a:pt x="1217582" y="937061"/>
+                  </a:lnTo>
+                  <a:lnTo>
+                    <a:pt x="1289205" y="980576"/>
+                  </a:lnTo>
+                  <a:lnTo>
+                    <a:pt x="1360827" y="1022998"/>
+                  </a:lnTo>
+                  <a:lnTo>
+                    <a:pt x="1432450" y="1064357"/>
+                  </a:lnTo>
+                  <a:lnTo>
+                    <a:pt x="1504073" y="1104677"/>
+                  </a:lnTo>
+                  <a:lnTo>
+                    <a:pt x="1575695" y="1143986"/>
+                  </a:lnTo>
+                  <a:lnTo>
+                    <a:pt x="1647318" y="1182308"/>
+                  </a:lnTo>
+                  <a:lnTo>
+                    <a:pt x="1718940" y="1219669"/>
+                  </a:lnTo>
+                  <a:lnTo>
+                    <a:pt x="1790563" y="1256093"/>
+                  </a:lnTo>
+                  <a:lnTo>
+                    <a:pt x="1862185" y="1291602"/>
+                  </a:lnTo>
+                  <a:lnTo>
+                    <a:pt x="1933808" y="1326221"/>
+                  </a:lnTo>
+                  <a:lnTo>
+                    <a:pt x="2005430" y="1359971"/>
+                  </a:lnTo>
+                  <a:lnTo>
+                    <a:pt x="2077053" y="1392874"/>
+                  </a:lnTo>
+                  <a:lnTo>
+                    <a:pt x="2148675" y="1424951"/>
+                  </a:lnTo>
+                  <a:lnTo>
+                    <a:pt x="2220298" y="1456224"/>
+                  </a:lnTo>
+                  <a:lnTo>
+                    <a:pt x="2291920" y="1486712"/>
+                  </a:lnTo>
+                  <a:lnTo>
+                    <a:pt x="2363543" y="1516435"/>
+                  </a:lnTo>
+                  <a:lnTo>
+                    <a:pt x="2435165" y="1545412"/>
+                  </a:lnTo>
+                  <a:lnTo>
+                    <a:pt x="2506788" y="1573662"/>
+                  </a:lnTo>
+                  <a:lnTo>
+                    <a:pt x="2578410" y="1601203"/>
+                  </a:lnTo>
+                  <a:lnTo>
+                    <a:pt x="2650033" y="1628053"/>
+                  </a:lnTo>
+                  <a:lnTo>
+                    <a:pt x="2721655" y="1654230"/>
+                  </a:lnTo>
+                  <a:lnTo>
+                    <a:pt x="2793278" y="1679749"/>
+                  </a:lnTo>
+                  <a:lnTo>
+                    <a:pt x="2864901" y="1704629"/>
+                  </a:lnTo>
+                  <a:lnTo>
+                    <a:pt x="2936523" y="1728884"/>
+                  </a:lnTo>
+                  <a:lnTo>
+                    <a:pt x="3008146" y="1752530"/>
+                  </a:lnTo>
+                  <a:lnTo>
+                    <a:pt x="3079768" y="1775584"/>
+                  </a:lnTo>
+                  <a:lnTo>
+                    <a:pt x="3151391" y="1798058"/>
+                  </a:lnTo>
+                  <a:lnTo>
+                    <a:pt x="3223013" y="1819969"/>
+                  </a:lnTo>
+                  <a:lnTo>
+                    <a:pt x="3294636" y="1841330"/>
+                  </a:lnTo>
+                  <a:lnTo>
+                    <a:pt x="3366258" y="1846999"/>
+                  </a:lnTo>
+                  <a:lnTo>
+                    <a:pt x="3437881" y="1852259"/>
+                  </a:lnTo>
+                  <a:lnTo>
+                    <a:pt x="3509503" y="1857485"/>
+                  </a:lnTo>
+                  <a:lnTo>
+                    <a:pt x="3581126" y="1862678"/>
+                  </a:lnTo>
+                  <a:lnTo>
+                    <a:pt x="3652748" y="1867838"/>
+                  </a:lnTo>
+                  <a:lnTo>
+                    <a:pt x="3724371" y="1872965"/>
+                  </a:lnTo>
+                  <a:lnTo>
+                    <a:pt x="3795993" y="1878060"/>
+                  </a:lnTo>
+                  <a:lnTo>
+                    <a:pt x="3867616" y="1883122"/>
+                  </a:lnTo>
+                  <a:lnTo>
+                    <a:pt x="3939238" y="1888151"/>
+                  </a:lnTo>
+                  <a:lnTo>
+                    <a:pt x="4010861" y="1893149"/>
+                  </a:lnTo>
+                  <a:lnTo>
+                    <a:pt x="4082483" y="1898114"/>
+                  </a:lnTo>
+                  <a:lnTo>
+                    <a:pt x="4154106" y="1903048"/>
+                  </a:lnTo>
+                  <a:lnTo>
+                    <a:pt x="4225729" y="1907950"/>
+                  </a:lnTo>
+                  <a:lnTo>
+                    <a:pt x="4297351" y="1912822"/>
+                  </a:lnTo>
+                  <a:lnTo>
+                    <a:pt x="4368974" y="1917662"/>
+                  </a:lnTo>
+                  <a:lnTo>
+                    <a:pt x="4440596" y="1922471"/>
+                  </a:lnTo>
+                  <a:lnTo>
+                    <a:pt x="4512219" y="1927249"/>
+                  </a:lnTo>
+                  <a:lnTo>
+                    <a:pt x="4583841" y="1931997"/>
+                  </a:lnTo>
+                  <a:lnTo>
+                    <a:pt x="4655464" y="1936715"/>
+                  </a:lnTo>
+                  <a:lnTo>
+                    <a:pt x="4727086" y="1941402"/>
+                  </a:lnTo>
+                  <a:lnTo>
+                    <a:pt x="4798709" y="1946060"/>
+                  </a:lnTo>
+                  <a:lnTo>
+                    <a:pt x="4870331" y="1950688"/>
+                  </a:lnTo>
+                  <a:lnTo>
+                    <a:pt x="4941954" y="1955286"/>
+                  </a:lnTo>
+                  <a:lnTo>
+                    <a:pt x="5013576" y="1959855"/>
+                  </a:lnTo>
+                  <a:lnTo>
+                    <a:pt x="5085199" y="1964395"/>
+                  </a:lnTo>
+                  <a:lnTo>
+                    <a:pt x="5156821" y="1968906"/>
+                  </a:lnTo>
+                  <a:lnTo>
+                    <a:pt x="5228444" y="1973388"/>
+                  </a:lnTo>
+                  <a:lnTo>
+                    <a:pt x="5300066" y="1977842"/>
+                  </a:lnTo>
+                  <a:lnTo>
+                    <a:pt x="5371689" y="1982267"/>
+                  </a:lnTo>
+                  <a:lnTo>
+                    <a:pt x="5443311" y="1986664"/>
+                  </a:lnTo>
+                  <a:lnTo>
+                    <a:pt x="5514934" y="1991033"/>
+                  </a:lnTo>
+                  <a:lnTo>
+                    <a:pt x="5586557" y="1995374"/>
+                  </a:lnTo>
+                  <a:lnTo>
+                    <a:pt x="5658179" y="1999687"/>
+                  </a:lnTo>
+                  <a:lnTo>
+                    <a:pt x="5729802" y="2003972"/>
+                  </a:lnTo>
+                  <a:lnTo>
+                    <a:pt x="5801424" y="2008231"/>
+                  </a:lnTo>
+                  <a:lnTo>
+                    <a:pt x="5873047" y="2012462"/>
+                  </a:lnTo>
+                  <a:lnTo>
+                    <a:pt x="5944669" y="2016666"/>
+                  </a:lnTo>
+                  <a:lnTo>
+                    <a:pt x="6016292" y="2020844"/>
+                  </a:lnTo>
+                  <a:lnTo>
+                    <a:pt x="6087914" y="2024994"/>
+                  </a:lnTo>
+                  <a:lnTo>
+                    <a:pt x="6159537" y="2029119"/>
+                  </a:lnTo>
+                  <a:lnTo>
+                    <a:pt x="6231159" y="2033216"/>
+                  </a:lnTo>
+                  <a:lnTo>
+                    <a:pt x="6302782" y="2037288"/>
+                  </a:lnTo>
+                  <a:lnTo>
+                    <a:pt x="6374404" y="2041334"/>
+                  </a:lnTo>
+                  <a:lnTo>
+                    <a:pt x="6446027" y="2045354"/>
+                  </a:lnTo>
+                  <a:lnTo>
+                    <a:pt x="6517649" y="2049348"/>
+                  </a:lnTo>
+                  <a:lnTo>
+                    <a:pt x="6589272" y="2053317"/>
+                  </a:lnTo>
+                  <a:lnTo>
+                    <a:pt x="6660894" y="2057261"/>
+                  </a:lnTo>
+                  <a:lnTo>
+                    <a:pt x="6732517" y="2061179"/>
+                  </a:lnTo>
+                  <a:lnTo>
+                    <a:pt x="6804139" y="2065072"/>
+                  </a:lnTo>
+                  <a:lnTo>
+                    <a:pt x="6875762" y="2068941"/>
+                  </a:lnTo>
+                  <a:lnTo>
+                    <a:pt x="6947385" y="2072784"/>
+                  </a:lnTo>
+                  <a:lnTo>
+                    <a:pt x="7019007" y="2076604"/>
+                  </a:lnTo>
+                  <a:lnTo>
+                    <a:pt x="7090630" y="2080399"/>
+                  </a:lnTo>
+                </a:path>
+              </a:pathLst>
+            </a:custGeom>
+          </p:spPr>
+          <p:txBody>
+            <a:bodyPr/>
+            <a:lstStyle/>
+            <a:p/>
+          </p:txBody>
+        </p:sp>
+        <p:sp>
+          <p:nvSpPr>
             <p:cNvPr id="22" name="pl22"/>
             <p:cNvSpPr/>
             <p:nvPr/>
           </p:nvSpPr>
           <p:spPr>
             <a:xfrm>
-              <a:off x="817517" y="3100799"/>
-              <a:ext cx="7392041" cy="1865554"/>
+              <a:off x="1172049" y="4443586"/>
+              <a:ext cx="7090630" cy="897817"/>
             </a:xfrm>
             <a:custGeom>
               <a:avLst/>
               <a:pathLst>
-                <a:path w="7392041" h="1865554">
+                <a:path w="7090630" h="897817">
                   <a:moveTo>
+                    <a:pt x="7090630" y="897817"/>
+                  </a:moveTo>
+                  <a:lnTo>
+                    <a:pt x="7019007" y="892262"/>
+                  </a:lnTo>
+                  <a:lnTo>
+                    <a:pt x="6947385" y="886564"/>
+                  </a:lnTo>
+                  <a:lnTo>
+                    <a:pt x="6875762" y="880719"/>
+                  </a:lnTo>
+                  <a:lnTo>
+                    <a:pt x="6804139" y="874723"/>
+                  </a:lnTo>
+                  <a:lnTo>
+                    <a:pt x="6732517" y="868574"/>
+                  </a:lnTo>
+                  <a:lnTo>
+                    <a:pt x="6660894" y="862266"/>
+                  </a:lnTo>
+                  <a:lnTo>
+                    <a:pt x="6589272" y="855796"/>
+                  </a:lnTo>
+                  <a:lnTo>
+                    <a:pt x="6517649" y="849159"/>
+                  </a:lnTo>
+                  <a:lnTo>
+                    <a:pt x="6446027" y="842351"/>
+                  </a:lnTo>
+                  <a:lnTo>
+                    <a:pt x="6374404" y="835368"/>
+                  </a:lnTo>
+                  <a:lnTo>
+                    <a:pt x="6302782" y="828206"/>
+                  </a:lnTo>
+                  <a:lnTo>
+                    <a:pt x="6231159" y="820859"/>
+                  </a:lnTo>
+                  <a:lnTo>
+                    <a:pt x="6159537" y="813323"/>
+                  </a:lnTo>
+                  <a:lnTo>
+                    <a:pt x="6087914" y="805593"/>
+                  </a:lnTo>
+                  <a:lnTo>
+                    <a:pt x="6016292" y="797664"/>
+                  </a:lnTo>
+                  <a:lnTo>
+                    <a:pt x="5944669" y="789531"/>
+                  </a:lnTo>
+                  <a:lnTo>
+                    <a:pt x="5873047" y="781189"/>
+                  </a:lnTo>
+                  <a:lnTo>
+                    <a:pt x="5801424" y="772632"/>
+                  </a:lnTo>
+                  <a:lnTo>
+                    <a:pt x="5729802" y="763855"/>
+                  </a:lnTo>
+                  <a:lnTo>
+                    <a:pt x="5658179" y="754851"/>
+                  </a:lnTo>
+                  <a:lnTo>
+                    <a:pt x="5586557" y="745617"/>
+                  </a:lnTo>
+                  <a:lnTo>
+                    <a:pt x="5514934" y="736144"/>
+                  </a:lnTo>
+                  <a:lnTo>
+                    <a:pt x="5443311" y="726428"/>
+                  </a:lnTo>
+                  <a:lnTo>
+                    <a:pt x="5371689" y="716461"/>
+                  </a:lnTo>
+                  <a:lnTo>
+                    <a:pt x="5300066" y="706238"/>
+                  </a:lnTo>
+                  <a:lnTo>
+                    <a:pt x="5228444" y="695752"/>
+                  </a:lnTo>
+                  <a:lnTo>
+                    <a:pt x="5156821" y="684997"/>
+                  </a:lnTo>
+                  <a:lnTo>
+                    <a:pt x="5085199" y="673964"/>
+                  </a:lnTo>
+                  <a:lnTo>
+                    <a:pt x="5013576" y="662647"/>
+                  </a:lnTo>
+                  <a:lnTo>
+                    <a:pt x="4941954" y="651039"/>
+                  </a:lnTo>
+                  <a:lnTo>
+                    <a:pt x="4870331" y="639133"/>
+                  </a:lnTo>
+                  <a:lnTo>
+                    <a:pt x="4798709" y="626919"/>
+                  </a:lnTo>
+                  <a:lnTo>
+                    <a:pt x="4727086" y="614392"/>
+                  </a:lnTo>
+                  <a:lnTo>
+                    <a:pt x="4655464" y="601542"/>
+                  </a:lnTo>
+                  <a:lnTo>
+                    <a:pt x="4583841" y="588361"/>
+                  </a:lnTo>
+                  <a:lnTo>
+                    <a:pt x="4512219" y="574842"/>
+                  </a:lnTo>
+                  <a:lnTo>
+                    <a:pt x="4440596" y="560974"/>
+                  </a:lnTo>
+                  <a:lnTo>
+                    <a:pt x="4368974" y="546749"/>
+                  </a:lnTo>
+                  <a:lnTo>
+                    <a:pt x="4297351" y="532158"/>
+                  </a:lnTo>
+                  <a:lnTo>
+                    <a:pt x="4225729" y="517192"/>
+                  </a:lnTo>
+                  <a:lnTo>
+                    <a:pt x="4154106" y="501840"/>
+                  </a:lnTo>
+                  <a:lnTo>
+                    <a:pt x="4082483" y="486094"/>
+                  </a:lnTo>
+                  <a:lnTo>
+                    <a:pt x="4010861" y="469942"/>
+                  </a:lnTo>
+                  <a:lnTo>
+                    <a:pt x="3939238" y="453374"/>
+                  </a:lnTo>
+                  <a:lnTo>
+                    <a:pt x="3867616" y="436380"/>
+                  </a:lnTo>
+                  <a:lnTo>
+                    <a:pt x="3795993" y="418949"/>
+                  </a:lnTo>
+                  <a:lnTo>
+                    <a:pt x="3724371" y="401069"/>
+                  </a:lnTo>
+                  <a:lnTo>
+                    <a:pt x="3652748" y="382728"/>
+                  </a:lnTo>
+                  <a:lnTo>
+                    <a:pt x="3581126" y="363916"/>
+                  </a:lnTo>
+                  <a:lnTo>
+                    <a:pt x="3509503" y="344620"/>
+                  </a:lnTo>
+                  <a:lnTo>
+                    <a:pt x="3437881" y="324827"/>
+                  </a:lnTo>
+                  <a:lnTo>
+                    <a:pt x="3366258" y="304524"/>
+                  </a:lnTo>
+                  <a:lnTo>
+                    <a:pt x="3294636" y="284074"/>
+                  </a:lnTo>
+                  <a:lnTo>
+                    <a:pt x="3223013" y="278746"/>
+                  </a:lnTo>
+                  <a:lnTo>
+                    <a:pt x="3151391" y="273384"/>
+                  </a:lnTo>
+                  <a:lnTo>
+                    <a:pt x="3079768" y="267987"/>
+                  </a:lnTo>
+                  <a:lnTo>
+                    <a:pt x="3008146" y="262556"/>
+                  </a:lnTo>
+                  <a:lnTo>
+                    <a:pt x="2936523" y="257090"/>
+                  </a:lnTo>
+                  <a:lnTo>
+                    <a:pt x="2864901" y="251589"/>
+                  </a:lnTo>
+                  <a:lnTo>
+                    <a:pt x="2793278" y="246052"/>
+                  </a:lnTo>
+                  <a:lnTo>
+                    <a:pt x="2721655" y="240480"/>
+                  </a:lnTo>
+                  <a:lnTo>
+                    <a:pt x="2650033" y="234873"/>
+                  </a:lnTo>
+                  <a:lnTo>
+                    <a:pt x="2578410" y="229229"/>
+                  </a:lnTo>
+                  <a:lnTo>
+                    <a:pt x="2506788" y="223549"/>
+                  </a:lnTo>
+                  <a:lnTo>
+                    <a:pt x="2435165" y="217832"/>
+                  </a:lnTo>
+                  <a:lnTo>
+                    <a:pt x="2363543" y="212079"/>
+                  </a:lnTo>
+                  <a:lnTo>
+                    <a:pt x="2291920" y="206289"/>
+                  </a:lnTo>
+                  <a:lnTo>
+                    <a:pt x="2220298" y="200461"/>
+                  </a:lnTo>
+                  <a:lnTo>
+                    <a:pt x="2148675" y="194597"/>
+                  </a:lnTo>
+                  <a:lnTo>
+                    <a:pt x="2077053" y="188694"/>
+                  </a:lnTo>
+                  <a:lnTo>
+                    <a:pt x="2005430" y="182754"/>
+                  </a:lnTo>
+                  <a:lnTo>
+                    <a:pt x="1933808" y="176775"/>
+                  </a:lnTo>
+                  <a:lnTo>
+                    <a:pt x="1862185" y="170758"/>
+                  </a:lnTo>
+                  <a:lnTo>
+                    <a:pt x="1790563" y="164703"/>
+                  </a:lnTo>
+                  <a:lnTo>
+                    <a:pt x="1718940" y="158608"/>
+                  </a:lnTo>
+                  <a:lnTo>
+                    <a:pt x="1647318" y="152474"/>
+                  </a:lnTo>
+                  <a:lnTo>
+                    <a:pt x="1575695" y="146301"/>
+                  </a:lnTo>
+                  <a:lnTo>
+                    <a:pt x="1504073" y="140089"/>
+                  </a:lnTo>
+                  <a:lnTo>
+                    <a:pt x="1432450" y="133836"/>
+                  </a:lnTo>
+                  <a:lnTo>
+                    <a:pt x="1360827" y="127544"/>
+                  </a:lnTo>
+                  <a:lnTo>
+                    <a:pt x="1289205" y="121210"/>
+                  </a:lnTo>
+                  <a:lnTo>
+                    <a:pt x="1217582" y="114837"/>
+                  </a:lnTo>
+                  <a:lnTo>
+                    <a:pt x="1145960" y="108422"/>
+                  </a:lnTo>
+                  <a:lnTo>
+                    <a:pt x="1074337" y="101966"/>
+                  </a:lnTo>
+                  <a:lnTo>
+                    <a:pt x="1002715" y="95469"/>
+                  </a:lnTo>
+                  <a:lnTo>
+                    <a:pt x="931092" y="88930"/>
+                  </a:lnTo>
+                  <a:lnTo>
+                    <a:pt x="859470" y="82348"/>
+                  </a:lnTo>
+                  <a:lnTo>
+                    <a:pt x="787847" y="75725"/>
+                  </a:lnTo>
+                  <a:lnTo>
+                    <a:pt x="716225" y="69059"/>
+                  </a:lnTo>
+                  <a:lnTo>
+                    <a:pt x="644602" y="62350"/>
+                  </a:lnTo>
+                  <a:lnTo>
+                    <a:pt x="572980" y="55599"/>
+                  </a:lnTo>
+                  <a:lnTo>
+                    <a:pt x="501357" y="48803"/>
+                  </a:lnTo>
+                  <a:lnTo>
+                    <a:pt x="429735" y="41965"/>
+                  </a:lnTo>
+                  <a:lnTo>
+                    <a:pt x="358112" y="35082"/>
+                  </a:lnTo>
+                  <a:lnTo>
+                    <a:pt x="286490" y="28155"/>
+                  </a:lnTo>
+                  <a:lnTo>
+                    <a:pt x="214867" y="21184"/>
+                  </a:lnTo>
+                  <a:lnTo>
+                    <a:pt x="143245" y="14167"/>
+                  </a:lnTo>
+                  <a:lnTo>
+                    <a:pt x="71622" y="7106"/>
+                  </a:lnTo>
+                  <a:lnTo>
                     <a:pt x="0" y="0"/>
-                  </a:moveTo>
-                  <a:lnTo>
-                    <a:pt x="53901" y="43339"/>
-                  </a:lnTo>
-                  <a:lnTo>
-                    <a:pt x="131145" y="103887"/>
-                  </a:lnTo>
-                  <a:lnTo>
-                    <a:pt x="208389" y="162917"/>
-                  </a:lnTo>
-                  <a:lnTo>
-                    <a:pt x="285632" y="220465"/>
-                  </a:lnTo>
-                  <a:lnTo>
-                    <a:pt x="362876" y="276569"/>
-                  </a:lnTo>
-                  <a:lnTo>
-                    <a:pt x="440119" y="331265"/>
-                  </a:lnTo>
-                  <a:lnTo>
-                    <a:pt x="517363" y="384590"/>
-                  </a:lnTo>
-                  <a:lnTo>
-                    <a:pt x="594606" y="436576"/>
-                  </a:lnTo>
-                  <a:lnTo>
-                    <a:pt x="671850" y="487257"/>
-                  </a:lnTo>
-                  <a:lnTo>
-                    <a:pt x="749094" y="536667"/>
-                  </a:lnTo>
-                  <a:lnTo>
-                    <a:pt x="826337" y="584837"/>
-                  </a:lnTo>
-                  <a:lnTo>
-                    <a:pt x="903581" y="631799"/>
-                  </a:lnTo>
-                  <a:lnTo>
-                    <a:pt x="980824" y="677582"/>
-                  </a:lnTo>
-                  <a:lnTo>
-                    <a:pt x="1058068" y="722217"/>
-                  </a:lnTo>
-                  <a:lnTo>
-                    <a:pt x="1135311" y="765731"/>
-                  </a:lnTo>
-                  <a:lnTo>
-                    <a:pt x="1212555" y="808154"/>
-                  </a:lnTo>
-                  <a:lnTo>
-                    <a:pt x="1289799" y="849512"/>
-                  </a:lnTo>
-                  <a:lnTo>
-                    <a:pt x="1367042" y="889832"/>
-                  </a:lnTo>
-                  <a:lnTo>
-                    <a:pt x="1444286" y="929141"/>
-                  </a:lnTo>
-                  <a:lnTo>
-                    <a:pt x="1521529" y="967464"/>
-                  </a:lnTo>
-                  <a:lnTo>
-                    <a:pt x="1598773" y="1004824"/>
-                  </a:lnTo>
-                  <a:lnTo>
-                    <a:pt x="1676016" y="1041248"/>
-                  </a:lnTo>
-                  <a:lnTo>
-                    <a:pt x="1753260" y="1076757"/>
-                  </a:lnTo>
-                  <a:lnTo>
-                    <a:pt x="1830504" y="1111376"/>
-                  </a:lnTo>
-                  <a:lnTo>
-                    <a:pt x="1907747" y="1145126"/>
-                  </a:lnTo>
-                  <a:lnTo>
-                    <a:pt x="1984991" y="1178029"/>
-                  </a:lnTo>
-                  <a:lnTo>
-                    <a:pt x="2062234" y="1210106"/>
-                  </a:lnTo>
-                  <a:lnTo>
-                    <a:pt x="2139478" y="1241379"/>
-                  </a:lnTo>
-                  <a:lnTo>
-                    <a:pt x="2216721" y="1271867"/>
-                  </a:lnTo>
-                  <a:lnTo>
-                    <a:pt x="2293965" y="1301590"/>
-                  </a:lnTo>
-                  <a:lnTo>
-                    <a:pt x="2371209" y="1330567"/>
-                  </a:lnTo>
-                  <a:lnTo>
-                    <a:pt x="2448452" y="1358817"/>
-                  </a:lnTo>
-                  <a:lnTo>
-                    <a:pt x="2525696" y="1386358"/>
-                  </a:lnTo>
-                  <a:lnTo>
-                    <a:pt x="2602939" y="1413209"/>
-                  </a:lnTo>
-                  <a:lnTo>
-                    <a:pt x="2680183" y="1439385"/>
-                  </a:lnTo>
-                  <a:lnTo>
-                    <a:pt x="2757426" y="1464905"/>
-                  </a:lnTo>
-                  <a:lnTo>
-                    <a:pt x="2834670" y="1489784"/>
-                  </a:lnTo>
-                  <a:lnTo>
-                    <a:pt x="2911914" y="1514039"/>
-                  </a:lnTo>
-                  <a:lnTo>
-                    <a:pt x="2989157" y="1537686"/>
-                  </a:lnTo>
-                  <a:lnTo>
-                    <a:pt x="3066401" y="1560739"/>
-                  </a:lnTo>
-                  <a:lnTo>
-                    <a:pt x="3143644" y="1583214"/>
-                  </a:lnTo>
-                  <a:lnTo>
-                    <a:pt x="3220888" y="1605124"/>
-                  </a:lnTo>
-                  <a:lnTo>
-                    <a:pt x="3298131" y="1626485"/>
-                  </a:lnTo>
-                  <a:lnTo>
-                    <a:pt x="3375375" y="1632154"/>
-                  </a:lnTo>
-                  <a:lnTo>
-                    <a:pt x="3452619" y="1637414"/>
-                  </a:lnTo>
-                  <a:lnTo>
-                    <a:pt x="3529862" y="1642640"/>
-                  </a:lnTo>
-                  <a:lnTo>
-                    <a:pt x="3607106" y="1647834"/>
-                  </a:lnTo>
-                  <a:lnTo>
-                    <a:pt x="3684349" y="1652994"/>
-                  </a:lnTo>
-                  <a:lnTo>
-                    <a:pt x="3761593" y="1658121"/>
-                  </a:lnTo>
-                  <a:lnTo>
-                    <a:pt x="3838836" y="1663215"/>
-                  </a:lnTo>
-                  <a:lnTo>
-                    <a:pt x="3916080" y="1668277"/>
-                  </a:lnTo>
-                  <a:lnTo>
-                    <a:pt x="3993324" y="1673306"/>
-                  </a:lnTo>
-                  <a:lnTo>
-                    <a:pt x="4070567" y="1678304"/>
-                  </a:lnTo>
-                  <a:lnTo>
-                    <a:pt x="4147811" y="1683269"/>
-                  </a:lnTo>
-                  <a:lnTo>
-                    <a:pt x="4225054" y="1688203"/>
-                  </a:lnTo>
-                  <a:lnTo>
-                    <a:pt x="4302298" y="1693106"/>
-                  </a:lnTo>
-                  <a:lnTo>
-                    <a:pt x="4379541" y="1697977"/>
-                  </a:lnTo>
-                  <a:lnTo>
-                    <a:pt x="4456785" y="1702817"/>
-                  </a:lnTo>
-                  <a:lnTo>
-                    <a:pt x="4534029" y="1707626"/>
-                  </a:lnTo>
-                  <a:lnTo>
-                    <a:pt x="4611272" y="1712404"/>
-                  </a:lnTo>
-                  <a:lnTo>
-                    <a:pt x="4688516" y="1717152"/>
-                  </a:lnTo>
-                  <a:lnTo>
-                    <a:pt x="4765759" y="1721870"/>
-                  </a:lnTo>
-                  <a:lnTo>
-                    <a:pt x="4843003" y="1726558"/>
-                  </a:lnTo>
-                  <a:lnTo>
-                    <a:pt x="4920246" y="1731215"/>
-                  </a:lnTo>
-                  <a:lnTo>
-                    <a:pt x="4997490" y="1735843"/>
-                  </a:lnTo>
-                  <a:lnTo>
-                    <a:pt x="5074734" y="1740442"/>
-                  </a:lnTo>
-                  <a:lnTo>
-                    <a:pt x="5151977" y="1745011"/>
-                  </a:lnTo>
-                  <a:lnTo>
-                    <a:pt x="5229221" y="1749550"/>
-                  </a:lnTo>
-                  <a:lnTo>
-                    <a:pt x="5306464" y="1754061"/>
-                  </a:lnTo>
-                  <a:lnTo>
-                    <a:pt x="5383708" y="1758544"/>
-                  </a:lnTo>
-                  <a:lnTo>
-                    <a:pt x="5460951" y="1762997"/>
-                  </a:lnTo>
-                  <a:lnTo>
-                    <a:pt x="5538195" y="1767422"/>
-                  </a:lnTo>
-                  <a:lnTo>
-                    <a:pt x="5615439" y="1771819"/>
-                  </a:lnTo>
-                  <a:lnTo>
-                    <a:pt x="5692682" y="1776188"/>
-                  </a:lnTo>
-                  <a:lnTo>
-                    <a:pt x="5769926" y="1780529"/>
-                  </a:lnTo>
-                  <a:lnTo>
-                    <a:pt x="5847169" y="1784842"/>
-                  </a:lnTo>
-                  <a:lnTo>
-                    <a:pt x="5924413" y="1789128"/>
-                  </a:lnTo>
-                  <a:lnTo>
-                    <a:pt x="6001656" y="1793386"/>
-                  </a:lnTo>
-                  <a:lnTo>
-                    <a:pt x="6078900" y="1797617"/>
-                  </a:lnTo>
-                  <a:lnTo>
-                    <a:pt x="6156144" y="1801822"/>
-                  </a:lnTo>
-                  <a:lnTo>
-                    <a:pt x="6233387" y="1805999"/>
-                  </a:lnTo>
-                  <a:lnTo>
-                    <a:pt x="6310631" y="1810150"/>
-                  </a:lnTo>
-                  <a:lnTo>
-                    <a:pt x="6387874" y="1814274"/>
-                  </a:lnTo>
-                  <a:lnTo>
-                    <a:pt x="6465118" y="1818372"/>
-                  </a:lnTo>
-                  <a:lnTo>
-                    <a:pt x="6542361" y="1822443"/>
-                  </a:lnTo>
-                  <a:lnTo>
-                    <a:pt x="6619605" y="1826489"/>
-                  </a:lnTo>
-                  <a:lnTo>
-                    <a:pt x="6696849" y="1830509"/>
-                  </a:lnTo>
-                  <a:lnTo>
-                    <a:pt x="6774092" y="1834504"/>
-                  </a:lnTo>
-                  <a:lnTo>
-                    <a:pt x="6851336" y="1838472"/>
-                  </a:lnTo>
-                  <a:lnTo>
-                    <a:pt x="6928579" y="1842416"/>
-                  </a:lnTo>
-                  <a:lnTo>
-                    <a:pt x="7005823" y="1846334"/>
-                  </a:lnTo>
-                  <a:lnTo>
-                    <a:pt x="7083066" y="1850227"/>
-                  </a:lnTo>
-                  <a:lnTo>
-                    <a:pt x="7160310" y="1854096"/>
-                  </a:lnTo>
-                  <a:lnTo>
-                    <a:pt x="7237554" y="1857940"/>
-                  </a:lnTo>
-                  <a:lnTo>
-                    <a:pt x="7314797" y="1861759"/>
-                  </a:lnTo>
-                  <a:lnTo>
-                    <a:pt x="7392041" y="1865554"/>
                   </a:lnTo>
                 </a:path>
               </a:pathLst>
@@ -3931,619 +4240,312 @@
           </p:nvSpPr>
           <p:spPr>
             <a:xfrm>
-              <a:off x="817517" y="4466876"/>
-              <a:ext cx="7392041" cy="874527"/>
+              <a:off x="1172049" y="3832452"/>
+              <a:ext cx="7090630" cy="1367666"/>
             </a:xfrm>
             <a:custGeom>
               <a:avLst/>
               <a:pathLst>
-                <a:path w="7392041" h="874527">
-                  <a:moveTo>
-                    <a:pt x="7392041" y="874527"/>
-                  </a:moveTo>
-                  <a:lnTo>
-                    <a:pt x="7314797" y="868971"/>
-                  </a:lnTo>
-                  <a:lnTo>
-                    <a:pt x="7237554" y="863273"/>
-                  </a:lnTo>
-                  <a:lnTo>
-                    <a:pt x="7160310" y="857428"/>
-                  </a:lnTo>
-                  <a:lnTo>
-                    <a:pt x="7083066" y="851433"/>
-                  </a:lnTo>
-                  <a:lnTo>
-                    <a:pt x="7005823" y="845283"/>
-                  </a:lnTo>
-                  <a:lnTo>
-                    <a:pt x="6928579" y="838975"/>
-                  </a:lnTo>
-                  <a:lnTo>
-                    <a:pt x="6851336" y="832505"/>
-                  </a:lnTo>
-                  <a:lnTo>
-                    <a:pt x="6774092" y="825868"/>
-                  </a:lnTo>
-                  <a:lnTo>
-                    <a:pt x="6696849" y="819060"/>
-                  </a:lnTo>
-                  <a:lnTo>
-                    <a:pt x="6619605" y="812078"/>
-                  </a:lnTo>
-                  <a:lnTo>
-                    <a:pt x="6542361" y="804915"/>
-                  </a:lnTo>
-                  <a:lnTo>
-                    <a:pt x="6465118" y="797568"/>
-                  </a:lnTo>
-                  <a:lnTo>
-                    <a:pt x="6387874" y="790032"/>
-                  </a:lnTo>
-                  <a:lnTo>
-                    <a:pt x="6310631" y="782302"/>
-                  </a:lnTo>
-                  <a:lnTo>
-                    <a:pt x="6233387" y="774373"/>
-                  </a:lnTo>
-                  <a:lnTo>
-                    <a:pt x="6156144" y="766240"/>
-                  </a:lnTo>
-                  <a:lnTo>
-                    <a:pt x="6078900" y="757898"/>
-                  </a:lnTo>
-                  <a:lnTo>
-                    <a:pt x="6001656" y="749341"/>
-                  </a:lnTo>
-                  <a:lnTo>
-                    <a:pt x="5924413" y="740564"/>
-                  </a:lnTo>
-                  <a:lnTo>
-                    <a:pt x="5847169" y="731561"/>
-                  </a:lnTo>
-                  <a:lnTo>
-                    <a:pt x="5769926" y="722326"/>
-                  </a:lnTo>
-                  <a:lnTo>
-                    <a:pt x="5692682" y="712853"/>
-                  </a:lnTo>
-                  <a:lnTo>
-                    <a:pt x="5615439" y="703137"/>
-                  </a:lnTo>
-                  <a:lnTo>
-                    <a:pt x="5538195" y="693171"/>
-                  </a:lnTo>
-                  <a:lnTo>
-                    <a:pt x="5460951" y="682948"/>
-                  </a:lnTo>
-                  <a:lnTo>
-                    <a:pt x="5383708" y="672462"/>
-                  </a:lnTo>
-                  <a:lnTo>
-                    <a:pt x="5306464" y="661706"/>
-                  </a:lnTo>
-                  <a:lnTo>
-                    <a:pt x="5229221" y="650673"/>
-                  </a:lnTo>
-                  <a:lnTo>
-                    <a:pt x="5151977" y="639357"/>
-                  </a:lnTo>
-                  <a:lnTo>
-                    <a:pt x="5074734" y="627749"/>
-                  </a:lnTo>
-                  <a:lnTo>
-                    <a:pt x="4997490" y="615842"/>
-                  </a:lnTo>
-                  <a:lnTo>
-                    <a:pt x="4920246" y="603629"/>
-                  </a:lnTo>
-                  <a:lnTo>
-                    <a:pt x="4843003" y="591101"/>
-                  </a:lnTo>
-                  <a:lnTo>
-                    <a:pt x="4765759" y="578251"/>
-                  </a:lnTo>
-                  <a:lnTo>
-                    <a:pt x="4688516" y="565071"/>
-                  </a:lnTo>
-                  <a:lnTo>
-                    <a:pt x="4611272" y="551551"/>
-                  </a:lnTo>
-                  <a:lnTo>
-                    <a:pt x="4534029" y="537683"/>
-                  </a:lnTo>
-                  <a:lnTo>
-                    <a:pt x="4456785" y="523458"/>
-                  </a:lnTo>
-                  <a:lnTo>
-                    <a:pt x="4379541" y="508868"/>
-                  </a:lnTo>
-                  <a:lnTo>
-                    <a:pt x="4302298" y="493901"/>
-                  </a:lnTo>
-                  <a:lnTo>
-                    <a:pt x="4225054" y="478550"/>
-                  </a:lnTo>
-                  <a:lnTo>
-                    <a:pt x="4147811" y="462803"/>
-                  </a:lnTo>
-                  <a:lnTo>
-                    <a:pt x="4070567" y="446651"/>
-                  </a:lnTo>
-                  <a:lnTo>
-                    <a:pt x="3993324" y="430083"/>
-                  </a:lnTo>
-                  <a:lnTo>
-                    <a:pt x="3916080" y="413089"/>
-                  </a:lnTo>
-                  <a:lnTo>
-                    <a:pt x="3838836" y="395658"/>
-                  </a:lnTo>
-                  <a:lnTo>
-                    <a:pt x="3761593" y="377778"/>
-                  </a:lnTo>
-                  <a:lnTo>
-                    <a:pt x="3684349" y="359438"/>
-                  </a:lnTo>
-                  <a:lnTo>
-                    <a:pt x="3607106" y="340625"/>
-                  </a:lnTo>
-                  <a:lnTo>
-                    <a:pt x="3529862" y="321329"/>
-                  </a:lnTo>
-                  <a:lnTo>
-                    <a:pt x="3452619" y="301536"/>
-                  </a:lnTo>
-                  <a:lnTo>
-                    <a:pt x="3375375" y="281233"/>
-                  </a:lnTo>
-                  <a:lnTo>
-                    <a:pt x="3298131" y="260783"/>
-                  </a:lnTo>
-                  <a:lnTo>
-                    <a:pt x="3220888" y="255455"/>
-                  </a:lnTo>
-                  <a:lnTo>
-                    <a:pt x="3143644" y="250093"/>
-                  </a:lnTo>
-                  <a:lnTo>
-                    <a:pt x="3066401" y="244697"/>
-                  </a:lnTo>
-                  <a:lnTo>
-                    <a:pt x="2989157" y="239265"/>
-                  </a:lnTo>
-                  <a:lnTo>
-                    <a:pt x="2911914" y="233799"/>
-                  </a:lnTo>
-                  <a:lnTo>
-                    <a:pt x="2834670" y="228298"/>
-                  </a:lnTo>
-                  <a:lnTo>
-                    <a:pt x="2757426" y="222762"/>
-                  </a:lnTo>
-                  <a:lnTo>
-                    <a:pt x="2680183" y="217190"/>
-                  </a:lnTo>
-                  <a:lnTo>
-                    <a:pt x="2602939" y="211582"/>
-                  </a:lnTo>
-                  <a:lnTo>
-                    <a:pt x="2525696" y="205938"/>
-                  </a:lnTo>
-                  <a:lnTo>
-                    <a:pt x="2448452" y="200258"/>
-                  </a:lnTo>
-                  <a:lnTo>
-                    <a:pt x="2371209" y="194542"/>
-                  </a:lnTo>
-                  <a:lnTo>
-                    <a:pt x="2293965" y="188788"/>
-                  </a:lnTo>
-                  <a:lnTo>
-                    <a:pt x="2216721" y="182998"/>
-                  </a:lnTo>
-                  <a:lnTo>
-                    <a:pt x="2139478" y="177171"/>
-                  </a:lnTo>
-                  <a:lnTo>
-                    <a:pt x="2062234" y="171306"/>
-                  </a:lnTo>
-                  <a:lnTo>
-                    <a:pt x="1984991" y="165403"/>
-                  </a:lnTo>
-                  <a:lnTo>
-                    <a:pt x="1907747" y="159463"/>
-                  </a:lnTo>
-                  <a:lnTo>
-                    <a:pt x="1830504" y="153484"/>
-                  </a:lnTo>
-                  <a:lnTo>
-                    <a:pt x="1753260" y="147467"/>
-                  </a:lnTo>
-                  <a:lnTo>
-                    <a:pt x="1676016" y="141412"/>
-                  </a:lnTo>
-                  <a:lnTo>
-                    <a:pt x="1598773" y="135317"/>
-                  </a:lnTo>
-                  <a:lnTo>
-                    <a:pt x="1521529" y="129184"/>
-                  </a:lnTo>
-                  <a:lnTo>
-                    <a:pt x="1444286" y="123011"/>
-                  </a:lnTo>
-                  <a:lnTo>
-                    <a:pt x="1367042" y="116798"/>
-                  </a:lnTo>
-                  <a:lnTo>
-                    <a:pt x="1289799" y="110546"/>
-                  </a:lnTo>
-                  <a:lnTo>
-                    <a:pt x="1212555" y="104253"/>
-                  </a:lnTo>
-                  <a:lnTo>
-                    <a:pt x="1135311" y="97920"/>
-                  </a:lnTo>
-                  <a:lnTo>
-                    <a:pt x="1058068" y="91546"/>
-                  </a:lnTo>
-                  <a:lnTo>
-                    <a:pt x="980824" y="85131"/>
-                  </a:lnTo>
-                  <a:lnTo>
-                    <a:pt x="903581" y="78675"/>
-                  </a:lnTo>
-                  <a:lnTo>
-                    <a:pt x="826337" y="72178"/>
-                  </a:lnTo>
-                  <a:lnTo>
-                    <a:pt x="749094" y="65639"/>
-                  </a:lnTo>
-                  <a:lnTo>
-                    <a:pt x="671850" y="59058"/>
-                  </a:lnTo>
-                  <a:lnTo>
-                    <a:pt x="594606" y="52434"/>
-                  </a:lnTo>
-                  <a:lnTo>
-                    <a:pt x="517363" y="45768"/>
-                  </a:lnTo>
-                  <a:lnTo>
-                    <a:pt x="440119" y="39060"/>
-                  </a:lnTo>
-                  <a:lnTo>
-                    <a:pt x="362876" y="32308"/>
-                  </a:lnTo>
-                  <a:lnTo>
-                    <a:pt x="285632" y="25513"/>
-                  </a:lnTo>
-                  <a:lnTo>
-                    <a:pt x="208389" y="18674"/>
-                  </a:lnTo>
-                  <a:lnTo>
-                    <a:pt x="131145" y="11791"/>
-                  </a:lnTo>
-                  <a:lnTo>
-                    <a:pt x="53901" y="4864"/>
-                  </a:lnTo>
-                  <a:lnTo>
-                    <a:pt x="0" y="0"/>
-                  </a:lnTo>
-                </a:path>
-              </a:pathLst>
-            </a:custGeom>
-          </p:spPr>
-          <p:txBody>
-            <a:bodyPr/>
-            <a:lstStyle/>
-            <a:p/>
-          </p:txBody>
-        </p:sp>
-        <p:sp>
-          <p:nvSpPr>
-            <p:cNvPr id="24" name="pl24"/>
-            <p:cNvSpPr/>
-            <p:nvPr/>
-          </p:nvSpPr>
-          <p:spPr>
-            <a:xfrm>
-              <a:off x="817517" y="3920669"/>
-              <a:ext cx="7392041" cy="1279449"/>
-            </a:xfrm>
-            <a:custGeom>
-              <a:avLst/>
-              <a:pathLst>
-                <a:path w="7392041" h="1279449">
+                <a:path w="7090630" h="1367666">
                   <a:moveTo>
                     <a:pt x="0" y="0"/>
                   </a:moveTo>
                   <a:lnTo>
-                    <a:pt x="53901" y="18108"/>
-                  </a:lnTo>
-                  <a:lnTo>
-                    <a:pt x="131145" y="43649"/>
-                  </a:lnTo>
-                  <a:lnTo>
-                    <a:pt x="208389" y="68787"/>
-                  </a:lnTo>
-                  <a:lnTo>
-                    <a:pt x="285632" y="93528"/>
-                  </a:lnTo>
-                  <a:lnTo>
-                    <a:pt x="362876" y="117879"/>
-                  </a:lnTo>
-                  <a:lnTo>
-                    <a:pt x="440119" y="141845"/>
-                  </a:lnTo>
-                  <a:lnTo>
-                    <a:pt x="517363" y="165433"/>
-                  </a:lnTo>
-                  <a:lnTo>
-                    <a:pt x="594606" y="188649"/>
-                  </a:lnTo>
-                  <a:lnTo>
-                    <a:pt x="671850" y="211499"/>
-                  </a:lnTo>
-                  <a:lnTo>
-                    <a:pt x="749094" y="233988"/>
-                  </a:lnTo>
-                  <a:lnTo>
-                    <a:pt x="826337" y="256122"/>
-                  </a:lnTo>
-                  <a:lnTo>
-                    <a:pt x="903581" y="277907"/>
-                  </a:lnTo>
-                  <a:lnTo>
-                    <a:pt x="980824" y="299348"/>
-                  </a:lnTo>
-                  <a:lnTo>
-                    <a:pt x="1058068" y="320450"/>
-                  </a:lnTo>
-                  <a:lnTo>
-                    <a:pt x="1135311" y="341220"/>
-                  </a:lnTo>
-                  <a:lnTo>
-                    <a:pt x="1212555" y="361662"/>
-                  </a:lnTo>
-                  <a:lnTo>
-                    <a:pt x="1289799" y="381781"/>
-                  </a:lnTo>
-                  <a:lnTo>
-                    <a:pt x="1367042" y="401583"/>
-                  </a:lnTo>
-                  <a:lnTo>
-                    <a:pt x="1444286" y="421072"/>
-                  </a:lnTo>
-                  <a:lnTo>
-                    <a:pt x="1521529" y="440254"/>
-                  </a:lnTo>
-                  <a:lnTo>
-                    <a:pt x="1598773" y="459133"/>
-                  </a:lnTo>
-                  <a:lnTo>
-                    <a:pt x="1676016" y="477714"/>
-                  </a:lnTo>
-                  <a:lnTo>
-                    <a:pt x="1753260" y="496002"/>
-                  </a:lnTo>
-                  <a:lnTo>
-                    <a:pt x="1830504" y="514001"/>
-                  </a:lnTo>
-                  <a:lnTo>
-                    <a:pt x="1907747" y="531716"/>
-                  </a:lnTo>
-                  <a:lnTo>
-                    <a:pt x="1984991" y="549152"/>
-                  </a:lnTo>
-                  <a:lnTo>
-                    <a:pt x="2062234" y="566313"/>
-                  </a:lnTo>
-                  <a:lnTo>
-                    <a:pt x="2139478" y="583202"/>
-                  </a:lnTo>
-                  <a:lnTo>
-                    <a:pt x="2216721" y="599826"/>
-                  </a:lnTo>
-                  <a:lnTo>
-                    <a:pt x="2293965" y="616186"/>
-                  </a:lnTo>
-                  <a:lnTo>
-                    <a:pt x="2371209" y="632289"/>
-                  </a:lnTo>
-                  <a:lnTo>
-                    <a:pt x="2448452" y="648138"/>
-                  </a:lnTo>
-                  <a:lnTo>
-                    <a:pt x="2525696" y="663736"/>
-                  </a:lnTo>
-                  <a:lnTo>
-                    <a:pt x="2602939" y="679088"/>
-                  </a:lnTo>
-                  <a:lnTo>
-                    <a:pt x="2680183" y="694198"/>
-                  </a:lnTo>
-                  <a:lnTo>
-                    <a:pt x="2757426" y="709070"/>
-                  </a:lnTo>
-                  <a:lnTo>
-                    <a:pt x="2834670" y="723707"/>
-                  </a:lnTo>
-                  <a:lnTo>
-                    <a:pt x="2911914" y="738113"/>
-                  </a:lnTo>
-                  <a:lnTo>
-                    <a:pt x="2989157" y="752291"/>
-                  </a:lnTo>
-                  <a:lnTo>
-                    <a:pt x="3066401" y="766246"/>
-                  </a:lnTo>
-                  <a:lnTo>
-                    <a:pt x="3143644" y="779981"/>
-                  </a:lnTo>
-                  <a:lnTo>
-                    <a:pt x="3220888" y="793499"/>
-                  </a:lnTo>
-                  <a:lnTo>
-                    <a:pt x="3298131" y="806803"/>
-                  </a:lnTo>
-                  <a:lnTo>
-                    <a:pt x="3375375" y="819898"/>
-                  </a:lnTo>
-                  <a:lnTo>
-                    <a:pt x="3452619" y="832786"/>
-                  </a:lnTo>
-                  <a:lnTo>
-                    <a:pt x="3529862" y="845470"/>
-                  </a:lnTo>
-                  <a:lnTo>
-                    <a:pt x="3607106" y="857955"/>
-                  </a:lnTo>
-                  <a:lnTo>
-                    <a:pt x="3684349" y="870242"/>
-                  </a:lnTo>
-                  <a:lnTo>
-                    <a:pt x="3761593" y="882336"/>
-                  </a:lnTo>
-                  <a:lnTo>
-                    <a:pt x="3838836" y="894238"/>
-                  </a:lnTo>
-                  <a:lnTo>
-                    <a:pt x="3916080" y="905953"/>
-                  </a:lnTo>
-                  <a:lnTo>
-                    <a:pt x="3993324" y="917483"/>
-                  </a:lnTo>
-                  <a:lnTo>
-                    <a:pt x="4070567" y="928831"/>
-                  </a:lnTo>
-                  <a:lnTo>
-                    <a:pt x="4147811" y="940000"/>
-                  </a:lnTo>
-                  <a:lnTo>
-                    <a:pt x="4225054" y="950992"/>
-                  </a:lnTo>
-                  <a:lnTo>
-                    <a:pt x="4302298" y="961812"/>
-                  </a:lnTo>
-                  <a:lnTo>
-                    <a:pt x="4379541" y="972460"/>
-                  </a:lnTo>
-                  <a:lnTo>
-                    <a:pt x="4456785" y="982940"/>
-                  </a:lnTo>
-                  <a:lnTo>
-                    <a:pt x="4534029" y="993255"/>
-                  </a:lnTo>
-                  <a:lnTo>
-                    <a:pt x="4611272" y="1003408"/>
-                  </a:lnTo>
-                  <a:lnTo>
-                    <a:pt x="4688516" y="1013400"/>
-                  </a:lnTo>
-                  <a:lnTo>
-                    <a:pt x="4765759" y="1023234"/>
-                  </a:lnTo>
-                  <a:lnTo>
-                    <a:pt x="4843003" y="1032913"/>
-                  </a:lnTo>
-                  <a:lnTo>
-                    <a:pt x="4920246" y="1042439"/>
-                  </a:lnTo>
-                  <a:lnTo>
-                    <a:pt x="4997490" y="1051815"/>
-                  </a:lnTo>
-                  <a:lnTo>
-                    <a:pt x="5074734" y="1061043"/>
-                  </a:lnTo>
-                  <a:lnTo>
-                    <a:pt x="5151977" y="1070126"/>
-                  </a:lnTo>
-                  <a:lnTo>
-                    <a:pt x="5229221" y="1079065"/>
-                  </a:lnTo>
-                  <a:lnTo>
-                    <a:pt x="5306464" y="1087863"/>
-                  </a:lnTo>
-                  <a:lnTo>
-                    <a:pt x="5383708" y="1096522"/>
-                  </a:lnTo>
-                  <a:lnTo>
-                    <a:pt x="5460951" y="1105045"/>
-                  </a:lnTo>
-                  <a:lnTo>
-                    <a:pt x="5538195" y="1113433"/>
-                  </a:lnTo>
-                  <a:lnTo>
-                    <a:pt x="5615439" y="1121689"/>
-                  </a:lnTo>
-                  <a:lnTo>
-                    <a:pt x="5692682" y="1129814"/>
-                  </a:lnTo>
-                  <a:lnTo>
-                    <a:pt x="5769926" y="1137811"/>
-                  </a:lnTo>
-                  <a:lnTo>
-                    <a:pt x="5847169" y="1145682"/>
-                  </a:lnTo>
-                  <a:lnTo>
-                    <a:pt x="5924413" y="1153429"/>
-                  </a:lnTo>
-                  <a:lnTo>
-                    <a:pt x="6001656" y="1161054"/>
-                  </a:lnTo>
-                  <a:lnTo>
-                    <a:pt x="6078900" y="1168558"/>
-                  </a:lnTo>
-                  <a:lnTo>
-                    <a:pt x="6156144" y="1175944"/>
-                  </a:lnTo>
-                  <a:lnTo>
-                    <a:pt x="6233387" y="1183213"/>
-                  </a:lnTo>
-                  <a:lnTo>
-                    <a:pt x="6310631" y="1190367"/>
-                  </a:lnTo>
-                  <a:lnTo>
-                    <a:pt x="6387874" y="1197409"/>
-                  </a:lnTo>
-                  <a:lnTo>
-                    <a:pt x="6465118" y="1204340"/>
-                  </a:lnTo>
-                  <a:lnTo>
-                    <a:pt x="6542361" y="1211161"/>
-                  </a:lnTo>
-                  <a:lnTo>
-                    <a:pt x="6619605" y="1217874"/>
-                  </a:lnTo>
-                  <a:lnTo>
-                    <a:pt x="6696849" y="1224482"/>
-                  </a:lnTo>
-                  <a:lnTo>
-                    <a:pt x="6774092" y="1230985"/>
-                  </a:lnTo>
-                  <a:lnTo>
-                    <a:pt x="6851336" y="1237386"/>
-                  </a:lnTo>
-                  <a:lnTo>
-                    <a:pt x="6928579" y="1243685"/>
-                  </a:lnTo>
-                  <a:lnTo>
-                    <a:pt x="7005823" y="1249885"/>
-                  </a:lnTo>
-                  <a:lnTo>
-                    <a:pt x="7083066" y="1255988"/>
-                  </a:lnTo>
-                  <a:lnTo>
-                    <a:pt x="7160310" y="1261994"/>
-                  </a:lnTo>
-                  <a:lnTo>
-                    <a:pt x="7237554" y="1267905"/>
-                  </a:lnTo>
-                  <a:lnTo>
-                    <a:pt x="7314797" y="1273723"/>
-                  </a:lnTo>
-                  <a:lnTo>
-                    <a:pt x="7392041" y="1279449"/>
+                    <a:pt x="71622" y="27218"/>
+                  </a:lnTo>
+                  <a:lnTo>
+                    <a:pt x="143245" y="54007"/>
+                  </a:lnTo>
+                  <a:lnTo>
+                    <a:pt x="214867" y="80374"/>
+                  </a:lnTo>
+                  <a:lnTo>
+                    <a:pt x="286490" y="106324"/>
+                  </a:lnTo>
+                  <a:lnTo>
+                    <a:pt x="358112" y="131865"/>
+                  </a:lnTo>
+                  <a:lnTo>
+                    <a:pt x="429735" y="157003"/>
+                  </a:lnTo>
+                  <a:lnTo>
+                    <a:pt x="501357" y="181744"/>
+                  </a:lnTo>
+                  <a:lnTo>
+                    <a:pt x="572980" y="206095"/>
+                  </a:lnTo>
+                  <a:lnTo>
+                    <a:pt x="644602" y="230061"/>
+                  </a:lnTo>
+                  <a:lnTo>
+                    <a:pt x="716225" y="253649"/>
+                  </a:lnTo>
+                  <a:lnTo>
+                    <a:pt x="787847" y="276865"/>
+                  </a:lnTo>
+                  <a:lnTo>
+                    <a:pt x="859470" y="299715"/>
+                  </a:lnTo>
+                  <a:lnTo>
+                    <a:pt x="931092" y="322204"/>
+                  </a:lnTo>
+                  <a:lnTo>
+                    <a:pt x="1002715" y="344338"/>
+                  </a:lnTo>
+                  <a:lnTo>
+                    <a:pt x="1074337" y="366123"/>
+                  </a:lnTo>
+                  <a:lnTo>
+                    <a:pt x="1145960" y="387564"/>
+                  </a:lnTo>
+                  <a:lnTo>
+                    <a:pt x="1217582" y="408666"/>
+                  </a:lnTo>
+                  <a:lnTo>
+                    <a:pt x="1289205" y="429436"/>
+                  </a:lnTo>
+                  <a:lnTo>
+                    <a:pt x="1360827" y="449878"/>
+                  </a:lnTo>
+                  <a:lnTo>
+                    <a:pt x="1432450" y="469997"/>
+                  </a:lnTo>
+                  <a:lnTo>
+                    <a:pt x="1504073" y="489799"/>
+                  </a:lnTo>
+                  <a:lnTo>
+                    <a:pt x="1575695" y="509288"/>
+                  </a:lnTo>
+                  <a:lnTo>
+                    <a:pt x="1647318" y="528470"/>
+                  </a:lnTo>
+                  <a:lnTo>
+                    <a:pt x="1718940" y="547349"/>
+                  </a:lnTo>
+                  <a:lnTo>
+                    <a:pt x="1790563" y="565930"/>
+                  </a:lnTo>
+                  <a:lnTo>
+                    <a:pt x="1862185" y="584218"/>
+                  </a:lnTo>
+                  <a:lnTo>
+                    <a:pt x="1933808" y="602217"/>
+                  </a:lnTo>
+                  <a:lnTo>
+                    <a:pt x="2005430" y="619933"/>
+                  </a:lnTo>
+                  <a:lnTo>
+                    <a:pt x="2077053" y="637368"/>
+                  </a:lnTo>
+                  <a:lnTo>
+                    <a:pt x="2148675" y="654529"/>
+                  </a:lnTo>
+                  <a:lnTo>
+                    <a:pt x="2220298" y="671419"/>
+                  </a:lnTo>
+                  <a:lnTo>
+                    <a:pt x="2291920" y="688042"/>
+                  </a:lnTo>
+                  <a:lnTo>
+                    <a:pt x="2363543" y="704403"/>
+                  </a:lnTo>
+                  <a:lnTo>
+                    <a:pt x="2435165" y="720505"/>
+                  </a:lnTo>
+                  <a:lnTo>
+                    <a:pt x="2506788" y="736354"/>
+                  </a:lnTo>
+                  <a:lnTo>
+                    <a:pt x="2578410" y="751952"/>
+                  </a:lnTo>
+                  <a:lnTo>
+                    <a:pt x="2650033" y="767305"/>
+                  </a:lnTo>
+                  <a:lnTo>
+                    <a:pt x="2721655" y="782415"/>
+                  </a:lnTo>
+                  <a:lnTo>
+                    <a:pt x="2793278" y="797286"/>
+                  </a:lnTo>
+                  <a:lnTo>
+                    <a:pt x="2864901" y="811923"/>
+                  </a:lnTo>
+                  <a:lnTo>
+                    <a:pt x="2936523" y="826329"/>
+                  </a:lnTo>
+                  <a:lnTo>
+                    <a:pt x="3008146" y="840508"/>
+                  </a:lnTo>
+                  <a:lnTo>
+                    <a:pt x="3079768" y="854462"/>
+                  </a:lnTo>
+                  <a:lnTo>
+                    <a:pt x="3151391" y="868197"/>
+                  </a:lnTo>
+                  <a:lnTo>
+                    <a:pt x="3223013" y="881715"/>
+                  </a:lnTo>
+                  <a:lnTo>
+                    <a:pt x="3294636" y="895019"/>
+                  </a:lnTo>
+                  <a:lnTo>
+                    <a:pt x="3366258" y="908114"/>
+                  </a:lnTo>
+                  <a:lnTo>
+                    <a:pt x="3437881" y="921002"/>
+                  </a:lnTo>
+                  <a:lnTo>
+                    <a:pt x="3509503" y="933687"/>
+                  </a:lnTo>
+                  <a:lnTo>
+                    <a:pt x="3581126" y="946171"/>
+                  </a:lnTo>
+                  <a:lnTo>
+                    <a:pt x="3652748" y="958458"/>
+                  </a:lnTo>
+                  <a:lnTo>
+                    <a:pt x="3724371" y="970552"/>
+                  </a:lnTo>
+                  <a:lnTo>
+                    <a:pt x="3795993" y="982454"/>
+                  </a:lnTo>
+                  <a:lnTo>
+                    <a:pt x="3867616" y="994169"/>
+                  </a:lnTo>
+                  <a:lnTo>
+                    <a:pt x="3939238" y="1005699"/>
+                  </a:lnTo>
+                  <a:lnTo>
+                    <a:pt x="4010861" y="1017047"/>
+                  </a:lnTo>
+                  <a:lnTo>
+                    <a:pt x="4082483" y="1028216"/>
+                  </a:lnTo>
+                  <a:lnTo>
+                    <a:pt x="4154106" y="1039209"/>
+                  </a:lnTo>
+                  <a:lnTo>
+                    <a:pt x="4225729" y="1050028"/>
+                  </a:lnTo>
+                  <a:lnTo>
+                    <a:pt x="4297351" y="1060676"/>
+                  </a:lnTo>
+                  <a:lnTo>
+                    <a:pt x="4368974" y="1071157"/>
+                  </a:lnTo>
+                  <a:lnTo>
+                    <a:pt x="4440596" y="1081471"/>
+                  </a:lnTo>
+                  <a:lnTo>
+                    <a:pt x="4512219" y="1091624"/>
+                  </a:lnTo>
+                  <a:lnTo>
+                    <a:pt x="4583841" y="1101616"/>
+                  </a:lnTo>
+                  <a:lnTo>
+                    <a:pt x="4655464" y="1111450"/>
+                  </a:lnTo>
+                  <a:lnTo>
+                    <a:pt x="4727086" y="1121129"/>
+                  </a:lnTo>
+                  <a:lnTo>
+                    <a:pt x="4798709" y="1130656"/>
+                  </a:lnTo>
+                  <a:lnTo>
+                    <a:pt x="4870331" y="1140032"/>
+                  </a:lnTo>
+                  <a:lnTo>
+                    <a:pt x="4941954" y="1149260"/>
+                  </a:lnTo>
+                  <a:lnTo>
+                    <a:pt x="5013576" y="1158342"/>
+                  </a:lnTo>
+                  <a:lnTo>
+                    <a:pt x="5085199" y="1167281"/>
+                  </a:lnTo>
+                  <a:lnTo>
+                    <a:pt x="5156821" y="1176079"/>
+                  </a:lnTo>
+                  <a:lnTo>
+                    <a:pt x="5228444" y="1184739"/>
+                  </a:lnTo>
+                  <a:lnTo>
+                    <a:pt x="5300066" y="1193261"/>
+                  </a:lnTo>
+                  <a:lnTo>
+                    <a:pt x="5371689" y="1201649"/>
+                  </a:lnTo>
+                  <a:lnTo>
+                    <a:pt x="5443311" y="1209905"/>
+                  </a:lnTo>
+                  <a:lnTo>
+                    <a:pt x="5514934" y="1218030"/>
+                  </a:lnTo>
+                  <a:lnTo>
+                    <a:pt x="5586557" y="1226028"/>
+                  </a:lnTo>
+                  <a:lnTo>
+                    <a:pt x="5658179" y="1233898"/>
+                  </a:lnTo>
+                  <a:lnTo>
+                    <a:pt x="5729802" y="1241645"/>
+                  </a:lnTo>
+                  <a:lnTo>
+                    <a:pt x="5801424" y="1249270"/>
+                  </a:lnTo>
+                  <a:lnTo>
+                    <a:pt x="5873047" y="1256774"/>
+                  </a:lnTo>
+                  <a:lnTo>
+                    <a:pt x="5944669" y="1264160"/>
+                  </a:lnTo>
+                  <a:lnTo>
+                    <a:pt x="6016292" y="1271429"/>
+                  </a:lnTo>
+                  <a:lnTo>
+                    <a:pt x="6087914" y="1278584"/>
+                  </a:lnTo>
+                  <a:lnTo>
+                    <a:pt x="6159537" y="1285625"/>
+                  </a:lnTo>
+                  <a:lnTo>
+                    <a:pt x="6231159" y="1292556"/>
+                  </a:lnTo>
+                  <a:lnTo>
+                    <a:pt x="6302782" y="1299377"/>
+                  </a:lnTo>
+                  <a:lnTo>
+                    <a:pt x="6374404" y="1306090"/>
+                  </a:lnTo>
+                  <a:lnTo>
+                    <a:pt x="6446027" y="1312698"/>
+                  </a:lnTo>
+                  <a:lnTo>
+                    <a:pt x="6517649" y="1319201"/>
+                  </a:lnTo>
+                  <a:lnTo>
+                    <a:pt x="6589272" y="1325602"/>
+                  </a:lnTo>
+                  <a:lnTo>
+                    <a:pt x="6660894" y="1331901"/>
+                  </a:lnTo>
+                  <a:lnTo>
+                    <a:pt x="6732517" y="1338102"/>
+                  </a:lnTo>
+                  <a:lnTo>
+                    <a:pt x="6804139" y="1344204"/>
+                  </a:lnTo>
+                  <a:lnTo>
+                    <a:pt x="6875762" y="1350210"/>
+                  </a:lnTo>
+                  <a:lnTo>
+                    <a:pt x="6947385" y="1356121"/>
+                  </a:lnTo>
+                  <a:lnTo>
+                    <a:pt x="7019007" y="1361939"/>
+                  </a:lnTo>
+                  <a:lnTo>
+                    <a:pt x="7090630" y="1367666"/>
                   </a:lnTo>
                 </a:path>
               </a:pathLst>
@@ -4566,7 +4568,7 @@
         </p:sp>
         <p:sp>
           <p:nvSpPr>
-            <p:cNvPr id="25" name="pl25"/>
+            <p:cNvPr id="24" name="pl24"/>
             <p:cNvSpPr/>
             <p:nvPr/>
           </p:nvSpPr>
@@ -4609,13 +4611,13 @@
         </p:sp>
         <p:sp>
           <p:nvSpPr>
-            <p:cNvPr id="26" name="pl26"/>
+            <p:cNvPr id="25" name="pl25"/>
             <p:cNvSpPr/>
             <p:nvPr/>
           </p:nvSpPr>
           <p:spPr>
             <a:xfrm>
-              <a:off x="4117484" y="2073503"/>
+              <a:off x="4468386" y="2073503"/>
               <a:ext cx="0" cy="3649639"/>
             </a:xfrm>
             <a:custGeom>
@@ -4652,7 +4654,7 @@
         </p:sp>
         <p:sp>
           <p:nvSpPr>
-            <p:cNvPr id="27" name="tx27"/>
+            <p:cNvPr id="26" name="tx26"/>
             <p:cNvSpPr/>
             <p:nvPr/>
           </p:nvSpPr>
@@ -4698,7 +4700,7 @@
         </p:sp>
         <p:sp>
           <p:nvSpPr>
-            <p:cNvPr id="28" name="tx28"/>
+            <p:cNvPr id="27" name="tx27"/>
             <p:cNvSpPr/>
             <p:nvPr/>
           </p:nvSpPr>
@@ -4744,7 +4746,7 @@
         </p:sp>
         <p:sp>
           <p:nvSpPr>
-            <p:cNvPr id="29" name="tx29"/>
+            <p:cNvPr id="28" name="tx28"/>
             <p:cNvSpPr/>
             <p:nvPr/>
           </p:nvSpPr>
@@ -4790,7 +4792,7 @@
         </p:sp>
         <p:sp>
           <p:nvSpPr>
-            <p:cNvPr id="30" name="tx30"/>
+            <p:cNvPr id="29" name="tx29"/>
             <p:cNvSpPr/>
             <p:nvPr/>
           </p:nvSpPr>
@@ -4836,7 +4838,7 @@
         </p:sp>
         <p:sp>
           <p:nvSpPr>
-            <p:cNvPr id="31" name="tx31"/>
+            <p:cNvPr id="30" name="tx30"/>
             <p:cNvSpPr/>
             <p:nvPr/>
           </p:nvSpPr>
@@ -4882,14 +4884,14 @@
         </p:sp>
         <p:sp>
           <p:nvSpPr>
-            <p:cNvPr id="32" name="tx32"/>
+            <p:cNvPr id="31" name="tx31"/>
             <p:cNvSpPr/>
             <p:nvPr/>
           </p:nvSpPr>
           <p:spPr>
             <a:xfrm>
-              <a:off x="2423864" y="5785772"/>
-              <a:ext cx="155356" cy="80101"/>
+              <a:off x="2478335" y="5785772"/>
+              <a:ext cx="161574" cy="80101"/>
             </a:xfrm>
             <a:prstGeom prst="rect">
               <a:avLst/>
@@ -4921,21 +4923,21 @@
                   <a:latin typeface="Helvetica"/>
                   <a:cs typeface="Helvetica"/>
                 </a:rPr>
-                <a:t>0.8</a:t>
+                <a:t>-25</a:t>
               </a:r>
             </a:p>
           </p:txBody>
         </p:sp>
         <p:sp>
           <p:nvSpPr>
-            <p:cNvPr id="33" name="tx33"/>
+            <p:cNvPr id="32" name="tx32"/>
             <p:cNvSpPr/>
             <p:nvPr/>
           </p:nvSpPr>
           <p:spPr>
             <a:xfrm>
-              <a:off x="4196521" y="5785772"/>
-              <a:ext cx="155356" cy="80101"/>
+              <a:off x="4582608" y="5785772"/>
+              <a:ext cx="62179" cy="80101"/>
             </a:xfrm>
             <a:prstGeom prst="rect">
               <a:avLst/>
@@ -4967,21 +4969,21 @@
                   <a:latin typeface="Helvetica"/>
                   <a:cs typeface="Helvetica"/>
                 </a:rPr>
-                <a:t>1.0</a:t>
+                <a:t>0</a:t>
               </a:r>
             </a:p>
           </p:txBody>
         </p:sp>
         <p:sp>
           <p:nvSpPr>
-            <p:cNvPr id="34" name="tx34"/>
+            <p:cNvPr id="33" name="tx33"/>
             <p:cNvSpPr/>
             <p:nvPr/>
           </p:nvSpPr>
           <p:spPr>
             <a:xfrm>
-              <a:off x="5969179" y="5785772"/>
-              <a:ext cx="155356" cy="80101"/>
+              <a:off x="6606094" y="5785772"/>
+              <a:ext cx="124358" cy="80101"/>
             </a:xfrm>
             <a:prstGeom prst="rect">
               <a:avLst/>
@@ -5013,67 +5015,21 @@
                   <a:latin typeface="Helvetica"/>
                   <a:cs typeface="Helvetica"/>
                 </a:rPr>
-                <a:t>1.2</a:t>
+                <a:t>25</a:t>
               </a:r>
             </a:p>
           </p:txBody>
         </p:sp>
         <p:sp>
           <p:nvSpPr>
-            <p:cNvPr id="35" name="tx35"/>
+            <p:cNvPr id="34" name="tx34"/>
             <p:cNvSpPr/>
             <p:nvPr/>
           </p:nvSpPr>
           <p:spPr>
             <a:xfrm>
-              <a:off x="7741836" y="5785772"/>
-              <a:ext cx="155356" cy="80101"/>
-            </a:xfrm>
-            <a:prstGeom prst="rect">
-              <a:avLst/>
-            </a:prstGeom>
-            <a:noFill/>
-          </p:spPr>
-          <p:txBody>
-            <a:bodyPr lIns="0" rIns="0" tIns="0" bIns="0" anchorCtr="1" anchor="ctr" wrap="none"/>
-            <a:lstStyle/>
-            <a:p>
-              <a:pPr algn="l" marL="0" marR="0" indent="0">
-                <a:lnSpc>
-                  <a:spcPts val="880"/>
-                </a:lnSpc>
-                <a:spcBef>
-                  <a:spcPts val="0"/>
-                </a:spcBef>
-                <a:spcAft>
-                  <a:spcPts val="0"/>
-                </a:spcAft>
-              </a:pPr>
-              <a:r>
-                <a:rPr sz="880">
-                  <a:solidFill>
-                    <a:srgbClr val="4D4D4D">
-                      <a:alpha val="100000"/>
-                    </a:srgbClr>
-                  </a:solidFill>
-                  <a:latin typeface="Helvetica"/>
-                  <a:cs typeface="Helvetica"/>
-                </a:rPr>
-                <a:t>1.4</a:t>
-              </a:r>
-            </a:p>
-          </p:txBody>
-        </p:sp>
-        <p:sp>
-          <p:nvSpPr>
-            <p:cNvPr id="36" name="tx36"/>
-            <p:cNvSpPr/>
-            <p:nvPr/>
-          </p:nvSpPr>
-          <p:spPr>
-            <a:xfrm>
-              <a:off x="3879271" y="5925448"/>
-              <a:ext cx="1676186" cy="100218"/>
+              <a:off x="2928340" y="5925448"/>
+              <a:ext cx="3578047" cy="100218"/>
             </a:xfrm>
             <a:prstGeom prst="rect">
               <a:avLst/>
@@ -5105,14 +5061,14 @@
                   <a:latin typeface="Helvetica"/>
                   <a:cs typeface="Helvetica"/>
                 </a:rPr>
-                <a:t>CKD-EPI Cr-Cys / CG ratio</a:t>
+                <a:t>eGFR difference (%): 100 × (CKD-EPI Cr-Cys − CG) / CG</a:t>
               </a:r>
             </a:p>
           </p:txBody>
         </p:sp>
         <p:sp>
           <p:nvSpPr>
-            <p:cNvPr id="37" name="tx37"/>
+            <p:cNvPr id="35" name="tx35"/>
             <p:cNvSpPr/>
             <p:nvPr/>
           </p:nvSpPr>
@@ -5158,14 +5114,14 @@
         </p:sp>
         <p:sp>
           <p:nvSpPr>
-            <p:cNvPr id="38" name="tx38"/>
+            <p:cNvPr id="36" name="tx36"/>
             <p:cNvSpPr/>
             <p:nvPr/>
           </p:nvSpPr>
           <p:spPr>
             <a:xfrm>
               <a:off x="817517" y="1896563"/>
-              <a:ext cx="6833128" cy="82021"/>
+              <a:ext cx="6985375" cy="82021"/>
             </a:xfrm>
             <a:prstGeom prst="rect">
               <a:avLst/>
@@ -5197,14 +5153,14 @@
                   <a:latin typeface="Helvetica"/>
                   <a:cs typeface="Helvetica"/>
                 </a:rPr>
-                <a:t>subHR per 0.1 ratio decline: 1.20 (1.08-1.34), p_Bonf = 0.006 (n = 6)  |  per IQR decline (Δ = 0.30): 1.71 (1.24-2.37)  |  IQR: [0.84, 1.14]</a:t>
+                <a:t>subHR per 10 % decline: 1.20 (1.08-1.34), p_Bonf = 0.006 (n = 6)  |  per IQR decline (Δ = 29.5 %): 1.71 (1.24-2.37)  |  IQR: [-15.6, 13.9] %</a:t>
               </a:r>
             </a:p>
           </p:txBody>
         </p:sp>
         <p:sp>
           <p:nvSpPr>
-            <p:cNvPr id="39" name="tx39"/>
+            <p:cNvPr id="37" name="tx37"/>
             <p:cNvSpPr/>
             <p:nvPr/>
           </p:nvSpPr>

--- a/docs/pptx/auc3/jx-auc3-linsubhr-ratio-anemia2.pptx
+++ b/docs/pptx/auc3/jx-auc3-linsubhr-ratio-anemia2.pptx
@@ -2265,34 +2265,26 @@
         </p:sp>
         <p:sp>
           <p:nvSpPr>
-            <p:cNvPr id="4" name="pl4"/>
+            <p:cNvPr id="4" name="rc4"/>
             <p:cNvSpPr/>
             <p:nvPr/>
           </p:nvSpPr>
           <p:spPr>
             <a:xfrm>
-              <a:off x="817517" y="5142518"/>
-              <a:ext cx="7799693" cy="0"/>
+              <a:off x="457200" y="1600200"/>
+              <a:ext cx="8229600" cy="4525962"/>
             </a:xfrm>
-            <a:custGeom>
+            <a:prstGeom prst="rect">
               <a:avLst/>
-              <a:pathLst>
-                <a:path w="7799693" h="0">
-                  <a:moveTo>
-                    <a:pt x="0" y="0"/>
-                  </a:moveTo>
-                  <a:lnTo>
-                    <a:pt x="7799693" y="0"/>
-                  </a:lnTo>
-                  <a:lnTo>
-                    <a:pt x="7799693" y="0"/>
-                  </a:lnTo>
-                </a:path>
-              </a:pathLst>
-            </a:custGeom>
-            <a:ln w="6775" cap="flat">
+            </a:prstGeom>
+            <a:solidFill>
+              <a:srgbClr val="FFFFFF">
+                <a:alpha val="100000"/>
+              </a:srgbClr>
+            </a:solidFill>
+            <a:ln w="13550" cap="rnd">
               <a:solidFill>
-                <a:srgbClr val="EBEBEB">
+                <a:srgbClr val="FFFFFF">
                   <a:alpha val="100000"/>
                 </a:srgbClr>
               </a:solidFill>
@@ -2314,21 +2306,21 @@
           </p:nvSpPr>
           <p:spPr>
             <a:xfrm>
-              <a:off x="817517" y="4313054"/>
-              <a:ext cx="7799693" cy="0"/>
+              <a:off x="887106" y="3250627"/>
+              <a:ext cx="7660515" cy="0"/>
             </a:xfrm>
             <a:custGeom>
               <a:avLst/>
               <a:pathLst>
-                <a:path w="7799693" h="0">
+                <a:path w="7660515" h="0">
                   <a:moveTo>
                     <a:pt x="0" y="0"/>
                   </a:moveTo>
                   <a:lnTo>
-                    <a:pt x="7799693" y="0"/>
-                  </a:lnTo>
-                  <a:lnTo>
-                    <a:pt x="7799693" y="0"/>
+                    <a:pt x="7660515" y="0"/>
+                  </a:lnTo>
+                  <a:lnTo>
+                    <a:pt x="7660515" y="0"/>
                   </a:lnTo>
                 </a:path>
               </a:pathLst>
@@ -2357,21 +2349,21 @@
           </p:nvSpPr>
           <p:spPr>
             <a:xfrm>
-              <a:off x="817517" y="3483591"/>
-              <a:ext cx="7799693" cy="0"/>
+              <a:off x="887106" y="2951293"/>
+              <a:ext cx="7660515" cy="0"/>
             </a:xfrm>
             <a:custGeom>
               <a:avLst/>
               <a:pathLst>
-                <a:path w="7799693" h="0">
+                <a:path w="7660515" h="0">
                   <a:moveTo>
                     <a:pt x="0" y="0"/>
                   </a:moveTo>
                   <a:lnTo>
-                    <a:pt x="7799693" y="0"/>
-                  </a:lnTo>
-                  <a:lnTo>
-                    <a:pt x="7799693" y="0"/>
+                    <a:pt x="7660515" y="0"/>
+                  </a:lnTo>
+                  <a:lnTo>
+                    <a:pt x="7660515" y="0"/>
                   </a:lnTo>
                 </a:path>
               </a:pathLst>
@@ -2400,21 +2392,21 @@
           </p:nvSpPr>
           <p:spPr>
             <a:xfrm>
-              <a:off x="817517" y="2654127"/>
-              <a:ext cx="7799693" cy="0"/>
+              <a:off x="887106" y="2651959"/>
+              <a:ext cx="7660515" cy="0"/>
             </a:xfrm>
             <a:custGeom>
               <a:avLst/>
               <a:pathLst>
-                <a:path w="7799693" h="0">
+                <a:path w="7660515" h="0">
                   <a:moveTo>
                     <a:pt x="0" y="0"/>
                   </a:moveTo>
                   <a:lnTo>
-                    <a:pt x="7799693" y="0"/>
-                  </a:lnTo>
-                  <a:lnTo>
-                    <a:pt x="7799693" y="0"/>
+                    <a:pt x="7660515" y="0"/>
+                  </a:lnTo>
+                  <a:lnTo>
+                    <a:pt x="7660515" y="0"/>
                   </a:lnTo>
                 </a:path>
               </a:pathLst>
@@ -2443,21 +2435,21 @@
           </p:nvSpPr>
           <p:spPr>
             <a:xfrm>
-              <a:off x="1531834" y="2073503"/>
-              <a:ext cx="0" cy="3649639"/>
+              <a:off x="887106" y="2352625"/>
+              <a:ext cx="7660515" cy="0"/>
             </a:xfrm>
             <a:custGeom>
               <a:avLst/>
               <a:pathLst>
-                <a:path w="0" h="3649639">
+                <a:path w="7660515" h="0">
                   <a:moveTo>
-                    <a:pt x="0" y="3649639"/>
+                    <a:pt x="0" y="0"/>
                   </a:moveTo>
                   <a:lnTo>
-                    <a:pt x="0" y="0"/>
-                  </a:lnTo>
-                  <a:lnTo>
-                    <a:pt x="0" y="0"/>
+                    <a:pt x="7660515" y="0"/>
+                  </a:lnTo>
+                  <a:lnTo>
+                    <a:pt x="7660515" y="0"/>
                   </a:lnTo>
                 </a:path>
               </a:pathLst>
@@ -2486,15 +2478,15 @@
           </p:nvSpPr>
           <p:spPr>
             <a:xfrm>
-              <a:off x="3586410" y="2073503"/>
-              <a:ext cx="0" cy="3649639"/>
+              <a:off x="1588677" y="2143092"/>
+              <a:ext cx="0" cy="1317069"/>
             </a:xfrm>
             <a:custGeom>
               <a:avLst/>
               <a:pathLst>
-                <a:path w="0" h="3649639">
+                <a:path w="0" h="1317069">
                   <a:moveTo>
-                    <a:pt x="0" y="3649639"/>
+                    <a:pt x="0" y="1317069"/>
                   </a:moveTo>
                   <a:lnTo>
                     <a:pt x="0" y="0"/>
@@ -2529,15 +2521,15 @@
           </p:nvSpPr>
           <p:spPr>
             <a:xfrm>
-              <a:off x="5640985" y="2073503"/>
-              <a:ext cx="0" cy="3649639"/>
+              <a:off x="3606590" y="2143092"/>
+              <a:ext cx="0" cy="1317069"/>
             </a:xfrm>
             <a:custGeom>
               <a:avLst/>
               <a:pathLst>
-                <a:path w="0" h="3649639">
+                <a:path w="0" h="1317069">
                   <a:moveTo>
-                    <a:pt x="0" y="3649639"/>
+                    <a:pt x="0" y="1317069"/>
                   </a:moveTo>
                   <a:lnTo>
                     <a:pt x="0" y="0"/>
@@ -2572,15 +2564,15 @@
           </p:nvSpPr>
           <p:spPr>
             <a:xfrm>
-              <a:off x="7695561" y="2073503"/>
-              <a:ext cx="0" cy="3649639"/>
+              <a:off x="5624504" y="2143092"/>
+              <a:ext cx="0" cy="1317069"/>
             </a:xfrm>
             <a:custGeom>
               <a:avLst/>
               <a:pathLst>
-                <a:path w="0" h="3649639">
+                <a:path w="0" h="1317069">
                   <a:moveTo>
-                    <a:pt x="0" y="3649639"/>
+                    <a:pt x="0" y="1317069"/>
                   </a:moveTo>
                   <a:lnTo>
                     <a:pt x="0" y="0"/>
@@ -2615,26 +2607,26 @@
           </p:nvSpPr>
           <p:spPr>
             <a:xfrm>
-              <a:off x="817517" y="5557249"/>
-              <a:ext cx="7799693" cy="0"/>
+              <a:off x="7642418" y="2143092"/>
+              <a:ext cx="0" cy="1317069"/>
             </a:xfrm>
             <a:custGeom>
               <a:avLst/>
               <a:pathLst>
-                <a:path w="7799693" h="0">
+                <a:path w="0" h="1317069">
                   <a:moveTo>
+                    <a:pt x="0" y="1317069"/>
+                  </a:moveTo>
+                  <a:lnTo>
                     <a:pt x="0" y="0"/>
-                  </a:moveTo>
-                  <a:lnTo>
-                    <a:pt x="7799693" y="0"/>
-                  </a:lnTo>
-                  <a:lnTo>
-                    <a:pt x="7799693" y="0"/>
+                  </a:lnTo>
+                  <a:lnTo>
+                    <a:pt x="0" y="0"/>
                   </a:lnTo>
                 </a:path>
               </a:pathLst>
             </a:custGeom>
-            <a:ln w="13550" cap="flat">
+            <a:ln w="6775" cap="flat">
               <a:solidFill>
                 <a:srgbClr val="EBEBEB">
                   <a:alpha val="100000"/>
@@ -2658,21 +2650,21 @@
           </p:nvSpPr>
           <p:spPr>
             <a:xfrm>
-              <a:off x="817517" y="4727786"/>
-              <a:ext cx="7799693" cy="0"/>
+              <a:off x="887106" y="3400294"/>
+              <a:ext cx="7660515" cy="0"/>
             </a:xfrm>
             <a:custGeom>
               <a:avLst/>
               <a:pathLst>
-                <a:path w="7799693" h="0">
+                <a:path w="7660515" h="0">
                   <a:moveTo>
                     <a:pt x="0" y="0"/>
                   </a:moveTo>
                   <a:lnTo>
-                    <a:pt x="7799693" y="0"/>
-                  </a:lnTo>
-                  <a:lnTo>
-                    <a:pt x="7799693" y="0"/>
+                    <a:pt x="7660515" y="0"/>
+                  </a:lnTo>
+                  <a:lnTo>
+                    <a:pt x="7660515" y="0"/>
                   </a:lnTo>
                 </a:path>
               </a:pathLst>
@@ -2701,21 +2693,21 @@
           </p:nvSpPr>
           <p:spPr>
             <a:xfrm>
-              <a:off x="817517" y="3898322"/>
-              <a:ext cx="7799693" cy="0"/>
+              <a:off x="887106" y="3100960"/>
+              <a:ext cx="7660515" cy="0"/>
             </a:xfrm>
             <a:custGeom>
               <a:avLst/>
               <a:pathLst>
-                <a:path w="7799693" h="0">
+                <a:path w="7660515" h="0">
                   <a:moveTo>
                     <a:pt x="0" y="0"/>
                   </a:moveTo>
                   <a:lnTo>
-                    <a:pt x="7799693" y="0"/>
-                  </a:lnTo>
-                  <a:lnTo>
-                    <a:pt x="7799693" y="0"/>
+                    <a:pt x="7660515" y="0"/>
+                  </a:lnTo>
+                  <a:lnTo>
+                    <a:pt x="7660515" y="0"/>
                   </a:lnTo>
                 </a:path>
               </a:pathLst>
@@ -2744,21 +2736,21 @@
           </p:nvSpPr>
           <p:spPr>
             <a:xfrm>
-              <a:off x="817517" y="3068859"/>
-              <a:ext cx="7799693" cy="0"/>
+              <a:off x="887106" y="2801626"/>
+              <a:ext cx="7660515" cy="0"/>
             </a:xfrm>
             <a:custGeom>
               <a:avLst/>
               <a:pathLst>
-                <a:path w="7799693" h="0">
+                <a:path w="7660515" h="0">
                   <a:moveTo>
                     <a:pt x="0" y="0"/>
                   </a:moveTo>
                   <a:lnTo>
-                    <a:pt x="7799693" y="0"/>
-                  </a:lnTo>
-                  <a:lnTo>
-                    <a:pt x="7799693" y="0"/>
+                    <a:pt x="7660515" y="0"/>
+                  </a:lnTo>
+                  <a:lnTo>
+                    <a:pt x="7660515" y="0"/>
                   </a:lnTo>
                 </a:path>
               </a:pathLst>
@@ -2787,21 +2779,21 @@
           </p:nvSpPr>
           <p:spPr>
             <a:xfrm>
-              <a:off x="817517" y="2239395"/>
-              <a:ext cx="7799693" cy="0"/>
+              <a:off x="887106" y="2502292"/>
+              <a:ext cx="7660515" cy="0"/>
             </a:xfrm>
             <a:custGeom>
               <a:avLst/>
               <a:pathLst>
-                <a:path w="7799693" h="0">
+                <a:path w="7660515" h="0">
                   <a:moveTo>
                     <a:pt x="0" y="0"/>
                   </a:moveTo>
                   <a:lnTo>
-                    <a:pt x="7799693" y="0"/>
-                  </a:lnTo>
-                  <a:lnTo>
-                    <a:pt x="7799693" y="0"/>
+                    <a:pt x="7660515" y="0"/>
+                  </a:lnTo>
+                  <a:lnTo>
+                    <a:pt x="7660515" y="0"/>
                   </a:lnTo>
                 </a:path>
               </a:pathLst>
@@ -2830,21 +2822,21 @@
           </p:nvSpPr>
           <p:spPr>
             <a:xfrm>
-              <a:off x="2559122" y="2073503"/>
-              <a:ext cx="0" cy="3649639"/>
+              <a:off x="887106" y="2202958"/>
+              <a:ext cx="7660515" cy="0"/>
             </a:xfrm>
             <a:custGeom>
               <a:avLst/>
               <a:pathLst>
-                <a:path w="0" h="3649639">
+                <a:path w="7660515" h="0">
                   <a:moveTo>
-                    <a:pt x="0" y="3649639"/>
+                    <a:pt x="0" y="0"/>
                   </a:moveTo>
                   <a:lnTo>
-                    <a:pt x="0" y="0"/>
-                  </a:lnTo>
-                  <a:lnTo>
-                    <a:pt x="0" y="0"/>
+                    <a:pt x="7660515" y="0"/>
+                  </a:lnTo>
+                  <a:lnTo>
+                    <a:pt x="7660515" y="0"/>
                   </a:lnTo>
                 </a:path>
               </a:pathLst>
@@ -2873,15 +2865,15 @@
           </p:nvSpPr>
           <p:spPr>
             <a:xfrm>
-              <a:off x="4613698" y="2073503"/>
-              <a:ext cx="0" cy="3649639"/>
+              <a:off x="2597634" y="2143092"/>
+              <a:ext cx="0" cy="1317069"/>
             </a:xfrm>
             <a:custGeom>
               <a:avLst/>
               <a:pathLst>
-                <a:path w="0" h="3649639">
+                <a:path w="0" h="1317069">
                   <a:moveTo>
-                    <a:pt x="0" y="3649639"/>
+                    <a:pt x="0" y="1317069"/>
                   </a:moveTo>
                   <a:lnTo>
                     <a:pt x="0" y="0"/>
@@ -2916,15 +2908,15 @@
           </p:nvSpPr>
           <p:spPr>
             <a:xfrm>
-              <a:off x="6668273" y="2073503"/>
-              <a:ext cx="0" cy="3649639"/>
+              <a:off x="4615547" y="2143092"/>
+              <a:ext cx="0" cy="1317069"/>
             </a:xfrm>
             <a:custGeom>
               <a:avLst/>
               <a:pathLst>
-                <a:path w="0" h="3649639">
+                <a:path w="0" h="1317069">
                   <a:moveTo>
-                    <a:pt x="0" y="3649639"/>
+                    <a:pt x="0" y="1317069"/>
                   </a:moveTo>
                   <a:lnTo>
                     <a:pt x="0" y="0"/>
@@ -2953,618 +2945,661 @@
         </p:sp>
         <p:sp>
           <p:nvSpPr>
-            <p:cNvPr id="20" name="pg20"/>
+            <p:cNvPr id="20" name="pl20"/>
             <p:cNvSpPr/>
             <p:nvPr/>
           </p:nvSpPr>
           <p:spPr>
             <a:xfrm>
-              <a:off x="1172049" y="2885955"/>
-              <a:ext cx="7090630" cy="2455448"/>
+              <a:off x="6633461" y="2143092"/>
+              <a:ext cx="0" cy="1317069"/>
             </a:xfrm>
             <a:custGeom>
               <a:avLst/>
               <a:pathLst>
-                <a:path w="7090630" h="2455448">
+                <a:path w="0" h="1317069">
+                  <a:moveTo>
+                    <a:pt x="0" y="1317069"/>
+                  </a:moveTo>
+                  <a:lnTo>
+                    <a:pt x="0" y="0"/>
+                  </a:lnTo>
+                  <a:lnTo>
+                    <a:pt x="0" y="0"/>
+                  </a:lnTo>
+                </a:path>
+              </a:pathLst>
+            </a:custGeom>
+            <a:ln w="13550" cap="flat">
+              <a:solidFill>
+                <a:srgbClr val="EBEBEB">
+                  <a:alpha val="100000"/>
+                </a:srgbClr>
+              </a:solidFill>
+              <a:prstDash val="solid"/>
+              <a:round/>
+            </a:ln>
+          </p:spPr>
+          <p:txBody>
+            <a:bodyPr/>
+            <a:lstStyle/>
+            <a:p/>
+          </p:txBody>
+        </p:sp>
+        <p:sp>
+          <p:nvSpPr>
+            <p:cNvPr id="21" name="pg21"/>
+            <p:cNvSpPr/>
+            <p:nvPr/>
+          </p:nvSpPr>
+          <p:spPr>
+            <a:xfrm>
+              <a:off x="1235312" y="2436286"/>
+              <a:ext cx="6964104" cy="886113"/>
+            </a:xfrm>
+            <a:custGeom>
+              <a:avLst/>
+              <a:pathLst>
+                <a:path w="6964104" h="886113">
                   <a:moveTo>
                     <a:pt x="0" y="0"/>
                   </a:moveTo>
                   <a:lnTo>
-                    <a:pt x="71622" y="67026"/>
-                  </a:lnTo>
-                  <a:lnTo>
-                    <a:pt x="143245" y="132371"/>
-                  </a:lnTo>
-                  <a:lnTo>
-                    <a:pt x="214867" y="196077"/>
-                  </a:lnTo>
-                  <a:lnTo>
-                    <a:pt x="286490" y="258184"/>
-                  </a:lnTo>
-                  <a:lnTo>
-                    <a:pt x="358112" y="318732"/>
-                  </a:lnTo>
-                  <a:lnTo>
-                    <a:pt x="429735" y="377761"/>
-                  </a:lnTo>
-                  <a:lnTo>
-                    <a:pt x="501357" y="435310"/>
-                  </a:lnTo>
-                  <a:lnTo>
-                    <a:pt x="572980" y="491414"/>
-                  </a:lnTo>
-                  <a:lnTo>
-                    <a:pt x="644602" y="546110"/>
-                  </a:lnTo>
-                  <a:lnTo>
-                    <a:pt x="716225" y="599434"/>
-                  </a:lnTo>
-                  <a:lnTo>
-                    <a:pt x="787847" y="651420"/>
-                  </a:lnTo>
-                  <a:lnTo>
-                    <a:pt x="859470" y="702102"/>
-                  </a:lnTo>
-                  <a:lnTo>
-                    <a:pt x="931092" y="751512"/>
-                  </a:lnTo>
-                  <a:lnTo>
-                    <a:pt x="1002715" y="799682"/>
-                  </a:lnTo>
-                  <a:lnTo>
-                    <a:pt x="1074337" y="846644"/>
-                  </a:lnTo>
-                  <a:lnTo>
-                    <a:pt x="1145960" y="892427"/>
-                  </a:lnTo>
-                  <a:lnTo>
-                    <a:pt x="1217582" y="937061"/>
-                  </a:lnTo>
-                  <a:lnTo>
-                    <a:pt x="1289205" y="980576"/>
-                  </a:lnTo>
-                  <a:lnTo>
-                    <a:pt x="1360827" y="1022998"/>
-                  </a:lnTo>
-                  <a:lnTo>
-                    <a:pt x="1432450" y="1064357"/>
-                  </a:lnTo>
-                  <a:lnTo>
-                    <a:pt x="1504073" y="1104677"/>
-                  </a:lnTo>
-                  <a:lnTo>
-                    <a:pt x="1575695" y="1143986"/>
-                  </a:lnTo>
-                  <a:lnTo>
-                    <a:pt x="1647318" y="1182308"/>
-                  </a:lnTo>
-                  <a:lnTo>
-                    <a:pt x="1718940" y="1219669"/>
-                  </a:lnTo>
-                  <a:lnTo>
-                    <a:pt x="1790563" y="1256093"/>
-                  </a:lnTo>
-                  <a:lnTo>
-                    <a:pt x="1862185" y="1291602"/>
-                  </a:lnTo>
-                  <a:lnTo>
-                    <a:pt x="1933808" y="1326221"/>
-                  </a:lnTo>
-                  <a:lnTo>
-                    <a:pt x="2005430" y="1359971"/>
-                  </a:lnTo>
-                  <a:lnTo>
-                    <a:pt x="2077053" y="1392874"/>
-                  </a:lnTo>
-                  <a:lnTo>
-                    <a:pt x="2148675" y="1424951"/>
-                  </a:lnTo>
-                  <a:lnTo>
-                    <a:pt x="2220298" y="1456224"/>
-                  </a:lnTo>
-                  <a:lnTo>
-                    <a:pt x="2291920" y="1486712"/>
-                  </a:lnTo>
-                  <a:lnTo>
-                    <a:pt x="2363543" y="1516435"/>
-                  </a:lnTo>
-                  <a:lnTo>
-                    <a:pt x="2435165" y="1545412"/>
-                  </a:lnTo>
-                  <a:lnTo>
-                    <a:pt x="2506788" y="1573662"/>
-                  </a:lnTo>
-                  <a:lnTo>
-                    <a:pt x="2578410" y="1601203"/>
-                  </a:lnTo>
-                  <a:lnTo>
-                    <a:pt x="2650033" y="1628053"/>
-                  </a:lnTo>
-                  <a:lnTo>
-                    <a:pt x="2721655" y="1654230"/>
-                  </a:lnTo>
-                  <a:lnTo>
-                    <a:pt x="2793278" y="1679749"/>
-                  </a:lnTo>
-                  <a:lnTo>
-                    <a:pt x="2864901" y="1704629"/>
-                  </a:lnTo>
-                  <a:lnTo>
-                    <a:pt x="2936523" y="1728884"/>
-                  </a:lnTo>
-                  <a:lnTo>
-                    <a:pt x="3008146" y="1752530"/>
-                  </a:lnTo>
-                  <a:lnTo>
-                    <a:pt x="3079768" y="1775584"/>
-                  </a:lnTo>
-                  <a:lnTo>
-                    <a:pt x="3151391" y="1798058"/>
-                  </a:lnTo>
-                  <a:lnTo>
-                    <a:pt x="3223013" y="1819969"/>
-                  </a:lnTo>
-                  <a:lnTo>
-                    <a:pt x="3294636" y="1841330"/>
-                  </a:lnTo>
-                  <a:lnTo>
-                    <a:pt x="3366258" y="1846999"/>
-                  </a:lnTo>
-                  <a:lnTo>
-                    <a:pt x="3437881" y="1852259"/>
-                  </a:lnTo>
-                  <a:lnTo>
-                    <a:pt x="3509503" y="1857485"/>
-                  </a:lnTo>
-                  <a:lnTo>
-                    <a:pt x="3581126" y="1862678"/>
-                  </a:lnTo>
-                  <a:lnTo>
-                    <a:pt x="3652748" y="1867838"/>
-                  </a:lnTo>
-                  <a:lnTo>
-                    <a:pt x="3724371" y="1872965"/>
-                  </a:lnTo>
-                  <a:lnTo>
-                    <a:pt x="3795993" y="1878060"/>
-                  </a:lnTo>
-                  <a:lnTo>
-                    <a:pt x="3867616" y="1883122"/>
-                  </a:lnTo>
-                  <a:lnTo>
-                    <a:pt x="3939238" y="1888151"/>
-                  </a:lnTo>
-                  <a:lnTo>
-                    <a:pt x="4010861" y="1893149"/>
-                  </a:lnTo>
-                  <a:lnTo>
-                    <a:pt x="4082483" y="1898114"/>
-                  </a:lnTo>
-                  <a:lnTo>
-                    <a:pt x="4154106" y="1903048"/>
-                  </a:lnTo>
-                  <a:lnTo>
-                    <a:pt x="4225729" y="1907950"/>
-                  </a:lnTo>
-                  <a:lnTo>
-                    <a:pt x="4297351" y="1912822"/>
-                  </a:lnTo>
-                  <a:lnTo>
-                    <a:pt x="4368974" y="1917662"/>
-                  </a:lnTo>
-                  <a:lnTo>
-                    <a:pt x="4440596" y="1922471"/>
-                  </a:lnTo>
-                  <a:lnTo>
-                    <a:pt x="4512219" y="1927249"/>
-                  </a:lnTo>
-                  <a:lnTo>
-                    <a:pt x="4583841" y="1931997"/>
-                  </a:lnTo>
-                  <a:lnTo>
-                    <a:pt x="4655464" y="1936715"/>
-                  </a:lnTo>
-                  <a:lnTo>
-                    <a:pt x="4727086" y="1941402"/>
-                  </a:lnTo>
-                  <a:lnTo>
-                    <a:pt x="4798709" y="1946060"/>
-                  </a:lnTo>
-                  <a:lnTo>
-                    <a:pt x="4870331" y="1950688"/>
-                  </a:lnTo>
-                  <a:lnTo>
-                    <a:pt x="4941954" y="1955286"/>
-                  </a:lnTo>
-                  <a:lnTo>
-                    <a:pt x="5013576" y="1959855"/>
-                  </a:lnTo>
-                  <a:lnTo>
-                    <a:pt x="5085199" y="1964395"/>
-                  </a:lnTo>
-                  <a:lnTo>
-                    <a:pt x="5156821" y="1968906"/>
-                  </a:lnTo>
-                  <a:lnTo>
-                    <a:pt x="5228444" y="1973388"/>
-                  </a:lnTo>
-                  <a:lnTo>
-                    <a:pt x="5300066" y="1977842"/>
-                  </a:lnTo>
-                  <a:lnTo>
-                    <a:pt x="5371689" y="1982267"/>
-                  </a:lnTo>
-                  <a:lnTo>
-                    <a:pt x="5443311" y="1986664"/>
-                  </a:lnTo>
-                  <a:lnTo>
-                    <a:pt x="5514934" y="1991033"/>
-                  </a:lnTo>
-                  <a:lnTo>
-                    <a:pt x="5586557" y="1995374"/>
-                  </a:lnTo>
-                  <a:lnTo>
-                    <a:pt x="5658179" y="1999687"/>
-                  </a:lnTo>
-                  <a:lnTo>
-                    <a:pt x="5729802" y="2003972"/>
-                  </a:lnTo>
-                  <a:lnTo>
-                    <a:pt x="5801424" y="2008231"/>
-                  </a:lnTo>
-                  <a:lnTo>
-                    <a:pt x="5873047" y="2012462"/>
-                  </a:lnTo>
-                  <a:lnTo>
-                    <a:pt x="5944669" y="2016666"/>
-                  </a:lnTo>
-                  <a:lnTo>
-                    <a:pt x="6016292" y="2020844"/>
-                  </a:lnTo>
-                  <a:lnTo>
-                    <a:pt x="6087914" y="2024994"/>
-                  </a:lnTo>
-                  <a:lnTo>
-                    <a:pt x="6159537" y="2029119"/>
-                  </a:lnTo>
-                  <a:lnTo>
-                    <a:pt x="6231159" y="2033216"/>
-                  </a:lnTo>
-                  <a:lnTo>
-                    <a:pt x="6302782" y="2037288"/>
-                  </a:lnTo>
-                  <a:lnTo>
-                    <a:pt x="6374404" y="2041334"/>
-                  </a:lnTo>
-                  <a:lnTo>
-                    <a:pt x="6446027" y="2045354"/>
-                  </a:lnTo>
-                  <a:lnTo>
-                    <a:pt x="6517649" y="2049348"/>
-                  </a:lnTo>
-                  <a:lnTo>
-                    <a:pt x="6589272" y="2053317"/>
-                  </a:lnTo>
-                  <a:lnTo>
-                    <a:pt x="6660894" y="2057261"/>
-                  </a:lnTo>
-                  <a:lnTo>
-                    <a:pt x="6732517" y="2061179"/>
-                  </a:lnTo>
-                  <a:lnTo>
-                    <a:pt x="6804139" y="2065072"/>
-                  </a:lnTo>
-                  <a:lnTo>
-                    <a:pt x="6875762" y="2068941"/>
-                  </a:lnTo>
-                  <a:lnTo>
-                    <a:pt x="6947385" y="2072784"/>
-                  </a:lnTo>
-                  <a:lnTo>
-                    <a:pt x="7019007" y="2076604"/>
-                  </a:lnTo>
-                  <a:lnTo>
-                    <a:pt x="7090630" y="2080399"/>
-                  </a:lnTo>
-                  <a:lnTo>
-                    <a:pt x="7090630" y="2455448"/>
-                  </a:lnTo>
-                  <a:lnTo>
-                    <a:pt x="7019007" y="2449893"/>
-                  </a:lnTo>
-                  <a:lnTo>
-                    <a:pt x="6947385" y="2444195"/>
-                  </a:lnTo>
-                  <a:lnTo>
-                    <a:pt x="6875762" y="2438350"/>
-                  </a:lnTo>
-                  <a:lnTo>
-                    <a:pt x="6804139" y="2432355"/>
-                  </a:lnTo>
-                  <a:lnTo>
-                    <a:pt x="6732517" y="2426205"/>
-                  </a:lnTo>
-                  <a:lnTo>
-                    <a:pt x="6660894" y="2419897"/>
-                  </a:lnTo>
-                  <a:lnTo>
-                    <a:pt x="6589272" y="2413427"/>
-                  </a:lnTo>
-                  <a:lnTo>
-                    <a:pt x="6517649" y="2406790"/>
-                  </a:lnTo>
-                  <a:lnTo>
-                    <a:pt x="6446027" y="2399982"/>
-                  </a:lnTo>
-                  <a:lnTo>
-                    <a:pt x="6374404" y="2392999"/>
-                  </a:lnTo>
-                  <a:lnTo>
-                    <a:pt x="6302782" y="2385837"/>
-                  </a:lnTo>
-                  <a:lnTo>
-                    <a:pt x="6231159" y="2378490"/>
-                  </a:lnTo>
-                  <a:lnTo>
-                    <a:pt x="6159537" y="2370954"/>
-                  </a:lnTo>
-                  <a:lnTo>
-                    <a:pt x="6087914" y="2363224"/>
-                  </a:lnTo>
-                  <a:lnTo>
-                    <a:pt x="6016292" y="2355295"/>
-                  </a:lnTo>
-                  <a:lnTo>
-                    <a:pt x="5944669" y="2347162"/>
-                  </a:lnTo>
-                  <a:lnTo>
-                    <a:pt x="5873047" y="2338820"/>
-                  </a:lnTo>
-                  <a:lnTo>
-                    <a:pt x="5801424" y="2330263"/>
-                  </a:lnTo>
-                  <a:lnTo>
-                    <a:pt x="5729802" y="2321486"/>
-                  </a:lnTo>
-                  <a:lnTo>
-                    <a:pt x="5658179" y="2312482"/>
-                  </a:lnTo>
-                  <a:lnTo>
-                    <a:pt x="5586557" y="2303248"/>
-                  </a:lnTo>
-                  <a:lnTo>
-                    <a:pt x="5514934" y="2293775"/>
-                  </a:lnTo>
-                  <a:lnTo>
-                    <a:pt x="5443311" y="2284059"/>
-                  </a:lnTo>
-                  <a:lnTo>
-                    <a:pt x="5371689" y="2274092"/>
-                  </a:lnTo>
-                  <a:lnTo>
-                    <a:pt x="5300066" y="2263870"/>
-                  </a:lnTo>
-                  <a:lnTo>
-                    <a:pt x="5228444" y="2253384"/>
-                  </a:lnTo>
-                  <a:lnTo>
-                    <a:pt x="5156821" y="2242628"/>
-                  </a:lnTo>
-                  <a:lnTo>
-                    <a:pt x="5085199" y="2231595"/>
-                  </a:lnTo>
-                  <a:lnTo>
-                    <a:pt x="5013576" y="2220278"/>
-                  </a:lnTo>
-                  <a:lnTo>
-                    <a:pt x="4941954" y="2208670"/>
-                  </a:lnTo>
-                  <a:lnTo>
-                    <a:pt x="4870331" y="2196764"/>
-                  </a:lnTo>
-                  <a:lnTo>
-                    <a:pt x="4798709" y="2184550"/>
-                  </a:lnTo>
-                  <a:lnTo>
-                    <a:pt x="4727086" y="2172023"/>
-                  </a:lnTo>
-                  <a:lnTo>
-                    <a:pt x="4655464" y="2159173"/>
-                  </a:lnTo>
-                  <a:lnTo>
-                    <a:pt x="4583841" y="2145993"/>
-                  </a:lnTo>
-                  <a:lnTo>
-                    <a:pt x="4512219" y="2132473"/>
-                  </a:lnTo>
-                  <a:lnTo>
-                    <a:pt x="4440596" y="2118605"/>
-                  </a:lnTo>
-                  <a:lnTo>
-                    <a:pt x="4368974" y="2104380"/>
-                  </a:lnTo>
-                  <a:lnTo>
-                    <a:pt x="4297351" y="2089789"/>
-                  </a:lnTo>
-                  <a:lnTo>
-                    <a:pt x="4225729" y="2074823"/>
-                  </a:lnTo>
-                  <a:lnTo>
-                    <a:pt x="4154106" y="2059471"/>
-                  </a:lnTo>
-                  <a:lnTo>
-                    <a:pt x="4082483" y="2043725"/>
-                  </a:lnTo>
-                  <a:lnTo>
-                    <a:pt x="4010861" y="2027573"/>
-                  </a:lnTo>
-                  <a:lnTo>
-                    <a:pt x="3939238" y="2011005"/>
-                  </a:lnTo>
-                  <a:lnTo>
-                    <a:pt x="3867616" y="1994011"/>
-                  </a:lnTo>
-                  <a:lnTo>
-                    <a:pt x="3795993" y="1976580"/>
-                  </a:lnTo>
-                  <a:lnTo>
-                    <a:pt x="3724371" y="1958700"/>
-                  </a:lnTo>
-                  <a:lnTo>
-                    <a:pt x="3652748" y="1940359"/>
-                  </a:lnTo>
-                  <a:lnTo>
-                    <a:pt x="3581126" y="1921547"/>
-                  </a:lnTo>
-                  <a:lnTo>
-                    <a:pt x="3509503" y="1902251"/>
-                  </a:lnTo>
-                  <a:lnTo>
-                    <a:pt x="3437881" y="1882458"/>
-                  </a:lnTo>
-                  <a:lnTo>
-                    <a:pt x="3366258" y="1862155"/>
-                  </a:lnTo>
-                  <a:lnTo>
-                    <a:pt x="3294636" y="1841705"/>
-                  </a:lnTo>
-                  <a:lnTo>
-                    <a:pt x="3223013" y="1836377"/>
-                  </a:lnTo>
-                  <a:lnTo>
-                    <a:pt x="3151391" y="1831015"/>
-                  </a:lnTo>
-                  <a:lnTo>
-                    <a:pt x="3079768" y="1825618"/>
-                  </a:lnTo>
-                  <a:lnTo>
-                    <a:pt x="3008146" y="1820187"/>
-                  </a:lnTo>
-                  <a:lnTo>
-                    <a:pt x="2936523" y="1814721"/>
-                  </a:lnTo>
-                  <a:lnTo>
-                    <a:pt x="2864901" y="1809220"/>
-                  </a:lnTo>
-                  <a:lnTo>
-                    <a:pt x="2793278" y="1803684"/>
-                  </a:lnTo>
-                  <a:lnTo>
-                    <a:pt x="2721655" y="1798112"/>
-                  </a:lnTo>
-                  <a:lnTo>
-                    <a:pt x="2650033" y="1792504"/>
-                  </a:lnTo>
-                  <a:lnTo>
-                    <a:pt x="2578410" y="1786860"/>
-                  </a:lnTo>
-                  <a:lnTo>
-                    <a:pt x="2506788" y="1781180"/>
-                  </a:lnTo>
-                  <a:lnTo>
-                    <a:pt x="2435165" y="1775463"/>
-                  </a:lnTo>
-                  <a:lnTo>
-                    <a:pt x="2363543" y="1769710"/>
-                  </a:lnTo>
-                  <a:lnTo>
-                    <a:pt x="2291920" y="1763920"/>
-                  </a:lnTo>
-                  <a:lnTo>
-                    <a:pt x="2220298" y="1758092"/>
-                  </a:lnTo>
-                  <a:lnTo>
-                    <a:pt x="2148675" y="1752228"/>
-                  </a:lnTo>
-                  <a:lnTo>
-                    <a:pt x="2077053" y="1746325"/>
-                  </a:lnTo>
-                  <a:lnTo>
-                    <a:pt x="2005430" y="1740385"/>
-                  </a:lnTo>
-                  <a:lnTo>
-                    <a:pt x="1933808" y="1734406"/>
-                  </a:lnTo>
-                  <a:lnTo>
-                    <a:pt x="1862185" y="1728389"/>
-                  </a:lnTo>
-                  <a:lnTo>
-                    <a:pt x="1790563" y="1722334"/>
-                  </a:lnTo>
-                  <a:lnTo>
-                    <a:pt x="1718940" y="1716239"/>
-                  </a:lnTo>
-                  <a:lnTo>
-                    <a:pt x="1647318" y="1710106"/>
-                  </a:lnTo>
-                  <a:lnTo>
-                    <a:pt x="1575695" y="1703933"/>
-                  </a:lnTo>
-                  <a:lnTo>
-                    <a:pt x="1504073" y="1697720"/>
-                  </a:lnTo>
-                  <a:lnTo>
-                    <a:pt x="1432450" y="1691467"/>
-                  </a:lnTo>
-                  <a:lnTo>
-                    <a:pt x="1360827" y="1685175"/>
-                  </a:lnTo>
-                  <a:lnTo>
-                    <a:pt x="1289205" y="1678841"/>
-                  </a:lnTo>
-                  <a:lnTo>
-                    <a:pt x="1217582" y="1672468"/>
-                  </a:lnTo>
-                  <a:lnTo>
-                    <a:pt x="1145960" y="1666053"/>
-                  </a:lnTo>
-                  <a:lnTo>
-                    <a:pt x="1074337" y="1659597"/>
-                  </a:lnTo>
-                  <a:lnTo>
-                    <a:pt x="1002715" y="1653100"/>
-                  </a:lnTo>
-                  <a:lnTo>
-                    <a:pt x="931092" y="1646561"/>
-                  </a:lnTo>
-                  <a:lnTo>
-                    <a:pt x="859470" y="1639979"/>
-                  </a:lnTo>
-                  <a:lnTo>
-                    <a:pt x="787847" y="1633356"/>
-                  </a:lnTo>
-                  <a:lnTo>
-                    <a:pt x="716225" y="1626690"/>
-                  </a:lnTo>
-                  <a:lnTo>
-                    <a:pt x="644602" y="1619981"/>
-                  </a:lnTo>
-                  <a:lnTo>
-                    <a:pt x="572980" y="1613230"/>
-                  </a:lnTo>
-                  <a:lnTo>
-                    <a:pt x="501357" y="1606434"/>
-                  </a:lnTo>
-                  <a:lnTo>
-                    <a:pt x="429735" y="1599596"/>
-                  </a:lnTo>
-                  <a:lnTo>
-                    <a:pt x="358112" y="1592713"/>
-                  </a:lnTo>
-                  <a:lnTo>
-                    <a:pt x="286490" y="1585786"/>
-                  </a:lnTo>
-                  <a:lnTo>
-                    <a:pt x="214867" y="1578815"/>
-                  </a:lnTo>
-                  <a:lnTo>
-                    <a:pt x="143245" y="1571798"/>
-                  </a:lnTo>
-                  <a:lnTo>
-                    <a:pt x="71622" y="1564737"/>
-                  </a:lnTo>
-                  <a:lnTo>
-                    <a:pt x="0" y="1557631"/>
+                    <a:pt x="70344" y="24188"/>
+                  </a:lnTo>
+                  <a:lnTo>
+                    <a:pt x="140688" y="47769"/>
+                  </a:lnTo>
+                  <a:lnTo>
+                    <a:pt x="211033" y="70759"/>
+                  </a:lnTo>
+                  <a:lnTo>
+                    <a:pt x="281377" y="93172"/>
+                  </a:lnTo>
+                  <a:lnTo>
+                    <a:pt x="351722" y="115023"/>
+                  </a:lnTo>
+                  <a:lnTo>
+                    <a:pt x="422066" y="136325"/>
+                  </a:lnTo>
+                  <a:lnTo>
+                    <a:pt x="492411" y="157093"/>
+                  </a:lnTo>
+                  <a:lnTo>
+                    <a:pt x="562755" y="177339"/>
+                  </a:lnTo>
+                  <a:lnTo>
+                    <a:pt x="633100" y="197078"/>
+                  </a:lnTo>
+                  <a:lnTo>
+                    <a:pt x="703444" y="216321"/>
+                  </a:lnTo>
+                  <a:lnTo>
+                    <a:pt x="773789" y="235082"/>
+                  </a:lnTo>
+                  <a:lnTo>
+                    <a:pt x="844133" y="253372"/>
+                  </a:lnTo>
+                  <a:lnTo>
+                    <a:pt x="914478" y="271203"/>
+                  </a:lnTo>
+                  <a:lnTo>
+                    <a:pt x="984822" y="288586"/>
+                  </a:lnTo>
+                  <a:lnTo>
+                    <a:pt x="1055167" y="305533"/>
+                  </a:lnTo>
+                  <a:lnTo>
+                    <a:pt x="1125511" y="322056"/>
+                  </a:lnTo>
+                  <a:lnTo>
+                    <a:pt x="1195856" y="338163"/>
+                  </a:lnTo>
+                  <a:lnTo>
+                    <a:pt x="1266200" y="353866"/>
+                  </a:lnTo>
+                  <a:lnTo>
+                    <a:pt x="1336545" y="369176"/>
+                  </a:lnTo>
+                  <a:lnTo>
+                    <a:pt x="1406889" y="384101"/>
+                  </a:lnTo>
+                  <a:lnTo>
+                    <a:pt x="1477234" y="398652"/>
+                  </a:lnTo>
+                  <a:lnTo>
+                    <a:pt x="1547578" y="412837"/>
+                  </a:lnTo>
+                  <a:lnTo>
+                    <a:pt x="1617923" y="426667"/>
+                  </a:lnTo>
+                  <a:lnTo>
+                    <a:pt x="1688267" y="440150"/>
+                  </a:lnTo>
+                  <a:lnTo>
+                    <a:pt x="1758612" y="453294"/>
+                  </a:lnTo>
+                  <a:lnTo>
+                    <a:pt x="1828956" y="466109"/>
+                  </a:lnTo>
+                  <a:lnTo>
+                    <a:pt x="1899301" y="478602"/>
+                  </a:lnTo>
+                  <a:lnTo>
+                    <a:pt x="1969645" y="490781"/>
+                  </a:lnTo>
+                  <a:lnTo>
+                    <a:pt x="2039990" y="502655"/>
+                  </a:lnTo>
+                  <a:lnTo>
+                    <a:pt x="2110334" y="514231"/>
+                  </a:lnTo>
+                  <a:lnTo>
+                    <a:pt x="2180679" y="525517"/>
+                  </a:lnTo>
+                  <a:lnTo>
+                    <a:pt x="2251023" y="536519"/>
+                  </a:lnTo>
+                  <a:lnTo>
+                    <a:pt x="2321368" y="547245"/>
+                  </a:lnTo>
+                  <a:lnTo>
+                    <a:pt x="2391712" y="557702"/>
+                  </a:lnTo>
+                  <a:lnTo>
+                    <a:pt x="2462057" y="567897"/>
+                  </a:lnTo>
+                  <a:lnTo>
+                    <a:pt x="2532401" y="577836"/>
+                  </a:lnTo>
+                  <a:lnTo>
+                    <a:pt x="2602746" y="587526"/>
+                  </a:lnTo>
+                  <a:lnTo>
+                    <a:pt x="2673090" y="596972"/>
+                  </a:lnTo>
+                  <a:lnTo>
+                    <a:pt x="2743435" y="606182"/>
+                  </a:lnTo>
+                  <a:lnTo>
+                    <a:pt x="2813779" y="615160"/>
+                  </a:lnTo>
+                  <a:lnTo>
+                    <a:pt x="2884124" y="623913"/>
+                  </a:lnTo>
+                  <a:lnTo>
+                    <a:pt x="2954468" y="632447"/>
+                  </a:lnTo>
+                  <a:lnTo>
+                    <a:pt x="3024813" y="640766"/>
+                  </a:lnTo>
+                  <a:lnTo>
+                    <a:pt x="3095157" y="648877"/>
+                  </a:lnTo>
+                  <a:lnTo>
+                    <a:pt x="3165502" y="656784"/>
+                  </a:lnTo>
+                  <a:lnTo>
+                    <a:pt x="3235846" y="664492"/>
+                  </a:lnTo>
+                  <a:lnTo>
+                    <a:pt x="3306191" y="666538"/>
+                  </a:lnTo>
+                  <a:lnTo>
+                    <a:pt x="3376535" y="668436"/>
+                  </a:lnTo>
+                  <a:lnTo>
+                    <a:pt x="3446880" y="670322"/>
+                  </a:lnTo>
+                  <a:lnTo>
+                    <a:pt x="3517224" y="672196"/>
+                  </a:lnTo>
+                  <a:lnTo>
+                    <a:pt x="3587569" y="674059"/>
+                  </a:lnTo>
+                  <a:lnTo>
+                    <a:pt x="3657913" y="675909"/>
+                  </a:lnTo>
+                  <a:lnTo>
+                    <a:pt x="3728257" y="677747"/>
+                  </a:lnTo>
+                  <a:lnTo>
+                    <a:pt x="3798602" y="679574"/>
+                  </a:lnTo>
+                  <a:lnTo>
+                    <a:pt x="3868946" y="681389"/>
+                  </a:lnTo>
+                  <a:lnTo>
+                    <a:pt x="3939291" y="683192"/>
+                  </a:lnTo>
+                  <a:lnTo>
+                    <a:pt x="4009635" y="684984"/>
+                  </a:lnTo>
+                  <a:lnTo>
+                    <a:pt x="4079980" y="686765"/>
+                  </a:lnTo>
+                  <a:lnTo>
+                    <a:pt x="4150324" y="688534"/>
+                  </a:lnTo>
+                  <a:lnTo>
+                    <a:pt x="4220669" y="690292"/>
+                  </a:lnTo>
+                  <a:lnTo>
+                    <a:pt x="4291013" y="692039"/>
+                  </a:lnTo>
+                  <a:lnTo>
+                    <a:pt x="4361358" y="693774"/>
+                  </a:lnTo>
+                  <a:lnTo>
+                    <a:pt x="4431702" y="695499"/>
+                  </a:lnTo>
+                  <a:lnTo>
+                    <a:pt x="4502047" y="697212"/>
+                  </a:lnTo>
+                  <a:lnTo>
+                    <a:pt x="4572391" y="698914"/>
+                  </a:lnTo>
+                  <a:lnTo>
+                    <a:pt x="4642736" y="700606"/>
+                  </a:lnTo>
+                  <a:lnTo>
+                    <a:pt x="4713080" y="702287"/>
+                  </a:lnTo>
+                  <a:lnTo>
+                    <a:pt x="4783425" y="703957"/>
+                  </a:lnTo>
+                  <a:lnTo>
+                    <a:pt x="4853769" y="705616"/>
+                  </a:lnTo>
+                  <a:lnTo>
+                    <a:pt x="4924114" y="707265"/>
+                  </a:lnTo>
+                  <a:lnTo>
+                    <a:pt x="4994458" y="708904"/>
+                  </a:lnTo>
+                  <a:lnTo>
+                    <a:pt x="5064803" y="710532"/>
+                  </a:lnTo>
+                  <a:lnTo>
+                    <a:pt x="5135147" y="712149"/>
+                  </a:lnTo>
+                  <a:lnTo>
+                    <a:pt x="5205492" y="713756"/>
+                  </a:lnTo>
+                  <a:lnTo>
+                    <a:pt x="5275836" y="715353"/>
+                  </a:lnTo>
+                  <a:lnTo>
+                    <a:pt x="5346181" y="716940"/>
+                  </a:lnTo>
+                  <a:lnTo>
+                    <a:pt x="5416525" y="718517"/>
+                  </a:lnTo>
+                  <a:lnTo>
+                    <a:pt x="5486870" y="720083"/>
+                  </a:lnTo>
+                  <a:lnTo>
+                    <a:pt x="5557214" y="721640"/>
+                  </a:lnTo>
+                  <a:lnTo>
+                    <a:pt x="5627559" y="723186"/>
+                  </a:lnTo>
+                  <a:lnTo>
+                    <a:pt x="5697903" y="724723"/>
+                  </a:lnTo>
+                  <a:lnTo>
+                    <a:pt x="5768248" y="726250"/>
+                  </a:lnTo>
+                  <a:lnTo>
+                    <a:pt x="5838592" y="727767"/>
+                  </a:lnTo>
+                  <a:lnTo>
+                    <a:pt x="5908937" y="729275"/>
+                  </a:lnTo>
+                  <a:lnTo>
+                    <a:pt x="5979281" y="730772"/>
+                  </a:lnTo>
+                  <a:lnTo>
+                    <a:pt x="6049626" y="732261"/>
+                  </a:lnTo>
+                  <a:lnTo>
+                    <a:pt x="6119970" y="733740"/>
+                  </a:lnTo>
+                  <a:lnTo>
+                    <a:pt x="6190315" y="735209"/>
+                  </a:lnTo>
+                  <a:lnTo>
+                    <a:pt x="6260659" y="736669"/>
+                  </a:lnTo>
+                  <a:lnTo>
+                    <a:pt x="6331004" y="738120"/>
+                  </a:lnTo>
+                  <a:lnTo>
+                    <a:pt x="6401348" y="739561"/>
+                  </a:lnTo>
+                  <a:lnTo>
+                    <a:pt x="6471693" y="740993"/>
+                  </a:lnTo>
+                  <a:lnTo>
+                    <a:pt x="6542037" y="742417"/>
+                  </a:lnTo>
+                  <a:lnTo>
+                    <a:pt x="6612382" y="743831"/>
+                  </a:lnTo>
+                  <a:lnTo>
+                    <a:pt x="6682726" y="745236"/>
+                  </a:lnTo>
+                  <a:lnTo>
+                    <a:pt x="6753071" y="746632"/>
+                  </a:lnTo>
+                  <a:lnTo>
+                    <a:pt x="6823415" y="748019"/>
+                  </a:lnTo>
+                  <a:lnTo>
+                    <a:pt x="6893760" y="749397"/>
+                  </a:lnTo>
+                  <a:lnTo>
+                    <a:pt x="6964104" y="750767"/>
+                  </a:lnTo>
+                  <a:lnTo>
+                    <a:pt x="6964104" y="886113"/>
+                  </a:lnTo>
+                  <a:lnTo>
+                    <a:pt x="6893760" y="884108"/>
+                  </a:lnTo>
+                  <a:lnTo>
+                    <a:pt x="6823415" y="882052"/>
+                  </a:lnTo>
+                  <a:lnTo>
+                    <a:pt x="6753071" y="879943"/>
+                  </a:lnTo>
+                  <a:lnTo>
+                    <a:pt x="6682726" y="877779"/>
+                  </a:lnTo>
+                  <a:lnTo>
+                    <a:pt x="6612382" y="875560"/>
+                  </a:lnTo>
+                  <a:lnTo>
+                    <a:pt x="6542037" y="873284"/>
+                  </a:lnTo>
+                  <a:lnTo>
+                    <a:pt x="6471693" y="870949"/>
+                  </a:lnTo>
+                  <a:lnTo>
+                    <a:pt x="6401348" y="868554"/>
+                  </a:lnTo>
+                  <a:lnTo>
+                    <a:pt x="6331004" y="866097"/>
+                  </a:lnTo>
+                  <a:lnTo>
+                    <a:pt x="6260659" y="863577"/>
+                  </a:lnTo>
+                  <a:lnTo>
+                    <a:pt x="6190315" y="860992"/>
+                  </a:lnTo>
+                  <a:lnTo>
+                    <a:pt x="6119970" y="858341"/>
+                  </a:lnTo>
+                  <a:lnTo>
+                    <a:pt x="6049626" y="855621"/>
+                  </a:lnTo>
+                  <a:lnTo>
+                    <a:pt x="5979281" y="852832"/>
+                  </a:lnTo>
+                  <a:lnTo>
+                    <a:pt x="5908937" y="849970"/>
+                  </a:lnTo>
+                  <a:lnTo>
+                    <a:pt x="5838592" y="847035"/>
+                  </a:lnTo>
+                  <a:lnTo>
+                    <a:pt x="5768248" y="844025"/>
+                  </a:lnTo>
+                  <a:lnTo>
+                    <a:pt x="5697903" y="840937"/>
+                  </a:lnTo>
+                  <a:lnTo>
+                    <a:pt x="5627559" y="837769"/>
+                  </a:lnTo>
+                  <a:lnTo>
+                    <a:pt x="5557214" y="834520"/>
+                  </a:lnTo>
+                  <a:lnTo>
+                    <a:pt x="5486870" y="831188"/>
+                  </a:lnTo>
+                  <a:lnTo>
+                    <a:pt x="5416525" y="827769"/>
+                  </a:lnTo>
+                  <a:lnTo>
+                    <a:pt x="5346181" y="824263"/>
+                  </a:lnTo>
+                  <a:lnTo>
+                    <a:pt x="5275836" y="820666"/>
+                  </a:lnTo>
+                  <a:lnTo>
+                    <a:pt x="5205492" y="816977"/>
+                  </a:lnTo>
+                  <a:lnTo>
+                    <a:pt x="5135147" y="813193"/>
+                  </a:lnTo>
+                  <a:lnTo>
+                    <a:pt x="5064803" y="809311"/>
+                  </a:lnTo>
+                  <a:lnTo>
+                    <a:pt x="4994458" y="805330"/>
+                  </a:lnTo>
+                  <a:lnTo>
+                    <a:pt x="4924114" y="801246"/>
+                  </a:lnTo>
+                  <a:lnTo>
+                    <a:pt x="4853769" y="797057"/>
+                  </a:lnTo>
+                  <a:lnTo>
+                    <a:pt x="4783425" y="792760"/>
+                  </a:lnTo>
+                  <a:lnTo>
+                    <a:pt x="4713080" y="788353"/>
+                  </a:lnTo>
+                  <a:lnTo>
+                    <a:pt x="4642736" y="783832"/>
+                  </a:lnTo>
+                  <a:lnTo>
+                    <a:pt x="4572391" y="779194"/>
+                  </a:lnTo>
+                  <a:lnTo>
+                    <a:pt x="4502047" y="774438"/>
+                  </a:lnTo>
+                  <a:lnTo>
+                    <a:pt x="4431702" y="769559"/>
+                  </a:lnTo>
+                  <a:lnTo>
+                    <a:pt x="4361358" y="764554"/>
+                  </a:lnTo>
+                  <a:lnTo>
+                    <a:pt x="4291013" y="759421"/>
+                  </a:lnTo>
+                  <a:lnTo>
+                    <a:pt x="4220669" y="754155"/>
+                  </a:lnTo>
+                  <a:lnTo>
+                    <a:pt x="4150324" y="748754"/>
+                  </a:lnTo>
+                  <a:lnTo>
+                    <a:pt x="4079980" y="743214"/>
+                  </a:lnTo>
+                  <a:lnTo>
+                    <a:pt x="4009635" y="737532"/>
+                  </a:lnTo>
+                  <a:lnTo>
+                    <a:pt x="3939291" y="731703"/>
+                  </a:lnTo>
+                  <a:lnTo>
+                    <a:pt x="3868946" y="725724"/>
+                  </a:lnTo>
+                  <a:lnTo>
+                    <a:pt x="3798602" y="719591"/>
+                  </a:lnTo>
+                  <a:lnTo>
+                    <a:pt x="3728257" y="713301"/>
+                  </a:lnTo>
+                  <a:lnTo>
+                    <a:pt x="3657913" y="706848"/>
+                  </a:lnTo>
+                  <a:lnTo>
+                    <a:pt x="3587569" y="700230"/>
+                  </a:lnTo>
+                  <a:lnTo>
+                    <a:pt x="3517224" y="693441"/>
+                  </a:lnTo>
+                  <a:lnTo>
+                    <a:pt x="3446880" y="686477"/>
+                  </a:lnTo>
+                  <a:lnTo>
+                    <a:pt x="3376535" y="679334"/>
+                  </a:lnTo>
+                  <a:lnTo>
+                    <a:pt x="3306191" y="672008"/>
+                  </a:lnTo>
+                  <a:lnTo>
+                    <a:pt x="3235846" y="664628"/>
+                  </a:lnTo>
+                  <a:lnTo>
+                    <a:pt x="3165502" y="662705"/>
+                  </a:lnTo>
+                  <a:lnTo>
+                    <a:pt x="3095157" y="660770"/>
+                  </a:lnTo>
+                  <a:lnTo>
+                    <a:pt x="3024813" y="658822"/>
+                  </a:lnTo>
+                  <a:lnTo>
+                    <a:pt x="2954468" y="656862"/>
+                  </a:lnTo>
+                  <a:lnTo>
+                    <a:pt x="2884124" y="654890"/>
+                  </a:lnTo>
+                  <a:lnTo>
+                    <a:pt x="2813779" y="652905"/>
+                  </a:lnTo>
+                  <a:lnTo>
+                    <a:pt x="2743435" y="650907"/>
+                  </a:lnTo>
+                  <a:lnTo>
+                    <a:pt x="2673090" y="648896"/>
+                  </a:lnTo>
+                  <a:lnTo>
+                    <a:pt x="2602746" y="646872"/>
+                  </a:lnTo>
+                  <a:lnTo>
+                    <a:pt x="2532401" y="644835"/>
+                  </a:lnTo>
+                  <a:lnTo>
+                    <a:pt x="2462057" y="642786"/>
+                  </a:lnTo>
+                  <a:lnTo>
+                    <a:pt x="2391712" y="640723"/>
+                  </a:lnTo>
+                  <a:lnTo>
+                    <a:pt x="2321368" y="638646"/>
+                  </a:lnTo>
+                  <a:lnTo>
+                    <a:pt x="2251023" y="636557"/>
+                  </a:lnTo>
+                  <a:lnTo>
+                    <a:pt x="2180679" y="634454"/>
+                  </a:lnTo>
+                  <a:lnTo>
+                    <a:pt x="2110334" y="632337"/>
+                  </a:lnTo>
+                  <a:lnTo>
+                    <a:pt x="2039990" y="630207"/>
+                  </a:lnTo>
+                  <a:lnTo>
+                    <a:pt x="1969645" y="628064"/>
+                  </a:lnTo>
+                  <a:lnTo>
+                    <a:pt x="1899301" y="625906"/>
+                  </a:lnTo>
+                  <a:lnTo>
+                    <a:pt x="1828956" y="623735"/>
+                  </a:lnTo>
+                  <a:lnTo>
+                    <a:pt x="1758612" y="621549"/>
+                  </a:lnTo>
+                  <a:lnTo>
+                    <a:pt x="1688267" y="619350"/>
+                  </a:lnTo>
+                  <a:lnTo>
+                    <a:pt x="1617923" y="617137"/>
+                  </a:lnTo>
+                  <a:lnTo>
+                    <a:pt x="1547578" y="614909"/>
+                  </a:lnTo>
+                  <a:lnTo>
+                    <a:pt x="1477234" y="612667"/>
+                  </a:lnTo>
+                  <a:lnTo>
+                    <a:pt x="1406889" y="610410"/>
+                  </a:lnTo>
+                  <a:lnTo>
+                    <a:pt x="1336545" y="608140"/>
+                  </a:lnTo>
+                  <a:lnTo>
+                    <a:pt x="1266200" y="605854"/>
+                  </a:lnTo>
+                  <a:lnTo>
+                    <a:pt x="1195856" y="603554"/>
+                  </a:lnTo>
+                  <a:lnTo>
+                    <a:pt x="1125511" y="601239"/>
+                  </a:lnTo>
+                  <a:lnTo>
+                    <a:pt x="1055167" y="598909"/>
+                  </a:lnTo>
+                  <a:lnTo>
+                    <a:pt x="984822" y="596564"/>
+                  </a:lnTo>
+                  <a:lnTo>
+                    <a:pt x="914478" y="594205"/>
+                  </a:lnTo>
+                  <a:lnTo>
+                    <a:pt x="844133" y="591830"/>
+                  </a:lnTo>
+                  <a:lnTo>
+                    <a:pt x="773789" y="589439"/>
+                  </a:lnTo>
+                  <a:lnTo>
+                    <a:pt x="703444" y="587034"/>
+                  </a:lnTo>
+                  <a:lnTo>
+                    <a:pt x="633100" y="584613"/>
+                  </a:lnTo>
+                  <a:lnTo>
+                    <a:pt x="562755" y="582176"/>
+                  </a:lnTo>
+                  <a:lnTo>
+                    <a:pt x="492411" y="579724"/>
+                  </a:lnTo>
+                  <a:lnTo>
+                    <a:pt x="422066" y="577256"/>
+                  </a:lnTo>
+                  <a:lnTo>
+                    <a:pt x="351722" y="574772"/>
+                  </a:lnTo>
+                  <a:lnTo>
+                    <a:pt x="281377" y="572273"/>
+                  </a:lnTo>
+                  <a:lnTo>
+                    <a:pt x="211033" y="569757"/>
+                  </a:lnTo>
+                  <a:lnTo>
+                    <a:pt x="140688" y="567225"/>
+                  </a:lnTo>
+                  <a:lnTo>
+                    <a:pt x="70344" y="564677"/>
+                  </a:lnTo>
+                  <a:lnTo>
+                    <a:pt x="0" y="562112"/>
                   </a:lnTo>
                   <a:close/>
                 </a:path>
@@ -3584,643 +3619,318 @@
         </p:sp>
         <p:sp>
           <p:nvSpPr>
-            <p:cNvPr id="21" name="pl21"/>
-            <p:cNvSpPr/>
-            <p:nvPr/>
-          </p:nvSpPr>
-          <p:spPr>
-            <a:xfrm>
-              <a:off x="1172049" y="2885955"/>
-              <a:ext cx="7090630" cy="2080399"/>
-            </a:xfrm>
-            <a:custGeom>
-              <a:avLst/>
-              <a:pathLst>
-                <a:path w="7090630" h="2080399">
-                  <a:moveTo>
-                    <a:pt x="0" y="0"/>
-                  </a:moveTo>
-                  <a:lnTo>
-                    <a:pt x="71622" y="67026"/>
-                  </a:lnTo>
-                  <a:lnTo>
-                    <a:pt x="143245" y="132371"/>
-                  </a:lnTo>
-                  <a:lnTo>
-                    <a:pt x="214867" y="196077"/>
-                  </a:lnTo>
-                  <a:lnTo>
-                    <a:pt x="286490" y="258184"/>
-                  </a:lnTo>
-                  <a:lnTo>
-                    <a:pt x="358112" y="318732"/>
-                  </a:lnTo>
-                  <a:lnTo>
-                    <a:pt x="429735" y="377761"/>
-                  </a:lnTo>
-                  <a:lnTo>
-                    <a:pt x="501357" y="435310"/>
-                  </a:lnTo>
-                  <a:lnTo>
-                    <a:pt x="572980" y="491414"/>
-                  </a:lnTo>
-                  <a:lnTo>
-                    <a:pt x="644602" y="546110"/>
-                  </a:lnTo>
-                  <a:lnTo>
-                    <a:pt x="716225" y="599434"/>
-                  </a:lnTo>
-                  <a:lnTo>
-                    <a:pt x="787847" y="651420"/>
-                  </a:lnTo>
-                  <a:lnTo>
-                    <a:pt x="859470" y="702102"/>
-                  </a:lnTo>
-                  <a:lnTo>
-                    <a:pt x="931092" y="751512"/>
-                  </a:lnTo>
-                  <a:lnTo>
-                    <a:pt x="1002715" y="799682"/>
-                  </a:lnTo>
-                  <a:lnTo>
-                    <a:pt x="1074337" y="846644"/>
-                  </a:lnTo>
-                  <a:lnTo>
-                    <a:pt x="1145960" y="892427"/>
-                  </a:lnTo>
-                  <a:lnTo>
-                    <a:pt x="1217582" y="937061"/>
-                  </a:lnTo>
-                  <a:lnTo>
-                    <a:pt x="1289205" y="980576"/>
-                  </a:lnTo>
-                  <a:lnTo>
-                    <a:pt x="1360827" y="1022998"/>
-                  </a:lnTo>
-                  <a:lnTo>
-                    <a:pt x="1432450" y="1064357"/>
-                  </a:lnTo>
-                  <a:lnTo>
-                    <a:pt x="1504073" y="1104677"/>
-                  </a:lnTo>
-                  <a:lnTo>
-                    <a:pt x="1575695" y="1143986"/>
-                  </a:lnTo>
-                  <a:lnTo>
-                    <a:pt x="1647318" y="1182308"/>
-                  </a:lnTo>
-                  <a:lnTo>
-                    <a:pt x="1718940" y="1219669"/>
-                  </a:lnTo>
-                  <a:lnTo>
-                    <a:pt x="1790563" y="1256093"/>
-                  </a:lnTo>
-                  <a:lnTo>
-                    <a:pt x="1862185" y="1291602"/>
-                  </a:lnTo>
-                  <a:lnTo>
-                    <a:pt x="1933808" y="1326221"/>
-                  </a:lnTo>
-                  <a:lnTo>
-                    <a:pt x="2005430" y="1359971"/>
-                  </a:lnTo>
-                  <a:lnTo>
-                    <a:pt x="2077053" y="1392874"/>
-                  </a:lnTo>
-                  <a:lnTo>
-                    <a:pt x="2148675" y="1424951"/>
-                  </a:lnTo>
-                  <a:lnTo>
-                    <a:pt x="2220298" y="1456224"/>
-                  </a:lnTo>
-                  <a:lnTo>
-                    <a:pt x="2291920" y="1486712"/>
-                  </a:lnTo>
-                  <a:lnTo>
-                    <a:pt x="2363543" y="1516435"/>
-                  </a:lnTo>
-                  <a:lnTo>
-                    <a:pt x="2435165" y="1545412"/>
-                  </a:lnTo>
-                  <a:lnTo>
-                    <a:pt x="2506788" y="1573662"/>
-                  </a:lnTo>
-                  <a:lnTo>
-                    <a:pt x="2578410" y="1601203"/>
-                  </a:lnTo>
-                  <a:lnTo>
-                    <a:pt x="2650033" y="1628053"/>
-                  </a:lnTo>
-                  <a:lnTo>
-                    <a:pt x="2721655" y="1654230"/>
-                  </a:lnTo>
-                  <a:lnTo>
-                    <a:pt x="2793278" y="1679749"/>
-                  </a:lnTo>
-                  <a:lnTo>
-                    <a:pt x="2864901" y="1704629"/>
-                  </a:lnTo>
-                  <a:lnTo>
-                    <a:pt x="2936523" y="1728884"/>
-                  </a:lnTo>
-                  <a:lnTo>
-                    <a:pt x="3008146" y="1752530"/>
-                  </a:lnTo>
-                  <a:lnTo>
-                    <a:pt x="3079768" y="1775584"/>
-                  </a:lnTo>
-                  <a:lnTo>
-                    <a:pt x="3151391" y="1798058"/>
-                  </a:lnTo>
-                  <a:lnTo>
-                    <a:pt x="3223013" y="1819969"/>
-                  </a:lnTo>
-                  <a:lnTo>
-                    <a:pt x="3294636" y="1841330"/>
-                  </a:lnTo>
-                  <a:lnTo>
-                    <a:pt x="3366258" y="1846999"/>
-                  </a:lnTo>
-                  <a:lnTo>
-                    <a:pt x="3437881" y="1852259"/>
-                  </a:lnTo>
-                  <a:lnTo>
-                    <a:pt x="3509503" y="1857485"/>
-                  </a:lnTo>
-                  <a:lnTo>
-                    <a:pt x="3581126" y="1862678"/>
-                  </a:lnTo>
-                  <a:lnTo>
-                    <a:pt x="3652748" y="1867838"/>
-                  </a:lnTo>
-                  <a:lnTo>
-                    <a:pt x="3724371" y="1872965"/>
-                  </a:lnTo>
-                  <a:lnTo>
-                    <a:pt x="3795993" y="1878060"/>
-                  </a:lnTo>
-                  <a:lnTo>
-                    <a:pt x="3867616" y="1883122"/>
-                  </a:lnTo>
-                  <a:lnTo>
-                    <a:pt x="3939238" y="1888151"/>
-                  </a:lnTo>
-                  <a:lnTo>
-                    <a:pt x="4010861" y="1893149"/>
-                  </a:lnTo>
-                  <a:lnTo>
-                    <a:pt x="4082483" y="1898114"/>
-                  </a:lnTo>
-                  <a:lnTo>
-                    <a:pt x="4154106" y="1903048"/>
-                  </a:lnTo>
-                  <a:lnTo>
-                    <a:pt x="4225729" y="1907950"/>
-                  </a:lnTo>
-                  <a:lnTo>
-                    <a:pt x="4297351" y="1912822"/>
-                  </a:lnTo>
-                  <a:lnTo>
-                    <a:pt x="4368974" y="1917662"/>
-                  </a:lnTo>
-                  <a:lnTo>
-                    <a:pt x="4440596" y="1922471"/>
-                  </a:lnTo>
-                  <a:lnTo>
-                    <a:pt x="4512219" y="1927249"/>
-                  </a:lnTo>
-                  <a:lnTo>
-                    <a:pt x="4583841" y="1931997"/>
-                  </a:lnTo>
-                  <a:lnTo>
-                    <a:pt x="4655464" y="1936715"/>
-                  </a:lnTo>
-                  <a:lnTo>
-                    <a:pt x="4727086" y="1941402"/>
-                  </a:lnTo>
-                  <a:lnTo>
-                    <a:pt x="4798709" y="1946060"/>
-                  </a:lnTo>
-                  <a:lnTo>
-                    <a:pt x="4870331" y="1950688"/>
-                  </a:lnTo>
-                  <a:lnTo>
-                    <a:pt x="4941954" y="1955286"/>
-                  </a:lnTo>
-                  <a:lnTo>
-                    <a:pt x="5013576" y="1959855"/>
-                  </a:lnTo>
-                  <a:lnTo>
-                    <a:pt x="5085199" y="1964395"/>
-                  </a:lnTo>
-                  <a:lnTo>
-                    <a:pt x="5156821" y="1968906"/>
-                  </a:lnTo>
-                  <a:lnTo>
-                    <a:pt x="5228444" y="1973388"/>
-                  </a:lnTo>
-                  <a:lnTo>
-                    <a:pt x="5300066" y="1977842"/>
-                  </a:lnTo>
-                  <a:lnTo>
-                    <a:pt x="5371689" y="1982267"/>
-                  </a:lnTo>
-                  <a:lnTo>
-                    <a:pt x="5443311" y="1986664"/>
-                  </a:lnTo>
-                  <a:lnTo>
-                    <a:pt x="5514934" y="1991033"/>
-                  </a:lnTo>
-                  <a:lnTo>
-                    <a:pt x="5586557" y="1995374"/>
-                  </a:lnTo>
-                  <a:lnTo>
-                    <a:pt x="5658179" y="1999687"/>
-                  </a:lnTo>
-                  <a:lnTo>
-                    <a:pt x="5729802" y="2003972"/>
-                  </a:lnTo>
-                  <a:lnTo>
-                    <a:pt x="5801424" y="2008231"/>
-                  </a:lnTo>
-                  <a:lnTo>
-                    <a:pt x="5873047" y="2012462"/>
-                  </a:lnTo>
-                  <a:lnTo>
-                    <a:pt x="5944669" y="2016666"/>
-                  </a:lnTo>
-                  <a:lnTo>
-                    <a:pt x="6016292" y="2020844"/>
-                  </a:lnTo>
-                  <a:lnTo>
-                    <a:pt x="6087914" y="2024994"/>
-                  </a:lnTo>
-                  <a:lnTo>
-                    <a:pt x="6159537" y="2029119"/>
-                  </a:lnTo>
-                  <a:lnTo>
-                    <a:pt x="6231159" y="2033216"/>
-                  </a:lnTo>
-                  <a:lnTo>
-                    <a:pt x="6302782" y="2037288"/>
-                  </a:lnTo>
-                  <a:lnTo>
-                    <a:pt x="6374404" y="2041334"/>
-                  </a:lnTo>
-                  <a:lnTo>
-                    <a:pt x="6446027" y="2045354"/>
-                  </a:lnTo>
-                  <a:lnTo>
-                    <a:pt x="6517649" y="2049348"/>
-                  </a:lnTo>
-                  <a:lnTo>
-                    <a:pt x="6589272" y="2053317"/>
-                  </a:lnTo>
-                  <a:lnTo>
-                    <a:pt x="6660894" y="2057261"/>
-                  </a:lnTo>
-                  <a:lnTo>
-                    <a:pt x="6732517" y="2061179"/>
-                  </a:lnTo>
-                  <a:lnTo>
-                    <a:pt x="6804139" y="2065072"/>
-                  </a:lnTo>
-                  <a:lnTo>
-                    <a:pt x="6875762" y="2068941"/>
-                  </a:lnTo>
-                  <a:lnTo>
-                    <a:pt x="6947385" y="2072784"/>
-                  </a:lnTo>
-                  <a:lnTo>
-                    <a:pt x="7019007" y="2076604"/>
-                  </a:lnTo>
-                  <a:lnTo>
-                    <a:pt x="7090630" y="2080399"/>
-                  </a:lnTo>
-                </a:path>
-              </a:pathLst>
-            </a:custGeom>
-          </p:spPr>
-          <p:txBody>
-            <a:bodyPr/>
-            <a:lstStyle/>
-            <a:p/>
-          </p:txBody>
-        </p:sp>
-        <p:sp>
-          <p:nvSpPr>
             <p:cNvPr id="22" name="pl22"/>
             <p:cNvSpPr/>
             <p:nvPr/>
           </p:nvSpPr>
           <p:spPr>
             <a:xfrm>
-              <a:off x="1172049" y="4443586"/>
-              <a:ext cx="7090630" cy="897817"/>
+              <a:off x="1235312" y="2436286"/>
+              <a:ext cx="6964104" cy="750767"/>
             </a:xfrm>
             <a:custGeom>
               <a:avLst/>
               <a:pathLst>
-                <a:path w="7090630" h="897817">
+                <a:path w="6964104" h="750767">
                   <a:moveTo>
-                    <a:pt x="7090630" y="897817"/>
+                    <a:pt x="0" y="0"/>
                   </a:moveTo>
                   <a:lnTo>
-                    <a:pt x="7019007" y="892262"/>
-                  </a:lnTo>
-                  <a:lnTo>
-                    <a:pt x="6947385" y="886564"/>
-                  </a:lnTo>
-                  <a:lnTo>
-                    <a:pt x="6875762" y="880719"/>
-                  </a:lnTo>
-                  <a:lnTo>
-                    <a:pt x="6804139" y="874723"/>
-                  </a:lnTo>
-                  <a:lnTo>
-                    <a:pt x="6732517" y="868574"/>
-                  </a:lnTo>
-                  <a:lnTo>
-                    <a:pt x="6660894" y="862266"/>
-                  </a:lnTo>
-                  <a:lnTo>
-                    <a:pt x="6589272" y="855796"/>
-                  </a:lnTo>
-                  <a:lnTo>
-                    <a:pt x="6517649" y="849159"/>
-                  </a:lnTo>
-                  <a:lnTo>
-                    <a:pt x="6446027" y="842351"/>
-                  </a:lnTo>
-                  <a:lnTo>
-                    <a:pt x="6374404" y="835368"/>
-                  </a:lnTo>
-                  <a:lnTo>
-                    <a:pt x="6302782" y="828206"/>
-                  </a:lnTo>
-                  <a:lnTo>
-                    <a:pt x="6231159" y="820859"/>
-                  </a:lnTo>
-                  <a:lnTo>
-                    <a:pt x="6159537" y="813323"/>
-                  </a:lnTo>
-                  <a:lnTo>
-                    <a:pt x="6087914" y="805593"/>
-                  </a:lnTo>
-                  <a:lnTo>
-                    <a:pt x="6016292" y="797664"/>
-                  </a:lnTo>
-                  <a:lnTo>
-                    <a:pt x="5944669" y="789531"/>
-                  </a:lnTo>
-                  <a:lnTo>
-                    <a:pt x="5873047" y="781189"/>
-                  </a:lnTo>
-                  <a:lnTo>
-                    <a:pt x="5801424" y="772632"/>
-                  </a:lnTo>
-                  <a:lnTo>
-                    <a:pt x="5729802" y="763855"/>
-                  </a:lnTo>
-                  <a:lnTo>
-                    <a:pt x="5658179" y="754851"/>
-                  </a:lnTo>
-                  <a:lnTo>
-                    <a:pt x="5586557" y="745617"/>
-                  </a:lnTo>
-                  <a:lnTo>
-                    <a:pt x="5514934" y="736144"/>
-                  </a:lnTo>
-                  <a:lnTo>
-                    <a:pt x="5443311" y="726428"/>
-                  </a:lnTo>
-                  <a:lnTo>
-                    <a:pt x="5371689" y="716461"/>
-                  </a:lnTo>
-                  <a:lnTo>
-                    <a:pt x="5300066" y="706238"/>
-                  </a:lnTo>
-                  <a:lnTo>
-                    <a:pt x="5228444" y="695752"/>
-                  </a:lnTo>
-                  <a:lnTo>
-                    <a:pt x="5156821" y="684997"/>
-                  </a:lnTo>
-                  <a:lnTo>
-                    <a:pt x="5085199" y="673964"/>
-                  </a:lnTo>
-                  <a:lnTo>
-                    <a:pt x="5013576" y="662647"/>
-                  </a:lnTo>
-                  <a:lnTo>
-                    <a:pt x="4941954" y="651039"/>
-                  </a:lnTo>
-                  <a:lnTo>
-                    <a:pt x="4870331" y="639133"/>
-                  </a:lnTo>
-                  <a:lnTo>
-                    <a:pt x="4798709" y="626919"/>
-                  </a:lnTo>
-                  <a:lnTo>
-                    <a:pt x="4727086" y="614392"/>
-                  </a:lnTo>
-                  <a:lnTo>
-                    <a:pt x="4655464" y="601542"/>
-                  </a:lnTo>
-                  <a:lnTo>
-                    <a:pt x="4583841" y="588361"/>
-                  </a:lnTo>
-                  <a:lnTo>
-                    <a:pt x="4512219" y="574842"/>
-                  </a:lnTo>
-                  <a:lnTo>
-                    <a:pt x="4440596" y="560974"/>
-                  </a:lnTo>
-                  <a:lnTo>
-                    <a:pt x="4368974" y="546749"/>
-                  </a:lnTo>
-                  <a:lnTo>
-                    <a:pt x="4297351" y="532158"/>
-                  </a:lnTo>
-                  <a:lnTo>
-                    <a:pt x="4225729" y="517192"/>
-                  </a:lnTo>
-                  <a:lnTo>
-                    <a:pt x="4154106" y="501840"/>
-                  </a:lnTo>
-                  <a:lnTo>
-                    <a:pt x="4082483" y="486094"/>
-                  </a:lnTo>
-                  <a:lnTo>
-                    <a:pt x="4010861" y="469942"/>
-                  </a:lnTo>
-                  <a:lnTo>
-                    <a:pt x="3939238" y="453374"/>
-                  </a:lnTo>
-                  <a:lnTo>
-                    <a:pt x="3867616" y="436380"/>
-                  </a:lnTo>
-                  <a:lnTo>
-                    <a:pt x="3795993" y="418949"/>
-                  </a:lnTo>
-                  <a:lnTo>
-                    <a:pt x="3724371" y="401069"/>
-                  </a:lnTo>
-                  <a:lnTo>
-                    <a:pt x="3652748" y="382728"/>
-                  </a:lnTo>
-                  <a:lnTo>
-                    <a:pt x="3581126" y="363916"/>
-                  </a:lnTo>
-                  <a:lnTo>
-                    <a:pt x="3509503" y="344620"/>
-                  </a:lnTo>
-                  <a:lnTo>
-                    <a:pt x="3437881" y="324827"/>
-                  </a:lnTo>
-                  <a:lnTo>
-                    <a:pt x="3366258" y="304524"/>
-                  </a:lnTo>
-                  <a:lnTo>
-                    <a:pt x="3294636" y="284074"/>
-                  </a:lnTo>
-                  <a:lnTo>
-                    <a:pt x="3223013" y="278746"/>
-                  </a:lnTo>
-                  <a:lnTo>
-                    <a:pt x="3151391" y="273384"/>
-                  </a:lnTo>
-                  <a:lnTo>
-                    <a:pt x="3079768" y="267987"/>
-                  </a:lnTo>
-                  <a:lnTo>
-                    <a:pt x="3008146" y="262556"/>
-                  </a:lnTo>
-                  <a:lnTo>
-                    <a:pt x="2936523" y="257090"/>
-                  </a:lnTo>
-                  <a:lnTo>
-                    <a:pt x="2864901" y="251589"/>
-                  </a:lnTo>
-                  <a:lnTo>
-                    <a:pt x="2793278" y="246052"/>
-                  </a:lnTo>
-                  <a:lnTo>
-                    <a:pt x="2721655" y="240480"/>
-                  </a:lnTo>
-                  <a:lnTo>
-                    <a:pt x="2650033" y="234873"/>
-                  </a:lnTo>
-                  <a:lnTo>
-                    <a:pt x="2578410" y="229229"/>
-                  </a:lnTo>
-                  <a:lnTo>
-                    <a:pt x="2506788" y="223549"/>
-                  </a:lnTo>
-                  <a:lnTo>
-                    <a:pt x="2435165" y="217832"/>
-                  </a:lnTo>
-                  <a:lnTo>
-                    <a:pt x="2363543" y="212079"/>
-                  </a:lnTo>
-                  <a:lnTo>
-                    <a:pt x="2291920" y="206289"/>
-                  </a:lnTo>
-                  <a:lnTo>
-                    <a:pt x="2220298" y="200461"/>
-                  </a:lnTo>
-                  <a:lnTo>
-                    <a:pt x="2148675" y="194597"/>
-                  </a:lnTo>
-                  <a:lnTo>
-                    <a:pt x="2077053" y="188694"/>
-                  </a:lnTo>
-                  <a:lnTo>
-                    <a:pt x="2005430" y="182754"/>
-                  </a:lnTo>
-                  <a:lnTo>
-                    <a:pt x="1933808" y="176775"/>
-                  </a:lnTo>
-                  <a:lnTo>
-                    <a:pt x="1862185" y="170758"/>
-                  </a:lnTo>
-                  <a:lnTo>
-                    <a:pt x="1790563" y="164703"/>
-                  </a:lnTo>
-                  <a:lnTo>
-                    <a:pt x="1718940" y="158608"/>
-                  </a:lnTo>
-                  <a:lnTo>
-                    <a:pt x="1647318" y="152474"/>
-                  </a:lnTo>
-                  <a:lnTo>
-                    <a:pt x="1575695" y="146301"/>
-                  </a:lnTo>
-                  <a:lnTo>
-                    <a:pt x="1504073" y="140089"/>
-                  </a:lnTo>
-                  <a:lnTo>
-                    <a:pt x="1432450" y="133836"/>
-                  </a:lnTo>
-                  <a:lnTo>
-                    <a:pt x="1360827" y="127544"/>
-                  </a:lnTo>
-                  <a:lnTo>
-                    <a:pt x="1289205" y="121210"/>
-                  </a:lnTo>
-                  <a:lnTo>
-                    <a:pt x="1217582" y="114837"/>
-                  </a:lnTo>
-                  <a:lnTo>
-                    <a:pt x="1145960" y="108422"/>
-                  </a:lnTo>
-                  <a:lnTo>
-                    <a:pt x="1074337" y="101966"/>
-                  </a:lnTo>
-                  <a:lnTo>
-                    <a:pt x="1002715" y="95469"/>
-                  </a:lnTo>
-                  <a:lnTo>
-                    <a:pt x="931092" y="88930"/>
-                  </a:lnTo>
-                  <a:lnTo>
-                    <a:pt x="859470" y="82348"/>
-                  </a:lnTo>
-                  <a:lnTo>
-                    <a:pt x="787847" y="75725"/>
-                  </a:lnTo>
-                  <a:lnTo>
-                    <a:pt x="716225" y="69059"/>
-                  </a:lnTo>
-                  <a:lnTo>
-                    <a:pt x="644602" y="62350"/>
-                  </a:lnTo>
-                  <a:lnTo>
-                    <a:pt x="572980" y="55599"/>
-                  </a:lnTo>
-                  <a:lnTo>
-                    <a:pt x="501357" y="48803"/>
-                  </a:lnTo>
-                  <a:lnTo>
-                    <a:pt x="429735" y="41965"/>
-                  </a:lnTo>
-                  <a:lnTo>
-                    <a:pt x="358112" y="35082"/>
-                  </a:lnTo>
-                  <a:lnTo>
-                    <a:pt x="286490" y="28155"/>
-                  </a:lnTo>
-                  <a:lnTo>
-                    <a:pt x="214867" y="21184"/>
-                  </a:lnTo>
-                  <a:lnTo>
-                    <a:pt x="143245" y="14167"/>
-                  </a:lnTo>
-                  <a:lnTo>
-                    <a:pt x="71622" y="7106"/>
-                  </a:lnTo>
-                  <a:lnTo>
-                    <a:pt x="0" y="0"/>
+                    <a:pt x="70344" y="24188"/>
+                  </a:lnTo>
+                  <a:lnTo>
+                    <a:pt x="140688" y="47769"/>
+                  </a:lnTo>
+                  <a:lnTo>
+                    <a:pt x="211033" y="70759"/>
+                  </a:lnTo>
+                  <a:lnTo>
+                    <a:pt x="281377" y="93172"/>
+                  </a:lnTo>
+                  <a:lnTo>
+                    <a:pt x="351722" y="115023"/>
+                  </a:lnTo>
+                  <a:lnTo>
+                    <a:pt x="422066" y="136325"/>
+                  </a:lnTo>
+                  <a:lnTo>
+                    <a:pt x="492411" y="157093"/>
+                  </a:lnTo>
+                  <a:lnTo>
+                    <a:pt x="562755" y="177339"/>
+                  </a:lnTo>
+                  <a:lnTo>
+                    <a:pt x="633100" y="197078"/>
+                  </a:lnTo>
+                  <a:lnTo>
+                    <a:pt x="703444" y="216321"/>
+                  </a:lnTo>
+                  <a:lnTo>
+                    <a:pt x="773789" y="235082"/>
+                  </a:lnTo>
+                  <a:lnTo>
+                    <a:pt x="844133" y="253372"/>
+                  </a:lnTo>
+                  <a:lnTo>
+                    <a:pt x="914478" y="271203"/>
+                  </a:lnTo>
+                  <a:lnTo>
+                    <a:pt x="984822" y="288586"/>
+                  </a:lnTo>
+                  <a:lnTo>
+                    <a:pt x="1055167" y="305533"/>
+                  </a:lnTo>
+                  <a:lnTo>
+                    <a:pt x="1125511" y="322056"/>
+                  </a:lnTo>
+                  <a:lnTo>
+                    <a:pt x="1195856" y="338163"/>
+                  </a:lnTo>
+                  <a:lnTo>
+                    <a:pt x="1266200" y="353866"/>
+                  </a:lnTo>
+                  <a:lnTo>
+                    <a:pt x="1336545" y="369176"/>
+                  </a:lnTo>
+                  <a:lnTo>
+                    <a:pt x="1406889" y="384101"/>
+                  </a:lnTo>
+                  <a:lnTo>
+                    <a:pt x="1477234" y="398652"/>
+                  </a:lnTo>
+                  <a:lnTo>
+                    <a:pt x="1547578" y="412837"/>
+                  </a:lnTo>
+                  <a:lnTo>
+                    <a:pt x="1617923" y="426667"/>
+                  </a:lnTo>
+                  <a:lnTo>
+                    <a:pt x="1688267" y="440150"/>
+                  </a:lnTo>
+                  <a:lnTo>
+                    <a:pt x="1758612" y="453294"/>
+                  </a:lnTo>
+                  <a:lnTo>
+                    <a:pt x="1828956" y="466109"/>
+                  </a:lnTo>
+                  <a:lnTo>
+                    <a:pt x="1899301" y="478602"/>
+                  </a:lnTo>
+                  <a:lnTo>
+                    <a:pt x="1969645" y="490781"/>
+                  </a:lnTo>
+                  <a:lnTo>
+                    <a:pt x="2039990" y="502655"/>
+                  </a:lnTo>
+                  <a:lnTo>
+                    <a:pt x="2110334" y="514231"/>
+                  </a:lnTo>
+                  <a:lnTo>
+                    <a:pt x="2180679" y="525517"/>
+                  </a:lnTo>
+                  <a:lnTo>
+                    <a:pt x="2251023" y="536519"/>
+                  </a:lnTo>
+                  <a:lnTo>
+                    <a:pt x="2321368" y="547245"/>
+                  </a:lnTo>
+                  <a:lnTo>
+                    <a:pt x="2391712" y="557702"/>
+                  </a:lnTo>
+                  <a:lnTo>
+                    <a:pt x="2462057" y="567897"/>
+                  </a:lnTo>
+                  <a:lnTo>
+                    <a:pt x="2532401" y="577836"/>
+                  </a:lnTo>
+                  <a:lnTo>
+                    <a:pt x="2602746" y="587526"/>
+                  </a:lnTo>
+                  <a:lnTo>
+                    <a:pt x="2673090" y="596972"/>
+                  </a:lnTo>
+                  <a:lnTo>
+                    <a:pt x="2743435" y="606182"/>
+                  </a:lnTo>
+                  <a:lnTo>
+                    <a:pt x="2813779" y="615160"/>
+                  </a:lnTo>
+                  <a:lnTo>
+                    <a:pt x="2884124" y="623913"/>
+                  </a:lnTo>
+                  <a:lnTo>
+                    <a:pt x="2954468" y="632447"/>
+                  </a:lnTo>
+                  <a:lnTo>
+                    <a:pt x="3024813" y="640766"/>
+                  </a:lnTo>
+                  <a:lnTo>
+                    <a:pt x="3095157" y="648877"/>
+                  </a:lnTo>
+                  <a:lnTo>
+                    <a:pt x="3165502" y="656784"/>
+                  </a:lnTo>
+                  <a:lnTo>
+                    <a:pt x="3235846" y="664492"/>
+                  </a:lnTo>
+                  <a:lnTo>
+                    <a:pt x="3306191" y="666538"/>
+                  </a:lnTo>
+                  <a:lnTo>
+                    <a:pt x="3376535" y="668436"/>
+                  </a:lnTo>
+                  <a:lnTo>
+                    <a:pt x="3446880" y="670322"/>
+                  </a:lnTo>
+                  <a:lnTo>
+                    <a:pt x="3517224" y="672196"/>
+                  </a:lnTo>
+                  <a:lnTo>
+                    <a:pt x="3587569" y="674059"/>
+                  </a:lnTo>
+                  <a:lnTo>
+                    <a:pt x="3657913" y="675909"/>
+                  </a:lnTo>
+                  <a:lnTo>
+                    <a:pt x="3728257" y="677747"/>
+                  </a:lnTo>
+                  <a:lnTo>
+                    <a:pt x="3798602" y="679574"/>
+                  </a:lnTo>
+                  <a:lnTo>
+                    <a:pt x="3868946" y="681389"/>
+                  </a:lnTo>
+                  <a:lnTo>
+                    <a:pt x="3939291" y="683192"/>
+                  </a:lnTo>
+                  <a:lnTo>
+                    <a:pt x="4009635" y="684984"/>
+                  </a:lnTo>
+                  <a:lnTo>
+                    <a:pt x="4079980" y="686765"/>
+                  </a:lnTo>
+                  <a:lnTo>
+                    <a:pt x="4150324" y="688534"/>
+                  </a:lnTo>
+                  <a:lnTo>
+                    <a:pt x="4220669" y="690292"/>
+                  </a:lnTo>
+                  <a:lnTo>
+                    <a:pt x="4291013" y="692039"/>
+                  </a:lnTo>
+                  <a:lnTo>
+                    <a:pt x="4361358" y="693774"/>
+                  </a:lnTo>
+                  <a:lnTo>
+                    <a:pt x="4431702" y="695499"/>
+                  </a:lnTo>
+                  <a:lnTo>
+                    <a:pt x="4502047" y="697212"/>
+                  </a:lnTo>
+                  <a:lnTo>
+                    <a:pt x="4572391" y="698914"/>
+                  </a:lnTo>
+                  <a:lnTo>
+                    <a:pt x="4642736" y="700606"/>
+                  </a:lnTo>
+                  <a:lnTo>
+                    <a:pt x="4713080" y="702287"/>
+                  </a:lnTo>
+                  <a:lnTo>
+                    <a:pt x="4783425" y="703957"/>
+                  </a:lnTo>
+                  <a:lnTo>
+                    <a:pt x="4853769" y="705616"/>
+                  </a:lnTo>
+                  <a:lnTo>
+                    <a:pt x="4924114" y="707265"/>
+                  </a:lnTo>
+                  <a:lnTo>
+                    <a:pt x="4994458" y="708904"/>
+                  </a:lnTo>
+                  <a:lnTo>
+                    <a:pt x="5064803" y="710532"/>
+                  </a:lnTo>
+                  <a:lnTo>
+                    <a:pt x="5135147" y="712149"/>
+                  </a:lnTo>
+                  <a:lnTo>
+                    <a:pt x="5205492" y="713756"/>
+                  </a:lnTo>
+                  <a:lnTo>
+                    <a:pt x="5275836" y="715353"/>
+                  </a:lnTo>
+                  <a:lnTo>
+                    <a:pt x="5346181" y="716940"/>
+                  </a:lnTo>
+                  <a:lnTo>
+                    <a:pt x="5416525" y="718517"/>
+                  </a:lnTo>
+                  <a:lnTo>
+                    <a:pt x="5486870" y="720083"/>
+                  </a:lnTo>
+                  <a:lnTo>
+                    <a:pt x="5557214" y="721640"/>
+                  </a:lnTo>
+                  <a:lnTo>
+                    <a:pt x="5627559" y="723186"/>
+                  </a:lnTo>
+                  <a:lnTo>
+                    <a:pt x="5697903" y="724723"/>
+                  </a:lnTo>
+                  <a:lnTo>
+                    <a:pt x="5768248" y="726250"/>
+                  </a:lnTo>
+                  <a:lnTo>
+                    <a:pt x="5838592" y="727767"/>
+                  </a:lnTo>
+                  <a:lnTo>
+                    <a:pt x="5908937" y="729275"/>
+                  </a:lnTo>
+                  <a:lnTo>
+                    <a:pt x="5979281" y="730772"/>
+                  </a:lnTo>
+                  <a:lnTo>
+                    <a:pt x="6049626" y="732261"/>
+                  </a:lnTo>
+                  <a:lnTo>
+                    <a:pt x="6119970" y="733740"/>
+                  </a:lnTo>
+                  <a:lnTo>
+                    <a:pt x="6190315" y="735209"/>
+                  </a:lnTo>
+                  <a:lnTo>
+                    <a:pt x="6260659" y="736669"/>
+                  </a:lnTo>
+                  <a:lnTo>
+                    <a:pt x="6331004" y="738120"/>
+                  </a:lnTo>
+                  <a:lnTo>
+                    <a:pt x="6401348" y="739561"/>
+                  </a:lnTo>
+                  <a:lnTo>
+                    <a:pt x="6471693" y="740993"/>
+                  </a:lnTo>
+                  <a:lnTo>
+                    <a:pt x="6542037" y="742417"/>
+                  </a:lnTo>
+                  <a:lnTo>
+                    <a:pt x="6612382" y="743831"/>
+                  </a:lnTo>
+                  <a:lnTo>
+                    <a:pt x="6682726" y="745236"/>
+                  </a:lnTo>
+                  <a:lnTo>
+                    <a:pt x="6753071" y="746632"/>
+                  </a:lnTo>
+                  <a:lnTo>
+                    <a:pt x="6823415" y="748019"/>
+                  </a:lnTo>
+                  <a:lnTo>
+                    <a:pt x="6893760" y="749397"/>
+                  </a:lnTo>
+                  <a:lnTo>
+                    <a:pt x="6964104" y="750767"/>
                   </a:lnTo>
                 </a:path>
               </a:pathLst>
@@ -4240,312 +3950,637 @@
           </p:nvSpPr>
           <p:spPr>
             <a:xfrm>
-              <a:off x="1172049" y="3832452"/>
-              <a:ext cx="7090630" cy="1367666"/>
+              <a:off x="1235312" y="2998399"/>
+              <a:ext cx="6964104" cy="324001"/>
             </a:xfrm>
             <a:custGeom>
               <a:avLst/>
               <a:pathLst>
-                <a:path w="7090630" h="1367666">
+                <a:path w="6964104" h="324001">
+                  <a:moveTo>
+                    <a:pt x="6964104" y="324001"/>
+                  </a:moveTo>
+                  <a:lnTo>
+                    <a:pt x="6893760" y="321996"/>
+                  </a:lnTo>
+                  <a:lnTo>
+                    <a:pt x="6823415" y="319940"/>
+                  </a:lnTo>
+                  <a:lnTo>
+                    <a:pt x="6753071" y="317830"/>
+                  </a:lnTo>
+                  <a:lnTo>
+                    <a:pt x="6682726" y="315667"/>
+                  </a:lnTo>
+                  <a:lnTo>
+                    <a:pt x="6612382" y="313448"/>
+                  </a:lnTo>
+                  <a:lnTo>
+                    <a:pt x="6542037" y="311171"/>
+                  </a:lnTo>
+                  <a:lnTo>
+                    <a:pt x="6471693" y="308836"/>
+                  </a:lnTo>
+                  <a:lnTo>
+                    <a:pt x="6401348" y="306441"/>
+                  </a:lnTo>
+                  <a:lnTo>
+                    <a:pt x="6331004" y="303984"/>
+                  </a:lnTo>
+                  <a:lnTo>
+                    <a:pt x="6260659" y="301464"/>
+                  </a:lnTo>
+                  <a:lnTo>
+                    <a:pt x="6190315" y="298880"/>
+                  </a:lnTo>
+                  <a:lnTo>
+                    <a:pt x="6119970" y="296228"/>
+                  </a:lnTo>
+                  <a:lnTo>
+                    <a:pt x="6049626" y="293509"/>
+                  </a:lnTo>
+                  <a:lnTo>
+                    <a:pt x="5979281" y="290719"/>
+                  </a:lnTo>
+                  <a:lnTo>
+                    <a:pt x="5908937" y="287858"/>
+                  </a:lnTo>
+                  <a:lnTo>
+                    <a:pt x="5838592" y="284923"/>
+                  </a:lnTo>
+                  <a:lnTo>
+                    <a:pt x="5768248" y="281912"/>
+                  </a:lnTo>
+                  <a:lnTo>
+                    <a:pt x="5697903" y="278824"/>
+                  </a:lnTo>
+                  <a:lnTo>
+                    <a:pt x="5627559" y="275657"/>
+                  </a:lnTo>
+                  <a:lnTo>
+                    <a:pt x="5557214" y="272408"/>
+                  </a:lnTo>
+                  <a:lnTo>
+                    <a:pt x="5486870" y="269075"/>
+                  </a:lnTo>
+                  <a:lnTo>
+                    <a:pt x="5416525" y="265657"/>
+                  </a:lnTo>
+                  <a:lnTo>
+                    <a:pt x="5346181" y="262150"/>
+                  </a:lnTo>
+                  <a:lnTo>
+                    <a:pt x="5275836" y="258554"/>
+                  </a:lnTo>
+                  <a:lnTo>
+                    <a:pt x="5205492" y="254865"/>
+                  </a:lnTo>
+                  <a:lnTo>
+                    <a:pt x="5135147" y="251080"/>
+                  </a:lnTo>
+                  <a:lnTo>
+                    <a:pt x="5064803" y="247199"/>
+                  </a:lnTo>
+                  <a:lnTo>
+                    <a:pt x="4994458" y="243217"/>
+                  </a:lnTo>
+                  <a:lnTo>
+                    <a:pt x="4924114" y="239133"/>
+                  </a:lnTo>
+                  <a:lnTo>
+                    <a:pt x="4853769" y="234944"/>
+                  </a:lnTo>
+                  <a:lnTo>
+                    <a:pt x="4783425" y="230648"/>
+                  </a:lnTo>
+                  <a:lnTo>
+                    <a:pt x="4713080" y="226240"/>
+                  </a:lnTo>
+                  <a:lnTo>
+                    <a:pt x="4642736" y="221719"/>
+                  </a:lnTo>
+                  <a:lnTo>
+                    <a:pt x="4572391" y="217082"/>
+                  </a:lnTo>
+                  <a:lnTo>
+                    <a:pt x="4502047" y="212326"/>
+                  </a:lnTo>
+                  <a:lnTo>
+                    <a:pt x="4431702" y="207447"/>
+                  </a:lnTo>
+                  <a:lnTo>
+                    <a:pt x="4361358" y="202442"/>
+                  </a:lnTo>
+                  <a:lnTo>
+                    <a:pt x="4291013" y="197309"/>
+                  </a:lnTo>
+                  <a:lnTo>
+                    <a:pt x="4220669" y="192043"/>
+                  </a:lnTo>
+                  <a:lnTo>
+                    <a:pt x="4150324" y="186642"/>
+                  </a:lnTo>
+                  <a:lnTo>
+                    <a:pt x="4079980" y="181102"/>
+                  </a:lnTo>
+                  <a:lnTo>
+                    <a:pt x="4009635" y="175419"/>
+                  </a:lnTo>
+                  <a:lnTo>
+                    <a:pt x="3939291" y="169591"/>
+                  </a:lnTo>
+                  <a:lnTo>
+                    <a:pt x="3868946" y="163612"/>
+                  </a:lnTo>
+                  <a:lnTo>
+                    <a:pt x="3798602" y="157479"/>
+                  </a:lnTo>
+                  <a:lnTo>
+                    <a:pt x="3728257" y="151188"/>
+                  </a:lnTo>
+                  <a:lnTo>
+                    <a:pt x="3657913" y="144736"/>
+                  </a:lnTo>
+                  <a:lnTo>
+                    <a:pt x="3587569" y="138117"/>
+                  </a:lnTo>
+                  <a:lnTo>
+                    <a:pt x="3517224" y="131328"/>
+                  </a:lnTo>
+                  <a:lnTo>
+                    <a:pt x="3446880" y="124365"/>
+                  </a:lnTo>
+                  <a:lnTo>
+                    <a:pt x="3376535" y="117222"/>
+                  </a:lnTo>
+                  <a:lnTo>
+                    <a:pt x="3306191" y="109895"/>
+                  </a:lnTo>
+                  <a:lnTo>
+                    <a:pt x="3235846" y="102515"/>
+                  </a:lnTo>
+                  <a:lnTo>
+                    <a:pt x="3165502" y="100592"/>
+                  </a:lnTo>
+                  <a:lnTo>
+                    <a:pt x="3095157" y="98657"/>
+                  </a:lnTo>
+                  <a:lnTo>
+                    <a:pt x="3024813" y="96710"/>
+                  </a:lnTo>
+                  <a:lnTo>
+                    <a:pt x="2954468" y="94750"/>
+                  </a:lnTo>
+                  <a:lnTo>
+                    <a:pt x="2884124" y="92777"/>
+                  </a:lnTo>
+                  <a:lnTo>
+                    <a:pt x="2813779" y="90792"/>
+                  </a:lnTo>
+                  <a:lnTo>
+                    <a:pt x="2743435" y="88794"/>
+                  </a:lnTo>
+                  <a:lnTo>
+                    <a:pt x="2673090" y="86783"/>
+                  </a:lnTo>
+                  <a:lnTo>
+                    <a:pt x="2602746" y="84760"/>
+                  </a:lnTo>
+                  <a:lnTo>
+                    <a:pt x="2532401" y="82723"/>
+                  </a:lnTo>
+                  <a:lnTo>
+                    <a:pt x="2462057" y="80673"/>
+                  </a:lnTo>
+                  <a:lnTo>
+                    <a:pt x="2391712" y="78610"/>
+                  </a:lnTo>
+                  <a:lnTo>
+                    <a:pt x="2321368" y="76534"/>
+                  </a:lnTo>
+                  <a:lnTo>
+                    <a:pt x="2251023" y="74444"/>
+                  </a:lnTo>
+                  <a:lnTo>
+                    <a:pt x="2180679" y="72341"/>
+                  </a:lnTo>
+                  <a:lnTo>
+                    <a:pt x="2110334" y="70225"/>
+                  </a:lnTo>
+                  <a:lnTo>
+                    <a:pt x="2039990" y="68095"/>
+                  </a:lnTo>
+                  <a:lnTo>
+                    <a:pt x="1969645" y="65951"/>
+                  </a:lnTo>
+                  <a:lnTo>
+                    <a:pt x="1899301" y="63794"/>
+                  </a:lnTo>
+                  <a:lnTo>
+                    <a:pt x="1828956" y="61622"/>
+                  </a:lnTo>
+                  <a:lnTo>
+                    <a:pt x="1758612" y="59437"/>
+                  </a:lnTo>
+                  <a:lnTo>
+                    <a:pt x="1688267" y="57238"/>
+                  </a:lnTo>
+                  <a:lnTo>
+                    <a:pt x="1617923" y="55024"/>
+                  </a:lnTo>
+                  <a:lnTo>
+                    <a:pt x="1547578" y="52796"/>
+                  </a:lnTo>
+                  <a:lnTo>
+                    <a:pt x="1477234" y="50554"/>
+                  </a:lnTo>
+                  <a:lnTo>
+                    <a:pt x="1406889" y="48298"/>
+                  </a:lnTo>
+                  <a:lnTo>
+                    <a:pt x="1336545" y="46027"/>
+                  </a:lnTo>
+                  <a:lnTo>
+                    <a:pt x="1266200" y="43742"/>
+                  </a:lnTo>
+                  <a:lnTo>
+                    <a:pt x="1195856" y="41442"/>
+                  </a:lnTo>
+                  <a:lnTo>
+                    <a:pt x="1125511" y="39127"/>
+                  </a:lnTo>
+                  <a:lnTo>
+                    <a:pt x="1055167" y="36797"/>
+                  </a:lnTo>
+                  <a:lnTo>
+                    <a:pt x="984822" y="34452"/>
+                  </a:lnTo>
+                  <a:lnTo>
+                    <a:pt x="914478" y="32092"/>
+                  </a:lnTo>
+                  <a:lnTo>
+                    <a:pt x="844133" y="29717"/>
+                  </a:lnTo>
+                  <a:lnTo>
+                    <a:pt x="773789" y="27327"/>
+                  </a:lnTo>
+                  <a:lnTo>
+                    <a:pt x="703444" y="24921"/>
+                  </a:lnTo>
+                  <a:lnTo>
+                    <a:pt x="633100" y="22500"/>
+                  </a:lnTo>
+                  <a:lnTo>
+                    <a:pt x="562755" y="20064"/>
+                  </a:lnTo>
+                  <a:lnTo>
+                    <a:pt x="492411" y="17612"/>
+                  </a:lnTo>
+                  <a:lnTo>
+                    <a:pt x="422066" y="15144"/>
+                  </a:lnTo>
+                  <a:lnTo>
+                    <a:pt x="351722" y="12660"/>
+                  </a:lnTo>
+                  <a:lnTo>
+                    <a:pt x="281377" y="10160"/>
+                  </a:lnTo>
+                  <a:lnTo>
+                    <a:pt x="211033" y="7644"/>
+                  </a:lnTo>
+                  <a:lnTo>
+                    <a:pt x="140688" y="5112"/>
+                  </a:lnTo>
+                  <a:lnTo>
+                    <a:pt x="70344" y="2564"/>
+                  </a:lnTo>
+                  <a:lnTo>
+                    <a:pt x="0" y="0"/>
+                  </a:lnTo>
+                </a:path>
+              </a:pathLst>
+            </a:custGeom>
+          </p:spPr>
+          <p:txBody>
+            <a:bodyPr/>
+            <a:lstStyle/>
+            <a:p/>
+          </p:txBody>
+        </p:sp>
+        <p:sp>
+          <p:nvSpPr>
+            <p:cNvPr id="24" name="pl24"/>
+            <p:cNvSpPr/>
+            <p:nvPr/>
+          </p:nvSpPr>
+          <p:spPr>
+            <a:xfrm>
+              <a:off x="1235312" y="2777855"/>
+              <a:ext cx="6964104" cy="493558"/>
+            </a:xfrm>
+            <a:custGeom>
+              <a:avLst/>
+              <a:pathLst>
+                <a:path w="6964104" h="493558">
                   <a:moveTo>
                     <a:pt x="0" y="0"/>
                   </a:moveTo>
                   <a:lnTo>
-                    <a:pt x="71622" y="27218"/>
-                  </a:lnTo>
-                  <a:lnTo>
-                    <a:pt x="143245" y="54007"/>
-                  </a:lnTo>
-                  <a:lnTo>
-                    <a:pt x="214867" y="80374"/>
-                  </a:lnTo>
-                  <a:lnTo>
-                    <a:pt x="286490" y="106324"/>
-                  </a:lnTo>
-                  <a:lnTo>
-                    <a:pt x="358112" y="131865"/>
-                  </a:lnTo>
-                  <a:lnTo>
-                    <a:pt x="429735" y="157003"/>
-                  </a:lnTo>
-                  <a:lnTo>
-                    <a:pt x="501357" y="181744"/>
-                  </a:lnTo>
-                  <a:lnTo>
-                    <a:pt x="572980" y="206095"/>
-                  </a:lnTo>
-                  <a:lnTo>
-                    <a:pt x="644602" y="230061"/>
-                  </a:lnTo>
-                  <a:lnTo>
-                    <a:pt x="716225" y="253649"/>
-                  </a:lnTo>
-                  <a:lnTo>
-                    <a:pt x="787847" y="276865"/>
-                  </a:lnTo>
-                  <a:lnTo>
-                    <a:pt x="859470" y="299715"/>
-                  </a:lnTo>
-                  <a:lnTo>
-                    <a:pt x="931092" y="322204"/>
-                  </a:lnTo>
-                  <a:lnTo>
-                    <a:pt x="1002715" y="344338"/>
-                  </a:lnTo>
-                  <a:lnTo>
-                    <a:pt x="1074337" y="366123"/>
-                  </a:lnTo>
-                  <a:lnTo>
-                    <a:pt x="1145960" y="387564"/>
-                  </a:lnTo>
-                  <a:lnTo>
-                    <a:pt x="1217582" y="408666"/>
-                  </a:lnTo>
-                  <a:lnTo>
-                    <a:pt x="1289205" y="429436"/>
-                  </a:lnTo>
-                  <a:lnTo>
-                    <a:pt x="1360827" y="449878"/>
-                  </a:lnTo>
-                  <a:lnTo>
-                    <a:pt x="1432450" y="469997"/>
-                  </a:lnTo>
-                  <a:lnTo>
-                    <a:pt x="1504073" y="489799"/>
-                  </a:lnTo>
-                  <a:lnTo>
-                    <a:pt x="1575695" y="509288"/>
-                  </a:lnTo>
-                  <a:lnTo>
-                    <a:pt x="1647318" y="528470"/>
-                  </a:lnTo>
-                  <a:lnTo>
-                    <a:pt x="1718940" y="547349"/>
-                  </a:lnTo>
-                  <a:lnTo>
-                    <a:pt x="1790563" y="565930"/>
-                  </a:lnTo>
-                  <a:lnTo>
-                    <a:pt x="1862185" y="584218"/>
-                  </a:lnTo>
-                  <a:lnTo>
-                    <a:pt x="1933808" y="602217"/>
-                  </a:lnTo>
-                  <a:lnTo>
-                    <a:pt x="2005430" y="619933"/>
-                  </a:lnTo>
-                  <a:lnTo>
-                    <a:pt x="2077053" y="637368"/>
-                  </a:lnTo>
-                  <a:lnTo>
-                    <a:pt x="2148675" y="654529"/>
-                  </a:lnTo>
-                  <a:lnTo>
-                    <a:pt x="2220298" y="671419"/>
-                  </a:lnTo>
-                  <a:lnTo>
-                    <a:pt x="2291920" y="688042"/>
-                  </a:lnTo>
-                  <a:lnTo>
-                    <a:pt x="2363543" y="704403"/>
-                  </a:lnTo>
-                  <a:lnTo>
-                    <a:pt x="2435165" y="720505"/>
-                  </a:lnTo>
-                  <a:lnTo>
-                    <a:pt x="2506788" y="736354"/>
-                  </a:lnTo>
-                  <a:lnTo>
-                    <a:pt x="2578410" y="751952"/>
-                  </a:lnTo>
-                  <a:lnTo>
-                    <a:pt x="2650033" y="767305"/>
-                  </a:lnTo>
-                  <a:lnTo>
-                    <a:pt x="2721655" y="782415"/>
-                  </a:lnTo>
-                  <a:lnTo>
-                    <a:pt x="2793278" y="797286"/>
-                  </a:lnTo>
-                  <a:lnTo>
-                    <a:pt x="2864901" y="811923"/>
-                  </a:lnTo>
-                  <a:lnTo>
-                    <a:pt x="2936523" y="826329"/>
-                  </a:lnTo>
-                  <a:lnTo>
-                    <a:pt x="3008146" y="840508"/>
-                  </a:lnTo>
-                  <a:lnTo>
-                    <a:pt x="3079768" y="854462"/>
-                  </a:lnTo>
-                  <a:lnTo>
-                    <a:pt x="3151391" y="868197"/>
-                  </a:lnTo>
-                  <a:lnTo>
-                    <a:pt x="3223013" y="881715"/>
-                  </a:lnTo>
-                  <a:lnTo>
-                    <a:pt x="3294636" y="895019"/>
-                  </a:lnTo>
-                  <a:lnTo>
-                    <a:pt x="3366258" y="908114"/>
-                  </a:lnTo>
-                  <a:lnTo>
-                    <a:pt x="3437881" y="921002"/>
-                  </a:lnTo>
-                  <a:lnTo>
-                    <a:pt x="3509503" y="933687"/>
-                  </a:lnTo>
-                  <a:lnTo>
-                    <a:pt x="3581126" y="946171"/>
-                  </a:lnTo>
-                  <a:lnTo>
-                    <a:pt x="3652748" y="958458"/>
-                  </a:lnTo>
-                  <a:lnTo>
-                    <a:pt x="3724371" y="970552"/>
-                  </a:lnTo>
-                  <a:lnTo>
-                    <a:pt x="3795993" y="982454"/>
-                  </a:lnTo>
-                  <a:lnTo>
-                    <a:pt x="3867616" y="994169"/>
-                  </a:lnTo>
-                  <a:lnTo>
-                    <a:pt x="3939238" y="1005699"/>
-                  </a:lnTo>
-                  <a:lnTo>
-                    <a:pt x="4010861" y="1017047"/>
-                  </a:lnTo>
-                  <a:lnTo>
-                    <a:pt x="4082483" y="1028216"/>
-                  </a:lnTo>
-                  <a:lnTo>
-                    <a:pt x="4154106" y="1039209"/>
-                  </a:lnTo>
-                  <a:lnTo>
-                    <a:pt x="4225729" y="1050028"/>
-                  </a:lnTo>
-                  <a:lnTo>
-                    <a:pt x="4297351" y="1060676"/>
-                  </a:lnTo>
-                  <a:lnTo>
-                    <a:pt x="4368974" y="1071157"/>
-                  </a:lnTo>
-                  <a:lnTo>
-                    <a:pt x="4440596" y="1081471"/>
-                  </a:lnTo>
-                  <a:lnTo>
-                    <a:pt x="4512219" y="1091624"/>
-                  </a:lnTo>
-                  <a:lnTo>
-                    <a:pt x="4583841" y="1101616"/>
-                  </a:lnTo>
-                  <a:lnTo>
-                    <a:pt x="4655464" y="1111450"/>
-                  </a:lnTo>
-                  <a:lnTo>
-                    <a:pt x="4727086" y="1121129"/>
-                  </a:lnTo>
-                  <a:lnTo>
-                    <a:pt x="4798709" y="1130656"/>
-                  </a:lnTo>
-                  <a:lnTo>
-                    <a:pt x="4870331" y="1140032"/>
-                  </a:lnTo>
-                  <a:lnTo>
-                    <a:pt x="4941954" y="1149260"/>
-                  </a:lnTo>
-                  <a:lnTo>
-                    <a:pt x="5013576" y="1158342"/>
-                  </a:lnTo>
-                  <a:lnTo>
-                    <a:pt x="5085199" y="1167281"/>
-                  </a:lnTo>
-                  <a:lnTo>
-                    <a:pt x="5156821" y="1176079"/>
-                  </a:lnTo>
-                  <a:lnTo>
-                    <a:pt x="5228444" y="1184739"/>
-                  </a:lnTo>
-                  <a:lnTo>
-                    <a:pt x="5300066" y="1193261"/>
-                  </a:lnTo>
-                  <a:lnTo>
-                    <a:pt x="5371689" y="1201649"/>
-                  </a:lnTo>
-                  <a:lnTo>
-                    <a:pt x="5443311" y="1209905"/>
-                  </a:lnTo>
-                  <a:lnTo>
-                    <a:pt x="5514934" y="1218030"/>
-                  </a:lnTo>
-                  <a:lnTo>
-                    <a:pt x="5586557" y="1226028"/>
-                  </a:lnTo>
-                  <a:lnTo>
-                    <a:pt x="5658179" y="1233898"/>
-                  </a:lnTo>
-                  <a:lnTo>
-                    <a:pt x="5729802" y="1241645"/>
-                  </a:lnTo>
-                  <a:lnTo>
-                    <a:pt x="5801424" y="1249270"/>
-                  </a:lnTo>
-                  <a:lnTo>
-                    <a:pt x="5873047" y="1256774"/>
-                  </a:lnTo>
-                  <a:lnTo>
-                    <a:pt x="5944669" y="1264160"/>
-                  </a:lnTo>
-                  <a:lnTo>
-                    <a:pt x="6016292" y="1271429"/>
-                  </a:lnTo>
-                  <a:lnTo>
-                    <a:pt x="6087914" y="1278584"/>
-                  </a:lnTo>
-                  <a:lnTo>
-                    <a:pt x="6159537" y="1285625"/>
-                  </a:lnTo>
-                  <a:lnTo>
-                    <a:pt x="6231159" y="1292556"/>
-                  </a:lnTo>
-                  <a:lnTo>
-                    <a:pt x="6302782" y="1299377"/>
-                  </a:lnTo>
-                  <a:lnTo>
-                    <a:pt x="6374404" y="1306090"/>
-                  </a:lnTo>
-                  <a:lnTo>
-                    <a:pt x="6446027" y="1312698"/>
-                  </a:lnTo>
-                  <a:lnTo>
-                    <a:pt x="6517649" y="1319201"/>
-                  </a:lnTo>
-                  <a:lnTo>
-                    <a:pt x="6589272" y="1325602"/>
-                  </a:lnTo>
-                  <a:lnTo>
-                    <a:pt x="6660894" y="1331901"/>
-                  </a:lnTo>
-                  <a:lnTo>
-                    <a:pt x="6732517" y="1338102"/>
-                  </a:lnTo>
-                  <a:lnTo>
-                    <a:pt x="6804139" y="1344204"/>
-                  </a:lnTo>
-                  <a:lnTo>
-                    <a:pt x="6875762" y="1350210"/>
-                  </a:lnTo>
-                  <a:lnTo>
-                    <a:pt x="6947385" y="1356121"/>
-                  </a:lnTo>
-                  <a:lnTo>
-                    <a:pt x="7019007" y="1361939"/>
-                  </a:lnTo>
-                  <a:lnTo>
-                    <a:pt x="7090630" y="1367666"/>
+                    <a:pt x="70344" y="9822"/>
+                  </a:lnTo>
+                  <a:lnTo>
+                    <a:pt x="140688" y="19490"/>
+                  </a:lnTo>
+                  <a:lnTo>
+                    <a:pt x="211033" y="29005"/>
+                  </a:lnTo>
+                  <a:lnTo>
+                    <a:pt x="281377" y="38370"/>
+                  </a:lnTo>
+                  <a:lnTo>
+                    <a:pt x="351722" y="47587"/>
+                  </a:lnTo>
+                  <a:lnTo>
+                    <a:pt x="422066" y="56658"/>
+                  </a:lnTo>
+                  <a:lnTo>
+                    <a:pt x="492411" y="65587"/>
+                  </a:lnTo>
+                  <a:lnTo>
+                    <a:pt x="562755" y="74374"/>
+                  </a:lnTo>
+                  <a:lnTo>
+                    <a:pt x="633100" y="83023"/>
+                  </a:lnTo>
+                  <a:lnTo>
+                    <a:pt x="703444" y="91536"/>
+                  </a:lnTo>
+                  <a:lnTo>
+                    <a:pt x="773789" y="99914"/>
+                  </a:lnTo>
+                  <a:lnTo>
+                    <a:pt x="844133" y="108160"/>
+                  </a:lnTo>
+                  <a:lnTo>
+                    <a:pt x="914478" y="116275"/>
+                  </a:lnTo>
+                  <a:lnTo>
+                    <a:pt x="984822" y="124263"/>
+                  </a:lnTo>
+                  <a:lnTo>
+                    <a:pt x="1055167" y="132125"/>
+                  </a:lnTo>
+                  <a:lnTo>
+                    <a:pt x="1125511" y="139862"/>
+                  </a:lnTo>
+                  <a:lnTo>
+                    <a:pt x="1195856" y="147478"/>
+                  </a:lnTo>
+                  <a:lnTo>
+                    <a:pt x="1266200" y="154973"/>
+                  </a:lnTo>
+                  <a:lnTo>
+                    <a:pt x="1336545" y="162350"/>
+                  </a:lnTo>
+                  <a:lnTo>
+                    <a:pt x="1406889" y="169611"/>
+                  </a:lnTo>
+                  <a:lnTo>
+                    <a:pt x="1477234" y="176757"/>
+                  </a:lnTo>
+                  <a:lnTo>
+                    <a:pt x="1547578" y="183790"/>
+                  </a:lnTo>
+                  <a:lnTo>
+                    <a:pt x="1617923" y="190712"/>
+                  </a:lnTo>
+                  <a:lnTo>
+                    <a:pt x="1688267" y="197525"/>
+                  </a:lnTo>
+                  <a:lnTo>
+                    <a:pt x="1758612" y="204231"/>
+                  </a:lnTo>
+                  <a:lnTo>
+                    <a:pt x="1828956" y="210830"/>
+                  </a:lnTo>
+                  <a:lnTo>
+                    <a:pt x="1899301" y="217326"/>
+                  </a:lnTo>
+                  <a:lnTo>
+                    <a:pt x="1969645" y="223719"/>
+                  </a:lnTo>
+                  <a:lnTo>
+                    <a:pt x="2039990" y="230011"/>
+                  </a:lnTo>
+                  <a:lnTo>
+                    <a:pt x="2110334" y="236204"/>
+                  </a:lnTo>
+                  <a:lnTo>
+                    <a:pt x="2180679" y="242299"/>
+                  </a:lnTo>
+                  <a:lnTo>
+                    <a:pt x="2251023" y="248298"/>
+                  </a:lnTo>
+                  <a:lnTo>
+                    <a:pt x="2321368" y="254202"/>
+                  </a:lnTo>
+                  <a:lnTo>
+                    <a:pt x="2391712" y="260013"/>
+                  </a:lnTo>
+                  <a:lnTo>
+                    <a:pt x="2462057" y="265732"/>
+                  </a:lnTo>
+                  <a:lnTo>
+                    <a:pt x="2532401" y="271362"/>
+                  </a:lnTo>
+                  <a:lnTo>
+                    <a:pt x="2602746" y="276902"/>
+                  </a:lnTo>
+                  <a:lnTo>
+                    <a:pt x="2673090" y="282355"/>
+                  </a:lnTo>
+                  <a:lnTo>
+                    <a:pt x="2743435" y="287722"/>
+                  </a:lnTo>
+                  <a:lnTo>
+                    <a:pt x="2813779" y="293004"/>
+                  </a:lnTo>
+                  <a:lnTo>
+                    <a:pt x="2884124" y="298202"/>
+                  </a:lnTo>
+                  <a:lnTo>
+                    <a:pt x="2954468" y="303319"/>
+                  </a:lnTo>
+                  <a:lnTo>
+                    <a:pt x="3024813" y="308355"/>
+                  </a:lnTo>
+                  <a:lnTo>
+                    <a:pt x="3095157" y="313312"/>
+                  </a:lnTo>
+                  <a:lnTo>
+                    <a:pt x="3165502" y="318190"/>
+                  </a:lnTo>
+                  <a:lnTo>
+                    <a:pt x="3235846" y="322991"/>
+                  </a:lnTo>
+                  <a:lnTo>
+                    <a:pt x="3306191" y="327717"/>
+                  </a:lnTo>
+                  <a:lnTo>
+                    <a:pt x="3376535" y="332368"/>
+                  </a:lnTo>
+                  <a:lnTo>
+                    <a:pt x="3446880" y="336945"/>
+                  </a:lnTo>
+                  <a:lnTo>
+                    <a:pt x="3517224" y="341451"/>
+                  </a:lnTo>
+                  <a:lnTo>
+                    <a:pt x="3587569" y="345885"/>
+                  </a:lnTo>
+                  <a:lnTo>
+                    <a:pt x="3657913" y="350249"/>
+                  </a:lnTo>
+                  <a:lnTo>
+                    <a:pt x="3728257" y="354544"/>
+                  </a:lnTo>
+                  <a:lnTo>
+                    <a:pt x="3798602" y="358772"/>
+                  </a:lnTo>
+                  <a:lnTo>
+                    <a:pt x="3868946" y="362933"/>
+                  </a:lnTo>
+                  <a:lnTo>
+                    <a:pt x="3939291" y="367028"/>
+                  </a:lnTo>
+                  <a:lnTo>
+                    <a:pt x="4009635" y="371059"/>
+                  </a:lnTo>
+                  <a:lnTo>
+                    <a:pt x="4079980" y="375026"/>
+                  </a:lnTo>
+                  <a:lnTo>
+                    <a:pt x="4150324" y="378930"/>
+                  </a:lnTo>
+                  <a:lnTo>
+                    <a:pt x="4220669" y="382773"/>
+                  </a:lnTo>
+                  <a:lnTo>
+                    <a:pt x="4291013" y="386555"/>
+                  </a:lnTo>
+                  <a:lnTo>
+                    <a:pt x="4361358" y="390277"/>
+                  </a:lnTo>
+                  <a:lnTo>
+                    <a:pt x="4431702" y="393941"/>
+                  </a:lnTo>
+                  <a:lnTo>
+                    <a:pt x="4502047" y="397547"/>
+                  </a:lnTo>
+                  <a:lnTo>
+                    <a:pt x="4572391" y="401096"/>
+                  </a:lnTo>
+                  <a:lnTo>
+                    <a:pt x="4642736" y="404589"/>
+                  </a:lnTo>
+                  <a:lnTo>
+                    <a:pt x="4713080" y="408027"/>
+                  </a:lnTo>
+                  <a:lnTo>
+                    <a:pt x="4783425" y="411410"/>
+                  </a:lnTo>
+                  <a:lnTo>
+                    <a:pt x="4853769" y="414740"/>
+                  </a:lnTo>
+                  <a:lnTo>
+                    <a:pt x="4924114" y="418018"/>
+                  </a:lnTo>
+                  <a:lnTo>
+                    <a:pt x="4994458" y="421244"/>
+                  </a:lnTo>
+                  <a:lnTo>
+                    <a:pt x="5064803" y="424419"/>
+                  </a:lnTo>
+                  <a:lnTo>
+                    <a:pt x="5135147" y="427544"/>
+                  </a:lnTo>
+                  <a:lnTo>
+                    <a:pt x="5205492" y="430620"/>
+                  </a:lnTo>
+                  <a:lnTo>
+                    <a:pt x="5275836" y="433647"/>
+                  </a:lnTo>
+                  <a:lnTo>
+                    <a:pt x="5346181" y="436626"/>
+                  </a:lnTo>
+                  <a:lnTo>
+                    <a:pt x="5416525" y="439558"/>
+                  </a:lnTo>
+                  <a:lnTo>
+                    <a:pt x="5486870" y="442444"/>
+                  </a:lnTo>
+                  <a:lnTo>
+                    <a:pt x="5557214" y="445285"/>
+                  </a:lnTo>
+                  <a:lnTo>
+                    <a:pt x="5627559" y="448080"/>
+                  </a:lnTo>
+                  <a:lnTo>
+                    <a:pt x="5697903" y="450832"/>
+                  </a:lnTo>
+                  <a:lnTo>
+                    <a:pt x="5768248" y="453540"/>
+                  </a:lnTo>
+                  <a:lnTo>
+                    <a:pt x="5838592" y="456205"/>
+                  </a:lnTo>
+                  <a:lnTo>
+                    <a:pt x="5908937" y="458829"/>
+                  </a:lnTo>
+                  <a:lnTo>
+                    <a:pt x="5979281" y="461410"/>
+                  </a:lnTo>
+                  <a:lnTo>
+                    <a:pt x="6049626" y="463952"/>
+                  </a:lnTo>
+                  <a:lnTo>
+                    <a:pt x="6119970" y="466453"/>
+                  </a:lnTo>
+                  <a:lnTo>
+                    <a:pt x="6190315" y="468914"/>
+                  </a:lnTo>
+                  <a:lnTo>
+                    <a:pt x="6260659" y="471337"/>
+                  </a:lnTo>
+                  <a:lnTo>
+                    <a:pt x="6331004" y="473721"/>
+                  </a:lnTo>
+                  <a:lnTo>
+                    <a:pt x="6401348" y="476068"/>
+                  </a:lnTo>
+                  <a:lnTo>
+                    <a:pt x="6471693" y="478378"/>
+                  </a:lnTo>
+                  <a:lnTo>
+                    <a:pt x="6542037" y="480652"/>
+                  </a:lnTo>
+                  <a:lnTo>
+                    <a:pt x="6612382" y="482889"/>
+                  </a:lnTo>
+                  <a:lnTo>
+                    <a:pt x="6682726" y="485091"/>
+                  </a:lnTo>
+                  <a:lnTo>
+                    <a:pt x="6753071" y="487259"/>
+                  </a:lnTo>
+                  <a:lnTo>
+                    <a:pt x="6823415" y="489392"/>
+                  </a:lnTo>
+                  <a:lnTo>
+                    <a:pt x="6893760" y="491492"/>
+                  </a:lnTo>
+                  <a:lnTo>
+                    <a:pt x="6964104" y="493558"/>
                   </a:lnTo>
                 </a:path>
               </a:pathLst>
@@ -4568,27 +4603,27 @@
         </p:sp>
         <p:sp>
           <p:nvSpPr>
-            <p:cNvPr id="24" name="pl24"/>
+            <p:cNvPr id="25" name="pl25"/>
             <p:cNvSpPr/>
             <p:nvPr/>
           </p:nvSpPr>
           <p:spPr>
             <a:xfrm>
-              <a:off x="817517" y="4727786"/>
-              <a:ext cx="7799693" cy="0"/>
+              <a:off x="887106" y="3100960"/>
+              <a:ext cx="7660515" cy="0"/>
             </a:xfrm>
             <a:custGeom>
               <a:avLst/>
               <a:pathLst>
-                <a:path w="7799693" h="0">
+                <a:path w="7660515" h="0">
                   <a:moveTo>
                     <a:pt x="0" y="0"/>
                   </a:moveTo>
                   <a:lnTo>
-                    <a:pt x="7799693" y="0"/>
-                  </a:lnTo>
-                  <a:lnTo>
-                    <a:pt x="7799693" y="0"/>
+                    <a:pt x="7660515" y="0"/>
+                  </a:lnTo>
+                  <a:lnTo>
+                    <a:pt x="7660515" y="0"/>
                   </a:lnTo>
                 </a:path>
               </a:pathLst>
@@ -4611,21 +4646,21 @@
         </p:sp>
         <p:sp>
           <p:nvSpPr>
-            <p:cNvPr id="25" name="pl25"/>
+            <p:cNvPr id="26" name="pl26"/>
             <p:cNvSpPr/>
             <p:nvPr/>
           </p:nvSpPr>
           <p:spPr>
             <a:xfrm>
-              <a:off x="4468386" y="2073503"/>
-              <a:ext cx="0" cy="3649639"/>
+              <a:off x="4472829" y="2143092"/>
+              <a:ext cx="0" cy="1317069"/>
             </a:xfrm>
             <a:custGeom>
               <a:avLst/>
               <a:pathLst>
-                <a:path w="0" h="3649639">
+                <a:path w="0" h="1317069">
                   <a:moveTo>
-                    <a:pt x="0" y="3649639"/>
+                    <a:pt x="0" y="1317069"/>
                   </a:moveTo>
                   <a:lnTo>
                     <a:pt x="0" y="0"/>
@@ -4654,13 +4689,13 @@
         </p:sp>
         <p:sp>
           <p:nvSpPr>
-            <p:cNvPr id="26" name="tx26"/>
+            <p:cNvPr id="27" name="tx27"/>
             <p:cNvSpPr/>
             <p:nvPr/>
           </p:nvSpPr>
           <p:spPr>
             <a:xfrm>
-              <a:off x="692708" y="5517199"/>
+              <a:off x="762297" y="3360243"/>
               <a:ext cx="62179" cy="80101"/>
             </a:xfrm>
             <a:prstGeom prst="rect">
@@ -4700,13 +4735,13 @@
         </p:sp>
         <p:sp>
           <p:nvSpPr>
-            <p:cNvPr id="27" name="tx27"/>
+            <p:cNvPr id="28" name="tx28"/>
             <p:cNvSpPr/>
             <p:nvPr/>
           </p:nvSpPr>
           <p:spPr>
             <a:xfrm>
-              <a:off x="692708" y="4687735"/>
+              <a:off x="762297" y="3060909"/>
               <a:ext cx="62179" cy="80101"/>
             </a:xfrm>
             <a:prstGeom prst="rect">
@@ -4746,13 +4781,13 @@
         </p:sp>
         <p:sp>
           <p:nvSpPr>
-            <p:cNvPr id="28" name="tx28"/>
+            <p:cNvPr id="29" name="tx29"/>
             <p:cNvSpPr/>
             <p:nvPr/>
           </p:nvSpPr>
           <p:spPr>
             <a:xfrm>
-              <a:off x="692708" y="3858272"/>
+              <a:off x="762297" y="2761575"/>
               <a:ext cx="62179" cy="80101"/>
             </a:xfrm>
             <a:prstGeom prst="rect">
@@ -4792,13 +4827,13 @@
         </p:sp>
         <p:sp>
           <p:nvSpPr>
-            <p:cNvPr id="29" name="tx29"/>
+            <p:cNvPr id="30" name="tx30"/>
             <p:cNvSpPr/>
             <p:nvPr/>
           </p:nvSpPr>
           <p:spPr>
             <a:xfrm>
-              <a:off x="692708" y="3028808"/>
+              <a:off x="762297" y="2462242"/>
               <a:ext cx="62179" cy="80101"/>
             </a:xfrm>
             <a:prstGeom prst="rect">
@@ -4838,13 +4873,13 @@
         </p:sp>
         <p:sp>
           <p:nvSpPr>
-            <p:cNvPr id="30" name="tx30"/>
+            <p:cNvPr id="31" name="tx31"/>
             <p:cNvSpPr/>
             <p:nvPr/>
           </p:nvSpPr>
           <p:spPr>
             <a:xfrm>
-              <a:off x="692708" y="2199345"/>
+              <a:off x="762297" y="2162908"/>
               <a:ext cx="62179" cy="80101"/>
             </a:xfrm>
             <a:prstGeom prst="rect">
@@ -4884,13 +4919,13 @@
         </p:sp>
         <p:sp>
           <p:nvSpPr>
-            <p:cNvPr id="31" name="tx31"/>
+            <p:cNvPr id="32" name="tx32"/>
             <p:cNvSpPr/>
             <p:nvPr/>
           </p:nvSpPr>
           <p:spPr>
             <a:xfrm>
-              <a:off x="2478335" y="5785772"/>
+              <a:off x="2516846" y="3522791"/>
               <a:ext cx="161574" cy="80101"/>
             </a:xfrm>
             <a:prstGeom prst="rect">
@@ -4930,13 +4965,13 @@
         </p:sp>
         <p:sp>
           <p:nvSpPr>
-            <p:cNvPr id="32" name="tx32"/>
+            <p:cNvPr id="33" name="tx33"/>
             <p:cNvSpPr/>
             <p:nvPr/>
           </p:nvSpPr>
           <p:spPr>
             <a:xfrm>
-              <a:off x="4582608" y="5785772"/>
+              <a:off x="4584458" y="3522791"/>
               <a:ext cx="62179" cy="80101"/>
             </a:xfrm>
             <a:prstGeom prst="rect">
@@ -4976,13 +5011,13 @@
         </p:sp>
         <p:sp>
           <p:nvSpPr>
-            <p:cNvPr id="33" name="tx33"/>
+            <p:cNvPr id="34" name="tx34"/>
             <p:cNvSpPr/>
             <p:nvPr/>
           </p:nvSpPr>
           <p:spPr>
             <a:xfrm>
-              <a:off x="6606094" y="5785772"/>
+              <a:off x="6571282" y="3522791"/>
               <a:ext cx="124358" cy="80101"/>
             </a:xfrm>
             <a:prstGeom prst="rect">
@@ -5022,13 +5057,13 @@
         </p:sp>
         <p:sp>
           <p:nvSpPr>
-            <p:cNvPr id="34" name="tx34"/>
+            <p:cNvPr id="35" name="tx35"/>
             <p:cNvSpPr/>
             <p:nvPr/>
           </p:nvSpPr>
           <p:spPr>
             <a:xfrm>
-              <a:off x="2928340" y="5925448"/>
+              <a:off x="2928340" y="3662467"/>
               <a:ext cx="3578047" cy="100218"/>
             </a:xfrm>
             <a:prstGeom prst="rect">
@@ -5068,13 +5103,13 @@
         </p:sp>
         <p:sp>
           <p:nvSpPr>
-            <p:cNvPr id="35" name="tx35"/>
+            <p:cNvPr id="36" name="tx36"/>
             <p:cNvSpPr/>
             <p:nvPr/>
           </p:nvSpPr>
           <p:spPr>
             <a:xfrm rot="-5400000">
-              <a:off x="68446" y="3848213"/>
+              <a:off x="138035" y="2751517"/>
               <a:ext cx="1016904" cy="100218"/>
             </a:xfrm>
             <a:prstGeom prst="rect">
@@ -5114,13 +5149,13 @@
         </p:sp>
         <p:sp>
           <p:nvSpPr>
-            <p:cNvPr id="36" name="tx36"/>
+            <p:cNvPr id="37" name="tx37"/>
             <p:cNvSpPr/>
             <p:nvPr/>
           </p:nvSpPr>
           <p:spPr>
             <a:xfrm>
-              <a:off x="817517" y="1896563"/>
+              <a:off x="887106" y="1966152"/>
               <a:ext cx="6985375" cy="82021"/>
             </a:xfrm>
             <a:prstGeom prst="rect">
@@ -5160,13 +5195,3746 @@
         </p:sp>
         <p:sp>
           <p:nvSpPr>
-            <p:cNvPr id="37" name="tx37"/>
+            <p:cNvPr id="38" name="tx38"/>
             <p:cNvSpPr/>
             <p:nvPr/>
           </p:nvSpPr>
           <p:spPr>
             <a:xfrm>
-              <a:off x="817517" y="1669789"/>
+              <a:off x="887106" y="1739378"/>
+              <a:ext cx="2913186" cy="120152"/>
+            </a:xfrm>
+            <a:prstGeom prst="rect">
+              <a:avLst/>
+            </a:prstGeom>
+            <a:noFill/>
+          </p:spPr>
+          <p:txBody>
+            <a:bodyPr lIns="0" rIns="0" tIns="0" bIns="0" anchorCtr="1" anchor="ctr" wrap="none"/>
+            <a:lstStyle/>
+            <a:p>
+              <a:pPr algn="l" marL="0" marR="0" indent="0">
+                <a:lnSpc>
+                  <a:spcPts val="1320"/>
+                </a:lnSpc>
+                <a:spcBef>
+                  <a:spcPts val="0"/>
+                </a:spcBef>
+                <a:spcAft>
+                  <a:spcPts val="0"/>
+                </a:spcAft>
+              </a:pPr>
+              <a:r>
+                <a:rPr sz="1320">
+                  <a:solidFill>
+                    <a:srgbClr val="000000">
+                      <a:alpha val="100000"/>
+                    </a:srgbClr>
+                  </a:solidFill>
+                  <a:latin typeface="Helvetica"/>
+                  <a:cs typeface="Helvetica"/>
+                </a:rPr>
+                <a:t>Anemia Grade 2 (Carboplatin AUC ≥ 3)</a:t>
+              </a:r>
+            </a:p>
+          </p:txBody>
+        </p:sp>
+        <p:sp>
+          <p:nvSpPr>
+            <p:cNvPr id="39" name="pl39"/>
+            <p:cNvSpPr/>
+            <p:nvPr/>
+          </p:nvSpPr>
+          <p:spPr>
+            <a:xfrm>
+              <a:off x="887106" y="5444019"/>
+              <a:ext cx="7660515" cy="0"/>
+            </a:xfrm>
+            <a:custGeom>
+              <a:avLst/>
+              <a:pathLst>
+                <a:path w="7660515" h="0">
+                  <a:moveTo>
+                    <a:pt x="0" y="0"/>
+                  </a:moveTo>
+                  <a:lnTo>
+                    <a:pt x="7660515" y="0"/>
+                  </a:lnTo>
+                  <a:lnTo>
+                    <a:pt x="7660515" y="0"/>
+                  </a:lnTo>
+                </a:path>
+              </a:pathLst>
+            </a:custGeom>
+            <a:ln w="6775" cap="flat">
+              <a:solidFill>
+                <a:srgbClr val="EBEBEB">
+                  <a:alpha val="100000"/>
+                </a:srgbClr>
+              </a:solidFill>
+              <a:prstDash val="solid"/>
+              <a:round/>
+            </a:ln>
+          </p:spPr>
+          <p:txBody>
+            <a:bodyPr/>
+            <a:lstStyle/>
+            <a:p/>
+          </p:txBody>
+        </p:sp>
+        <p:sp>
+          <p:nvSpPr>
+            <p:cNvPr id="40" name="pl40"/>
+            <p:cNvSpPr/>
+            <p:nvPr/>
+          </p:nvSpPr>
+          <p:spPr>
+            <a:xfrm>
+              <a:off x="887106" y="5144686"/>
+              <a:ext cx="7660515" cy="0"/>
+            </a:xfrm>
+            <a:custGeom>
+              <a:avLst/>
+              <a:pathLst>
+                <a:path w="7660515" h="0">
+                  <a:moveTo>
+                    <a:pt x="0" y="0"/>
+                  </a:moveTo>
+                  <a:lnTo>
+                    <a:pt x="7660515" y="0"/>
+                  </a:lnTo>
+                  <a:lnTo>
+                    <a:pt x="7660515" y="0"/>
+                  </a:lnTo>
+                </a:path>
+              </a:pathLst>
+            </a:custGeom>
+            <a:ln w="6775" cap="flat">
+              <a:solidFill>
+                <a:srgbClr val="EBEBEB">
+                  <a:alpha val="100000"/>
+                </a:srgbClr>
+              </a:solidFill>
+              <a:prstDash val="solid"/>
+              <a:round/>
+            </a:ln>
+          </p:spPr>
+          <p:txBody>
+            <a:bodyPr/>
+            <a:lstStyle/>
+            <a:p/>
+          </p:txBody>
+        </p:sp>
+        <p:sp>
+          <p:nvSpPr>
+            <p:cNvPr id="41" name="pl41"/>
+            <p:cNvSpPr/>
+            <p:nvPr/>
+          </p:nvSpPr>
+          <p:spPr>
+            <a:xfrm>
+              <a:off x="887106" y="4845352"/>
+              <a:ext cx="7660515" cy="0"/>
+            </a:xfrm>
+            <a:custGeom>
+              <a:avLst/>
+              <a:pathLst>
+                <a:path w="7660515" h="0">
+                  <a:moveTo>
+                    <a:pt x="0" y="0"/>
+                  </a:moveTo>
+                  <a:lnTo>
+                    <a:pt x="7660515" y="0"/>
+                  </a:lnTo>
+                  <a:lnTo>
+                    <a:pt x="7660515" y="0"/>
+                  </a:lnTo>
+                </a:path>
+              </a:pathLst>
+            </a:custGeom>
+            <a:ln w="6775" cap="flat">
+              <a:solidFill>
+                <a:srgbClr val="EBEBEB">
+                  <a:alpha val="100000"/>
+                </a:srgbClr>
+              </a:solidFill>
+              <a:prstDash val="solid"/>
+              <a:round/>
+            </a:ln>
+          </p:spPr>
+          <p:txBody>
+            <a:bodyPr/>
+            <a:lstStyle/>
+            <a:p/>
+          </p:txBody>
+        </p:sp>
+        <p:sp>
+          <p:nvSpPr>
+            <p:cNvPr id="42" name="pl42"/>
+            <p:cNvSpPr/>
+            <p:nvPr/>
+          </p:nvSpPr>
+          <p:spPr>
+            <a:xfrm>
+              <a:off x="887106" y="4546018"/>
+              <a:ext cx="7660515" cy="0"/>
+            </a:xfrm>
+            <a:custGeom>
+              <a:avLst/>
+              <a:pathLst>
+                <a:path w="7660515" h="0">
+                  <a:moveTo>
+                    <a:pt x="0" y="0"/>
+                  </a:moveTo>
+                  <a:lnTo>
+                    <a:pt x="7660515" y="0"/>
+                  </a:lnTo>
+                  <a:lnTo>
+                    <a:pt x="7660515" y="0"/>
+                  </a:lnTo>
+                </a:path>
+              </a:pathLst>
+            </a:custGeom>
+            <a:ln w="6775" cap="flat">
+              <a:solidFill>
+                <a:srgbClr val="EBEBEB">
+                  <a:alpha val="100000"/>
+                </a:srgbClr>
+              </a:solidFill>
+              <a:prstDash val="solid"/>
+              <a:round/>
+            </a:ln>
+          </p:spPr>
+          <p:txBody>
+            <a:bodyPr/>
+            <a:lstStyle/>
+            <a:p/>
+          </p:txBody>
+        </p:sp>
+        <p:sp>
+          <p:nvSpPr>
+            <p:cNvPr id="43" name="pl43"/>
+            <p:cNvSpPr/>
+            <p:nvPr/>
+          </p:nvSpPr>
+          <p:spPr>
+            <a:xfrm>
+              <a:off x="983303" y="4336484"/>
+              <a:ext cx="0" cy="1317069"/>
+            </a:xfrm>
+            <a:custGeom>
+              <a:avLst/>
+              <a:pathLst>
+                <a:path w="0" h="1317069">
+                  <a:moveTo>
+                    <a:pt x="0" y="1317069"/>
+                  </a:moveTo>
+                  <a:lnTo>
+                    <a:pt x="0" y="0"/>
+                  </a:lnTo>
+                  <a:lnTo>
+                    <a:pt x="0" y="0"/>
+                  </a:lnTo>
+                </a:path>
+              </a:pathLst>
+            </a:custGeom>
+            <a:ln w="6775" cap="flat">
+              <a:solidFill>
+                <a:srgbClr val="EBEBEB">
+                  <a:alpha val="100000"/>
+                </a:srgbClr>
+              </a:solidFill>
+              <a:prstDash val="solid"/>
+              <a:round/>
+            </a:ln>
+          </p:spPr>
+          <p:txBody>
+            <a:bodyPr/>
+            <a:lstStyle/>
+            <a:p/>
+          </p:txBody>
+        </p:sp>
+        <p:sp>
+          <p:nvSpPr>
+            <p:cNvPr id="44" name="pl44"/>
+            <p:cNvSpPr/>
+            <p:nvPr/>
+          </p:nvSpPr>
+          <p:spPr>
+            <a:xfrm>
+              <a:off x="1790468" y="4336484"/>
+              <a:ext cx="0" cy="1317069"/>
+            </a:xfrm>
+            <a:custGeom>
+              <a:avLst/>
+              <a:pathLst>
+                <a:path w="0" h="1317069">
+                  <a:moveTo>
+                    <a:pt x="0" y="1317069"/>
+                  </a:moveTo>
+                  <a:lnTo>
+                    <a:pt x="0" y="0"/>
+                  </a:lnTo>
+                  <a:lnTo>
+                    <a:pt x="0" y="0"/>
+                  </a:lnTo>
+                </a:path>
+              </a:pathLst>
+            </a:custGeom>
+            <a:ln w="6775" cap="flat">
+              <a:solidFill>
+                <a:srgbClr val="EBEBEB">
+                  <a:alpha val="100000"/>
+                </a:srgbClr>
+              </a:solidFill>
+              <a:prstDash val="solid"/>
+              <a:round/>
+            </a:ln>
+          </p:spPr>
+          <p:txBody>
+            <a:bodyPr/>
+            <a:lstStyle/>
+            <a:p/>
+          </p:txBody>
+        </p:sp>
+        <p:sp>
+          <p:nvSpPr>
+            <p:cNvPr id="45" name="pl45"/>
+            <p:cNvSpPr/>
+            <p:nvPr/>
+          </p:nvSpPr>
+          <p:spPr>
+            <a:xfrm>
+              <a:off x="2597634" y="4336484"/>
+              <a:ext cx="0" cy="1317069"/>
+            </a:xfrm>
+            <a:custGeom>
+              <a:avLst/>
+              <a:pathLst>
+                <a:path w="0" h="1317069">
+                  <a:moveTo>
+                    <a:pt x="0" y="1317069"/>
+                  </a:moveTo>
+                  <a:lnTo>
+                    <a:pt x="0" y="0"/>
+                  </a:lnTo>
+                  <a:lnTo>
+                    <a:pt x="0" y="0"/>
+                  </a:lnTo>
+                </a:path>
+              </a:pathLst>
+            </a:custGeom>
+            <a:ln w="6775" cap="flat">
+              <a:solidFill>
+                <a:srgbClr val="EBEBEB">
+                  <a:alpha val="100000"/>
+                </a:srgbClr>
+              </a:solidFill>
+              <a:prstDash val="solid"/>
+              <a:round/>
+            </a:ln>
+          </p:spPr>
+          <p:txBody>
+            <a:bodyPr/>
+            <a:lstStyle/>
+            <a:p/>
+          </p:txBody>
+        </p:sp>
+        <p:sp>
+          <p:nvSpPr>
+            <p:cNvPr id="46" name="pl46"/>
+            <p:cNvSpPr/>
+            <p:nvPr/>
+          </p:nvSpPr>
+          <p:spPr>
+            <a:xfrm>
+              <a:off x="3404799" y="4336484"/>
+              <a:ext cx="0" cy="1317069"/>
+            </a:xfrm>
+            <a:custGeom>
+              <a:avLst/>
+              <a:pathLst>
+                <a:path w="0" h="1317069">
+                  <a:moveTo>
+                    <a:pt x="0" y="1317069"/>
+                  </a:moveTo>
+                  <a:lnTo>
+                    <a:pt x="0" y="0"/>
+                  </a:lnTo>
+                  <a:lnTo>
+                    <a:pt x="0" y="0"/>
+                  </a:lnTo>
+                </a:path>
+              </a:pathLst>
+            </a:custGeom>
+            <a:ln w="6775" cap="flat">
+              <a:solidFill>
+                <a:srgbClr val="EBEBEB">
+                  <a:alpha val="100000"/>
+                </a:srgbClr>
+              </a:solidFill>
+              <a:prstDash val="solid"/>
+              <a:round/>
+            </a:ln>
+          </p:spPr>
+          <p:txBody>
+            <a:bodyPr/>
+            <a:lstStyle/>
+            <a:p/>
+          </p:txBody>
+        </p:sp>
+        <p:sp>
+          <p:nvSpPr>
+            <p:cNvPr id="47" name="pl47"/>
+            <p:cNvSpPr/>
+            <p:nvPr/>
+          </p:nvSpPr>
+          <p:spPr>
+            <a:xfrm>
+              <a:off x="4211965" y="4336484"/>
+              <a:ext cx="0" cy="1317069"/>
+            </a:xfrm>
+            <a:custGeom>
+              <a:avLst/>
+              <a:pathLst>
+                <a:path w="0" h="1317069">
+                  <a:moveTo>
+                    <a:pt x="0" y="1317069"/>
+                  </a:moveTo>
+                  <a:lnTo>
+                    <a:pt x="0" y="0"/>
+                  </a:lnTo>
+                  <a:lnTo>
+                    <a:pt x="0" y="0"/>
+                  </a:lnTo>
+                </a:path>
+              </a:pathLst>
+            </a:custGeom>
+            <a:ln w="6775" cap="flat">
+              <a:solidFill>
+                <a:srgbClr val="EBEBEB">
+                  <a:alpha val="100000"/>
+                </a:srgbClr>
+              </a:solidFill>
+              <a:prstDash val="solid"/>
+              <a:round/>
+            </a:ln>
+          </p:spPr>
+          <p:txBody>
+            <a:bodyPr/>
+            <a:lstStyle/>
+            <a:p/>
+          </p:txBody>
+        </p:sp>
+        <p:sp>
+          <p:nvSpPr>
+            <p:cNvPr id="48" name="pl48"/>
+            <p:cNvSpPr/>
+            <p:nvPr/>
+          </p:nvSpPr>
+          <p:spPr>
+            <a:xfrm>
+              <a:off x="5019130" y="4336484"/>
+              <a:ext cx="0" cy="1317069"/>
+            </a:xfrm>
+            <a:custGeom>
+              <a:avLst/>
+              <a:pathLst>
+                <a:path w="0" h="1317069">
+                  <a:moveTo>
+                    <a:pt x="0" y="1317069"/>
+                  </a:moveTo>
+                  <a:lnTo>
+                    <a:pt x="0" y="0"/>
+                  </a:lnTo>
+                  <a:lnTo>
+                    <a:pt x="0" y="0"/>
+                  </a:lnTo>
+                </a:path>
+              </a:pathLst>
+            </a:custGeom>
+            <a:ln w="6775" cap="flat">
+              <a:solidFill>
+                <a:srgbClr val="EBEBEB">
+                  <a:alpha val="100000"/>
+                </a:srgbClr>
+              </a:solidFill>
+              <a:prstDash val="solid"/>
+              <a:round/>
+            </a:ln>
+          </p:spPr>
+          <p:txBody>
+            <a:bodyPr/>
+            <a:lstStyle/>
+            <a:p/>
+          </p:txBody>
+        </p:sp>
+        <p:sp>
+          <p:nvSpPr>
+            <p:cNvPr id="49" name="pl49"/>
+            <p:cNvSpPr/>
+            <p:nvPr/>
+          </p:nvSpPr>
+          <p:spPr>
+            <a:xfrm>
+              <a:off x="5826296" y="4336484"/>
+              <a:ext cx="0" cy="1317069"/>
+            </a:xfrm>
+            <a:custGeom>
+              <a:avLst/>
+              <a:pathLst>
+                <a:path w="0" h="1317069">
+                  <a:moveTo>
+                    <a:pt x="0" y="1317069"/>
+                  </a:moveTo>
+                  <a:lnTo>
+                    <a:pt x="0" y="0"/>
+                  </a:lnTo>
+                  <a:lnTo>
+                    <a:pt x="0" y="0"/>
+                  </a:lnTo>
+                </a:path>
+              </a:pathLst>
+            </a:custGeom>
+            <a:ln w="6775" cap="flat">
+              <a:solidFill>
+                <a:srgbClr val="EBEBEB">
+                  <a:alpha val="100000"/>
+                </a:srgbClr>
+              </a:solidFill>
+              <a:prstDash val="solid"/>
+              <a:round/>
+            </a:ln>
+          </p:spPr>
+          <p:txBody>
+            <a:bodyPr/>
+            <a:lstStyle/>
+            <a:p/>
+          </p:txBody>
+        </p:sp>
+        <p:sp>
+          <p:nvSpPr>
+            <p:cNvPr id="50" name="pl50"/>
+            <p:cNvSpPr/>
+            <p:nvPr/>
+          </p:nvSpPr>
+          <p:spPr>
+            <a:xfrm>
+              <a:off x="6633461" y="4336484"/>
+              <a:ext cx="0" cy="1317069"/>
+            </a:xfrm>
+            <a:custGeom>
+              <a:avLst/>
+              <a:pathLst>
+                <a:path w="0" h="1317069">
+                  <a:moveTo>
+                    <a:pt x="0" y="1317069"/>
+                  </a:moveTo>
+                  <a:lnTo>
+                    <a:pt x="0" y="0"/>
+                  </a:lnTo>
+                  <a:lnTo>
+                    <a:pt x="0" y="0"/>
+                  </a:lnTo>
+                </a:path>
+              </a:pathLst>
+            </a:custGeom>
+            <a:ln w="6775" cap="flat">
+              <a:solidFill>
+                <a:srgbClr val="EBEBEB">
+                  <a:alpha val="100000"/>
+                </a:srgbClr>
+              </a:solidFill>
+              <a:prstDash val="solid"/>
+              <a:round/>
+            </a:ln>
+          </p:spPr>
+          <p:txBody>
+            <a:bodyPr/>
+            <a:lstStyle/>
+            <a:p/>
+          </p:txBody>
+        </p:sp>
+        <p:sp>
+          <p:nvSpPr>
+            <p:cNvPr id="51" name="pl51"/>
+            <p:cNvSpPr/>
+            <p:nvPr/>
+          </p:nvSpPr>
+          <p:spPr>
+            <a:xfrm>
+              <a:off x="7440627" y="4336484"/>
+              <a:ext cx="0" cy="1317069"/>
+            </a:xfrm>
+            <a:custGeom>
+              <a:avLst/>
+              <a:pathLst>
+                <a:path w="0" h="1317069">
+                  <a:moveTo>
+                    <a:pt x="0" y="1317069"/>
+                  </a:moveTo>
+                  <a:lnTo>
+                    <a:pt x="0" y="0"/>
+                  </a:lnTo>
+                  <a:lnTo>
+                    <a:pt x="0" y="0"/>
+                  </a:lnTo>
+                </a:path>
+              </a:pathLst>
+            </a:custGeom>
+            <a:ln w="6775" cap="flat">
+              <a:solidFill>
+                <a:srgbClr val="EBEBEB">
+                  <a:alpha val="100000"/>
+                </a:srgbClr>
+              </a:solidFill>
+              <a:prstDash val="solid"/>
+              <a:round/>
+            </a:ln>
+          </p:spPr>
+          <p:txBody>
+            <a:bodyPr/>
+            <a:lstStyle/>
+            <a:p/>
+          </p:txBody>
+        </p:sp>
+        <p:sp>
+          <p:nvSpPr>
+            <p:cNvPr id="52" name="pl52"/>
+            <p:cNvSpPr/>
+            <p:nvPr/>
+          </p:nvSpPr>
+          <p:spPr>
+            <a:xfrm>
+              <a:off x="8247792" y="4336484"/>
+              <a:ext cx="0" cy="1317069"/>
+            </a:xfrm>
+            <a:custGeom>
+              <a:avLst/>
+              <a:pathLst>
+                <a:path w="0" h="1317069">
+                  <a:moveTo>
+                    <a:pt x="0" y="1317069"/>
+                  </a:moveTo>
+                  <a:lnTo>
+                    <a:pt x="0" y="0"/>
+                  </a:lnTo>
+                  <a:lnTo>
+                    <a:pt x="0" y="0"/>
+                  </a:lnTo>
+                </a:path>
+              </a:pathLst>
+            </a:custGeom>
+            <a:ln w="6775" cap="flat">
+              <a:solidFill>
+                <a:srgbClr val="EBEBEB">
+                  <a:alpha val="100000"/>
+                </a:srgbClr>
+              </a:solidFill>
+              <a:prstDash val="solid"/>
+              <a:round/>
+            </a:ln>
+          </p:spPr>
+          <p:txBody>
+            <a:bodyPr/>
+            <a:lstStyle/>
+            <a:p/>
+          </p:txBody>
+        </p:sp>
+        <p:sp>
+          <p:nvSpPr>
+            <p:cNvPr id="53" name="pl53"/>
+            <p:cNvSpPr/>
+            <p:nvPr/>
+          </p:nvSpPr>
+          <p:spPr>
+            <a:xfrm>
+              <a:off x="887106" y="5593686"/>
+              <a:ext cx="7660515" cy="0"/>
+            </a:xfrm>
+            <a:custGeom>
+              <a:avLst/>
+              <a:pathLst>
+                <a:path w="7660515" h="0">
+                  <a:moveTo>
+                    <a:pt x="0" y="0"/>
+                  </a:moveTo>
+                  <a:lnTo>
+                    <a:pt x="7660515" y="0"/>
+                  </a:lnTo>
+                  <a:lnTo>
+                    <a:pt x="7660515" y="0"/>
+                  </a:lnTo>
+                </a:path>
+              </a:pathLst>
+            </a:custGeom>
+            <a:ln w="13550" cap="flat">
+              <a:solidFill>
+                <a:srgbClr val="EBEBEB">
+                  <a:alpha val="100000"/>
+                </a:srgbClr>
+              </a:solidFill>
+              <a:prstDash val="solid"/>
+              <a:round/>
+            </a:ln>
+          </p:spPr>
+          <p:txBody>
+            <a:bodyPr/>
+            <a:lstStyle/>
+            <a:p/>
+          </p:txBody>
+        </p:sp>
+        <p:sp>
+          <p:nvSpPr>
+            <p:cNvPr id="54" name="pl54"/>
+            <p:cNvSpPr/>
+            <p:nvPr/>
+          </p:nvSpPr>
+          <p:spPr>
+            <a:xfrm>
+              <a:off x="887106" y="5294352"/>
+              <a:ext cx="7660515" cy="0"/>
+            </a:xfrm>
+            <a:custGeom>
+              <a:avLst/>
+              <a:pathLst>
+                <a:path w="7660515" h="0">
+                  <a:moveTo>
+                    <a:pt x="0" y="0"/>
+                  </a:moveTo>
+                  <a:lnTo>
+                    <a:pt x="7660515" y="0"/>
+                  </a:lnTo>
+                  <a:lnTo>
+                    <a:pt x="7660515" y="0"/>
+                  </a:lnTo>
+                </a:path>
+              </a:pathLst>
+            </a:custGeom>
+            <a:ln w="13550" cap="flat">
+              <a:solidFill>
+                <a:srgbClr val="EBEBEB">
+                  <a:alpha val="100000"/>
+                </a:srgbClr>
+              </a:solidFill>
+              <a:prstDash val="solid"/>
+              <a:round/>
+            </a:ln>
+          </p:spPr>
+          <p:txBody>
+            <a:bodyPr/>
+            <a:lstStyle/>
+            <a:p/>
+          </p:txBody>
+        </p:sp>
+        <p:sp>
+          <p:nvSpPr>
+            <p:cNvPr id="55" name="pl55"/>
+            <p:cNvSpPr/>
+            <p:nvPr/>
+          </p:nvSpPr>
+          <p:spPr>
+            <a:xfrm>
+              <a:off x="887106" y="4995019"/>
+              <a:ext cx="7660515" cy="0"/>
+            </a:xfrm>
+            <a:custGeom>
+              <a:avLst/>
+              <a:pathLst>
+                <a:path w="7660515" h="0">
+                  <a:moveTo>
+                    <a:pt x="0" y="0"/>
+                  </a:moveTo>
+                  <a:lnTo>
+                    <a:pt x="7660515" y="0"/>
+                  </a:lnTo>
+                  <a:lnTo>
+                    <a:pt x="7660515" y="0"/>
+                  </a:lnTo>
+                </a:path>
+              </a:pathLst>
+            </a:custGeom>
+            <a:ln w="13550" cap="flat">
+              <a:solidFill>
+                <a:srgbClr val="EBEBEB">
+                  <a:alpha val="100000"/>
+                </a:srgbClr>
+              </a:solidFill>
+              <a:prstDash val="solid"/>
+              <a:round/>
+            </a:ln>
+          </p:spPr>
+          <p:txBody>
+            <a:bodyPr/>
+            <a:lstStyle/>
+            <a:p/>
+          </p:txBody>
+        </p:sp>
+        <p:sp>
+          <p:nvSpPr>
+            <p:cNvPr id="56" name="pl56"/>
+            <p:cNvSpPr/>
+            <p:nvPr/>
+          </p:nvSpPr>
+          <p:spPr>
+            <a:xfrm>
+              <a:off x="887106" y="4695685"/>
+              <a:ext cx="7660515" cy="0"/>
+            </a:xfrm>
+            <a:custGeom>
+              <a:avLst/>
+              <a:pathLst>
+                <a:path w="7660515" h="0">
+                  <a:moveTo>
+                    <a:pt x="0" y="0"/>
+                  </a:moveTo>
+                  <a:lnTo>
+                    <a:pt x="7660515" y="0"/>
+                  </a:lnTo>
+                  <a:lnTo>
+                    <a:pt x="7660515" y="0"/>
+                  </a:lnTo>
+                </a:path>
+              </a:pathLst>
+            </a:custGeom>
+            <a:ln w="13550" cap="flat">
+              <a:solidFill>
+                <a:srgbClr val="EBEBEB">
+                  <a:alpha val="100000"/>
+                </a:srgbClr>
+              </a:solidFill>
+              <a:prstDash val="solid"/>
+              <a:round/>
+            </a:ln>
+          </p:spPr>
+          <p:txBody>
+            <a:bodyPr/>
+            <a:lstStyle/>
+            <a:p/>
+          </p:txBody>
+        </p:sp>
+        <p:sp>
+          <p:nvSpPr>
+            <p:cNvPr id="57" name="pl57"/>
+            <p:cNvSpPr/>
+            <p:nvPr/>
+          </p:nvSpPr>
+          <p:spPr>
+            <a:xfrm>
+              <a:off x="887106" y="4396351"/>
+              <a:ext cx="7660515" cy="0"/>
+            </a:xfrm>
+            <a:custGeom>
+              <a:avLst/>
+              <a:pathLst>
+                <a:path w="7660515" h="0">
+                  <a:moveTo>
+                    <a:pt x="0" y="0"/>
+                  </a:moveTo>
+                  <a:lnTo>
+                    <a:pt x="7660515" y="0"/>
+                  </a:lnTo>
+                  <a:lnTo>
+                    <a:pt x="7660515" y="0"/>
+                  </a:lnTo>
+                </a:path>
+              </a:pathLst>
+            </a:custGeom>
+            <a:ln w="13550" cap="flat">
+              <a:solidFill>
+                <a:srgbClr val="EBEBEB">
+                  <a:alpha val="100000"/>
+                </a:srgbClr>
+              </a:solidFill>
+              <a:prstDash val="solid"/>
+              <a:round/>
+            </a:ln>
+          </p:spPr>
+          <p:txBody>
+            <a:bodyPr/>
+            <a:lstStyle/>
+            <a:p/>
+          </p:txBody>
+        </p:sp>
+        <p:sp>
+          <p:nvSpPr>
+            <p:cNvPr id="58" name="pl58"/>
+            <p:cNvSpPr/>
+            <p:nvPr/>
+          </p:nvSpPr>
+          <p:spPr>
+            <a:xfrm>
+              <a:off x="1386885" y="4336484"/>
+              <a:ext cx="0" cy="1317069"/>
+            </a:xfrm>
+            <a:custGeom>
+              <a:avLst/>
+              <a:pathLst>
+                <a:path w="0" h="1317069">
+                  <a:moveTo>
+                    <a:pt x="0" y="1317069"/>
+                  </a:moveTo>
+                  <a:lnTo>
+                    <a:pt x="0" y="0"/>
+                  </a:lnTo>
+                  <a:lnTo>
+                    <a:pt x="0" y="0"/>
+                  </a:lnTo>
+                </a:path>
+              </a:pathLst>
+            </a:custGeom>
+            <a:ln w="13550" cap="flat">
+              <a:solidFill>
+                <a:srgbClr val="EBEBEB">
+                  <a:alpha val="100000"/>
+                </a:srgbClr>
+              </a:solidFill>
+              <a:prstDash val="solid"/>
+              <a:round/>
+            </a:ln>
+          </p:spPr>
+          <p:txBody>
+            <a:bodyPr/>
+            <a:lstStyle/>
+            <a:p/>
+          </p:txBody>
+        </p:sp>
+        <p:sp>
+          <p:nvSpPr>
+            <p:cNvPr id="59" name="pl59"/>
+            <p:cNvSpPr/>
+            <p:nvPr/>
+          </p:nvSpPr>
+          <p:spPr>
+            <a:xfrm>
+              <a:off x="2194051" y="4336484"/>
+              <a:ext cx="0" cy="1317069"/>
+            </a:xfrm>
+            <a:custGeom>
+              <a:avLst/>
+              <a:pathLst>
+                <a:path w="0" h="1317069">
+                  <a:moveTo>
+                    <a:pt x="0" y="1317069"/>
+                  </a:moveTo>
+                  <a:lnTo>
+                    <a:pt x="0" y="0"/>
+                  </a:lnTo>
+                  <a:lnTo>
+                    <a:pt x="0" y="0"/>
+                  </a:lnTo>
+                </a:path>
+              </a:pathLst>
+            </a:custGeom>
+            <a:ln w="13550" cap="flat">
+              <a:solidFill>
+                <a:srgbClr val="EBEBEB">
+                  <a:alpha val="100000"/>
+                </a:srgbClr>
+              </a:solidFill>
+              <a:prstDash val="solid"/>
+              <a:round/>
+            </a:ln>
+          </p:spPr>
+          <p:txBody>
+            <a:bodyPr/>
+            <a:lstStyle/>
+            <a:p/>
+          </p:txBody>
+        </p:sp>
+        <p:sp>
+          <p:nvSpPr>
+            <p:cNvPr id="60" name="pl60"/>
+            <p:cNvSpPr/>
+            <p:nvPr/>
+          </p:nvSpPr>
+          <p:spPr>
+            <a:xfrm>
+              <a:off x="3001216" y="4336484"/>
+              <a:ext cx="0" cy="1317069"/>
+            </a:xfrm>
+            <a:custGeom>
+              <a:avLst/>
+              <a:pathLst>
+                <a:path w="0" h="1317069">
+                  <a:moveTo>
+                    <a:pt x="0" y="1317069"/>
+                  </a:moveTo>
+                  <a:lnTo>
+                    <a:pt x="0" y="0"/>
+                  </a:lnTo>
+                  <a:lnTo>
+                    <a:pt x="0" y="0"/>
+                  </a:lnTo>
+                </a:path>
+              </a:pathLst>
+            </a:custGeom>
+            <a:ln w="13550" cap="flat">
+              <a:solidFill>
+                <a:srgbClr val="EBEBEB">
+                  <a:alpha val="100000"/>
+                </a:srgbClr>
+              </a:solidFill>
+              <a:prstDash val="solid"/>
+              <a:round/>
+            </a:ln>
+          </p:spPr>
+          <p:txBody>
+            <a:bodyPr/>
+            <a:lstStyle/>
+            <a:p/>
+          </p:txBody>
+        </p:sp>
+        <p:sp>
+          <p:nvSpPr>
+            <p:cNvPr id="61" name="pl61"/>
+            <p:cNvSpPr/>
+            <p:nvPr/>
+          </p:nvSpPr>
+          <p:spPr>
+            <a:xfrm>
+              <a:off x="3808382" y="4336484"/>
+              <a:ext cx="0" cy="1317069"/>
+            </a:xfrm>
+            <a:custGeom>
+              <a:avLst/>
+              <a:pathLst>
+                <a:path w="0" h="1317069">
+                  <a:moveTo>
+                    <a:pt x="0" y="1317069"/>
+                  </a:moveTo>
+                  <a:lnTo>
+                    <a:pt x="0" y="0"/>
+                  </a:lnTo>
+                  <a:lnTo>
+                    <a:pt x="0" y="0"/>
+                  </a:lnTo>
+                </a:path>
+              </a:pathLst>
+            </a:custGeom>
+            <a:ln w="13550" cap="flat">
+              <a:solidFill>
+                <a:srgbClr val="EBEBEB">
+                  <a:alpha val="100000"/>
+                </a:srgbClr>
+              </a:solidFill>
+              <a:prstDash val="solid"/>
+              <a:round/>
+            </a:ln>
+          </p:spPr>
+          <p:txBody>
+            <a:bodyPr/>
+            <a:lstStyle/>
+            <a:p/>
+          </p:txBody>
+        </p:sp>
+        <p:sp>
+          <p:nvSpPr>
+            <p:cNvPr id="62" name="pl62"/>
+            <p:cNvSpPr/>
+            <p:nvPr/>
+          </p:nvSpPr>
+          <p:spPr>
+            <a:xfrm>
+              <a:off x="4615547" y="4336484"/>
+              <a:ext cx="0" cy="1317069"/>
+            </a:xfrm>
+            <a:custGeom>
+              <a:avLst/>
+              <a:pathLst>
+                <a:path w="0" h="1317069">
+                  <a:moveTo>
+                    <a:pt x="0" y="1317069"/>
+                  </a:moveTo>
+                  <a:lnTo>
+                    <a:pt x="0" y="0"/>
+                  </a:lnTo>
+                  <a:lnTo>
+                    <a:pt x="0" y="0"/>
+                  </a:lnTo>
+                </a:path>
+              </a:pathLst>
+            </a:custGeom>
+            <a:ln w="13550" cap="flat">
+              <a:solidFill>
+                <a:srgbClr val="EBEBEB">
+                  <a:alpha val="100000"/>
+                </a:srgbClr>
+              </a:solidFill>
+              <a:prstDash val="solid"/>
+              <a:round/>
+            </a:ln>
+          </p:spPr>
+          <p:txBody>
+            <a:bodyPr/>
+            <a:lstStyle/>
+            <a:p/>
+          </p:txBody>
+        </p:sp>
+        <p:sp>
+          <p:nvSpPr>
+            <p:cNvPr id="63" name="pl63"/>
+            <p:cNvSpPr/>
+            <p:nvPr/>
+          </p:nvSpPr>
+          <p:spPr>
+            <a:xfrm>
+              <a:off x="5422713" y="4336484"/>
+              <a:ext cx="0" cy="1317069"/>
+            </a:xfrm>
+            <a:custGeom>
+              <a:avLst/>
+              <a:pathLst>
+                <a:path w="0" h="1317069">
+                  <a:moveTo>
+                    <a:pt x="0" y="1317069"/>
+                  </a:moveTo>
+                  <a:lnTo>
+                    <a:pt x="0" y="0"/>
+                  </a:lnTo>
+                  <a:lnTo>
+                    <a:pt x="0" y="0"/>
+                  </a:lnTo>
+                </a:path>
+              </a:pathLst>
+            </a:custGeom>
+            <a:ln w="13550" cap="flat">
+              <a:solidFill>
+                <a:srgbClr val="EBEBEB">
+                  <a:alpha val="100000"/>
+                </a:srgbClr>
+              </a:solidFill>
+              <a:prstDash val="solid"/>
+              <a:round/>
+            </a:ln>
+          </p:spPr>
+          <p:txBody>
+            <a:bodyPr/>
+            <a:lstStyle/>
+            <a:p/>
+          </p:txBody>
+        </p:sp>
+        <p:sp>
+          <p:nvSpPr>
+            <p:cNvPr id="64" name="pl64"/>
+            <p:cNvSpPr/>
+            <p:nvPr/>
+          </p:nvSpPr>
+          <p:spPr>
+            <a:xfrm>
+              <a:off x="6229878" y="4336484"/>
+              <a:ext cx="0" cy="1317069"/>
+            </a:xfrm>
+            <a:custGeom>
+              <a:avLst/>
+              <a:pathLst>
+                <a:path w="0" h="1317069">
+                  <a:moveTo>
+                    <a:pt x="0" y="1317069"/>
+                  </a:moveTo>
+                  <a:lnTo>
+                    <a:pt x="0" y="0"/>
+                  </a:lnTo>
+                  <a:lnTo>
+                    <a:pt x="0" y="0"/>
+                  </a:lnTo>
+                </a:path>
+              </a:pathLst>
+            </a:custGeom>
+            <a:ln w="13550" cap="flat">
+              <a:solidFill>
+                <a:srgbClr val="EBEBEB">
+                  <a:alpha val="100000"/>
+                </a:srgbClr>
+              </a:solidFill>
+              <a:prstDash val="solid"/>
+              <a:round/>
+            </a:ln>
+          </p:spPr>
+          <p:txBody>
+            <a:bodyPr/>
+            <a:lstStyle/>
+            <a:p/>
+          </p:txBody>
+        </p:sp>
+        <p:sp>
+          <p:nvSpPr>
+            <p:cNvPr id="65" name="pl65"/>
+            <p:cNvSpPr/>
+            <p:nvPr/>
+          </p:nvSpPr>
+          <p:spPr>
+            <a:xfrm>
+              <a:off x="7037044" y="4336484"/>
+              <a:ext cx="0" cy="1317069"/>
+            </a:xfrm>
+            <a:custGeom>
+              <a:avLst/>
+              <a:pathLst>
+                <a:path w="0" h="1317069">
+                  <a:moveTo>
+                    <a:pt x="0" y="1317069"/>
+                  </a:moveTo>
+                  <a:lnTo>
+                    <a:pt x="0" y="0"/>
+                  </a:lnTo>
+                  <a:lnTo>
+                    <a:pt x="0" y="0"/>
+                  </a:lnTo>
+                </a:path>
+              </a:pathLst>
+            </a:custGeom>
+            <a:ln w="13550" cap="flat">
+              <a:solidFill>
+                <a:srgbClr val="EBEBEB">
+                  <a:alpha val="100000"/>
+                </a:srgbClr>
+              </a:solidFill>
+              <a:prstDash val="solid"/>
+              <a:round/>
+            </a:ln>
+          </p:spPr>
+          <p:txBody>
+            <a:bodyPr/>
+            <a:lstStyle/>
+            <a:p/>
+          </p:txBody>
+        </p:sp>
+        <p:sp>
+          <p:nvSpPr>
+            <p:cNvPr id="66" name="pl66"/>
+            <p:cNvSpPr/>
+            <p:nvPr/>
+          </p:nvSpPr>
+          <p:spPr>
+            <a:xfrm>
+              <a:off x="7844209" y="4336484"/>
+              <a:ext cx="0" cy="1317069"/>
+            </a:xfrm>
+            <a:custGeom>
+              <a:avLst/>
+              <a:pathLst>
+                <a:path w="0" h="1317069">
+                  <a:moveTo>
+                    <a:pt x="0" y="1317069"/>
+                  </a:moveTo>
+                  <a:lnTo>
+                    <a:pt x="0" y="0"/>
+                  </a:lnTo>
+                  <a:lnTo>
+                    <a:pt x="0" y="0"/>
+                  </a:lnTo>
+                </a:path>
+              </a:pathLst>
+            </a:custGeom>
+            <a:ln w="13550" cap="flat">
+              <a:solidFill>
+                <a:srgbClr val="EBEBEB">
+                  <a:alpha val="100000"/>
+                </a:srgbClr>
+              </a:solidFill>
+              <a:prstDash val="solid"/>
+              <a:round/>
+            </a:ln>
+          </p:spPr>
+          <p:txBody>
+            <a:bodyPr/>
+            <a:lstStyle/>
+            <a:p/>
+          </p:txBody>
+        </p:sp>
+        <p:sp>
+          <p:nvSpPr>
+            <p:cNvPr id="67" name="pg67"/>
+            <p:cNvSpPr/>
+            <p:nvPr/>
+          </p:nvSpPr>
+          <p:spPr>
+            <a:xfrm>
+              <a:off x="1235312" y="4629679"/>
+              <a:ext cx="6964104" cy="886113"/>
+            </a:xfrm>
+            <a:custGeom>
+              <a:avLst/>
+              <a:pathLst>
+                <a:path w="6964104" h="886113">
+                  <a:moveTo>
+                    <a:pt x="0" y="0"/>
+                  </a:moveTo>
+                  <a:lnTo>
+                    <a:pt x="70344" y="24188"/>
+                  </a:lnTo>
+                  <a:lnTo>
+                    <a:pt x="140688" y="47769"/>
+                  </a:lnTo>
+                  <a:lnTo>
+                    <a:pt x="211033" y="70759"/>
+                  </a:lnTo>
+                  <a:lnTo>
+                    <a:pt x="281377" y="93172"/>
+                  </a:lnTo>
+                  <a:lnTo>
+                    <a:pt x="351722" y="115023"/>
+                  </a:lnTo>
+                  <a:lnTo>
+                    <a:pt x="422066" y="136325"/>
+                  </a:lnTo>
+                  <a:lnTo>
+                    <a:pt x="492411" y="157093"/>
+                  </a:lnTo>
+                  <a:lnTo>
+                    <a:pt x="562755" y="177339"/>
+                  </a:lnTo>
+                  <a:lnTo>
+                    <a:pt x="633100" y="197078"/>
+                  </a:lnTo>
+                  <a:lnTo>
+                    <a:pt x="703444" y="216321"/>
+                  </a:lnTo>
+                  <a:lnTo>
+                    <a:pt x="773789" y="235082"/>
+                  </a:lnTo>
+                  <a:lnTo>
+                    <a:pt x="844133" y="253372"/>
+                  </a:lnTo>
+                  <a:lnTo>
+                    <a:pt x="914478" y="271203"/>
+                  </a:lnTo>
+                  <a:lnTo>
+                    <a:pt x="984822" y="288586"/>
+                  </a:lnTo>
+                  <a:lnTo>
+                    <a:pt x="1055167" y="305533"/>
+                  </a:lnTo>
+                  <a:lnTo>
+                    <a:pt x="1125511" y="322056"/>
+                  </a:lnTo>
+                  <a:lnTo>
+                    <a:pt x="1195856" y="338163"/>
+                  </a:lnTo>
+                  <a:lnTo>
+                    <a:pt x="1266200" y="353866"/>
+                  </a:lnTo>
+                  <a:lnTo>
+                    <a:pt x="1336545" y="369176"/>
+                  </a:lnTo>
+                  <a:lnTo>
+                    <a:pt x="1406889" y="384101"/>
+                  </a:lnTo>
+                  <a:lnTo>
+                    <a:pt x="1477234" y="398652"/>
+                  </a:lnTo>
+                  <a:lnTo>
+                    <a:pt x="1547578" y="412837"/>
+                  </a:lnTo>
+                  <a:lnTo>
+                    <a:pt x="1617923" y="426667"/>
+                  </a:lnTo>
+                  <a:lnTo>
+                    <a:pt x="1688267" y="440150"/>
+                  </a:lnTo>
+                  <a:lnTo>
+                    <a:pt x="1758612" y="453294"/>
+                  </a:lnTo>
+                  <a:lnTo>
+                    <a:pt x="1828956" y="466109"/>
+                  </a:lnTo>
+                  <a:lnTo>
+                    <a:pt x="1899301" y="478602"/>
+                  </a:lnTo>
+                  <a:lnTo>
+                    <a:pt x="1969645" y="490781"/>
+                  </a:lnTo>
+                  <a:lnTo>
+                    <a:pt x="2039990" y="502655"/>
+                  </a:lnTo>
+                  <a:lnTo>
+                    <a:pt x="2110334" y="514231"/>
+                  </a:lnTo>
+                  <a:lnTo>
+                    <a:pt x="2180679" y="525517"/>
+                  </a:lnTo>
+                  <a:lnTo>
+                    <a:pt x="2251023" y="536519"/>
+                  </a:lnTo>
+                  <a:lnTo>
+                    <a:pt x="2321368" y="547245"/>
+                  </a:lnTo>
+                  <a:lnTo>
+                    <a:pt x="2391712" y="557702"/>
+                  </a:lnTo>
+                  <a:lnTo>
+                    <a:pt x="2462057" y="567897"/>
+                  </a:lnTo>
+                  <a:lnTo>
+                    <a:pt x="2532401" y="577836"/>
+                  </a:lnTo>
+                  <a:lnTo>
+                    <a:pt x="2602746" y="587526"/>
+                  </a:lnTo>
+                  <a:lnTo>
+                    <a:pt x="2673090" y="596972"/>
+                  </a:lnTo>
+                  <a:lnTo>
+                    <a:pt x="2743435" y="606182"/>
+                  </a:lnTo>
+                  <a:lnTo>
+                    <a:pt x="2813779" y="615160"/>
+                  </a:lnTo>
+                  <a:lnTo>
+                    <a:pt x="2884124" y="623913"/>
+                  </a:lnTo>
+                  <a:lnTo>
+                    <a:pt x="2954468" y="632447"/>
+                  </a:lnTo>
+                  <a:lnTo>
+                    <a:pt x="3024813" y="640766"/>
+                  </a:lnTo>
+                  <a:lnTo>
+                    <a:pt x="3095157" y="648877"/>
+                  </a:lnTo>
+                  <a:lnTo>
+                    <a:pt x="3165502" y="656784"/>
+                  </a:lnTo>
+                  <a:lnTo>
+                    <a:pt x="3235846" y="664492"/>
+                  </a:lnTo>
+                  <a:lnTo>
+                    <a:pt x="3306191" y="666538"/>
+                  </a:lnTo>
+                  <a:lnTo>
+                    <a:pt x="3376535" y="668436"/>
+                  </a:lnTo>
+                  <a:lnTo>
+                    <a:pt x="3446880" y="670322"/>
+                  </a:lnTo>
+                  <a:lnTo>
+                    <a:pt x="3517224" y="672196"/>
+                  </a:lnTo>
+                  <a:lnTo>
+                    <a:pt x="3587569" y="674059"/>
+                  </a:lnTo>
+                  <a:lnTo>
+                    <a:pt x="3657913" y="675909"/>
+                  </a:lnTo>
+                  <a:lnTo>
+                    <a:pt x="3728257" y="677747"/>
+                  </a:lnTo>
+                  <a:lnTo>
+                    <a:pt x="3798602" y="679574"/>
+                  </a:lnTo>
+                  <a:lnTo>
+                    <a:pt x="3868946" y="681389"/>
+                  </a:lnTo>
+                  <a:lnTo>
+                    <a:pt x="3939291" y="683192"/>
+                  </a:lnTo>
+                  <a:lnTo>
+                    <a:pt x="4009635" y="684984"/>
+                  </a:lnTo>
+                  <a:lnTo>
+                    <a:pt x="4079980" y="686765"/>
+                  </a:lnTo>
+                  <a:lnTo>
+                    <a:pt x="4150324" y="688534"/>
+                  </a:lnTo>
+                  <a:lnTo>
+                    <a:pt x="4220669" y="690292"/>
+                  </a:lnTo>
+                  <a:lnTo>
+                    <a:pt x="4291013" y="692039"/>
+                  </a:lnTo>
+                  <a:lnTo>
+                    <a:pt x="4361358" y="693774"/>
+                  </a:lnTo>
+                  <a:lnTo>
+                    <a:pt x="4431702" y="695499"/>
+                  </a:lnTo>
+                  <a:lnTo>
+                    <a:pt x="4502047" y="697212"/>
+                  </a:lnTo>
+                  <a:lnTo>
+                    <a:pt x="4572391" y="698914"/>
+                  </a:lnTo>
+                  <a:lnTo>
+                    <a:pt x="4642736" y="700606"/>
+                  </a:lnTo>
+                  <a:lnTo>
+                    <a:pt x="4713080" y="702287"/>
+                  </a:lnTo>
+                  <a:lnTo>
+                    <a:pt x="4783425" y="703957"/>
+                  </a:lnTo>
+                  <a:lnTo>
+                    <a:pt x="4853769" y="705616"/>
+                  </a:lnTo>
+                  <a:lnTo>
+                    <a:pt x="4924114" y="707265"/>
+                  </a:lnTo>
+                  <a:lnTo>
+                    <a:pt x="4994458" y="708904"/>
+                  </a:lnTo>
+                  <a:lnTo>
+                    <a:pt x="5064803" y="710532"/>
+                  </a:lnTo>
+                  <a:lnTo>
+                    <a:pt x="5135147" y="712149"/>
+                  </a:lnTo>
+                  <a:lnTo>
+                    <a:pt x="5205492" y="713756"/>
+                  </a:lnTo>
+                  <a:lnTo>
+                    <a:pt x="5275836" y="715353"/>
+                  </a:lnTo>
+                  <a:lnTo>
+                    <a:pt x="5346181" y="716940"/>
+                  </a:lnTo>
+                  <a:lnTo>
+                    <a:pt x="5416525" y="718517"/>
+                  </a:lnTo>
+                  <a:lnTo>
+                    <a:pt x="5486870" y="720083"/>
+                  </a:lnTo>
+                  <a:lnTo>
+                    <a:pt x="5557214" y="721640"/>
+                  </a:lnTo>
+                  <a:lnTo>
+                    <a:pt x="5627559" y="723186"/>
+                  </a:lnTo>
+                  <a:lnTo>
+                    <a:pt x="5697903" y="724723"/>
+                  </a:lnTo>
+                  <a:lnTo>
+                    <a:pt x="5768248" y="726250"/>
+                  </a:lnTo>
+                  <a:lnTo>
+                    <a:pt x="5838592" y="727767"/>
+                  </a:lnTo>
+                  <a:lnTo>
+                    <a:pt x="5908937" y="729275"/>
+                  </a:lnTo>
+                  <a:lnTo>
+                    <a:pt x="5979281" y="730772"/>
+                  </a:lnTo>
+                  <a:lnTo>
+                    <a:pt x="6049626" y="732261"/>
+                  </a:lnTo>
+                  <a:lnTo>
+                    <a:pt x="6119970" y="733740"/>
+                  </a:lnTo>
+                  <a:lnTo>
+                    <a:pt x="6190315" y="735209"/>
+                  </a:lnTo>
+                  <a:lnTo>
+                    <a:pt x="6260659" y="736669"/>
+                  </a:lnTo>
+                  <a:lnTo>
+                    <a:pt x="6331004" y="738120"/>
+                  </a:lnTo>
+                  <a:lnTo>
+                    <a:pt x="6401348" y="739561"/>
+                  </a:lnTo>
+                  <a:lnTo>
+                    <a:pt x="6471693" y="740993"/>
+                  </a:lnTo>
+                  <a:lnTo>
+                    <a:pt x="6542037" y="742417"/>
+                  </a:lnTo>
+                  <a:lnTo>
+                    <a:pt x="6612382" y="743831"/>
+                  </a:lnTo>
+                  <a:lnTo>
+                    <a:pt x="6682726" y="745236"/>
+                  </a:lnTo>
+                  <a:lnTo>
+                    <a:pt x="6753071" y="746632"/>
+                  </a:lnTo>
+                  <a:lnTo>
+                    <a:pt x="6823415" y="748019"/>
+                  </a:lnTo>
+                  <a:lnTo>
+                    <a:pt x="6893760" y="749397"/>
+                  </a:lnTo>
+                  <a:lnTo>
+                    <a:pt x="6964104" y="750767"/>
+                  </a:lnTo>
+                  <a:lnTo>
+                    <a:pt x="6964104" y="886113"/>
+                  </a:lnTo>
+                  <a:lnTo>
+                    <a:pt x="6893760" y="884108"/>
+                  </a:lnTo>
+                  <a:lnTo>
+                    <a:pt x="6823415" y="882052"/>
+                  </a:lnTo>
+                  <a:lnTo>
+                    <a:pt x="6753071" y="879943"/>
+                  </a:lnTo>
+                  <a:lnTo>
+                    <a:pt x="6682726" y="877779"/>
+                  </a:lnTo>
+                  <a:lnTo>
+                    <a:pt x="6612382" y="875560"/>
+                  </a:lnTo>
+                  <a:lnTo>
+                    <a:pt x="6542037" y="873284"/>
+                  </a:lnTo>
+                  <a:lnTo>
+                    <a:pt x="6471693" y="870949"/>
+                  </a:lnTo>
+                  <a:lnTo>
+                    <a:pt x="6401348" y="868554"/>
+                  </a:lnTo>
+                  <a:lnTo>
+                    <a:pt x="6331004" y="866097"/>
+                  </a:lnTo>
+                  <a:lnTo>
+                    <a:pt x="6260659" y="863577"/>
+                  </a:lnTo>
+                  <a:lnTo>
+                    <a:pt x="6190315" y="860992"/>
+                  </a:lnTo>
+                  <a:lnTo>
+                    <a:pt x="6119970" y="858341"/>
+                  </a:lnTo>
+                  <a:lnTo>
+                    <a:pt x="6049626" y="855621"/>
+                  </a:lnTo>
+                  <a:lnTo>
+                    <a:pt x="5979281" y="852832"/>
+                  </a:lnTo>
+                  <a:lnTo>
+                    <a:pt x="5908937" y="849970"/>
+                  </a:lnTo>
+                  <a:lnTo>
+                    <a:pt x="5838592" y="847035"/>
+                  </a:lnTo>
+                  <a:lnTo>
+                    <a:pt x="5768248" y="844025"/>
+                  </a:lnTo>
+                  <a:lnTo>
+                    <a:pt x="5697903" y="840937"/>
+                  </a:lnTo>
+                  <a:lnTo>
+                    <a:pt x="5627559" y="837769"/>
+                  </a:lnTo>
+                  <a:lnTo>
+                    <a:pt x="5557214" y="834520"/>
+                  </a:lnTo>
+                  <a:lnTo>
+                    <a:pt x="5486870" y="831188"/>
+                  </a:lnTo>
+                  <a:lnTo>
+                    <a:pt x="5416525" y="827769"/>
+                  </a:lnTo>
+                  <a:lnTo>
+                    <a:pt x="5346181" y="824263"/>
+                  </a:lnTo>
+                  <a:lnTo>
+                    <a:pt x="5275836" y="820666"/>
+                  </a:lnTo>
+                  <a:lnTo>
+                    <a:pt x="5205492" y="816977"/>
+                  </a:lnTo>
+                  <a:lnTo>
+                    <a:pt x="5135147" y="813193"/>
+                  </a:lnTo>
+                  <a:lnTo>
+                    <a:pt x="5064803" y="809311"/>
+                  </a:lnTo>
+                  <a:lnTo>
+                    <a:pt x="4994458" y="805330"/>
+                  </a:lnTo>
+                  <a:lnTo>
+                    <a:pt x="4924114" y="801246"/>
+                  </a:lnTo>
+                  <a:lnTo>
+                    <a:pt x="4853769" y="797057"/>
+                  </a:lnTo>
+                  <a:lnTo>
+                    <a:pt x="4783425" y="792760"/>
+                  </a:lnTo>
+                  <a:lnTo>
+                    <a:pt x="4713080" y="788353"/>
+                  </a:lnTo>
+                  <a:lnTo>
+                    <a:pt x="4642736" y="783832"/>
+                  </a:lnTo>
+                  <a:lnTo>
+                    <a:pt x="4572391" y="779194"/>
+                  </a:lnTo>
+                  <a:lnTo>
+                    <a:pt x="4502047" y="774438"/>
+                  </a:lnTo>
+                  <a:lnTo>
+                    <a:pt x="4431702" y="769559"/>
+                  </a:lnTo>
+                  <a:lnTo>
+                    <a:pt x="4361358" y="764554"/>
+                  </a:lnTo>
+                  <a:lnTo>
+                    <a:pt x="4291013" y="759421"/>
+                  </a:lnTo>
+                  <a:lnTo>
+                    <a:pt x="4220669" y="754155"/>
+                  </a:lnTo>
+                  <a:lnTo>
+                    <a:pt x="4150324" y="748754"/>
+                  </a:lnTo>
+                  <a:lnTo>
+                    <a:pt x="4079980" y="743214"/>
+                  </a:lnTo>
+                  <a:lnTo>
+                    <a:pt x="4009635" y="737532"/>
+                  </a:lnTo>
+                  <a:lnTo>
+                    <a:pt x="3939291" y="731703"/>
+                  </a:lnTo>
+                  <a:lnTo>
+                    <a:pt x="3868946" y="725724"/>
+                  </a:lnTo>
+                  <a:lnTo>
+                    <a:pt x="3798602" y="719591"/>
+                  </a:lnTo>
+                  <a:lnTo>
+                    <a:pt x="3728257" y="713301"/>
+                  </a:lnTo>
+                  <a:lnTo>
+                    <a:pt x="3657913" y="706848"/>
+                  </a:lnTo>
+                  <a:lnTo>
+                    <a:pt x="3587569" y="700230"/>
+                  </a:lnTo>
+                  <a:lnTo>
+                    <a:pt x="3517224" y="693441"/>
+                  </a:lnTo>
+                  <a:lnTo>
+                    <a:pt x="3446880" y="686477"/>
+                  </a:lnTo>
+                  <a:lnTo>
+                    <a:pt x="3376535" y="679334"/>
+                  </a:lnTo>
+                  <a:lnTo>
+                    <a:pt x="3306191" y="672008"/>
+                  </a:lnTo>
+                  <a:lnTo>
+                    <a:pt x="3235846" y="664628"/>
+                  </a:lnTo>
+                  <a:lnTo>
+                    <a:pt x="3165502" y="662705"/>
+                  </a:lnTo>
+                  <a:lnTo>
+                    <a:pt x="3095157" y="660770"/>
+                  </a:lnTo>
+                  <a:lnTo>
+                    <a:pt x="3024813" y="658822"/>
+                  </a:lnTo>
+                  <a:lnTo>
+                    <a:pt x="2954468" y="656862"/>
+                  </a:lnTo>
+                  <a:lnTo>
+                    <a:pt x="2884124" y="654890"/>
+                  </a:lnTo>
+                  <a:lnTo>
+                    <a:pt x="2813779" y="652905"/>
+                  </a:lnTo>
+                  <a:lnTo>
+                    <a:pt x="2743435" y="650907"/>
+                  </a:lnTo>
+                  <a:lnTo>
+                    <a:pt x="2673090" y="648896"/>
+                  </a:lnTo>
+                  <a:lnTo>
+                    <a:pt x="2602746" y="646872"/>
+                  </a:lnTo>
+                  <a:lnTo>
+                    <a:pt x="2532401" y="644835"/>
+                  </a:lnTo>
+                  <a:lnTo>
+                    <a:pt x="2462057" y="642786"/>
+                  </a:lnTo>
+                  <a:lnTo>
+                    <a:pt x="2391712" y="640723"/>
+                  </a:lnTo>
+                  <a:lnTo>
+                    <a:pt x="2321368" y="638646"/>
+                  </a:lnTo>
+                  <a:lnTo>
+                    <a:pt x="2251023" y="636557"/>
+                  </a:lnTo>
+                  <a:lnTo>
+                    <a:pt x="2180679" y="634454"/>
+                  </a:lnTo>
+                  <a:lnTo>
+                    <a:pt x="2110334" y="632337"/>
+                  </a:lnTo>
+                  <a:lnTo>
+                    <a:pt x="2039990" y="630207"/>
+                  </a:lnTo>
+                  <a:lnTo>
+                    <a:pt x="1969645" y="628064"/>
+                  </a:lnTo>
+                  <a:lnTo>
+                    <a:pt x="1899301" y="625906"/>
+                  </a:lnTo>
+                  <a:lnTo>
+                    <a:pt x="1828956" y="623735"/>
+                  </a:lnTo>
+                  <a:lnTo>
+                    <a:pt x="1758612" y="621549"/>
+                  </a:lnTo>
+                  <a:lnTo>
+                    <a:pt x="1688267" y="619350"/>
+                  </a:lnTo>
+                  <a:lnTo>
+                    <a:pt x="1617923" y="617137"/>
+                  </a:lnTo>
+                  <a:lnTo>
+                    <a:pt x="1547578" y="614909"/>
+                  </a:lnTo>
+                  <a:lnTo>
+                    <a:pt x="1477234" y="612667"/>
+                  </a:lnTo>
+                  <a:lnTo>
+                    <a:pt x="1406889" y="610410"/>
+                  </a:lnTo>
+                  <a:lnTo>
+                    <a:pt x="1336545" y="608140"/>
+                  </a:lnTo>
+                  <a:lnTo>
+                    <a:pt x="1266200" y="605854"/>
+                  </a:lnTo>
+                  <a:lnTo>
+                    <a:pt x="1195856" y="603554"/>
+                  </a:lnTo>
+                  <a:lnTo>
+                    <a:pt x="1125511" y="601239"/>
+                  </a:lnTo>
+                  <a:lnTo>
+                    <a:pt x="1055167" y="598909"/>
+                  </a:lnTo>
+                  <a:lnTo>
+                    <a:pt x="984822" y="596564"/>
+                  </a:lnTo>
+                  <a:lnTo>
+                    <a:pt x="914478" y="594205"/>
+                  </a:lnTo>
+                  <a:lnTo>
+                    <a:pt x="844133" y="591830"/>
+                  </a:lnTo>
+                  <a:lnTo>
+                    <a:pt x="773789" y="589439"/>
+                  </a:lnTo>
+                  <a:lnTo>
+                    <a:pt x="703444" y="587034"/>
+                  </a:lnTo>
+                  <a:lnTo>
+                    <a:pt x="633100" y="584613"/>
+                  </a:lnTo>
+                  <a:lnTo>
+                    <a:pt x="562755" y="582176"/>
+                  </a:lnTo>
+                  <a:lnTo>
+                    <a:pt x="492411" y="579724"/>
+                  </a:lnTo>
+                  <a:lnTo>
+                    <a:pt x="422066" y="577256"/>
+                  </a:lnTo>
+                  <a:lnTo>
+                    <a:pt x="351722" y="574772"/>
+                  </a:lnTo>
+                  <a:lnTo>
+                    <a:pt x="281377" y="572273"/>
+                  </a:lnTo>
+                  <a:lnTo>
+                    <a:pt x="211033" y="569757"/>
+                  </a:lnTo>
+                  <a:lnTo>
+                    <a:pt x="140688" y="567225"/>
+                  </a:lnTo>
+                  <a:lnTo>
+                    <a:pt x="70344" y="564677"/>
+                  </a:lnTo>
+                  <a:lnTo>
+                    <a:pt x="0" y="562112"/>
+                  </a:lnTo>
+                  <a:close/>
+                </a:path>
+              </a:pathLst>
+            </a:custGeom>
+            <a:solidFill>
+              <a:srgbClr val="FF8C00">
+                <a:alpha val="20000"/>
+              </a:srgbClr>
+            </a:solidFill>
+          </p:spPr>
+          <p:txBody>
+            <a:bodyPr/>
+            <a:lstStyle/>
+            <a:p/>
+          </p:txBody>
+        </p:sp>
+        <p:sp>
+          <p:nvSpPr>
+            <p:cNvPr id="68" name="pl68"/>
+            <p:cNvSpPr/>
+            <p:nvPr/>
+          </p:nvSpPr>
+          <p:spPr>
+            <a:xfrm>
+              <a:off x="1235312" y="4629679"/>
+              <a:ext cx="6964104" cy="750767"/>
+            </a:xfrm>
+            <a:custGeom>
+              <a:avLst/>
+              <a:pathLst>
+                <a:path w="6964104" h="750767">
+                  <a:moveTo>
+                    <a:pt x="0" y="0"/>
+                  </a:moveTo>
+                  <a:lnTo>
+                    <a:pt x="70344" y="24188"/>
+                  </a:lnTo>
+                  <a:lnTo>
+                    <a:pt x="140688" y="47769"/>
+                  </a:lnTo>
+                  <a:lnTo>
+                    <a:pt x="211033" y="70759"/>
+                  </a:lnTo>
+                  <a:lnTo>
+                    <a:pt x="281377" y="93172"/>
+                  </a:lnTo>
+                  <a:lnTo>
+                    <a:pt x="351722" y="115023"/>
+                  </a:lnTo>
+                  <a:lnTo>
+                    <a:pt x="422066" y="136325"/>
+                  </a:lnTo>
+                  <a:lnTo>
+                    <a:pt x="492411" y="157093"/>
+                  </a:lnTo>
+                  <a:lnTo>
+                    <a:pt x="562755" y="177339"/>
+                  </a:lnTo>
+                  <a:lnTo>
+                    <a:pt x="633100" y="197078"/>
+                  </a:lnTo>
+                  <a:lnTo>
+                    <a:pt x="703444" y="216321"/>
+                  </a:lnTo>
+                  <a:lnTo>
+                    <a:pt x="773789" y="235082"/>
+                  </a:lnTo>
+                  <a:lnTo>
+                    <a:pt x="844133" y="253372"/>
+                  </a:lnTo>
+                  <a:lnTo>
+                    <a:pt x="914478" y="271203"/>
+                  </a:lnTo>
+                  <a:lnTo>
+                    <a:pt x="984822" y="288586"/>
+                  </a:lnTo>
+                  <a:lnTo>
+                    <a:pt x="1055167" y="305533"/>
+                  </a:lnTo>
+                  <a:lnTo>
+                    <a:pt x="1125511" y="322056"/>
+                  </a:lnTo>
+                  <a:lnTo>
+                    <a:pt x="1195856" y="338163"/>
+                  </a:lnTo>
+                  <a:lnTo>
+                    <a:pt x="1266200" y="353866"/>
+                  </a:lnTo>
+                  <a:lnTo>
+                    <a:pt x="1336545" y="369176"/>
+                  </a:lnTo>
+                  <a:lnTo>
+                    <a:pt x="1406889" y="384101"/>
+                  </a:lnTo>
+                  <a:lnTo>
+                    <a:pt x="1477234" y="398652"/>
+                  </a:lnTo>
+                  <a:lnTo>
+                    <a:pt x="1547578" y="412837"/>
+                  </a:lnTo>
+                  <a:lnTo>
+                    <a:pt x="1617923" y="426667"/>
+                  </a:lnTo>
+                  <a:lnTo>
+                    <a:pt x="1688267" y="440150"/>
+                  </a:lnTo>
+                  <a:lnTo>
+                    <a:pt x="1758612" y="453294"/>
+                  </a:lnTo>
+                  <a:lnTo>
+                    <a:pt x="1828956" y="466109"/>
+                  </a:lnTo>
+                  <a:lnTo>
+                    <a:pt x="1899301" y="478602"/>
+                  </a:lnTo>
+                  <a:lnTo>
+                    <a:pt x="1969645" y="490781"/>
+                  </a:lnTo>
+                  <a:lnTo>
+                    <a:pt x="2039990" y="502655"/>
+                  </a:lnTo>
+                  <a:lnTo>
+                    <a:pt x="2110334" y="514231"/>
+                  </a:lnTo>
+                  <a:lnTo>
+                    <a:pt x="2180679" y="525517"/>
+                  </a:lnTo>
+                  <a:lnTo>
+                    <a:pt x="2251023" y="536519"/>
+                  </a:lnTo>
+                  <a:lnTo>
+                    <a:pt x="2321368" y="547245"/>
+                  </a:lnTo>
+                  <a:lnTo>
+                    <a:pt x="2391712" y="557702"/>
+                  </a:lnTo>
+                  <a:lnTo>
+                    <a:pt x="2462057" y="567897"/>
+                  </a:lnTo>
+                  <a:lnTo>
+                    <a:pt x="2532401" y="577836"/>
+                  </a:lnTo>
+                  <a:lnTo>
+                    <a:pt x="2602746" y="587526"/>
+                  </a:lnTo>
+                  <a:lnTo>
+                    <a:pt x="2673090" y="596972"/>
+                  </a:lnTo>
+                  <a:lnTo>
+                    <a:pt x="2743435" y="606182"/>
+                  </a:lnTo>
+                  <a:lnTo>
+                    <a:pt x="2813779" y="615160"/>
+                  </a:lnTo>
+                  <a:lnTo>
+                    <a:pt x="2884124" y="623913"/>
+                  </a:lnTo>
+                  <a:lnTo>
+                    <a:pt x="2954468" y="632447"/>
+                  </a:lnTo>
+                  <a:lnTo>
+                    <a:pt x="3024813" y="640766"/>
+                  </a:lnTo>
+                  <a:lnTo>
+                    <a:pt x="3095157" y="648877"/>
+                  </a:lnTo>
+                  <a:lnTo>
+                    <a:pt x="3165502" y="656784"/>
+                  </a:lnTo>
+                  <a:lnTo>
+                    <a:pt x="3235846" y="664492"/>
+                  </a:lnTo>
+                  <a:lnTo>
+                    <a:pt x="3306191" y="666538"/>
+                  </a:lnTo>
+                  <a:lnTo>
+                    <a:pt x="3376535" y="668436"/>
+                  </a:lnTo>
+                  <a:lnTo>
+                    <a:pt x="3446880" y="670322"/>
+                  </a:lnTo>
+                  <a:lnTo>
+                    <a:pt x="3517224" y="672196"/>
+                  </a:lnTo>
+                  <a:lnTo>
+                    <a:pt x="3587569" y="674059"/>
+                  </a:lnTo>
+                  <a:lnTo>
+                    <a:pt x="3657913" y="675909"/>
+                  </a:lnTo>
+                  <a:lnTo>
+                    <a:pt x="3728257" y="677747"/>
+                  </a:lnTo>
+                  <a:lnTo>
+                    <a:pt x="3798602" y="679574"/>
+                  </a:lnTo>
+                  <a:lnTo>
+                    <a:pt x="3868946" y="681389"/>
+                  </a:lnTo>
+                  <a:lnTo>
+                    <a:pt x="3939291" y="683192"/>
+                  </a:lnTo>
+                  <a:lnTo>
+                    <a:pt x="4009635" y="684984"/>
+                  </a:lnTo>
+                  <a:lnTo>
+                    <a:pt x="4079980" y="686765"/>
+                  </a:lnTo>
+                  <a:lnTo>
+                    <a:pt x="4150324" y="688534"/>
+                  </a:lnTo>
+                  <a:lnTo>
+                    <a:pt x="4220669" y="690292"/>
+                  </a:lnTo>
+                  <a:lnTo>
+                    <a:pt x="4291013" y="692039"/>
+                  </a:lnTo>
+                  <a:lnTo>
+                    <a:pt x="4361358" y="693774"/>
+                  </a:lnTo>
+                  <a:lnTo>
+                    <a:pt x="4431702" y="695499"/>
+                  </a:lnTo>
+                  <a:lnTo>
+                    <a:pt x="4502047" y="697212"/>
+                  </a:lnTo>
+                  <a:lnTo>
+                    <a:pt x="4572391" y="698914"/>
+                  </a:lnTo>
+                  <a:lnTo>
+                    <a:pt x="4642736" y="700606"/>
+                  </a:lnTo>
+                  <a:lnTo>
+                    <a:pt x="4713080" y="702287"/>
+                  </a:lnTo>
+                  <a:lnTo>
+                    <a:pt x="4783425" y="703957"/>
+                  </a:lnTo>
+                  <a:lnTo>
+                    <a:pt x="4853769" y="705616"/>
+                  </a:lnTo>
+                  <a:lnTo>
+                    <a:pt x="4924114" y="707265"/>
+                  </a:lnTo>
+                  <a:lnTo>
+                    <a:pt x="4994458" y="708904"/>
+                  </a:lnTo>
+                  <a:lnTo>
+                    <a:pt x="5064803" y="710532"/>
+                  </a:lnTo>
+                  <a:lnTo>
+                    <a:pt x="5135147" y="712149"/>
+                  </a:lnTo>
+                  <a:lnTo>
+                    <a:pt x="5205492" y="713756"/>
+                  </a:lnTo>
+                  <a:lnTo>
+                    <a:pt x="5275836" y="715353"/>
+                  </a:lnTo>
+                  <a:lnTo>
+                    <a:pt x="5346181" y="716940"/>
+                  </a:lnTo>
+                  <a:lnTo>
+                    <a:pt x="5416525" y="718517"/>
+                  </a:lnTo>
+                  <a:lnTo>
+                    <a:pt x="5486870" y="720083"/>
+                  </a:lnTo>
+                  <a:lnTo>
+                    <a:pt x="5557214" y="721640"/>
+                  </a:lnTo>
+                  <a:lnTo>
+                    <a:pt x="5627559" y="723186"/>
+                  </a:lnTo>
+                  <a:lnTo>
+                    <a:pt x="5697903" y="724723"/>
+                  </a:lnTo>
+                  <a:lnTo>
+                    <a:pt x="5768248" y="726250"/>
+                  </a:lnTo>
+                  <a:lnTo>
+                    <a:pt x="5838592" y="727767"/>
+                  </a:lnTo>
+                  <a:lnTo>
+                    <a:pt x="5908937" y="729275"/>
+                  </a:lnTo>
+                  <a:lnTo>
+                    <a:pt x="5979281" y="730772"/>
+                  </a:lnTo>
+                  <a:lnTo>
+                    <a:pt x="6049626" y="732261"/>
+                  </a:lnTo>
+                  <a:lnTo>
+                    <a:pt x="6119970" y="733740"/>
+                  </a:lnTo>
+                  <a:lnTo>
+                    <a:pt x="6190315" y="735209"/>
+                  </a:lnTo>
+                  <a:lnTo>
+                    <a:pt x="6260659" y="736669"/>
+                  </a:lnTo>
+                  <a:lnTo>
+                    <a:pt x="6331004" y="738120"/>
+                  </a:lnTo>
+                  <a:lnTo>
+                    <a:pt x="6401348" y="739561"/>
+                  </a:lnTo>
+                  <a:lnTo>
+                    <a:pt x="6471693" y="740993"/>
+                  </a:lnTo>
+                  <a:lnTo>
+                    <a:pt x="6542037" y="742417"/>
+                  </a:lnTo>
+                  <a:lnTo>
+                    <a:pt x="6612382" y="743831"/>
+                  </a:lnTo>
+                  <a:lnTo>
+                    <a:pt x="6682726" y="745236"/>
+                  </a:lnTo>
+                  <a:lnTo>
+                    <a:pt x="6753071" y="746632"/>
+                  </a:lnTo>
+                  <a:lnTo>
+                    <a:pt x="6823415" y="748019"/>
+                  </a:lnTo>
+                  <a:lnTo>
+                    <a:pt x="6893760" y="749397"/>
+                  </a:lnTo>
+                  <a:lnTo>
+                    <a:pt x="6964104" y="750767"/>
+                  </a:lnTo>
+                </a:path>
+              </a:pathLst>
+            </a:custGeom>
+          </p:spPr>
+          <p:txBody>
+            <a:bodyPr/>
+            <a:lstStyle/>
+            <a:p/>
+          </p:txBody>
+        </p:sp>
+        <p:sp>
+          <p:nvSpPr>
+            <p:cNvPr id="69" name="pl69"/>
+            <p:cNvSpPr/>
+            <p:nvPr/>
+          </p:nvSpPr>
+          <p:spPr>
+            <a:xfrm>
+              <a:off x="1235312" y="5191791"/>
+              <a:ext cx="6964104" cy="324001"/>
+            </a:xfrm>
+            <a:custGeom>
+              <a:avLst/>
+              <a:pathLst>
+                <a:path w="6964104" h="324001">
+                  <a:moveTo>
+                    <a:pt x="6964104" y="324001"/>
+                  </a:moveTo>
+                  <a:lnTo>
+                    <a:pt x="6893760" y="321996"/>
+                  </a:lnTo>
+                  <a:lnTo>
+                    <a:pt x="6823415" y="319940"/>
+                  </a:lnTo>
+                  <a:lnTo>
+                    <a:pt x="6753071" y="317830"/>
+                  </a:lnTo>
+                  <a:lnTo>
+                    <a:pt x="6682726" y="315667"/>
+                  </a:lnTo>
+                  <a:lnTo>
+                    <a:pt x="6612382" y="313448"/>
+                  </a:lnTo>
+                  <a:lnTo>
+                    <a:pt x="6542037" y="311171"/>
+                  </a:lnTo>
+                  <a:lnTo>
+                    <a:pt x="6471693" y="308836"/>
+                  </a:lnTo>
+                  <a:lnTo>
+                    <a:pt x="6401348" y="306441"/>
+                  </a:lnTo>
+                  <a:lnTo>
+                    <a:pt x="6331004" y="303984"/>
+                  </a:lnTo>
+                  <a:lnTo>
+                    <a:pt x="6260659" y="301464"/>
+                  </a:lnTo>
+                  <a:lnTo>
+                    <a:pt x="6190315" y="298880"/>
+                  </a:lnTo>
+                  <a:lnTo>
+                    <a:pt x="6119970" y="296228"/>
+                  </a:lnTo>
+                  <a:lnTo>
+                    <a:pt x="6049626" y="293509"/>
+                  </a:lnTo>
+                  <a:lnTo>
+                    <a:pt x="5979281" y="290719"/>
+                  </a:lnTo>
+                  <a:lnTo>
+                    <a:pt x="5908937" y="287858"/>
+                  </a:lnTo>
+                  <a:lnTo>
+                    <a:pt x="5838592" y="284923"/>
+                  </a:lnTo>
+                  <a:lnTo>
+                    <a:pt x="5768248" y="281912"/>
+                  </a:lnTo>
+                  <a:lnTo>
+                    <a:pt x="5697903" y="278824"/>
+                  </a:lnTo>
+                  <a:lnTo>
+                    <a:pt x="5627559" y="275657"/>
+                  </a:lnTo>
+                  <a:lnTo>
+                    <a:pt x="5557214" y="272408"/>
+                  </a:lnTo>
+                  <a:lnTo>
+                    <a:pt x="5486870" y="269075"/>
+                  </a:lnTo>
+                  <a:lnTo>
+                    <a:pt x="5416525" y="265657"/>
+                  </a:lnTo>
+                  <a:lnTo>
+                    <a:pt x="5346181" y="262150"/>
+                  </a:lnTo>
+                  <a:lnTo>
+                    <a:pt x="5275836" y="258554"/>
+                  </a:lnTo>
+                  <a:lnTo>
+                    <a:pt x="5205492" y="254865"/>
+                  </a:lnTo>
+                  <a:lnTo>
+                    <a:pt x="5135147" y="251080"/>
+                  </a:lnTo>
+                  <a:lnTo>
+                    <a:pt x="5064803" y="247199"/>
+                  </a:lnTo>
+                  <a:lnTo>
+                    <a:pt x="4994458" y="243217"/>
+                  </a:lnTo>
+                  <a:lnTo>
+                    <a:pt x="4924114" y="239133"/>
+                  </a:lnTo>
+                  <a:lnTo>
+                    <a:pt x="4853769" y="234944"/>
+                  </a:lnTo>
+                  <a:lnTo>
+                    <a:pt x="4783425" y="230648"/>
+                  </a:lnTo>
+                  <a:lnTo>
+                    <a:pt x="4713080" y="226240"/>
+                  </a:lnTo>
+                  <a:lnTo>
+                    <a:pt x="4642736" y="221719"/>
+                  </a:lnTo>
+                  <a:lnTo>
+                    <a:pt x="4572391" y="217082"/>
+                  </a:lnTo>
+                  <a:lnTo>
+                    <a:pt x="4502047" y="212326"/>
+                  </a:lnTo>
+                  <a:lnTo>
+                    <a:pt x="4431702" y="207447"/>
+                  </a:lnTo>
+                  <a:lnTo>
+                    <a:pt x="4361358" y="202442"/>
+                  </a:lnTo>
+                  <a:lnTo>
+                    <a:pt x="4291013" y="197309"/>
+                  </a:lnTo>
+                  <a:lnTo>
+                    <a:pt x="4220669" y="192043"/>
+                  </a:lnTo>
+                  <a:lnTo>
+                    <a:pt x="4150324" y="186642"/>
+                  </a:lnTo>
+                  <a:lnTo>
+                    <a:pt x="4079980" y="181102"/>
+                  </a:lnTo>
+                  <a:lnTo>
+                    <a:pt x="4009635" y="175419"/>
+                  </a:lnTo>
+                  <a:lnTo>
+                    <a:pt x="3939291" y="169591"/>
+                  </a:lnTo>
+                  <a:lnTo>
+                    <a:pt x="3868946" y="163612"/>
+                  </a:lnTo>
+                  <a:lnTo>
+                    <a:pt x="3798602" y="157479"/>
+                  </a:lnTo>
+                  <a:lnTo>
+                    <a:pt x="3728257" y="151188"/>
+                  </a:lnTo>
+                  <a:lnTo>
+                    <a:pt x="3657913" y="144736"/>
+                  </a:lnTo>
+                  <a:lnTo>
+                    <a:pt x="3587569" y="138117"/>
+                  </a:lnTo>
+                  <a:lnTo>
+                    <a:pt x="3517224" y="131328"/>
+                  </a:lnTo>
+                  <a:lnTo>
+                    <a:pt x="3446880" y="124365"/>
+                  </a:lnTo>
+                  <a:lnTo>
+                    <a:pt x="3376535" y="117222"/>
+                  </a:lnTo>
+                  <a:lnTo>
+                    <a:pt x="3306191" y="109895"/>
+                  </a:lnTo>
+                  <a:lnTo>
+                    <a:pt x="3235846" y="102515"/>
+                  </a:lnTo>
+                  <a:lnTo>
+                    <a:pt x="3165502" y="100592"/>
+                  </a:lnTo>
+                  <a:lnTo>
+                    <a:pt x="3095157" y="98657"/>
+                  </a:lnTo>
+                  <a:lnTo>
+                    <a:pt x="3024813" y="96710"/>
+                  </a:lnTo>
+                  <a:lnTo>
+                    <a:pt x="2954468" y="94750"/>
+                  </a:lnTo>
+                  <a:lnTo>
+                    <a:pt x="2884124" y="92777"/>
+                  </a:lnTo>
+                  <a:lnTo>
+                    <a:pt x="2813779" y="90792"/>
+                  </a:lnTo>
+                  <a:lnTo>
+                    <a:pt x="2743435" y="88794"/>
+                  </a:lnTo>
+                  <a:lnTo>
+                    <a:pt x="2673090" y="86783"/>
+                  </a:lnTo>
+                  <a:lnTo>
+                    <a:pt x="2602746" y="84760"/>
+                  </a:lnTo>
+                  <a:lnTo>
+                    <a:pt x="2532401" y="82723"/>
+                  </a:lnTo>
+                  <a:lnTo>
+                    <a:pt x="2462057" y="80673"/>
+                  </a:lnTo>
+                  <a:lnTo>
+                    <a:pt x="2391712" y="78610"/>
+                  </a:lnTo>
+                  <a:lnTo>
+                    <a:pt x="2321368" y="76534"/>
+                  </a:lnTo>
+                  <a:lnTo>
+                    <a:pt x="2251023" y="74444"/>
+                  </a:lnTo>
+                  <a:lnTo>
+                    <a:pt x="2180679" y="72341"/>
+                  </a:lnTo>
+                  <a:lnTo>
+                    <a:pt x="2110334" y="70225"/>
+                  </a:lnTo>
+                  <a:lnTo>
+                    <a:pt x="2039990" y="68095"/>
+                  </a:lnTo>
+                  <a:lnTo>
+                    <a:pt x="1969645" y="65951"/>
+                  </a:lnTo>
+                  <a:lnTo>
+                    <a:pt x="1899301" y="63794"/>
+                  </a:lnTo>
+                  <a:lnTo>
+                    <a:pt x="1828956" y="61622"/>
+                  </a:lnTo>
+                  <a:lnTo>
+                    <a:pt x="1758612" y="59437"/>
+                  </a:lnTo>
+                  <a:lnTo>
+                    <a:pt x="1688267" y="57238"/>
+                  </a:lnTo>
+                  <a:lnTo>
+                    <a:pt x="1617923" y="55024"/>
+                  </a:lnTo>
+                  <a:lnTo>
+                    <a:pt x="1547578" y="52796"/>
+                  </a:lnTo>
+                  <a:lnTo>
+                    <a:pt x="1477234" y="50554"/>
+                  </a:lnTo>
+                  <a:lnTo>
+                    <a:pt x="1406889" y="48298"/>
+                  </a:lnTo>
+                  <a:lnTo>
+                    <a:pt x="1336545" y="46027"/>
+                  </a:lnTo>
+                  <a:lnTo>
+                    <a:pt x="1266200" y="43742"/>
+                  </a:lnTo>
+                  <a:lnTo>
+                    <a:pt x="1195856" y="41442"/>
+                  </a:lnTo>
+                  <a:lnTo>
+                    <a:pt x="1125511" y="39127"/>
+                  </a:lnTo>
+                  <a:lnTo>
+                    <a:pt x="1055167" y="36797"/>
+                  </a:lnTo>
+                  <a:lnTo>
+                    <a:pt x="984822" y="34452"/>
+                  </a:lnTo>
+                  <a:lnTo>
+                    <a:pt x="914478" y="32092"/>
+                  </a:lnTo>
+                  <a:lnTo>
+                    <a:pt x="844133" y="29717"/>
+                  </a:lnTo>
+                  <a:lnTo>
+                    <a:pt x="773789" y="27327"/>
+                  </a:lnTo>
+                  <a:lnTo>
+                    <a:pt x="703444" y="24921"/>
+                  </a:lnTo>
+                  <a:lnTo>
+                    <a:pt x="633100" y="22500"/>
+                  </a:lnTo>
+                  <a:lnTo>
+                    <a:pt x="562755" y="20064"/>
+                  </a:lnTo>
+                  <a:lnTo>
+                    <a:pt x="492411" y="17612"/>
+                  </a:lnTo>
+                  <a:lnTo>
+                    <a:pt x="422066" y="15144"/>
+                  </a:lnTo>
+                  <a:lnTo>
+                    <a:pt x="351722" y="12660"/>
+                  </a:lnTo>
+                  <a:lnTo>
+                    <a:pt x="281377" y="10160"/>
+                  </a:lnTo>
+                  <a:lnTo>
+                    <a:pt x="211033" y="7644"/>
+                  </a:lnTo>
+                  <a:lnTo>
+                    <a:pt x="140688" y="5112"/>
+                  </a:lnTo>
+                  <a:lnTo>
+                    <a:pt x="70344" y="2564"/>
+                  </a:lnTo>
+                  <a:lnTo>
+                    <a:pt x="0" y="0"/>
+                  </a:lnTo>
+                </a:path>
+              </a:pathLst>
+            </a:custGeom>
+          </p:spPr>
+          <p:txBody>
+            <a:bodyPr/>
+            <a:lstStyle/>
+            <a:p/>
+          </p:txBody>
+        </p:sp>
+        <p:sp>
+          <p:nvSpPr>
+            <p:cNvPr id="70" name="pl70"/>
+            <p:cNvSpPr/>
+            <p:nvPr/>
+          </p:nvSpPr>
+          <p:spPr>
+            <a:xfrm>
+              <a:off x="1235312" y="4971248"/>
+              <a:ext cx="6964104" cy="493558"/>
+            </a:xfrm>
+            <a:custGeom>
+              <a:avLst/>
+              <a:pathLst>
+                <a:path w="6964104" h="493558">
+                  <a:moveTo>
+                    <a:pt x="0" y="0"/>
+                  </a:moveTo>
+                  <a:lnTo>
+                    <a:pt x="70344" y="9822"/>
+                  </a:lnTo>
+                  <a:lnTo>
+                    <a:pt x="140688" y="19490"/>
+                  </a:lnTo>
+                  <a:lnTo>
+                    <a:pt x="211033" y="29005"/>
+                  </a:lnTo>
+                  <a:lnTo>
+                    <a:pt x="281377" y="38370"/>
+                  </a:lnTo>
+                  <a:lnTo>
+                    <a:pt x="351722" y="47587"/>
+                  </a:lnTo>
+                  <a:lnTo>
+                    <a:pt x="422066" y="56658"/>
+                  </a:lnTo>
+                  <a:lnTo>
+                    <a:pt x="492411" y="65587"/>
+                  </a:lnTo>
+                  <a:lnTo>
+                    <a:pt x="562755" y="74374"/>
+                  </a:lnTo>
+                  <a:lnTo>
+                    <a:pt x="633100" y="83023"/>
+                  </a:lnTo>
+                  <a:lnTo>
+                    <a:pt x="703444" y="91536"/>
+                  </a:lnTo>
+                  <a:lnTo>
+                    <a:pt x="773789" y="99914"/>
+                  </a:lnTo>
+                  <a:lnTo>
+                    <a:pt x="844133" y="108160"/>
+                  </a:lnTo>
+                  <a:lnTo>
+                    <a:pt x="914478" y="116275"/>
+                  </a:lnTo>
+                  <a:lnTo>
+                    <a:pt x="984822" y="124263"/>
+                  </a:lnTo>
+                  <a:lnTo>
+                    <a:pt x="1055167" y="132125"/>
+                  </a:lnTo>
+                  <a:lnTo>
+                    <a:pt x="1125511" y="139862"/>
+                  </a:lnTo>
+                  <a:lnTo>
+                    <a:pt x="1195856" y="147478"/>
+                  </a:lnTo>
+                  <a:lnTo>
+                    <a:pt x="1266200" y="154973"/>
+                  </a:lnTo>
+                  <a:lnTo>
+                    <a:pt x="1336545" y="162350"/>
+                  </a:lnTo>
+                  <a:lnTo>
+                    <a:pt x="1406889" y="169611"/>
+                  </a:lnTo>
+                  <a:lnTo>
+                    <a:pt x="1477234" y="176757"/>
+                  </a:lnTo>
+                  <a:lnTo>
+                    <a:pt x="1547578" y="183790"/>
+                  </a:lnTo>
+                  <a:lnTo>
+                    <a:pt x="1617923" y="190712"/>
+                  </a:lnTo>
+                  <a:lnTo>
+                    <a:pt x="1688267" y="197525"/>
+                  </a:lnTo>
+                  <a:lnTo>
+                    <a:pt x="1758612" y="204231"/>
+                  </a:lnTo>
+                  <a:lnTo>
+                    <a:pt x="1828956" y="210830"/>
+                  </a:lnTo>
+                  <a:lnTo>
+                    <a:pt x="1899301" y="217326"/>
+                  </a:lnTo>
+                  <a:lnTo>
+                    <a:pt x="1969645" y="223719"/>
+                  </a:lnTo>
+                  <a:lnTo>
+                    <a:pt x="2039990" y="230011"/>
+                  </a:lnTo>
+                  <a:lnTo>
+                    <a:pt x="2110334" y="236204"/>
+                  </a:lnTo>
+                  <a:lnTo>
+                    <a:pt x="2180679" y="242299"/>
+                  </a:lnTo>
+                  <a:lnTo>
+                    <a:pt x="2251023" y="248298"/>
+                  </a:lnTo>
+                  <a:lnTo>
+                    <a:pt x="2321368" y="254202"/>
+                  </a:lnTo>
+                  <a:lnTo>
+                    <a:pt x="2391712" y="260013"/>
+                  </a:lnTo>
+                  <a:lnTo>
+                    <a:pt x="2462057" y="265732"/>
+                  </a:lnTo>
+                  <a:lnTo>
+                    <a:pt x="2532401" y="271362"/>
+                  </a:lnTo>
+                  <a:lnTo>
+                    <a:pt x="2602746" y="276902"/>
+                  </a:lnTo>
+                  <a:lnTo>
+                    <a:pt x="2673090" y="282355"/>
+                  </a:lnTo>
+                  <a:lnTo>
+                    <a:pt x="2743435" y="287722"/>
+                  </a:lnTo>
+                  <a:lnTo>
+                    <a:pt x="2813779" y="293004"/>
+                  </a:lnTo>
+                  <a:lnTo>
+                    <a:pt x="2884124" y="298202"/>
+                  </a:lnTo>
+                  <a:lnTo>
+                    <a:pt x="2954468" y="303319"/>
+                  </a:lnTo>
+                  <a:lnTo>
+                    <a:pt x="3024813" y="308355"/>
+                  </a:lnTo>
+                  <a:lnTo>
+                    <a:pt x="3095157" y="313312"/>
+                  </a:lnTo>
+                  <a:lnTo>
+                    <a:pt x="3165502" y="318190"/>
+                  </a:lnTo>
+                  <a:lnTo>
+                    <a:pt x="3235846" y="322991"/>
+                  </a:lnTo>
+                  <a:lnTo>
+                    <a:pt x="3306191" y="327717"/>
+                  </a:lnTo>
+                  <a:lnTo>
+                    <a:pt x="3376535" y="332368"/>
+                  </a:lnTo>
+                  <a:lnTo>
+                    <a:pt x="3446880" y="336945"/>
+                  </a:lnTo>
+                  <a:lnTo>
+                    <a:pt x="3517224" y="341451"/>
+                  </a:lnTo>
+                  <a:lnTo>
+                    <a:pt x="3587569" y="345885"/>
+                  </a:lnTo>
+                  <a:lnTo>
+                    <a:pt x="3657913" y="350249"/>
+                  </a:lnTo>
+                  <a:lnTo>
+                    <a:pt x="3728257" y="354544"/>
+                  </a:lnTo>
+                  <a:lnTo>
+                    <a:pt x="3798602" y="358772"/>
+                  </a:lnTo>
+                  <a:lnTo>
+                    <a:pt x="3868946" y="362933"/>
+                  </a:lnTo>
+                  <a:lnTo>
+                    <a:pt x="3939291" y="367028"/>
+                  </a:lnTo>
+                  <a:lnTo>
+                    <a:pt x="4009635" y="371059"/>
+                  </a:lnTo>
+                  <a:lnTo>
+                    <a:pt x="4079980" y="375026"/>
+                  </a:lnTo>
+                  <a:lnTo>
+                    <a:pt x="4150324" y="378930"/>
+                  </a:lnTo>
+                  <a:lnTo>
+                    <a:pt x="4220669" y="382773"/>
+                  </a:lnTo>
+                  <a:lnTo>
+                    <a:pt x="4291013" y="386555"/>
+                  </a:lnTo>
+                  <a:lnTo>
+                    <a:pt x="4361358" y="390277"/>
+                  </a:lnTo>
+                  <a:lnTo>
+                    <a:pt x="4431702" y="393941"/>
+                  </a:lnTo>
+                  <a:lnTo>
+                    <a:pt x="4502047" y="397547"/>
+                  </a:lnTo>
+                  <a:lnTo>
+                    <a:pt x="4572391" y="401096"/>
+                  </a:lnTo>
+                  <a:lnTo>
+                    <a:pt x="4642736" y="404589"/>
+                  </a:lnTo>
+                  <a:lnTo>
+                    <a:pt x="4713080" y="408027"/>
+                  </a:lnTo>
+                  <a:lnTo>
+                    <a:pt x="4783425" y="411410"/>
+                  </a:lnTo>
+                  <a:lnTo>
+                    <a:pt x="4853769" y="414740"/>
+                  </a:lnTo>
+                  <a:lnTo>
+                    <a:pt x="4924114" y="418018"/>
+                  </a:lnTo>
+                  <a:lnTo>
+                    <a:pt x="4994458" y="421244"/>
+                  </a:lnTo>
+                  <a:lnTo>
+                    <a:pt x="5064803" y="424419"/>
+                  </a:lnTo>
+                  <a:lnTo>
+                    <a:pt x="5135147" y="427544"/>
+                  </a:lnTo>
+                  <a:lnTo>
+                    <a:pt x="5205492" y="430620"/>
+                  </a:lnTo>
+                  <a:lnTo>
+                    <a:pt x="5275836" y="433647"/>
+                  </a:lnTo>
+                  <a:lnTo>
+                    <a:pt x="5346181" y="436626"/>
+                  </a:lnTo>
+                  <a:lnTo>
+                    <a:pt x="5416525" y="439558"/>
+                  </a:lnTo>
+                  <a:lnTo>
+                    <a:pt x="5486870" y="442444"/>
+                  </a:lnTo>
+                  <a:lnTo>
+                    <a:pt x="5557214" y="445285"/>
+                  </a:lnTo>
+                  <a:lnTo>
+                    <a:pt x="5627559" y="448080"/>
+                  </a:lnTo>
+                  <a:lnTo>
+                    <a:pt x="5697903" y="450832"/>
+                  </a:lnTo>
+                  <a:lnTo>
+                    <a:pt x="5768248" y="453540"/>
+                  </a:lnTo>
+                  <a:lnTo>
+                    <a:pt x="5838592" y="456205"/>
+                  </a:lnTo>
+                  <a:lnTo>
+                    <a:pt x="5908937" y="458829"/>
+                  </a:lnTo>
+                  <a:lnTo>
+                    <a:pt x="5979281" y="461410"/>
+                  </a:lnTo>
+                  <a:lnTo>
+                    <a:pt x="6049626" y="463952"/>
+                  </a:lnTo>
+                  <a:lnTo>
+                    <a:pt x="6119970" y="466453"/>
+                  </a:lnTo>
+                  <a:lnTo>
+                    <a:pt x="6190315" y="468914"/>
+                  </a:lnTo>
+                  <a:lnTo>
+                    <a:pt x="6260659" y="471337"/>
+                  </a:lnTo>
+                  <a:lnTo>
+                    <a:pt x="6331004" y="473721"/>
+                  </a:lnTo>
+                  <a:lnTo>
+                    <a:pt x="6401348" y="476068"/>
+                  </a:lnTo>
+                  <a:lnTo>
+                    <a:pt x="6471693" y="478378"/>
+                  </a:lnTo>
+                  <a:lnTo>
+                    <a:pt x="6542037" y="480652"/>
+                  </a:lnTo>
+                  <a:lnTo>
+                    <a:pt x="6612382" y="482889"/>
+                  </a:lnTo>
+                  <a:lnTo>
+                    <a:pt x="6682726" y="485091"/>
+                  </a:lnTo>
+                  <a:lnTo>
+                    <a:pt x="6753071" y="487259"/>
+                  </a:lnTo>
+                  <a:lnTo>
+                    <a:pt x="6823415" y="489392"/>
+                  </a:lnTo>
+                  <a:lnTo>
+                    <a:pt x="6893760" y="491492"/>
+                  </a:lnTo>
+                  <a:lnTo>
+                    <a:pt x="6964104" y="493558"/>
+                  </a:lnTo>
+                </a:path>
+              </a:pathLst>
+            </a:custGeom>
+            <a:ln w="27101" cap="flat">
+              <a:solidFill>
+                <a:srgbClr val="FF8C00">
+                  <a:alpha val="100000"/>
+                </a:srgbClr>
+              </a:solidFill>
+              <a:prstDash val="solid"/>
+              <a:round/>
+            </a:ln>
+          </p:spPr>
+          <p:txBody>
+            <a:bodyPr/>
+            <a:lstStyle/>
+            <a:p/>
+          </p:txBody>
+        </p:sp>
+        <p:sp>
+          <p:nvSpPr>
+            <p:cNvPr id="71" name="pl71"/>
+            <p:cNvSpPr/>
+            <p:nvPr/>
+          </p:nvSpPr>
+          <p:spPr>
+            <a:xfrm>
+              <a:off x="887106" y="5294352"/>
+              <a:ext cx="7660515" cy="0"/>
+            </a:xfrm>
+            <a:custGeom>
+              <a:avLst/>
+              <a:pathLst>
+                <a:path w="7660515" h="0">
+                  <a:moveTo>
+                    <a:pt x="0" y="0"/>
+                  </a:moveTo>
+                  <a:lnTo>
+                    <a:pt x="7660515" y="0"/>
+                  </a:lnTo>
+                  <a:lnTo>
+                    <a:pt x="7660515" y="0"/>
+                  </a:lnTo>
+                </a:path>
+              </a:pathLst>
+            </a:custGeom>
+            <a:ln w="13550" cap="flat">
+              <a:solidFill>
+                <a:srgbClr val="7F7F7F">
+                  <a:alpha val="100000"/>
+                </a:srgbClr>
+              </a:solidFill>
+              <a:prstDash val="dash"/>
+              <a:round/>
+            </a:ln>
+          </p:spPr>
+          <p:txBody>
+            <a:bodyPr/>
+            <a:lstStyle/>
+            <a:p/>
+          </p:txBody>
+        </p:sp>
+        <p:sp>
+          <p:nvSpPr>
+            <p:cNvPr id="72" name="pl72"/>
+            <p:cNvSpPr/>
+            <p:nvPr/>
+          </p:nvSpPr>
+          <p:spPr>
+            <a:xfrm>
+              <a:off x="4472829" y="4336484"/>
+              <a:ext cx="0" cy="1317069"/>
+            </a:xfrm>
+            <a:custGeom>
+              <a:avLst/>
+              <a:pathLst>
+                <a:path w="0" h="1317069">
+                  <a:moveTo>
+                    <a:pt x="0" y="1317069"/>
+                  </a:moveTo>
+                  <a:lnTo>
+                    <a:pt x="0" y="0"/>
+                  </a:lnTo>
+                  <a:lnTo>
+                    <a:pt x="0" y="0"/>
+                  </a:lnTo>
+                </a:path>
+              </a:pathLst>
+            </a:custGeom>
+            <a:ln w="13550" cap="flat">
+              <a:solidFill>
+                <a:srgbClr val="666666">
+                  <a:alpha val="100000"/>
+                </a:srgbClr>
+              </a:solidFill>
+              <a:prstDash val="dot"/>
+              <a:round/>
+            </a:ln>
+          </p:spPr>
+          <p:txBody>
+            <a:bodyPr/>
+            <a:lstStyle/>
+            <a:p/>
+          </p:txBody>
+        </p:sp>
+        <p:sp>
+          <p:nvSpPr>
+            <p:cNvPr id="73" name="tx73"/>
+            <p:cNvSpPr/>
+            <p:nvPr/>
+          </p:nvSpPr>
+          <p:spPr>
+            <a:xfrm>
+              <a:off x="762297" y="5553636"/>
+              <a:ext cx="62179" cy="80101"/>
+            </a:xfrm>
+            <a:prstGeom prst="rect">
+              <a:avLst/>
+            </a:prstGeom>
+            <a:noFill/>
+          </p:spPr>
+          <p:txBody>
+            <a:bodyPr lIns="0" rIns="0" tIns="0" bIns="0" anchorCtr="1" anchor="ctr" wrap="none"/>
+            <a:lstStyle/>
+            <a:p>
+              <a:pPr algn="l" marL="0" marR="0" indent="0">
+                <a:lnSpc>
+                  <a:spcPts val="880"/>
+                </a:lnSpc>
+                <a:spcBef>
+                  <a:spcPts val="0"/>
+                </a:spcBef>
+                <a:spcAft>
+                  <a:spcPts val="0"/>
+                </a:spcAft>
+              </a:pPr>
+              <a:r>
+                <a:rPr sz="880">
+                  <a:solidFill>
+                    <a:srgbClr val="4D4D4D">
+                      <a:alpha val="100000"/>
+                    </a:srgbClr>
+                  </a:solidFill>
+                  <a:latin typeface="Helvetica"/>
+                  <a:cs typeface="Helvetica"/>
+                </a:rPr>
+                <a:t>0</a:t>
+              </a:r>
+            </a:p>
+          </p:txBody>
+        </p:sp>
+        <p:sp>
+          <p:nvSpPr>
+            <p:cNvPr id="74" name="tx74"/>
+            <p:cNvSpPr/>
+            <p:nvPr/>
+          </p:nvSpPr>
+          <p:spPr>
+            <a:xfrm>
+              <a:off x="762297" y="5254302"/>
+              <a:ext cx="62179" cy="80101"/>
+            </a:xfrm>
+            <a:prstGeom prst="rect">
+              <a:avLst/>
+            </a:prstGeom>
+            <a:noFill/>
+          </p:spPr>
+          <p:txBody>
+            <a:bodyPr lIns="0" rIns="0" tIns="0" bIns="0" anchorCtr="1" anchor="ctr" wrap="none"/>
+            <a:lstStyle/>
+            <a:p>
+              <a:pPr algn="l" marL="0" marR="0" indent="0">
+                <a:lnSpc>
+                  <a:spcPts val="880"/>
+                </a:lnSpc>
+                <a:spcBef>
+                  <a:spcPts val="0"/>
+                </a:spcBef>
+                <a:spcAft>
+                  <a:spcPts val="0"/>
+                </a:spcAft>
+              </a:pPr>
+              <a:r>
+                <a:rPr sz="880">
+                  <a:solidFill>
+                    <a:srgbClr val="4D4D4D">
+                      <a:alpha val="100000"/>
+                    </a:srgbClr>
+                  </a:solidFill>
+                  <a:latin typeface="Helvetica"/>
+                  <a:cs typeface="Helvetica"/>
+                </a:rPr>
+                <a:t>1</a:t>
+              </a:r>
+            </a:p>
+          </p:txBody>
+        </p:sp>
+        <p:sp>
+          <p:nvSpPr>
+            <p:cNvPr id="75" name="tx75"/>
+            <p:cNvSpPr/>
+            <p:nvPr/>
+          </p:nvSpPr>
+          <p:spPr>
+            <a:xfrm>
+              <a:off x="762297" y="4954968"/>
+              <a:ext cx="62179" cy="80101"/>
+            </a:xfrm>
+            <a:prstGeom prst="rect">
+              <a:avLst/>
+            </a:prstGeom>
+            <a:noFill/>
+          </p:spPr>
+          <p:txBody>
+            <a:bodyPr lIns="0" rIns="0" tIns="0" bIns="0" anchorCtr="1" anchor="ctr" wrap="none"/>
+            <a:lstStyle/>
+            <a:p>
+              <a:pPr algn="l" marL="0" marR="0" indent="0">
+                <a:lnSpc>
+                  <a:spcPts val="880"/>
+                </a:lnSpc>
+                <a:spcBef>
+                  <a:spcPts val="0"/>
+                </a:spcBef>
+                <a:spcAft>
+                  <a:spcPts val="0"/>
+                </a:spcAft>
+              </a:pPr>
+              <a:r>
+                <a:rPr sz="880">
+                  <a:solidFill>
+                    <a:srgbClr val="4D4D4D">
+                      <a:alpha val="100000"/>
+                    </a:srgbClr>
+                  </a:solidFill>
+                  <a:latin typeface="Helvetica"/>
+                  <a:cs typeface="Helvetica"/>
+                </a:rPr>
+                <a:t>2</a:t>
+              </a:r>
+            </a:p>
+          </p:txBody>
+        </p:sp>
+        <p:sp>
+          <p:nvSpPr>
+            <p:cNvPr id="76" name="tx76"/>
+            <p:cNvSpPr/>
+            <p:nvPr/>
+          </p:nvSpPr>
+          <p:spPr>
+            <a:xfrm>
+              <a:off x="762297" y="4655634"/>
+              <a:ext cx="62179" cy="80101"/>
+            </a:xfrm>
+            <a:prstGeom prst="rect">
+              <a:avLst/>
+            </a:prstGeom>
+            <a:noFill/>
+          </p:spPr>
+          <p:txBody>
+            <a:bodyPr lIns="0" rIns="0" tIns="0" bIns="0" anchorCtr="1" anchor="ctr" wrap="none"/>
+            <a:lstStyle/>
+            <a:p>
+              <a:pPr algn="l" marL="0" marR="0" indent="0">
+                <a:lnSpc>
+                  <a:spcPts val="880"/>
+                </a:lnSpc>
+                <a:spcBef>
+                  <a:spcPts val="0"/>
+                </a:spcBef>
+                <a:spcAft>
+                  <a:spcPts val="0"/>
+                </a:spcAft>
+              </a:pPr>
+              <a:r>
+                <a:rPr sz="880">
+                  <a:solidFill>
+                    <a:srgbClr val="4D4D4D">
+                      <a:alpha val="100000"/>
+                    </a:srgbClr>
+                  </a:solidFill>
+                  <a:latin typeface="Helvetica"/>
+                  <a:cs typeface="Helvetica"/>
+                </a:rPr>
+                <a:t>3</a:t>
+              </a:r>
+            </a:p>
+          </p:txBody>
+        </p:sp>
+        <p:sp>
+          <p:nvSpPr>
+            <p:cNvPr id="77" name="tx77"/>
+            <p:cNvSpPr/>
+            <p:nvPr/>
+          </p:nvSpPr>
+          <p:spPr>
+            <a:xfrm>
+              <a:off x="762297" y="4356300"/>
+              <a:ext cx="62179" cy="80101"/>
+            </a:xfrm>
+            <a:prstGeom prst="rect">
+              <a:avLst/>
+            </a:prstGeom>
+            <a:noFill/>
+          </p:spPr>
+          <p:txBody>
+            <a:bodyPr lIns="0" rIns="0" tIns="0" bIns="0" anchorCtr="1" anchor="ctr" wrap="none"/>
+            <a:lstStyle/>
+            <a:p>
+              <a:pPr algn="l" marL="0" marR="0" indent="0">
+                <a:lnSpc>
+                  <a:spcPts val="880"/>
+                </a:lnSpc>
+                <a:spcBef>
+                  <a:spcPts val="0"/>
+                </a:spcBef>
+                <a:spcAft>
+                  <a:spcPts val="0"/>
+                </a:spcAft>
+              </a:pPr>
+              <a:r>
+                <a:rPr sz="880">
+                  <a:solidFill>
+                    <a:srgbClr val="4D4D4D">
+                      <a:alpha val="100000"/>
+                    </a:srgbClr>
+                  </a:solidFill>
+                  <a:latin typeface="Helvetica"/>
+                  <a:cs typeface="Helvetica"/>
+                </a:rPr>
+                <a:t>4</a:t>
+              </a:r>
+            </a:p>
+          </p:txBody>
+        </p:sp>
+        <p:sp>
+          <p:nvSpPr>
+            <p:cNvPr id="78" name="tx78"/>
+            <p:cNvSpPr/>
+            <p:nvPr/>
+          </p:nvSpPr>
+          <p:spPr>
+            <a:xfrm>
+              <a:off x="1306098" y="5716183"/>
+              <a:ext cx="161574" cy="80101"/>
+            </a:xfrm>
+            <a:prstGeom prst="rect">
+              <a:avLst/>
+            </a:prstGeom>
+            <a:noFill/>
+          </p:spPr>
+          <p:txBody>
+            <a:bodyPr lIns="0" rIns="0" tIns="0" bIns="0" anchorCtr="1" anchor="ctr" wrap="none"/>
+            <a:lstStyle/>
+            <a:p>
+              <a:pPr algn="l" marL="0" marR="0" indent="0">
+                <a:lnSpc>
+                  <a:spcPts val="880"/>
+                </a:lnSpc>
+                <a:spcBef>
+                  <a:spcPts val="0"/>
+                </a:spcBef>
+                <a:spcAft>
+                  <a:spcPts val="0"/>
+                </a:spcAft>
+              </a:pPr>
+              <a:r>
+                <a:rPr sz="880">
+                  <a:solidFill>
+                    <a:srgbClr val="4D4D4D">
+                      <a:alpha val="100000"/>
+                    </a:srgbClr>
+                  </a:solidFill>
+                  <a:latin typeface="Helvetica"/>
+                  <a:cs typeface="Helvetica"/>
+                </a:rPr>
+                <a:t>-40</a:t>
+              </a:r>
+            </a:p>
+          </p:txBody>
+        </p:sp>
+        <p:sp>
+          <p:nvSpPr>
+            <p:cNvPr id="79" name="tx79"/>
+            <p:cNvSpPr/>
+            <p:nvPr/>
+          </p:nvSpPr>
+          <p:spPr>
+            <a:xfrm>
+              <a:off x="2113264" y="5716183"/>
+              <a:ext cx="161574" cy="80101"/>
+            </a:xfrm>
+            <a:prstGeom prst="rect">
+              <a:avLst/>
+            </a:prstGeom>
+            <a:noFill/>
+          </p:spPr>
+          <p:txBody>
+            <a:bodyPr lIns="0" rIns="0" tIns="0" bIns="0" anchorCtr="1" anchor="ctr" wrap="none"/>
+            <a:lstStyle/>
+            <a:p>
+              <a:pPr algn="l" marL="0" marR="0" indent="0">
+                <a:lnSpc>
+                  <a:spcPts val="880"/>
+                </a:lnSpc>
+                <a:spcBef>
+                  <a:spcPts val="0"/>
+                </a:spcBef>
+                <a:spcAft>
+                  <a:spcPts val="0"/>
+                </a:spcAft>
+              </a:pPr>
+              <a:r>
+                <a:rPr sz="880">
+                  <a:solidFill>
+                    <a:srgbClr val="4D4D4D">
+                      <a:alpha val="100000"/>
+                    </a:srgbClr>
+                  </a:solidFill>
+                  <a:latin typeface="Helvetica"/>
+                  <a:cs typeface="Helvetica"/>
+                </a:rPr>
+                <a:t>-30</a:t>
+              </a:r>
+            </a:p>
+          </p:txBody>
+        </p:sp>
+        <p:sp>
+          <p:nvSpPr>
+            <p:cNvPr id="80" name="tx80"/>
+            <p:cNvSpPr/>
+            <p:nvPr/>
+          </p:nvSpPr>
+          <p:spPr>
+            <a:xfrm>
+              <a:off x="2920429" y="5716183"/>
+              <a:ext cx="161574" cy="80101"/>
+            </a:xfrm>
+            <a:prstGeom prst="rect">
+              <a:avLst/>
+            </a:prstGeom>
+            <a:noFill/>
+          </p:spPr>
+          <p:txBody>
+            <a:bodyPr lIns="0" rIns="0" tIns="0" bIns="0" anchorCtr="1" anchor="ctr" wrap="none"/>
+            <a:lstStyle/>
+            <a:p>
+              <a:pPr algn="l" marL="0" marR="0" indent="0">
+                <a:lnSpc>
+                  <a:spcPts val="880"/>
+                </a:lnSpc>
+                <a:spcBef>
+                  <a:spcPts val="0"/>
+                </a:spcBef>
+                <a:spcAft>
+                  <a:spcPts val="0"/>
+                </a:spcAft>
+              </a:pPr>
+              <a:r>
+                <a:rPr sz="880">
+                  <a:solidFill>
+                    <a:srgbClr val="4D4D4D">
+                      <a:alpha val="100000"/>
+                    </a:srgbClr>
+                  </a:solidFill>
+                  <a:latin typeface="Helvetica"/>
+                  <a:cs typeface="Helvetica"/>
+                </a:rPr>
+                <a:t>-20</a:t>
+              </a:r>
+            </a:p>
+          </p:txBody>
+        </p:sp>
+        <p:sp>
+          <p:nvSpPr>
+            <p:cNvPr id="81" name="tx81"/>
+            <p:cNvSpPr/>
+            <p:nvPr/>
+          </p:nvSpPr>
+          <p:spPr>
+            <a:xfrm>
+              <a:off x="3727595" y="5716183"/>
+              <a:ext cx="161574" cy="80101"/>
+            </a:xfrm>
+            <a:prstGeom prst="rect">
+              <a:avLst/>
+            </a:prstGeom>
+            <a:noFill/>
+          </p:spPr>
+          <p:txBody>
+            <a:bodyPr lIns="0" rIns="0" tIns="0" bIns="0" anchorCtr="1" anchor="ctr" wrap="none"/>
+            <a:lstStyle/>
+            <a:p>
+              <a:pPr algn="l" marL="0" marR="0" indent="0">
+                <a:lnSpc>
+                  <a:spcPts val="880"/>
+                </a:lnSpc>
+                <a:spcBef>
+                  <a:spcPts val="0"/>
+                </a:spcBef>
+                <a:spcAft>
+                  <a:spcPts val="0"/>
+                </a:spcAft>
+              </a:pPr>
+              <a:r>
+                <a:rPr sz="880">
+                  <a:solidFill>
+                    <a:srgbClr val="4D4D4D">
+                      <a:alpha val="100000"/>
+                    </a:srgbClr>
+                  </a:solidFill>
+                  <a:latin typeface="Helvetica"/>
+                  <a:cs typeface="Helvetica"/>
+                </a:rPr>
+                <a:t>-10</a:t>
+              </a:r>
+            </a:p>
+          </p:txBody>
+        </p:sp>
+        <p:sp>
+          <p:nvSpPr>
+            <p:cNvPr id="82" name="tx82"/>
+            <p:cNvSpPr/>
+            <p:nvPr/>
+          </p:nvSpPr>
+          <p:spPr>
+            <a:xfrm>
+              <a:off x="4584458" y="5716183"/>
+              <a:ext cx="62179" cy="80101"/>
+            </a:xfrm>
+            <a:prstGeom prst="rect">
+              <a:avLst/>
+            </a:prstGeom>
+            <a:noFill/>
+          </p:spPr>
+          <p:txBody>
+            <a:bodyPr lIns="0" rIns="0" tIns="0" bIns="0" anchorCtr="1" anchor="ctr" wrap="none"/>
+            <a:lstStyle/>
+            <a:p>
+              <a:pPr algn="l" marL="0" marR="0" indent="0">
+                <a:lnSpc>
+                  <a:spcPts val="880"/>
+                </a:lnSpc>
+                <a:spcBef>
+                  <a:spcPts val="0"/>
+                </a:spcBef>
+                <a:spcAft>
+                  <a:spcPts val="0"/>
+                </a:spcAft>
+              </a:pPr>
+              <a:r>
+                <a:rPr sz="880">
+                  <a:solidFill>
+                    <a:srgbClr val="4D4D4D">
+                      <a:alpha val="100000"/>
+                    </a:srgbClr>
+                  </a:solidFill>
+                  <a:latin typeface="Helvetica"/>
+                  <a:cs typeface="Helvetica"/>
+                </a:rPr>
+                <a:t>0</a:t>
+              </a:r>
+            </a:p>
+          </p:txBody>
+        </p:sp>
+        <p:sp>
+          <p:nvSpPr>
+            <p:cNvPr id="83" name="tx83"/>
+            <p:cNvSpPr/>
+            <p:nvPr/>
+          </p:nvSpPr>
+          <p:spPr>
+            <a:xfrm>
+              <a:off x="5360534" y="5716183"/>
+              <a:ext cx="124358" cy="80101"/>
+            </a:xfrm>
+            <a:prstGeom prst="rect">
+              <a:avLst/>
+            </a:prstGeom>
+            <a:noFill/>
+          </p:spPr>
+          <p:txBody>
+            <a:bodyPr lIns="0" rIns="0" tIns="0" bIns="0" anchorCtr="1" anchor="ctr" wrap="none"/>
+            <a:lstStyle/>
+            <a:p>
+              <a:pPr algn="l" marL="0" marR="0" indent="0">
+                <a:lnSpc>
+                  <a:spcPts val="880"/>
+                </a:lnSpc>
+                <a:spcBef>
+                  <a:spcPts val="0"/>
+                </a:spcBef>
+                <a:spcAft>
+                  <a:spcPts val="0"/>
+                </a:spcAft>
+              </a:pPr>
+              <a:r>
+                <a:rPr sz="880">
+                  <a:solidFill>
+                    <a:srgbClr val="4D4D4D">
+                      <a:alpha val="100000"/>
+                    </a:srgbClr>
+                  </a:solidFill>
+                  <a:latin typeface="Helvetica"/>
+                  <a:cs typeface="Helvetica"/>
+                </a:rPr>
+                <a:t>10</a:t>
+              </a:r>
+            </a:p>
+          </p:txBody>
+        </p:sp>
+        <p:sp>
+          <p:nvSpPr>
+            <p:cNvPr id="84" name="tx84"/>
+            <p:cNvSpPr/>
+            <p:nvPr/>
+          </p:nvSpPr>
+          <p:spPr>
+            <a:xfrm>
+              <a:off x="6167699" y="5716183"/>
+              <a:ext cx="124358" cy="80101"/>
+            </a:xfrm>
+            <a:prstGeom prst="rect">
+              <a:avLst/>
+            </a:prstGeom>
+            <a:noFill/>
+          </p:spPr>
+          <p:txBody>
+            <a:bodyPr lIns="0" rIns="0" tIns="0" bIns="0" anchorCtr="1" anchor="ctr" wrap="none"/>
+            <a:lstStyle/>
+            <a:p>
+              <a:pPr algn="l" marL="0" marR="0" indent="0">
+                <a:lnSpc>
+                  <a:spcPts val="880"/>
+                </a:lnSpc>
+                <a:spcBef>
+                  <a:spcPts val="0"/>
+                </a:spcBef>
+                <a:spcAft>
+                  <a:spcPts val="0"/>
+                </a:spcAft>
+              </a:pPr>
+              <a:r>
+                <a:rPr sz="880">
+                  <a:solidFill>
+                    <a:srgbClr val="4D4D4D">
+                      <a:alpha val="100000"/>
+                    </a:srgbClr>
+                  </a:solidFill>
+                  <a:latin typeface="Helvetica"/>
+                  <a:cs typeface="Helvetica"/>
+                </a:rPr>
+                <a:t>20</a:t>
+              </a:r>
+            </a:p>
+          </p:txBody>
+        </p:sp>
+        <p:sp>
+          <p:nvSpPr>
+            <p:cNvPr id="85" name="tx85"/>
+            <p:cNvSpPr/>
+            <p:nvPr/>
+          </p:nvSpPr>
+          <p:spPr>
+            <a:xfrm>
+              <a:off x="6974865" y="5716183"/>
+              <a:ext cx="124358" cy="80101"/>
+            </a:xfrm>
+            <a:prstGeom prst="rect">
+              <a:avLst/>
+            </a:prstGeom>
+            <a:noFill/>
+          </p:spPr>
+          <p:txBody>
+            <a:bodyPr lIns="0" rIns="0" tIns="0" bIns="0" anchorCtr="1" anchor="ctr" wrap="none"/>
+            <a:lstStyle/>
+            <a:p>
+              <a:pPr algn="l" marL="0" marR="0" indent="0">
+                <a:lnSpc>
+                  <a:spcPts val="880"/>
+                </a:lnSpc>
+                <a:spcBef>
+                  <a:spcPts val="0"/>
+                </a:spcBef>
+                <a:spcAft>
+                  <a:spcPts val="0"/>
+                </a:spcAft>
+              </a:pPr>
+              <a:r>
+                <a:rPr sz="880">
+                  <a:solidFill>
+                    <a:srgbClr val="4D4D4D">
+                      <a:alpha val="100000"/>
+                    </a:srgbClr>
+                  </a:solidFill>
+                  <a:latin typeface="Helvetica"/>
+                  <a:cs typeface="Helvetica"/>
+                </a:rPr>
+                <a:t>30</a:t>
+              </a:r>
+            </a:p>
+          </p:txBody>
+        </p:sp>
+        <p:sp>
+          <p:nvSpPr>
+            <p:cNvPr id="86" name="tx86"/>
+            <p:cNvSpPr/>
+            <p:nvPr/>
+          </p:nvSpPr>
+          <p:spPr>
+            <a:xfrm>
+              <a:off x="7782030" y="5716183"/>
+              <a:ext cx="124358" cy="80101"/>
+            </a:xfrm>
+            <a:prstGeom prst="rect">
+              <a:avLst/>
+            </a:prstGeom>
+            <a:noFill/>
+          </p:spPr>
+          <p:txBody>
+            <a:bodyPr lIns="0" rIns="0" tIns="0" bIns="0" anchorCtr="1" anchor="ctr" wrap="none"/>
+            <a:lstStyle/>
+            <a:p>
+              <a:pPr algn="l" marL="0" marR="0" indent="0">
+                <a:lnSpc>
+                  <a:spcPts val="880"/>
+                </a:lnSpc>
+                <a:spcBef>
+                  <a:spcPts val="0"/>
+                </a:spcBef>
+                <a:spcAft>
+                  <a:spcPts val="0"/>
+                </a:spcAft>
+              </a:pPr>
+              <a:r>
+                <a:rPr sz="880">
+                  <a:solidFill>
+                    <a:srgbClr val="4D4D4D">
+                      <a:alpha val="100000"/>
+                    </a:srgbClr>
+                  </a:solidFill>
+                  <a:latin typeface="Helvetica"/>
+                  <a:cs typeface="Helvetica"/>
+                </a:rPr>
+                <a:t>40</a:t>
+              </a:r>
+            </a:p>
+          </p:txBody>
+        </p:sp>
+        <p:sp>
+          <p:nvSpPr>
+            <p:cNvPr id="87" name="tx87"/>
+            <p:cNvSpPr/>
+            <p:nvPr/>
+          </p:nvSpPr>
+          <p:spPr>
+            <a:xfrm>
+              <a:off x="2928340" y="5855859"/>
+              <a:ext cx="3578047" cy="100218"/>
+            </a:xfrm>
+            <a:prstGeom prst="rect">
+              <a:avLst/>
+            </a:prstGeom>
+            <a:noFill/>
+          </p:spPr>
+          <p:txBody>
+            <a:bodyPr lIns="0" rIns="0" tIns="0" bIns="0" anchorCtr="1" anchor="ctr" wrap="none"/>
+            <a:lstStyle/>
+            <a:p>
+              <a:pPr algn="l" marL="0" marR="0" indent="0">
+                <a:lnSpc>
+                  <a:spcPts val="1100"/>
+                </a:lnSpc>
+                <a:spcBef>
+                  <a:spcPts val="0"/>
+                </a:spcBef>
+                <a:spcAft>
+                  <a:spcPts val="0"/>
+                </a:spcAft>
+              </a:pPr>
+              <a:r>
+                <a:rPr sz="1100">
+                  <a:solidFill>
+                    <a:srgbClr val="000000">
+                      <a:alpha val="100000"/>
+                    </a:srgbClr>
+                  </a:solidFill>
+                  <a:latin typeface="Helvetica"/>
+                  <a:cs typeface="Helvetica"/>
+                </a:rPr>
+                <a:t>eGFR difference (%): 100 × (CKD-EPI Cr-Cys − CG) / CG</a:t>
+              </a:r>
+            </a:p>
+          </p:txBody>
+        </p:sp>
+        <p:sp>
+          <p:nvSpPr>
+            <p:cNvPr id="88" name="tx88"/>
+            <p:cNvSpPr/>
+            <p:nvPr/>
+          </p:nvSpPr>
+          <p:spPr>
+            <a:xfrm rot="-5400000">
+              <a:off x="138035" y="4944909"/>
+              <a:ext cx="1016904" cy="100218"/>
+            </a:xfrm>
+            <a:prstGeom prst="rect">
+              <a:avLst/>
+            </a:prstGeom>
+            <a:noFill/>
+          </p:spPr>
+          <p:txBody>
+            <a:bodyPr lIns="0" rIns="0" tIns="0" bIns="0" anchorCtr="1" anchor="ctr" wrap="none"/>
+            <a:lstStyle/>
+            <a:p>
+              <a:pPr algn="l" marL="0" marR="0" indent="0">
+                <a:lnSpc>
+                  <a:spcPts val="1100"/>
+                </a:lnSpc>
+                <a:spcBef>
+                  <a:spcPts val="0"/>
+                </a:spcBef>
+                <a:spcAft>
+                  <a:spcPts val="0"/>
+                </a:spcAft>
+              </a:pPr>
+              <a:r>
+                <a:rPr sz="1100">
+                  <a:solidFill>
+                    <a:srgbClr val="000000">
+                      <a:alpha val="100000"/>
+                    </a:srgbClr>
+                  </a:solidFill>
+                  <a:latin typeface="Helvetica"/>
+                  <a:cs typeface="Helvetica"/>
+                </a:rPr>
+                <a:t>subHR (95% CI)</a:t>
+              </a:r>
+            </a:p>
+          </p:txBody>
+        </p:sp>
+        <p:sp>
+          <p:nvSpPr>
+            <p:cNvPr id="89" name="tx89"/>
+            <p:cNvSpPr/>
+            <p:nvPr/>
+          </p:nvSpPr>
+          <p:spPr>
+            <a:xfrm>
+              <a:off x="887106" y="4159544"/>
+              <a:ext cx="6985375" cy="82021"/>
+            </a:xfrm>
+            <a:prstGeom prst="rect">
+              <a:avLst/>
+            </a:prstGeom>
+            <a:noFill/>
+          </p:spPr>
+          <p:txBody>
+            <a:bodyPr lIns="0" rIns="0" tIns="0" bIns="0" anchorCtr="1" anchor="ctr" wrap="none"/>
+            <a:lstStyle/>
+            <a:p>
+              <a:pPr algn="l" marL="0" marR="0" indent="0">
+                <a:lnSpc>
+                  <a:spcPts val="900"/>
+                </a:lnSpc>
+                <a:spcBef>
+                  <a:spcPts val="0"/>
+                </a:spcBef>
+                <a:spcAft>
+                  <a:spcPts val="0"/>
+                </a:spcAft>
+              </a:pPr>
+              <a:r>
+                <a:rPr sz="900">
+                  <a:solidFill>
+                    <a:srgbClr val="404040">
+                      <a:alpha val="100000"/>
+                    </a:srgbClr>
+                  </a:solidFill>
+                  <a:latin typeface="Helvetica"/>
+                  <a:cs typeface="Helvetica"/>
+                </a:rPr>
+                <a:t>subHR per 10 % decline: 1.20 (1.08-1.34), p_Bonf = 0.006 (n = 6)  |  per IQR decline (Δ = 29.5 %): 1.71 (1.24-2.37)  |  IQR: [-15.6, 13.9] %</a:t>
+              </a:r>
+            </a:p>
+          </p:txBody>
+        </p:sp>
+        <p:sp>
+          <p:nvSpPr>
+            <p:cNvPr id="90" name="tx90"/>
+            <p:cNvSpPr/>
+            <p:nvPr/>
+          </p:nvSpPr>
+          <p:spPr>
+            <a:xfrm>
+              <a:off x="887106" y="3932770"/>
               <a:ext cx="2913186" cy="120152"/>
             </a:xfrm>
             <a:prstGeom prst="rect">
